--- a/slides/C24_RNN.pptx
+++ b/slides/C24_RNN.pptx
@@ -5,26 +5,33 @@
     <p:sldMasterId id="2147483648" r:id="rId1"/>
   </p:sldMasterIdLst>
   <p:notesMasterIdLst>
-    <p:notesMasterId r:id="rId16"/>
+    <p:notesMasterId r:id="rId23"/>
   </p:notesMasterIdLst>
   <p:handoutMasterIdLst>
-    <p:handoutMasterId r:id="rId17"/>
+    <p:handoutMasterId r:id="rId24"/>
   </p:handoutMasterIdLst>
   <p:sldIdLst>
     <p:sldId id="256" r:id="rId2"/>
     <p:sldId id="315" r:id="rId3"/>
     <p:sldId id="308" r:id="rId4"/>
     <p:sldId id="316" r:id="rId5"/>
-    <p:sldId id="317" r:id="rId6"/>
-    <p:sldId id="318" r:id="rId7"/>
-    <p:sldId id="319" r:id="rId8"/>
-    <p:sldId id="320" r:id="rId9"/>
-    <p:sldId id="322" r:id="rId10"/>
-    <p:sldId id="321" r:id="rId11"/>
-    <p:sldId id="324" r:id="rId12"/>
-    <p:sldId id="323" r:id="rId13"/>
-    <p:sldId id="293" r:id="rId14"/>
-    <p:sldId id="306" r:id="rId15"/>
+    <p:sldId id="325" r:id="rId6"/>
+    <p:sldId id="317" r:id="rId7"/>
+    <p:sldId id="326" r:id="rId8"/>
+    <p:sldId id="328" r:id="rId9"/>
+    <p:sldId id="329" r:id="rId10"/>
+    <p:sldId id="332" r:id="rId11"/>
+    <p:sldId id="333" r:id="rId12"/>
+    <p:sldId id="330" r:id="rId13"/>
+    <p:sldId id="331" r:id="rId14"/>
+    <p:sldId id="319" r:id="rId15"/>
+    <p:sldId id="320" r:id="rId16"/>
+    <p:sldId id="322" r:id="rId17"/>
+    <p:sldId id="321" r:id="rId18"/>
+    <p:sldId id="324" r:id="rId19"/>
+    <p:sldId id="323" r:id="rId20"/>
+    <p:sldId id="293" r:id="rId21"/>
+    <p:sldId id="306" r:id="rId22"/>
   </p:sldIdLst>
   <p:sldSz cx="12192000" cy="6858000"/>
   <p:notesSz cx="7315200" cy="9601200"/>
@@ -288,7 +295,7 @@
           <a:p>
             <a:fld id="{144F1436-6906-4D93-B7A2-786C327BFA14}" type="datetimeFigureOut">
               <a:rPr lang="nl-BE" smtClean="0"/>
-              <a:t>21/03/2026</a:t>
+              <a:t>24/03/2026</a:t>
             </a:fld>
             <a:endParaRPr lang="nl-BE"/>
           </a:p>
@@ -354,7 +361,7 @@
           <a:p>
             <a:fld id="{F7E56D9B-79AD-444A-AFED-DEC23408F8B4}" type="slidenum">
               <a:rPr lang="nl-BE" smtClean="0"/>
-              <a:t>‹nº›</a:t>
+              <a:t>‹#›</a:t>
             </a:fld>
             <a:endParaRPr lang="nl-BE"/>
           </a:p>
@@ -453,7 +460,7 @@
           <a:p>
             <a:fld id="{AA8CD09E-2914-4F47-B6C1-51B2C31814C9}" type="datetimeFigureOut">
               <a:rPr lang="pt-BR" smtClean="0"/>
-              <a:t>21/03/2026</a:t>
+              <a:t>24/03/2026</a:t>
             </a:fld>
             <a:endParaRPr lang="pt-BR"/>
           </a:p>
@@ -611,7 +618,7 @@
           <a:p>
             <a:fld id="{6FC8D850-966F-45A6-8DE7-15B891E7D40D}" type="slidenum">
               <a:rPr lang="pt-BR" smtClean="0"/>
-              <a:t>‹nº›</a:t>
+              <a:t>‹#›</a:t>
             </a:fld>
             <a:endParaRPr lang="pt-BR"/>
           </a:p>
@@ -972,6 +979,412 @@
 </p:notes>
 </file>
 
+<file path=ppt/notesSlides/notesSlide4.xml><?xml version="1.0" encoding="utf-8"?>
+<p:notes xmlns:a="http://schemas.openxmlformats.org/drawingml/2006/main" xmlns:r="http://schemas.openxmlformats.org/officeDocument/2006/relationships" xmlns:p="http://schemas.openxmlformats.org/presentationml/2006/main">
+  <p:cSld>
+    <p:spTree>
+      <p:nvGrpSpPr>
+        <p:cNvPr id="1" name=""/>
+        <p:cNvGrpSpPr/>
+        <p:nvPr/>
+      </p:nvGrpSpPr>
+      <p:grpSpPr>
+        <a:xfrm>
+          <a:off x="0" y="0"/>
+          <a:ext cx="0" cy="0"/>
+          <a:chOff x="0" y="0"/>
+          <a:chExt cx="0" cy="0"/>
+        </a:xfrm>
+      </p:grpSpPr>
+      <p:sp>
+        <p:nvSpPr>
+          <p:cNvPr id="2" name="Slide Image Placeholder 1"/>
+          <p:cNvSpPr>
+            <a:spLocks noGrp="1" noRot="1" noChangeAspect="1"/>
+          </p:cNvSpPr>
+          <p:nvPr>
+            <p:ph type="sldImg"/>
+          </p:nvPr>
+        </p:nvSpPr>
+        <p:spPr/>
+      </p:sp>
+      <p:sp>
+        <p:nvSpPr>
+          <p:cNvPr id="3" name="Notes Placeholder 2"/>
+          <p:cNvSpPr>
+            <a:spLocks noGrp="1"/>
+          </p:cNvSpPr>
+          <p:nvPr>
+            <p:ph type="body" idx="1"/>
+          </p:nvPr>
+        </p:nvSpPr>
+        <p:spPr/>
+        <p:txBody>
+          <a:bodyPr/>
+          <a:lstStyle/>
+          <a:p>
+            <a:endParaRPr lang="en-US" dirty="0"/>
+          </a:p>
+        </p:txBody>
+      </p:sp>
+      <p:sp>
+        <p:nvSpPr>
+          <p:cNvPr id="4" name="Slide Number Placeholder 3"/>
+          <p:cNvSpPr>
+            <a:spLocks noGrp="1"/>
+          </p:cNvSpPr>
+          <p:nvPr>
+            <p:ph type="sldNum" sz="quarter" idx="5"/>
+          </p:nvPr>
+        </p:nvSpPr>
+        <p:spPr/>
+        <p:txBody>
+          <a:bodyPr/>
+          <a:lstStyle/>
+          <a:p>
+            <a:fld id="{6FC8D850-966F-45A6-8DE7-15B891E7D40D}" type="slidenum">
+              <a:rPr lang="pt-BR" smtClean="0"/>
+              <a:t>6</a:t>
+            </a:fld>
+            <a:endParaRPr lang="pt-BR"/>
+          </a:p>
+        </p:txBody>
+      </p:sp>
+    </p:spTree>
+    <p:extLst>
+      <p:ext uri="{BB962C8B-B14F-4D97-AF65-F5344CB8AC3E}">
+        <p14:creationId xmlns:p14="http://schemas.microsoft.com/office/powerpoint/2010/main" val="1061417777"/>
+      </p:ext>
+    </p:extLst>
+  </p:cSld>
+  <p:clrMapOvr>
+    <a:masterClrMapping/>
+  </p:clrMapOvr>
+</p:notes>
+</file>
+
+<file path=ppt/notesSlides/notesSlide5.xml><?xml version="1.0" encoding="utf-8"?>
+<p:notes xmlns:a="http://schemas.openxmlformats.org/drawingml/2006/main" xmlns:r="http://schemas.openxmlformats.org/officeDocument/2006/relationships" xmlns:p="http://schemas.openxmlformats.org/presentationml/2006/main">
+  <p:cSld>
+    <p:spTree>
+      <p:nvGrpSpPr>
+        <p:cNvPr id="1" name="">
+          <a:extLst>
+            <a:ext uri="{FF2B5EF4-FFF2-40B4-BE49-F238E27FC236}">
+              <a16:creationId xmlns:a16="http://schemas.microsoft.com/office/drawing/2014/main" id="{BDC9BA21-D8BC-1049-8F29-21ED16A8E37E}"/>
+            </a:ext>
+          </a:extLst>
+        </p:cNvPr>
+        <p:cNvGrpSpPr/>
+        <p:nvPr/>
+      </p:nvGrpSpPr>
+      <p:grpSpPr>
+        <a:xfrm>
+          <a:off x="0" y="0"/>
+          <a:ext cx="0" cy="0"/>
+          <a:chOff x="0" y="0"/>
+          <a:chExt cx="0" cy="0"/>
+        </a:xfrm>
+      </p:grpSpPr>
+      <p:sp>
+        <p:nvSpPr>
+          <p:cNvPr id="2" name="Slide Image Placeholder 1">
+            <a:extLst>
+              <a:ext uri="{FF2B5EF4-FFF2-40B4-BE49-F238E27FC236}">
+                <a16:creationId xmlns:a16="http://schemas.microsoft.com/office/drawing/2014/main" id="{0C584FCD-2462-F8A2-1938-163C0709B9B6}"/>
+              </a:ext>
+            </a:extLst>
+          </p:cNvPr>
+          <p:cNvSpPr>
+            <a:spLocks noGrp="1" noRot="1" noChangeAspect="1"/>
+          </p:cNvSpPr>
+          <p:nvPr>
+            <p:ph type="sldImg"/>
+          </p:nvPr>
+        </p:nvSpPr>
+        <p:spPr/>
+      </p:sp>
+      <p:sp>
+        <p:nvSpPr>
+          <p:cNvPr id="3" name="Notes Placeholder 2">
+            <a:extLst>
+              <a:ext uri="{FF2B5EF4-FFF2-40B4-BE49-F238E27FC236}">
+                <a16:creationId xmlns:a16="http://schemas.microsoft.com/office/drawing/2014/main" id="{3DB09072-013A-0614-ACA7-D012EF0DB623}"/>
+              </a:ext>
+            </a:extLst>
+          </p:cNvPr>
+          <p:cNvSpPr>
+            <a:spLocks noGrp="1"/>
+          </p:cNvSpPr>
+          <p:nvPr>
+            <p:ph type="body" idx="1"/>
+          </p:nvPr>
+        </p:nvSpPr>
+        <p:spPr/>
+        <p:txBody>
+          <a:bodyPr/>
+          <a:lstStyle/>
+          <a:p>
+            <a:r>
+              <a:rPr lang="pt-BR" b="1" dirty="0"/>
+              <a:t>A Flexibilidade da RNN:</a:t>
+            </a:r>
+            <a:r>
+              <a:rPr lang="pt-BR" dirty="0"/>
+              <a:t> Elas são projetadas para processar sequências de </a:t>
+            </a:r>
+            <a:r>
+              <a:rPr lang="pt-BR" b="1" dirty="0"/>
+              <a:t>comprimento variável</a:t>
+            </a:r>
+            <a:r>
+              <a:rPr lang="pt-BR" dirty="0"/>
+              <a:t>. Elas iteram sobre a sequência elemento por elemento, o que as torna ideais para tradução automática ou reconhecimento de fala.</a:t>
+            </a:r>
+          </a:p>
+          <a:p>
+            <a:endParaRPr lang="pt-BR" dirty="0"/>
+          </a:p>
+          <a:p>
+            <a:r>
+              <a:rPr lang="pt-BR" dirty="0"/>
+              <a:t>De forma mais geral, as </a:t>
+            </a:r>
+            <a:r>
+              <a:rPr lang="pt-BR" dirty="0" err="1"/>
+              <a:t>RNNs</a:t>
+            </a:r>
+            <a:r>
+              <a:rPr lang="pt-BR" dirty="0"/>
+              <a:t> podem operar com sequências de comprimento arbitrário, em vez de entradas de tamanho fixo. Por exemplo, elas podem receber frases, documentos ou amostras de áudio como entrada, tornando-as extremamente úteis para aplicações de processamento de linguagem natural, como tradução automática ou reconhecimento de fala.</a:t>
+            </a:r>
+            <a:endParaRPr lang="en-US" dirty="0"/>
+          </a:p>
+        </p:txBody>
+      </p:sp>
+      <p:sp>
+        <p:nvSpPr>
+          <p:cNvPr id="4" name="Slide Number Placeholder 3">
+            <a:extLst>
+              <a:ext uri="{FF2B5EF4-FFF2-40B4-BE49-F238E27FC236}">
+                <a16:creationId xmlns:a16="http://schemas.microsoft.com/office/drawing/2014/main" id="{C7CDC41C-7FEE-80DC-975E-EFA1C4B2EDFB}"/>
+              </a:ext>
+            </a:extLst>
+          </p:cNvPr>
+          <p:cNvSpPr>
+            <a:spLocks noGrp="1"/>
+          </p:cNvSpPr>
+          <p:nvPr>
+            <p:ph type="sldNum" sz="quarter" idx="5"/>
+          </p:nvPr>
+        </p:nvSpPr>
+        <p:spPr/>
+        <p:txBody>
+          <a:bodyPr/>
+          <a:lstStyle/>
+          <a:p>
+            <a:fld id="{6FC8D850-966F-45A6-8DE7-15B891E7D40D}" type="slidenum">
+              <a:rPr lang="pt-BR" smtClean="0"/>
+              <a:t>7</a:t>
+            </a:fld>
+            <a:endParaRPr lang="pt-BR"/>
+          </a:p>
+        </p:txBody>
+      </p:sp>
+    </p:spTree>
+    <p:extLst>
+      <p:ext uri="{BB962C8B-B14F-4D97-AF65-F5344CB8AC3E}">
+        <p14:creationId xmlns:p14="http://schemas.microsoft.com/office/powerpoint/2010/main" val="874897284"/>
+      </p:ext>
+    </p:extLst>
+  </p:cSld>
+  <p:clrMapOvr>
+    <a:masterClrMapping/>
+  </p:clrMapOvr>
+</p:notes>
+</file>
+
+<file path=ppt/notesSlides/notesSlide6.xml><?xml version="1.0" encoding="utf-8"?>
+<p:notes xmlns:a="http://schemas.openxmlformats.org/drawingml/2006/main" xmlns:r="http://schemas.openxmlformats.org/officeDocument/2006/relationships" xmlns:p="http://schemas.openxmlformats.org/presentationml/2006/main">
+  <p:cSld>
+    <p:spTree>
+      <p:nvGrpSpPr>
+        <p:cNvPr id="1" name=""/>
+        <p:cNvGrpSpPr/>
+        <p:nvPr/>
+      </p:nvGrpSpPr>
+      <p:grpSpPr>
+        <a:xfrm>
+          <a:off x="0" y="0"/>
+          <a:ext cx="0" cy="0"/>
+          <a:chOff x="0" y="0"/>
+          <a:chExt cx="0" cy="0"/>
+        </a:xfrm>
+      </p:grpSpPr>
+      <p:sp>
+        <p:nvSpPr>
+          <p:cNvPr id="2" name="Slide Image Placeholder 1"/>
+          <p:cNvSpPr>
+            <a:spLocks noGrp="1" noRot="1" noChangeAspect="1"/>
+          </p:cNvSpPr>
+          <p:nvPr>
+            <p:ph type="sldImg"/>
+          </p:nvPr>
+        </p:nvSpPr>
+        <p:spPr/>
+      </p:sp>
+      <p:sp>
+        <p:nvSpPr>
+          <p:cNvPr id="3" name="Notes Placeholder 2"/>
+          <p:cNvSpPr>
+            <a:spLocks noGrp="1"/>
+          </p:cNvSpPr>
+          <p:nvPr>
+            <p:ph type="body" idx="1"/>
+          </p:nvPr>
+        </p:nvSpPr>
+        <p:spPr/>
+        <p:txBody>
+          <a:bodyPr/>
+          <a:lstStyle/>
+          <a:p>
+            <a:endParaRPr lang="en-US" dirty="0"/>
+          </a:p>
+        </p:txBody>
+      </p:sp>
+      <p:sp>
+        <p:nvSpPr>
+          <p:cNvPr id="4" name="Slide Number Placeholder 3"/>
+          <p:cNvSpPr>
+            <a:spLocks noGrp="1"/>
+          </p:cNvSpPr>
+          <p:nvPr>
+            <p:ph type="sldNum" sz="quarter" idx="5"/>
+          </p:nvPr>
+        </p:nvSpPr>
+        <p:spPr/>
+        <p:txBody>
+          <a:bodyPr/>
+          <a:lstStyle/>
+          <a:p>
+            <a:fld id="{6FC8D850-966F-45A6-8DE7-15B891E7D40D}" type="slidenum">
+              <a:rPr lang="pt-BR" smtClean="0"/>
+              <a:t>9</a:t>
+            </a:fld>
+            <a:endParaRPr lang="pt-BR"/>
+          </a:p>
+        </p:txBody>
+      </p:sp>
+    </p:spTree>
+    <p:extLst>
+      <p:ext uri="{BB962C8B-B14F-4D97-AF65-F5344CB8AC3E}">
+        <p14:creationId xmlns:p14="http://schemas.microsoft.com/office/powerpoint/2010/main" val="2890645828"/>
+      </p:ext>
+    </p:extLst>
+  </p:cSld>
+  <p:clrMapOvr>
+    <a:masterClrMapping/>
+  </p:clrMapOvr>
+</p:notes>
+</file>
+
+<file path=ppt/notesSlides/notesSlide7.xml><?xml version="1.0" encoding="utf-8"?>
+<p:notes xmlns:a="http://schemas.openxmlformats.org/drawingml/2006/main" xmlns:r="http://schemas.openxmlformats.org/officeDocument/2006/relationships" xmlns:p="http://schemas.openxmlformats.org/presentationml/2006/main">
+  <p:cSld>
+    <p:spTree>
+      <p:nvGrpSpPr>
+        <p:cNvPr id="1" name=""/>
+        <p:cNvGrpSpPr/>
+        <p:nvPr/>
+      </p:nvGrpSpPr>
+      <p:grpSpPr>
+        <a:xfrm>
+          <a:off x="0" y="0"/>
+          <a:ext cx="0" cy="0"/>
+          <a:chOff x="0" y="0"/>
+          <a:chExt cx="0" cy="0"/>
+        </a:xfrm>
+      </p:grpSpPr>
+      <p:sp>
+        <p:nvSpPr>
+          <p:cNvPr id="2" name="Slide Image Placeholder 1"/>
+          <p:cNvSpPr>
+            <a:spLocks noGrp="1" noRot="1" noChangeAspect="1"/>
+          </p:cNvSpPr>
+          <p:nvPr>
+            <p:ph type="sldImg"/>
+          </p:nvPr>
+        </p:nvSpPr>
+        <p:spPr/>
+      </p:sp>
+      <p:sp>
+        <p:nvSpPr>
+          <p:cNvPr id="3" name="Notes Placeholder 2"/>
+          <p:cNvSpPr>
+            <a:spLocks noGrp="1"/>
+          </p:cNvSpPr>
+          <p:nvPr>
+            <p:ph type="body" idx="1"/>
+          </p:nvPr>
+        </p:nvSpPr>
+        <p:spPr/>
+        <p:txBody>
+          <a:bodyPr/>
+          <a:lstStyle/>
+          <a:p>
+            <a:r>
+              <a:rPr lang="pt-BR" dirty="0"/>
+              <a:t>Referências</a:t>
+            </a:r>
+          </a:p>
+          <a:p>
+            <a:r>
+              <a:rPr lang="pt-BR" dirty="0"/>
+              <a:t>[1] https://www.sintef.no/contentassets/9689621c8cda44d9b2bc91c5fba21135/bianchi.pdf</a:t>
+            </a:r>
+            <a:endParaRPr lang="en-US" dirty="0"/>
+          </a:p>
+          <a:p>
+            <a:endParaRPr lang="en-US" dirty="0"/>
+          </a:p>
+        </p:txBody>
+      </p:sp>
+      <p:sp>
+        <p:nvSpPr>
+          <p:cNvPr id="4" name="Slide Number Placeholder 3"/>
+          <p:cNvSpPr>
+            <a:spLocks noGrp="1"/>
+          </p:cNvSpPr>
+          <p:nvPr>
+            <p:ph type="sldNum" sz="quarter" idx="5"/>
+          </p:nvPr>
+        </p:nvSpPr>
+        <p:spPr/>
+        <p:txBody>
+          <a:bodyPr/>
+          <a:lstStyle/>
+          <a:p>
+            <a:fld id="{6FC8D850-966F-45A6-8DE7-15B891E7D40D}" type="slidenum">
+              <a:rPr lang="pt-BR" smtClean="0"/>
+              <a:t>10</a:t>
+            </a:fld>
+            <a:endParaRPr lang="pt-BR"/>
+          </a:p>
+        </p:txBody>
+      </p:sp>
+    </p:spTree>
+    <p:extLst>
+      <p:ext uri="{BB962C8B-B14F-4D97-AF65-F5344CB8AC3E}">
+        <p14:creationId xmlns:p14="http://schemas.microsoft.com/office/powerpoint/2010/main" val="2677884178"/>
+      </p:ext>
+    </p:extLst>
+  </p:cSld>
+  <p:clrMapOvr>
+    <a:masterClrMapping/>
+  </p:clrMapOvr>
+</p:notes>
+</file>
+
 <file path=ppt/slideLayouts/slideLayout1.xml><?xml version="1.0" encoding="utf-8"?>
 <p:sldLayout xmlns:a="http://schemas.openxmlformats.org/drawingml/2006/main" xmlns:r="http://schemas.openxmlformats.org/officeDocument/2006/relationships" xmlns:p="http://schemas.openxmlformats.org/presentationml/2006/main" type="title" preserve="1">
   <p:cSld name="Slide de Título">
@@ -994,7 +1407,7 @@
           <p:cNvPr id="2" name="Título 1">
             <a:extLst>
               <a:ext uri="{FF2B5EF4-FFF2-40B4-BE49-F238E27FC236}">
-                <a16:creationId xmlns:a16="http://schemas.microsoft.com/office/drawing/2014/main" xmlns="" id="{1DB9B4FF-B06E-403C-A326-BDC64D8FF94E}"/>
+                <a16:creationId xmlns:a16="http://schemas.microsoft.com/office/drawing/2014/main" id="{1DB9B4FF-B06E-403C-A326-BDC64D8FF94E}"/>
               </a:ext>
             </a:extLst>
           </p:cNvPr>
@@ -1031,7 +1444,7 @@
           <p:cNvPr id="3" name="Subtítulo 2">
             <a:extLst>
               <a:ext uri="{FF2B5EF4-FFF2-40B4-BE49-F238E27FC236}">
-                <a16:creationId xmlns:a16="http://schemas.microsoft.com/office/drawing/2014/main" xmlns="" id="{247BDFCE-746E-45BF-A319-4733D58D1632}"/>
+                <a16:creationId xmlns:a16="http://schemas.microsoft.com/office/drawing/2014/main" id="{247BDFCE-746E-45BF-A319-4733D58D1632}"/>
               </a:ext>
             </a:extLst>
           </p:cNvPr>
@@ -1101,7 +1514,7 @@
           <p:cNvPr id="4" name="Espaço Reservado para Data 3">
             <a:extLst>
               <a:ext uri="{FF2B5EF4-FFF2-40B4-BE49-F238E27FC236}">
-                <a16:creationId xmlns:a16="http://schemas.microsoft.com/office/drawing/2014/main" xmlns="" id="{9EDE2778-5372-4104-B96D-968184DA8288}"/>
+                <a16:creationId xmlns:a16="http://schemas.microsoft.com/office/drawing/2014/main" id="{9EDE2778-5372-4104-B96D-968184DA8288}"/>
               </a:ext>
             </a:extLst>
           </p:cNvPr>
@@ -1119,7 +1532,7 @@
           <a:p>
             <a:fld id="{63289F7E-B80B-496E-81B4-D396C37C9454}" type="datetimeFigureOut">
               <a:rPr lang="pt-BR" smtClean="0"/>
-              <a:t>21/03/2026</a:t>
+              <a:t>24/03/2026</a:t>
             </a:fld>
             <a:endParaRPr lang="pt-BR"/>
           </a:p>
@@ -1130,7 +1543,7 @@
           <p:cNvPr id="5" name="Espaço Reservado para Rodapé 4">
             <a:extLst>
               <a:ext uri="{FF2B5EF4-FFF2-40B4-BE49-F238E27FC236}">
-                <a16:creationId xmlns:a16="http://schemas.microsoft.com/office/drawing/2014/main" xmlns="" id="{C1DD0F41-C861-4051-988D-3024A37A4B93}"/>
+                <a16:creationId xmlns:a16="http://schemas.microsoft.com/office/drawing/2014/main" id="{C1DD0F41-C861-4051-988D-3024A37A4B93}"/>
               </a:ext>
             </a:extLst>
           </p:cNvPr>
@@ -1155,7 +1568,7 @@
           <p:cNvPr id="6" name="Espaço Reservado para Número de Slide 5">
             <a:extLst>
               <a:ext uri="{FF2B5EF4-FFF2-40B4-BE49-F238E27FC236}">
-                <a16:creationId xmlns:a16="http://schemas.microsoft.com/office/drawing/2014/main" xmlns="" id="{07E5967E-D980-431A-A5DB-3F0C5030A81E}"/>
+                <a16:creationId xmlns:a16="http://schemas.microsoft.com/office/drawing/2014/main" id="{07E5967E-D980-431A-A5DB-3F0C5030A81E}"/>
               </a:ext>
             </a:extLst>
           </p:cNvPr>
@@ -1173,7 +1586,7 @@
           <a:p>
             <a:fld id="{1A7E88B7-70CE-4035-AE73-13FA6FB985D4}" type="slidenum">
               <a:rPr lang="pt-BR" smtClean="0"/>
-              <a:t>‹nº›</a:t>
+              <a:t>‹#›</a:t>
             </a:fld>
             <a:endParaRPr lang="pt-BR"/>
           </a:p>
@@ -1214,7 +1627,7 @@
           <p:cNvPr id="2" name="Título 1">
             <a:extLst>
               <a:ext uri="{FF2B5EF4-FFF2-40B4-BE49-F238E27FC236}">
-                <a16:creationId xmlns:a16="http://schemas.microsoft.com/office/drawing/2014/main" xmlns="" id="{9036C49F-3E68-4175-81BA-3C3FEE44308A}"/>
+                <a16:creationId xmlns:a16="http://schemas.microsoft.com/office/drawing/2014/main" id="{9036C49F-3E68-4175-81BA-3C3FEE44308A}"/>
               </a:ext>
             </a:extLst>
           </p:cNvPr>
@@ -1242,7 +1655,7 @@
           <p:cNvPr id="3" name="Espaço Reservado para Texto Vertical 2">
             <a:extLst>
               <a:ext uri="{FF2B5EF4-FFF2-40B4-BE49-F238E27FC236}">
-                <a16:creationId xmlns:a16="http://schemas.microsoft.com/office/drawing/2014/main" xmlns="" id="{426FA736-3DD3-4D4E-B57B-BBE1D8F7D424}"/>
+                <a16:creationId xmlns:a16="http://schemas.microsoft.com/office/drawing/2014/main" id="{426FA736-3DD3-4D4E-B57B-BBE1D8F7D424}"/>
               </a:ext>
             </a:extLst>
           </p:cNvPr>
@@ -1299,7 +1712,7 @@
           <p:cNvPr id="4" name="Espaço Reservado para Data 3">
             <a:extLst>
               <a:ext uri="{FF2B5EF4-FFF2-40B4-BE49-F238E27FC236}">
-                <a16:creationId xmlns:a16="http://schemas.microsoft.com/office/drawing/2014/main" xmlns="" id="{99E8855C-D8FD-48F6-B14E-861E0DE4D915}"/>
+                <a16:creationId xmlns:a16="http://schemas.microsoft.com/office/drawing/2014/main" id="{99E8855C-D8FD-48F6-B14E-861E0DE4D915}"/>
               </a:ext>
             </a:extLst>
           </p:cNvPr>
@@ -1317,7 +1730,7 @@
           <a:p>
             <a:fld id="{63289F7E-B80B-496E-81B4-D396C37C9454}" type="datetimeFigureOut">
               <a:rPr lang="pt-BR" smtClean="0"/>
-              <a:t>21/03/2026</a:t>
+              <a:t>24/03/2026</a:t>
             </a:fld>
             <a:endParaRPr lang="pt-BR"/>
           </a:p>
@@ -1328,7 +1741,7 @@
           <p:cNvPr id="5" name="Espaço Reservado para Rodapé 4">
             <a:extLst>
               <a:ext uri="{FF2B5EF4-FFF2-40B4-BE49-F238E27FC236}">
-                <a16:creationId xmlns:a16="http://schemas.microsoft.com/office/drawing/2014/main" xmlns="" id="{97C0BB88-2F21-42A5-ACFF-83DA47F2D340}"/>
+                <a16:creationId xmlns:a16="http://schemas.microsoft.com/office/drawing/2014/main" id="{97C0BB88-2F21-42A5-ACFF-83DA47F2D340}"/>
               </a:ext>
             </a:extLst>
           </p:cNvPr>
@@ -1353,7 +1766,7 @@
           <p:cNvPr id="6" name="Espaço Reservado para Número de Slide 5">
             <a:extLst>
               <a:ext uri="{FF2B5EF4-FFF2-40B4-BE49-F238E27FC236}">
-                <a16:creationId xmlns:a16="http://schemas.microsoft.com/office/drawing/2014/main" xmlns="" id="{6CB462B3-1F22-4C05-B4B8-7A279FB7D5E9}"/>
+                <a16:creationId xmlns:a16="http://schemas.microsoft.com/office/drawing/2014/main" id="{6CB462B3-1F22-4C05-B4B8-7A279FB7D5E9}"/>
               </a:ext>
             </a:extLst>
           </p:cNvPr>
@@ -1371,7 +1784,7 @@
           <a:p>
             <a:fld id="{1A7E88B7-70CE-4035-AE73-13FA6FB985D4}" type="slidenum">
               <a:rPr lang="pt-BR" smtClean="0"/>
-              <a:t>‹nº›</a:t>
+              <a:t>‹#›</a:t>
             </a:fld>
             <a:endParaRPr lang="pt-BR"/>
           </a:p>
@@ -1412,7 +1825,7 @@
           <p:cNvPr id="2" name="Título Vertical 1">
             <a:extLst>
               <a:ext uri="{FF2B5EF4-FFF2-40B4-BE49-F238E27FC236}">
-                <a16:creationId xmlns:a16="http://schemas.microsoft.com/office/drawing/2014/main" xmlns="" id="{EAEAB728-701C-4207-A9D5-23FF45C60502}"/>
+                <a16:creationId xmlns:a16="http://schemas.microsoft.com/office/drawing/2014/main" id="{EAEAB728-701C-4207-A9D5-23FF45C60502}"/>
               </a:ext>
             </a:extLst>
           </p:cNvPr>
@@ -1445,7 +1858,7 @@
           <p:cNvPr id="3" name="Espaço Reservado para Texto Vertical 2">
             <a:extLst>
               <a:ext uri="{FF2B5EF4-FFF2-40B4-BE49-F238E27FC236}">
-                <a16:creationId xmlns:a16="http://schemas.microsoft.com/office/drawing/2014/main" xmlns="" id="{BA8C8CCF-7823-480A-9A19-0F664DD17E3B}"/>
+                <a16:creationId xmlns:a16="http://schemas.microsoft.com/office/drawing/2014/main" id="{BA8C8CCF-7823-480A-9A19-0F664DD17E3B}"/>
               </a:ext>
             </a:extLst>
           </p:cNvPr>
@@ -1507,7 +1920,7 @@
           <p:cNvPr id="4" name="Espaço Reservado para Data 3">
             <a:extLst>
               <a:ext uri="{FF2B5EF4-FFF2-40B4-BE49-F238E27FC236}">
-                <a16:creationId xmlns:a16="http://schemas.microsoft.com/office/drawing/2014/main" xmlns="" id="{721D5734-7B1F-425D-942F-6EB73344027C}"/>
+                <a16:creationId xmlns:a16="http://schemas.microsoft.com/office/drawing/2014/main" id="{721D5734-7B1F-425D-942F-6EB73344027C}"/>
               </a:ext>
             </a:extLst>
           </p:cNvPr>
@@ -1525,7 +1938,7 @@
           <a:p>
             <a:fld id="{63289F7E-B80B-496E-81B4-D396C37C9454}" type="datetimeFigureOut">
               <a:rPr lang="pt-BR" smtClean="0"/>
-              <a:t>21/03/2026</a:t>
+              <a:t>24/03/2026</a:t>
             </a:fld>
             <a:endParaRPr lang="pt-BR"/>
           </a:p>
@@ -1536,7 +1949,7 @@
           <p:cNvPr id="5" name="Espaço Reservado para Rodapé 4">
             <a:extLst>
               <a:ext uri="{FF2B5EF4-FFF2-40B4-BE49-F238E27FC236}">
-                <a16:creationId xmlns:a16="http://schemas.microsoft.com/office/drawing/2014/main" xmlns="" id="{1E1AAEAC-F08D-45FE-89EC-B1B349A868C9}"/>
+                <a16:creationId xmlns:a16="http://schemas.microsoft.com/office/drawing/2014/main" id="{1E1AAEAC-F08D-45FE-89EC-B1B349A868C9}"/>
               </a:ext>
             </a:extLst>
           </p:cNvPr>
@@ -1561,7 +1974,7 @@
           <p:cNvPr id="6" name="Espaço Reservado para Número de Slide 5">
             <a:extLst>
               <a:ext uri="{FF2B5EF4-FFF2-40B4-BE49-F238E27FC236}">
-                <a16:creationId xmlns:a16="http://schemas.microsoft.com/office/drawing/2014/main" xmlns="" id="{BAA44493-9911-47B2-87A6-C2141A972BC8}"/>
+                <a16:creationId xmlns:a16="http://schemas.microsoft.com/office/drawing/2014/main" id="{BAA44493-9911-47B2-87A6-C2141A972BC8}"/>
               </a:ext>
             </a:extLst>
           </p:cNvPr>
@@ -1579,7 +1992,7 @@
           <a:p>
             <a:fld id="{1A7E88B7-70CE-4035-AE73-13FA6FB985D4}" type="slidenum">
               <a:rPr lang="pt-BR" smtClean="0"/>
-              <a:t>‹nº›</a:t>
+              <a:t>‹#›</a:t>
             </a:fld>
             <a:endParaRPr lang="pt-BR"/>
           </a:p>
@@ -1620,7 +2033,7 @@
           <p:cNvPr id="2" name="Título 1">
             <a:extLst>
               <a:ext uri="{FF2B5EF4-FFF2-40B4-BE49-F238E27FC236}">
-                <a16:creationId xmlns:a16="http://schemas.microsoft.com/office/drawing/2014/main" xmlns="" id="{71BD44A5-8F21-4626-A01D-48A1C874B1D5}"/>
+                <a16:creationId xmlns:a16="http://schemas.microsoft.com/office/drawing/2014/main" id="{71BD44A5-8F21-4626-A01D-48A1C874B1D5}"/>
               </a:ext>
             </a:extLst>
           </p:cNvPr>
@@ -1648,7 +2061,7 @@
           <p:cNvPr id="3" name="Espaço Reservado para Conteúdo 2">
             <a:extLst>
               <a:ext uri="{FF2B5EF4-FFF2-40B4-BE49-F238E27FC236}">
-                <a16:creationId xmlns:a16="http://schemas.microsoft.com/office/drawing/2014/main" xmlns="" id="{B79E8085-65A9-48AA-951D-71D978BFF4ED}"/>
+                <a16:creationId xmlns:a16="http://schemas.microsoft.com/office/drawing/2014/main" id="{B79E8085-65A9-48AA-951D-71D978BFF4ED}"/>
               </a:ext>
             </a:extLst>
           </p:cNvPr>
@@ -1705,7 +2118,7 @@
           <p:cNvPr id="4" name="Espaço Reservado para Data 3">
             <a:extLst>
               <a:ext uri="{FF2B5EF4-FFF2-40B4-BE49-F238E27FC236}">
-                <a16:creationId xmlns:a16="http://schemas.microsoft.com/office/drawing/2014/main" xmlns="" id="{F05BE1AF-51EA-425D-B188-DE7BD675009F}"/>
+                <a16:creationId xmlns:a16="http://schemas.microsoft.com/office/drawing/2014/main" id="{F05BE1AF-51EA-425D-B188-DE7BD675009F}"/>
               </a:ext>
             </a:extLst>
           </p:cNvPr>
@@ -1723,7 +2136,7 @@
           <a:p>
             <a:fld id="{63289F7E-B80B-496E-81B4-D396C37C9454}" type="datetimeFigureOut">
               <a:rPr lang="pt-BR" smtClean="0"/>
-              <a:t>21/03/2026</a:t>
+              <a:t>24/03/2026</a:t>
             </a:fld>
             <a:endParaRPr lang="pt-BR"/>
           </a:p>
@@ -1734,7 +2147,7 @@
           <p:cNvPr id="5" name="Espaço Reservado para Rodapé 4">
             <a:extLst>
               <a:ext uri="{FF2B5EF4-FFF2-40B4-BE49-F238E27FC236}">
-                <a16:creationId xmlns:a16="http://schemas.microsoft.com/office/drawing/2014/main" xmlns="" id="{121BE632-29CF-4CB9-B365-C9EF38F89BE6}"/>
+                <a16:creationId xmlns:a16="http://schemas.microsoft.com/office/drawing/2014/main" id="{121BE632-29CF-4CB9-B365-C9EF38F89BE6}"/>
               </a:ext>
             </a:extLst>
           </p:cNvPr>
@@ -1759,7 +2172,7 @@
           <p:cNvPr id="6" name="Espaço Reservado para Número de Slide 5">
             <a:extLst>
               <a:ext uri="{FF2B5EF4-FFF2-40B4-BE49-F238E27FC236}">
-                <a16:creationId xmlns:a16="http://schemas.microsoft.com/office/drawing/2014/main" xmlns="" id="{60CF3DD1-9AEC-4A57-B461-4E4DD86FAC18}"/>
+                <a16:creationId xmlns:a16="http://schemas.microsoft.com/office/drawing/2014/main" id="{60CF3DD1-9AEC-4A57-B461-4E4DD86FAC18}"/>
               </a:ext>
             </a:extLst>
           </p:cNvPr>
@@ -1777,7 +2190,7 @@
           <a:p>
             <a:fld id="{1A7E88B7-70CE-4035-AE73-13FA6FB985D4}" type="slidenum">
               <a:rPr lang="pt-BR" smtClean="0"/>
-              <a:t>‹nº›</a:t>
+              <a:t>‹#›</a:t>
             </a:fld>
             <a:endParaRPr lang="pt-BR"/>
           </a:p>
@@ -1818,7 +2231,7 @@
           <p:cNvPr id="2" name="Título 1">
             <a:extLst>
               <a:ext uri="{FF2B5EF4-FFF2-40B4-BE49-F238E27FC236}">
-                <a16:creationId xmlns:a16="http://schemas.microsoft.com/office/drawing/2014/main" xmlns="" id="{34AB2FF0-A4D7-4E28-991D-FF26140D5988}"/>
+                <a16:creationId xmlns:a16="http://schemas.microsoft.com/office/drawing/2014/main" id="{34AB2FF0-A4D7-4E28-991D-FF26140D5988}"/>
               </a:ext>
             </a:extLst>
           </p:cNvPr>
@@ -1855,7 +2268,7 @@
           <p:cNvPr id="3" name="Espaço Reservado para Texto 2">
             <a:extLst>
               <a:ext uri="{FF2B5EF4-FFF2-40B4-BE49-F238E27FC236}">
-                <a16:creationId xmlns:a16="http://schemas.microsoft.com/office/drawing/2014/main" xmlns="" id="{E2AC45B0-4145-40DB-8E61-105461170604}"/>
+                <a16:creationId xmlns:a16="http://schemas.microsoft.com/office/drawing/2014/main" id="{E2AC45B0-4145-40DB-8E61-105461170604}"/>
               </a:ext>
             </a:extLst>
           </p:cNvPr>
@@ -1980,7 +2393,7 @@
           <p:cNvPr id="4" name="Espaço Reservado para Data 3">
             <a:extLst>
               <a:ext uri="{FF2B5EF4-FFF2-40B4-BE49-F238E27FC236}">
-                <a16:creationId xmlns:a16="http://schemas.microsoft.com/office/drawing/2014/main" xmlns="" id="{50F1D3FB-740A-4EBA-A309-2CE71D12ECFB}"/>
+                <a16:creationId xmlns:a16="http://schemas.microsoft.com/office/drawing/2014/main" id="{50F1D3FB-740A-4EBA-A309-2CE71D12ECFB}"/>
               </a:ext>
             </a:extLst>
           </p:cNvPr>
@@ -1998,7 +2411,7 @@
           <a:p>
             <a:fld id="{63289F7E-B80B-496E-81B4-D396C37C9454}" type="datetimeFigureOut">
               <a:rPr lang="pt-BR" smtClean="0"/>
-              <a:t>21/03/2026</a:t>
+              <a:t>24/03/2026</a:t>
             </a:fld>
             <a:endParaRPr lang="pt-BR"/>
           </a:p>
@@ -2009,7 +2422,7 @@
           <p:cNvPr id="5" name="Espaço Reservado para Rodapé 4">
             <a:extLst>
               <a:ext uri="{FF2B5EF4-FFF2-40B4-BE49-F238E27FC236}">
-                <a16:creationId xmlns:a16="http://schemas.microsoft.com/office/drawing/2014/main" xmlns="" id="{BDCAB18F-8715-4465-A940-F9C193A2ACE9}"/>
+                <a16:creationId xmlns:a16="http://schemas.microsoft.com/office/drawing/2014/main" id="{BDCAB18F-8715-4465-A940-F9C193A2ACE9}"/>
               </a:ext>
             </a:extLst>
           </p:cNvPr>
@@ -2034,7 +2447,7 @@
           <p:cNvPr id="6" name="Espaço Reservado para Número de Slide 5">
             <a:extLst>
               <a:ext uri="{FF2B5EF4-FFF2-40B4-BE49-F238E27FC236}">
-                <a16:creationId xmlns:a16="http://schemas.microsoft.com/office/drawing/2014/main" xmlns="" id="{353466C6-8248-429F-8056-FF040BF509EB}"/>
+                <a16:creationId xmlns:a16="http://schemas.microsoft.com/office/drawing/2014/main" id="{353466C6-8248-429F-8056-FF040BF509EB}"/>
               </a:ext>
             </a:extLst>
           </p:cNvPr>
@@ -2052,7 +2465,7 @@
           <a:p>
             <a:fld id="{1A7E88B7-70CE-4035-AE73-13FA6FB985D4}" type="slidenum">
               <a:rPr lang="pt-BR" smtClean="0"/>
-              <a:t>‹nº›</a:t>
+              <a:t>‹#›</a:t>
             </a:fld>
             <a:endParaRPr lang="pt-BR"/>
           </a:p>
@@ -2093,7 +2506,7 @@
           <p:cNvPr id="2" name="Título 1">
             <a:extLst>
               <a:ext uri="{FF2B5EF4-FFF2-40B4-BE49-F238E27FC236}">
-                <a16:creationId xmlns:a16="http://schemas.microsoft.com/office/drawing/2014/main" xmlns="" id="{BC7BB9F0-F14B-4A91-B2B7-35BC47FE4DE7}"/>
+                <a16:creationId xmlns:a16="http://schemas.microsoft.com/office/drawing/2014/main" id="{BC7BB9F0-F14B-4A91-B2B7-35BC47FE4DE7}"/>
               </a:ext>
             </a:extLst>
           </p:cNvPr>
@@ -2121,7 +2534,7 @@
           <p:cNvPr id="3" name="Espaço Reservado para Conteúdo 2">
             <a:extLst>
               <a:ext uri="{FF2B5EF4-FFF2-40B4-BE49-F238E27FC236}">
-                <a16:creationId xmlns:a16="http://schemas.microsoft.com/office/drawing/2014/main" xmlns="" id="{EC1FC1C4-73DA-47A6-8496-B0B457F7D39A}"/>
+                <a16:creationId xmlns:a16="http://schemas.microsoft.com/office/drawing/2014/main" id="{EC1FC1C4-73DA-47A6-8496-B0B457F7D39A}"/>
               </a:ext>
             </a:extLst>
           </p:cNvPr>
@@ -2183,7 +2596,7 @@
           <p:cNvPr id="4" name="Espaço Reservado para Conteúdo 3">
             <a:extLst>
               <a:ext uri="{FF2B5EF4-FFF2-40B4-BE49-F238E27FC236}">
-                <a16:creationId xmlns:a16="http://schemas.microsoft.com/office/drawing/2014/main" xmlns="" id="{E92F06A8-A449-4D92-9912-76873E529B38}"/>
+                <a16:creationId xmlns:a16="http://schemas.microsoft.com/office/drawing/2014/main" id="{E92F06A8-A449-4D92-9912-76873E529B38}"/>
               </a:ext>
             </a:extLst>
           </p:cNvPr>
@@ -2245,7 +2658,7 @@
           <p:cNvPr id="5" name="Espaço Reservado para Data 4">
             <a:extLst>
               <a:ext uri="{FF2B5EF4-FFF2-40B4-BE49-F238E27FC236}">
-                <a16:creationId xmlns:a16="http://schemas.microsoft.com/office/drawing/2014/main" xmlns="" id="{938070A4-BC2F-4D55-BD8D-DEAF11BB9EE9}"/>
+                <a16:creationId xmlns:a16="http://schemas.microsoft.com/office/drawing/2014/main" id="{938070A4-BC2F-4D55-BD8D-DEAF11BB9EE9}"/>
               </a:ext>
             </a:extLst>
           </p:cNvPr>
@@ -2263,7 +2676,7 @@
           <a:p>
             <a:fld id="{63289F7E-B80B-496E-81B4-D396C37C9454}" type="datetimeFigureOut">
               <a:rPr lang="pt-BR" smtClean="0"/>
-              <a:t>21/03/2026</a:t>
+              <a:t>24/03/2026</a:t>
             </a:fld>
             <a:endParaRPr lang="pt-BR"/>
           </a:p>
@@ -2274,7 +2687,7 @@
           <p:cNvPr id="6" name="Espaço Reservado para Rodapé 5">
             <a:extLst>
               <a:ext uri="{FF2B5EF4-FFF2-40B4-BE49-F238E27FC236}">
-                <a16:creationId xmlns:a16="http://schemas.microsoft.com/office/drawing/2014/main" xmlns="" id="{45CC2DB8-844A-465F-BA9A-7734C80C7F43}"/>
+                <a16:creationId xmlns:a16="http://schemas.microsoft.com/office/drawing/2014/main" id="{45CC2DB8-844A-465F-BA9A-7734C80C7F43}"/>
               </a:ext>
             </a:extLst>
           </p:cNvPr>
@@ -2299,7 +2712,7 @@
           <p:cNvPr id="7" name="Espaço Reservado para Número de Slide 6">
             <a:extLst>
               <a:ext uri="{FF2B5EF4-FFF2-40B4-BE49-F238E27FC236}">
-                <a16:creationId xmlns:a16="http://schemas.microsoft.com/office/drawing/2014/main" xmlns="" id="{4CC606A8-097B-4040-94E0-CD8C88280D8F}"/>
+                <a16:creationId xmlns:a16="http://schemas.microsoft.com/office/drawing/2014/main" id="{4CC606A8-097B-4040-94E0-CD8C88280D8F}"/>
               </a:ext>
             </a:extLst>
           </p:cNvPr>
@@ -2317,7 +2730,7 @@
           <a:p>
             <a:fld id="{1A7E88B7-70CE-4035-AE73-13FA6FB985D4}" type="slidenum">
               <a:rPr lang="pt-BR" smtClean="0"/>
-              <a:t>‹nº›</a:t>
+              <a:t>‹#›</a:t>
             </a:fld>
             <a:endParaRPr lang="pt-BR"/>
           </a:p>
@@ -2358,7 +2771,7 @@
           <p:cNvPr id="2" name="Título 1">
             <a:extLst>
               <a:ext uri="{FF2B5EF4-FFF2-40B4-BE49-F238E27FC236}">
-                <a16:creationId xmlns:a16="http://schemas.microsoft.com/office/drawing/2014/main" xmlns="" id="{76D66686-0143-4CB6-8C09-BA326F1E7ACA}"/>
+                <a16:creationId xmlns:a16="http://schemas.microsoft.com/office/drawing/2014/main" id="{76D66686-0143-4CB6-8C09-BA326F1E7ACA}"/>
               </a:ext>
             </a:extLst>
           </p:cNvPr>
@@ -2391,7 +2804,7 @@
           <p:cNvPr id="3" name="Espaço Reservado para Texto 2">
             <a:extLst>
               <a:ext uri="{FF2B5EF4-FFF2-40B4-BE49-F238E27FC236}">
-                <a16:creationId xmlns:a16="http://schemas.microsoft.com/office/drawing/2014/main" xmlns="" id="{0227AB85-F59E-4BCE-B846-4FA0992C2F23}"/>
+                <a16:creationId xmlns:a16="http://schemas.microsoft.com/office/drawing/2014/main" id="{0227AB85-F59E-4BCE-B846-4FA0992C2F23}"/>
               </a:ext>
             </a:extLst>
           </p:cNvPr>
@@ -2462,7 +2875,7 @@
           <p:cNvPr id="4" name="Espaço Reservado para Conteúdo 3">
             <a:extLst>
               <a:ext uri="{FF2B5EF4-FFF2-40B4-BE49-F238E27FC236}">
-                <a16:creationId xmlns:a16="http://schemas.microsoft.com/office/drawing/2014/main" xmlns="" id="{3373456C-7319-4D0A-827D-D29F6B083F5D}"/>
+                <a16:creationId xmlns:a16="http://schemas.microsoft.com/office/drawing/2014/main" id="{3373456C-7319-4D0A-827D-D29F6B083F5D}"/>
               </a:ext>
             </a:extLst>
           </p:cNvPr>
@@ -2524,7 +2937,7 @@
           <p:cNvPr id="5" name="Espaço Reservado para Texto 4">
             <a:extLst>
               <a:ext uri="{FF2B5EF4-FFF2-40B4-BE49-F238E27FC236}">
-                <a16:creationId xmlns:a16="http://schemas.microsoft.com/office/drawing/2014/main" xmlns="" id="{4CD109D0-2E83-4262-8029-A871CEC47406}"/>
+                <a16:creationId xmlns:a16="http://schemas.microsoft.com/office/drawing/2014/main" id="{4CD109D0-2E83-4262-8029-A871CEC47406}"/>
               </a:ext>
             </a:extLst>
           </p:cNvPr>
@@ -2595,7 +3008,7 @@
           <p:cNvPr id="6" name="Espaço Reservado para Conteúdo 5">
             <a:extLst>
               <a:ext uri="{FF2B5EF4-FFF2-40B4-BE49-F238E27FC236}">
-                <a16:creationId xmlns:a16="http://schemas.microsoft.com/office/drawing/2014/main" xmlns="" id="{AD706E3A-CFBB-4A6C-A65F-D0360A9E74FE}"/>
+                <a16:creationId xmlns:a16="http://schemas.microsoft.com/office/drawing/2014/main" id="{AD706E3A-CFBB-4A6C-A65F-D0360A9E74FE}"/>
               </a:ext>
             </a:extLst>
           </p:cNvPr>
@@ -2657,7 +3070,7 @@
           <p:cNvPr id="7" name="Espaço Reservado para Data 6">
             <a:extLst>
               <a:ext uri="{FF2B5EF4-FFF2-40B4-BE49-F238E27FC236}">
-                <a16:creationId xmlns:a16="http://schemas.microsoft.com/office/drawing/2014/main" xmlns="" id="{4172C0E5-5AF0-4805-BB51-443733CD2BD5}"/>
+                <a16:creationId xmlns:a16="http://schemas.microsoft.com/office/drawing/2014/main" id="{4172C0E5-5AF0-4805-BB51-443733CD2BD5}"/>
               </a:ext>
             </a:extLst>
           </p:cNvPr>
@@ -2675,7 +3088,7 @@
           <a:p>
             <a:fld id="{63289F7E-B80B-496E-81B4-D396C37C9454}" type="datetimeFigureOut">
               <a:rPr lang="pt-BR" smtClean="0"/>
-              <a:t>21/03/2026</a:t>
+              <a:t>24/03/2026</a:t>
             </a:fld>
             <a:endParaRPr lang="pt-BR"/>
           </a:p>
@@ -2686,7 +3099,7 @@
           <p:cNvPr id="8" name="Espaço Reservado para Rodapé 7">
             <a:extLst>
               <a:ext uri="{FF2B5EF4-FFF2-40B4-BE49-F238E27FC236}">
-                <a16:creationId xmlns:a16="http://schemas.microsoft.com/office/drawing/2014/main" xmlns="" id="{0E801648-156F-497E-99CF-797DF48051E1}"/>
+                <a16:creationId xmlns:a16="http://schemas.microsoft.com/office/drawing/2014/main" id="{0E801648-156F-497E-99CF-797DF48051E1}"/>
               </a:ext>
             </a:extLst>
           </p:cNvPr>
@@ -2711,7 +3124,7 @@
           <p:cNvPr id="9" name="Espaço Reservado para Número de Slide 8">
             <a:extLst>
               <a:ext uri="{FF2B5EF4-FFF2-40B4-BE49-F238E27FC236}">
-                <a16:creationId xmlns:a16="http://schemas.microsoft.com/office/drawing/2014/main" xmlns="" id="{EEE23D32-80E7-4796-A137-66BF842E4B53}"/>
+                <a16:creationId xmlns:a16="http://schemas.microsoft.com/office/drawing/2014/main" id="{EEE23D32-80E7-4796-A137-66BF842E4B53}"/>
               </a:ext>
             </a:extLst>
           </p:cNvPr>
@@ -2729,7 +3142,7 @@
           <a:p>
             <a:fld id="{1A7E88B7-70CE-4035-AE73-13FA6FB985D4}" type="slidenum">
               <a:rPr lang="pt-BR" smtClean="0"/>
-              <a:t>‹nº›</a:t>
+              <a:t>‹#›</a:t>
             </a:fld>
             <a:endParaRPr lang="pt-BR"/>
           </a:p>
@@ -2770,7 +3183,7 @@
           <p:cNvPr id="2" name="Título 1">
             <a:extLst>
               <a:ext uri="{FF2B5EF4-FFF2-40B4-BE49-F238E27FC236}">
-                <a16:creationId xmlns:a16="http://schemas.microsoft.com/office/drawing/2014/main" xmlns="" id="{2BCE2379-C78F-47E1-8CFC-B846E7AF148D}"/>
+                <a16:creationId xmlns:a16="http://schemas.microsoft.com/office/drawing/2014/main" id="{2BCE2379-C78F-47E1-8CFC-B846E7AF148D}"/>
               </a:ext>
             </a:extLst>
           </p:cNvPr>
@@ -2798,7 +3211,7 @@
           <p:cNvPr id="3" name="Espaço Reservado para Data 2">
             <a:extLst>
               <a:ext uri="{FF2B5EF4-FFF2-40B4-BE49-F238E27FC236}">
-                <a16:creationId xmlns:a16="http://schemas.microsoft.com/office/drawing/2014/main" xmlns="" id="{342600A9-7F92-4E22-9D94-E4717252A817}"/>
+                <a16:creationId xmlns:a16="http://schemas.microsoft.com/office/drawing/2014/main" id="{342600A9-7F92-4E22-9D94-E4717252A817}"/>
               </a:ext>
             </a:extLst>
           </p:cNvPr>
@@ -2816,7 +3229,7 @@
           <a:p>
             <a:fld id="{63289F7E-B80B-496E-81B4-D396C37C9454}" type="datetimeFigureOut">
               <a:rPr lang="pt-BR" smtClean="0"/>
-              <a:t>21/03/2026</a:t>
+              <a:t>24/03/2026</a:t>
             </a:fld>
             <a:endParaRPr lang="pt-BR"/>
           </a:p>
@@ -2827,7 +3240,7 @@
           <p:cNvPr id="4" name="Espaço Reservado para Rodapé 3">
             <a:extLst>
               <a:ext uri="{FF2B5EF4-FFF2-40B4-BE49-F238E27FC236}">
-                <a16:creationId xmlns:a16="http://schemas.microsoft.com/office/drawing/2014/main" xmlns="" id="{192E6BED-F546-40CC-A2DF-99CBA853654E}"/>
+                <a16:creationId xmlns:a16="http://schemas.microsoft.com/office/drawing/2014/main" id="{192E6BED-F546-40CC-A2DF-99CBA853654E}"/>
               </a:ext>
             </a:extLst>
           </p:cNvPr>
@@ -2852,7 +3265,7 @@
           <p:cNvPr id="5" name="Espaço Reservado para Número de Slide 4">
             <a:extLst>
               <a:ext uri="{FF2B5EF4-FFF2-40B4-BE49-F238E27FC236}">
-                <a16:creationId xmlns:a16="http://schemas.microsoft.com/office/drawing/2014/main" xmlns="" id="{6091CC40-A8C4-4063-80EB-CC5099621678}"/>
+                <a16:creationId xmlns:a16="http://schemas.microsoft.com/office/drawing/2014/main" id="{6091CC40-A8C4-4063-80EB-CC5099621678}"/>
               </a:ext>
             </a:extLst>
           </p:cNvPr>
@@ -2870,7 +3283,7 @@
           <a:p>
             <a:fld id="{1A7E88B7-70CE-4035-AE73-13FA6FB985D4}" type="slidenum">
               <a:rPr lang="pt-BR" smtClean="0"/>
-              <a:t>‹nº›</a:t>
+              <a:t>‹#›</a:t>
             </a:fld>
             <a:endParaRPr lang="pt-BR"/>
           </a:p>
@@ -2911,7 +3324,7 @@
           <p:cNvPr id="2" name="Espaço Reservado para Data 1">
             <a:extLst>
               <a:ext uri="{FF2B5EF4-FFF2-40B4-BE49-F238E27FC236}">
-                <a16:creationId xmlns:a16="http://schemas.microsoft.com/office/drawing/2014/main" xmlns="" id="{DD19515C-212C-4EAE-84A3-8FF4BC844F1B}"/>
+                <a16:creationId xmlns:a16="http://schemas.microsoft.com/office/drawing/2014/main" id="{DD19515C-212C-4EAE-84A3-8FF4BC844F1B}"/>
               </a:ext>
             </a:extLst>
           </p:cNvPr>
@@ -2929,7 +3342,7 @@
           <a:p>
             <a:fld id="{63289F7E-B80B-496E-81B4-D396C37C9454}" type="datetimeFigureOut">
               <a:rPr lang="pt-BR" smtClean="0"/>
-              <a:t>21/03/2026</a:t>
+              <a:t>24/03/2026</a:t>
             </a:fld>
             <a:endParaRPr lang="pt-BR"/>
           </a:p>
@@ -2940,7 +3353,7 @@
           <p:cNvPr id="3" name="Espaço Reservado para Rodapé 2">
             <a:extLst>
               <a:ext uri="{FF2B5EF4-FFF2-40B4-BE49-F238E27FC236}">
-                <a16:creationId xmlns:a16="http://schemas.microsoft.com/office/drawing/2014/main" xmlns="" id="{94D3D120-B3E8-4C96-861D-7A4F12F49B3A}"/>
+                <a16:creationId xmlns:a16="http://schemas.microsoft.com/office/drawing/2014/main" id="{94D3D120-B3E8-4C96-861D-7A4F12F49B3A}"/>
               </a:ext>
             </a:extLst>
           </p:cNvPr>
@@ -2965,7 +3378,7 @@
           <p:cNvPr id="4" name="Espaço Reservado para Número de Slide 3">
             <a:extLst>
               <a:ext uri="{FF2B5EF4-FFF2-40B4-BE49-F238E27FC236}">
-                <a16:creationId xmlns:a16="http://schemas.microsoft.com/office/drawing/2014/main" xmlns="" id="{42E49B68-FA1B-468B-9F17-D5C09243D454}"/>
+                <a16:creationId xmlns:a16="http://schemas.microsoft.com/office/drawing/2014/main" id="{42E49B68-FA1B-468B-9F17-D5C09243D454}"/>
               </a:ext>
             </a:extLst>
           </p:cNvPr>
@@ -2983,7 +3396,7 @@
           <a:p>
             <a:fld id="{1A7E88B7-70CE-4035-AE73-13FA6FB985D4}" type="slidenum">
               <a:rPr lang="pt-BR" smtClean="0"/>
-              <a:t>‹nº›</a:t>
+              <a:t>‹#›</a:t>
             </a:fld>
             <a:endParaRPr lang="pt-BR"/>
           </a:p>
@@ -3024,7 +3437,7 @@
           <p:cNvPr id="2" name="Título 1">
             <a:extLst>
               <a:ext uri="{FF2B5EF4-FFF2-40B4-BE49-F238E27FC236}">
-                <a16:creationId xmlns:a16="http://schemas.microsoft.com/office/drawing/2014/main" xmlns="" id="{1C17BCBE-A897-4319-85EC-D87909C24980}"/>
+                <a16:creationId xmlns:a16="http://schemas.microsoft.com/office/drawing/2014/main" id="{1C17BCBE-A897-4319-85EC-D87909C24980}"/>
               </a:ext>
             </a:extLst>
           </p:cNvPr>
@@ -3061,7 +3474,7 @@
           <p:cNvPr id="3" name="Espaço Reservado para Conteúdo 2">
             <a:extLst>
               <a:ext uri="{FF2B5EF4-FFF2-40B4-BE49-F238E27FC236}">
-                <a16:creationId xmlns:a16="http://schemas.microsoft.com/office/drawing/2014/main" xmlns="" id="{4226F885-0204-4913-868B-4B8B82576F17}"/>
+                <a16:creationId xmlns:a16="http://schemas.microsoft.com/office/drawing/2014/main" id="{4226F885-0204-4913-868B-4B8B82576F17}"/>
               </a:ext>
             </a:extLst>
           </p:cNvPr>
@@ -3151,7 +3564,7 @@
           <p:cNvPr id="4" name="Espaço Reservado para Texto 3">
             <a:extLst>
               <a:ext uri="{FF2B5EF4-FFF2-40B4-BE49-F238E27FC236}">
-                <a16:creationId xmlns:a16="http://schemas.microsoft.com/office/drawing/2014/main" xmlns="" id="{00F9F784-A858-441B-8AB5-697098141751}"/>
+                <a16:creationId xmlns:a16="http://schemas.microsoft.com/office/drawing/2014/main" id="{00F9F784-A858-441B-8AB5-697098141751}"/>
               </a:ext>
             </a:extLst>
           </p:cNvPr>
@@ -3222,7 +3635,7 @@
           <p:cNvPr id="5" name="Espaço Reservado para Data 4">
             <a:extLst>
               <a:ext uri="{FF2B5EF4-FFF2-40B4-BE49-F238E27FC236}">
-                <a16:creationId xmlns:a16="http://schemas.microsoft.com/office/drawing/2014/main" xmlns="" id="{A4DC363A-5000-472E-8B17-02E7DCB8840A}"/>
+                <a16:creationId xmlns:a16="http://schemas.microsoft.com/office/drawing/2014/main" id="{A4DC363A-5000-472E-8B17-02E7DCB8840A}"/>
               </a:ext>
             </a:extLst>
           </p:cNvPr>
@@ -3240,7 +3653,7 @@
           <a:p>
             <a:fld id="{63289F7E-B80B-496E-81B4-D396C37C9454}" type="datetimeFigureOut">
               <a:rPr lang="pt-BR" smtClean="0"/>
-              <a:t>21/03/2026</a:t>
+              <a:t>24/03/2026</a:t>
             </a:fld>
             <a:endParaRPr lang="pt-BR"/>
           </a:p>
@@ -3251,7 +3664,7 @@
           <p:cNvPr id="6" name="Espaço Reservado para Rodapé 5">
             <a:extLst>
               <a:ext uri="{FF2B5EF4-FFF2-40B4-BE49-F238E27FC236}">
-                <a16:creationId xmlns:a16="http://schemas.microsoft.com/office/drawing/2014/main" xmlns="" id="{5548425D-2C21-4C56-BAD4-662978775C28}"/>
+                <a16:creationId xmlns:a16="http://schemas.microsoft.com/office/drawing/2014/main" id="{5548425D-2C21-4C56-BAD4-662978775C28}"/>
               </a:ext>
             </a:extLst>
           </p:cNvPr>
@@ -3276,7 +3689,7 @@
           <p:cNvPr id="7" name="Espaço Reservado para Número de Slide 6">
             <a:extLst>
               <a:ext uri="{FF2B5EF4-FFF2-40B4-BE49-F238E27FC236}">
-                <a16:creationId xmlns:a16="http://schemas.microsoft.com/office/drawing/2014/main" xmlns="" id="{C63E9726-E64C-42B2-AE8A-8C235A956B48}"/>
+                <a16:creationId xmlns:a16="http://schemas.microsoft.com/office/drawing/2014/main" id="{C63E9726-E64C-42B2-AE8A-8C235A956B48}"/>
               </a:ext>
             </a:extLst>
           </p:cNvPr>
@@ -3294,7 +3707,7 @@
           <a:p>
             <a:fld id="{1A7E88B7-70CE-4035-AE73-13FA6FB985D4}" type="slidenum">
               <a:rPr lang="pt-BR" smtClean="0"/>
-              <a:t>‹nº›</a:t>
+              <a:t>‹#›</a:t>
             </a:fld>
             <a:endParaRPr lang="pt-BR"/>
           </a:p>
@@ -3335,7 +3748,7 @@
           <p:cNvPr id="2" name="Título 1">
             <a:extLst>
               <a:ext uri="{FF2B5EF4-FFF2-40B4-BE49-F238E27FC236}">
-                <a16:creationId xmlns:a16="http://schemas.microsoft.com/office/drawing/2014/main" xmlns="" id="{11086A78-3E74-450C-96A6-CA8AC37AF772}"/>
+                <a16:creationId xmlns:a16="http://schemas.microsoft.com/office/drawing/2014/main" id="{11086A78-3E74-450C-96A6-CA8AC37AF772}"/>
               </a:ext>
             </a:extLst>
           </p:cNvPr>
@@ -3372,7 +3785,7 @@
           <p:cNvPr id="3" name="Espaço Reservado para Imagem 2">
             <a:extLst>
               <a:ext uri="{FF2B5EF4-FFF2-40B4-BE49-F238E27FC236}">
-                <a16:creationId xmlns:a16="http://schemas.microsoft.com/office/drawing/2014/main" xmlns="" id="{5F5B7312-975A-4DBC-9B2F-3652ADA006FD}"/>
+                <a16:creationId xmlns:a16="http://schemas.microsoft.com/office/drawing/2014/main" id="{5F5B7312-975A-4DBC-9B2F-3652ADA006FD}"/>
               </a:ext>
             </a:extLst>
           </p:cNvPr>
@@ -3439,7 +3852,7 @@
           <p:cNvPr id="4" name="Espaço Reservado para Texto 3">
             <a:extLst>
               <a:ext uri="{FF2B5EF4-FFF2-40B4-BE49-F238E27FC236}">
-                <a16:creationId xmlns:a16="http://schemas.microsoft.com/office/drawing/2014/main" xmlns="" id="{AAF805F5-1DFF-41C6-944C-7D79FE0D0963}"/>
+                <a16:creationId xmlns:a16="http://schemas.microsoft.com/office/drawing/2014/main" id="{AAF805F5-1DFF-41C6-944C-7D79FE0D0963}"/>
               </a:ext>
             </a:extLst>
           </p:cNvPr>
@@ -3510,7 +3923,7 @@
           <p:cNvPr id="5" name="Espaço Reservado para Data 4">
             <a:extLst>
               <a:ext uri="{FF2B5EF4-FFF2-40B4-BE49-F238E27FC236}">
-                <a16:creationId xmlns:a16="http://schemas.microsoft.com/office/drawing/2014/main" xmlns="" id="{02113D81-8665-4516-BD81-C6A1F254EECD}"/>
+                <a16:creationId xmlns:a16="http://schemas.microsoft.com/office/drawing/2014/main" id="{02113D81-8665-4516-BD81-C6A1F254EECD}"/>
               </a:ext>
             </a:extLst>
           </p:cNvPr>
@@ -3528,7 +3941,7 @@
           <a:p>
             <a:fld id="{63289F7E-B80B-496E-81B4-D396C37C9454}" type="datetimeFigureOut">
               <a:rPr lang="pt-BR" smtClean="0"/>
-              <a:t>21/03/2026</a:t>
+              <a:t>24/03/2026</a:t>
             </a:fld>
             <a:endParaRPr lang="pt-BR"/>
           </a:p>
@@ -3539,7 +3952,7 @@
           <p:cNvPr id="6" name="Espaço Reservado para Rodapé 5">
             <a:extLst>
               <a:ext uri="{FF2B5EF4-FFF2-40B4-BE49-F238E27FC236}">
-                <a16:creationId xmlns:a16="http://schemas.microsoft.com/office/drawing/2014/main" xmlns="" id="{2B00C88B-FF32-40AA-A187-727D96FD7862}"/>
+                <a16:creationId xmlns:a16="http://schemas.microsoft.com/office/drawing/2014/main" id="{2B00C88B-FF32-40AA-A187-727D96FD7862}"/>
               </a:ext>
             </a:extLst>
           </p:cNvPr>
@@ -3564,7 +3977,7 @@
           <p:cNvPr id="7" name="Espaço Reservado para Número de Slide 6">
             <a:extLst>
               <a:ext uri="{FF2B5EF4-FFF2-40B4-BE49-F238E27FC236}">
-                <a16:creationId xmlns:a16="http://schemas.microsoft.com/office/drawing/2014/main" xmlns="" id="{A04D1A2D-69F7-4B8F-A730-BC26DC340BA6}"/>
+                <a16:creationId xmlns:a16="http://schemas.microsoft.com/office/drawing/2014/main" id="{A04D1A2D-69F7-4B8F-A730-BC26DC340BA6}"/>
               </a:ext>
             </a:extLst>
           </p:cNvPr>
@@ -3582,7 +3995,7 @@
           <a:p>
             <a:fld id="{1A7E88B7-70CE-4035-AE73-13FA6FB985D4}" type="slidenum">
               <a:rPr lang="pt-BR" smtClean="0"/>
-              <a:t>‹nº›</a:t>
+              <a:t>‹#›</a:t>
             </a:fld>
             <a:endParaRPr lang="pt-BR"/>
           </a:p>
@@ -3628,7 +4041,7 @@
           <p:cNvPr id="2" name="Espaço Reservado para Título 1">
             <a:extLst>
               <a:ext uri="{FF2B5EF4-FFF2-40B4-BE49-F238E27FC236}">
-                <a16:creationId xmlns:a16="http://schemas.microsoft.com/office/drawing/2014/main" xmlns="" id="{E69A0273-1966-4A1B-9370-4C1CE5036371}"/>
+                <a16:creationId xmlns:a16="http://schemas.microsoft.com/office/drawing/2014/main" id="{E69A0273-1966-4A1B-9370-4C1CE5036371}"/>
               </a:ext>
             </a:extLst>
           </p:cNvPr>
@@ -3666,7 +4079,7 @@
           <p:cNvPr id="3" name="Espaço Reservado para Texto 2">
             <a:extLst>
               <a:ext uri="{FF2B5EF4-FFF2-40B4-BE49-F238E27FC236}">
-                <a16:creationId xmlns:a16="http://schemas.microsoft.com/office/drawing/2014/main" xmlns="" id="{3B9CF87A-0448-49A7-AB25-EBC1D56A40EF}"/>
+                <a16:creationId xmlns:a16="http://schemas.microsoft.com/office/drawing/2014/main" id="{3B9CF87A-0448-49A7-AB25-EBC1D56A40EF}"/>
               </a:ext>
             </a:extLst>
           </p:cNvPr>
@@ -3733,7 +4146,7 @@
           <p:cNvPr id="4" name="Espaço Reservado para Data 3">
             <a:extLst>
               <a:ext uri="{FF2B5EF4-FFF2-40B4-BE49-F238E27FC236}">
-                <a16:creationId xmlns:a16="http://schemas.microsoft.com/office/drawing/2014/main" xmlns="" id="{2EF7B1F2-BB5A-44D0-816D-16AD2C71430E}"/>
+                <a16:creationId xmlns:a16="http://schemas.microsoft.com/office/drawing/2014/main" id="{2EF7B1F2-BB5A-44D0-816D-16AD2C71430E}"/>
               </a:ext>
             </a:extLst>
           </p:cNvPr>
@@ -3769,7 +4182,7 @@
           <a:p>
             <a:fld id="{63289F7E-B80B-496E-81B4-D396C37C9454}" type="datetimeFigureOut">
               <a:rPr lang="pt-BR" smtClean="0"/>
-              <a:t>21/03/2026</a:t>
+              <a:t>24/03/2026</a:t>
             </a:fld>
             <a:endParaRPr lang="pt-BR"/>
           </a:p>
@@ -3780,7 +4193,7 @@
           <p:cNvPr id="5" name="Espaço Reservado para Rodapé 4">
             <a:extLst>
               <a:ext uri="{FF2B5EF4-FFF2-40B4-BE49-F238E27FC236}">
-                <a16:creationId xmlns:a16="http://schemas.microsoft.com/office/drawing/2014/main" xmlns="" id="{C703F94C-2CC8-4DAA-BC35-14FC3E841DCD}"/>
+                <a16:creationId xmlns:a16="http://schemas.microsoft.com/office/drawing/2014/main" id="{C703F94C-2CC8-4DAA-BC35-14FC3E841DCD}"/>
               </a:ext>
             </a:extLst>
           </p:cNvPr>
@@ -3823,7 +4236,7 @@
           <p:cNvPr id="6" name="Espaço Reservado para Número de Slide 5">
             <a:extLst>
               <a:ext uri="{FF2B5EF4-FFF2-40B4-BE49-F238E27FC236}">
-                <a16:creationId xmlns:a16="http://schemas.microsoft.com/office/drawing/2014/main" xmlns="" id="{64051336-7048-457A-8B61-D94291D71648}"/>
+                <a16:creationId xmlns:a16="http://schemas.microsoft.com/office/drawing/2014/main" id="{64051336-7048-457A-8B61-D94291D71648}"/>
               </a:ext>
             </a:extLst>
           </p:cNvPr>
@@ -3859,7 +4272,7 @@
           <a:p>
             <a:fld id="{1A7E88B7-70CE-4035-AE73-13FA6FB985D4}" type="slidenum">
               <a:rPr lang="pt-BR" smtClean="0"/>
-              <a:t>‹nº›</a:t>
+              <a:t>‹#›</a:t>
             </a:fld>
             <a:endParaRPr lang="pt-BR"/>
           </a:p>
@@ -4191,7 +4604,7 @@
           <p:cNvPr id="4" name="CaixaDeTexto 3">
             <a:extLst>
               <a:ext uri="{FF2B5EF4-FFF2-40B4-BE49-F238E27FC236}">
-                <a16:creationId xmlns:a16="http://schemas.microsoft.com/office/drawing/2014/main" xmlns="" id="{430EB894-B7D4-434C-9D1A-A14094D9BEEC}"/>
+                <a16:creationId xmlns:a16="http://schemas.microsoft.com/office/drawing/2014/main" id="{430EB894-B7D4-434C-9D1A-A14094D9BEEC}"/>
               </a:ext>
             </a:extLst>
           </p:cNvPr>
@@ -4215,23 +4628,16 @@
           <a:lstStyle/>
           <a:p>
             <a:r>
-              <a:rPr lang="pt-BR" sz="2000" dirty="0" smtClean="0"/>
+              <a:rPr lang="pt-BR" sz="2000" dirty="0"/>
               <a:t>Felipe A. P. de Figueiredo</a:t>
             </a:r>
-            <a:endParaRPr lang="pt-BR" sz="2000" dirty="0"/>
           </a:p>
           <a:p>
             <a:r>
               <a:rPr lang="pt-BR" dirty="0">
                 <a:hlinkClick r:id="rId3"/>
               </a:rPr>
-              <a:t>f</a:t>
-            </a:r>
-            <a:r>
-              <a:rPr lang="pt-BR" dirty="0" smtClean="0">
-                <a:hlinkClick r:id="rId3"/>
-              </a:rPr>
-              <a:t>elipe.figueiredo@Inatel.br</a:t>
+              <a:t>felipe.figueiredo@Inatel.br</a:t>
             </a:r>
             <a:endParaRPr lang="pt-BR" dirty="0"/>
           </a:p>
@@ -4242,7 +4648,7 @@
           <p:cNvPr id="1026" name="Picture 2" descr="Logo">
             <a:extLst>
               <a:ext uri="{FF2B5EF4-FFF2-40B4-BE49-F238E27FC236}">
-                <a16:creationId xmlns:a16="http://schemas.microsoft.com/office/drawing/2014/main" xmlns="" id="{3F2642E0-4F6A-4196-8F58-E77D36E9A33F}"/>
+                <a16:creationId xmlns:a16="http://schemas.microsoft.com/office/drawing/2014/main" id="{3F2642E0-4F6A-4196-8F58-E77D36E9A33F}"/>
               </a:ext>
             </a:extLst>
           </p:cNvPr>
@@ -4287,7 +4693,7 @@
           <p:cNvPr id="5122" name="Picture 2" descr="Image result for machine learning">
             <a:extLst>
               <a:ext uri="{FF2B5EF4-FFF2-40B4-BE49-F238E27FC236}">
-                <a16:creationId xmlns:a16="http://schemas.microsoft.com/office/drawing/2014/main" xmlns="" id="{810CE0A2-4102-44A6-A370-175E7896CDCB}"/>
+                <a16:creationId xmlns:a16="http://schemas.microsoft.com/office/drawing/2014/main" id="{810CE0A2-4102-44A6-A370-175E7896CDCB}"/>
               </a:ext>
             </a:extLst>
           </p:cNvPr>
@@ -4332,7 +4738,7 @@
           <p:cNvPr id="7" name="Título 1">
             <a:extLst>
               <a:ext uri="{FF2B5EF4-FFF2-40B4-BE49-F238E27FC236}">
-                <a16:creationId xmlns="" xmlns:a16="http://schemas.microsoft.com/office/drawing/2014/main" id="{32666AC8-2E17-4DB4-B0F5-60C640CCFD2E}"/>
+                <a16:creationId xmlns:a16="http://schemas.microsoft.com/office/drawing/2014/main" id="{32666AC8-2E17-4DB4-B0F5-60C640CCFD2E}"/>
               </a:ext>
             </a:extLst>
           </p:cNvPr>
@@ -4356,21 +4762,16 @@
           <a:lstStyle/>
           <a:p>
             <a:r>
-              <a:rPr lang="pt-BR" sz="6600" dirty="0" smtClean="0"/>
+              <a:rPr lang="pt-BR" sz="6600" dirty="0"/>
               <a:t>C24 – Inteligência Artificial:</a:t>
-            </a:r>
-            <a:r>
-              <a:rPr lang="pt-BR" sz="7200" dirty="0"/>
-              <a:t/>
             </a:r>
             <a:br>
               <a:rPr lang="pt-BR" sz="7200" dirty="0"/>
             </a:br>
             <a:r>
-              <a:rPr lang="pt-BR" sz="7200" b="1" i="1" dirty="0" smtClean="0"/>
+              <a:rPr lang="pt-BR" sz="7200" b="1" i="1" dirty="0"/>
               <a:t>Redes neurais recorrentes</a:t>
             </a:r>
-            <a:endParaRPr lang="pt-BR" sz="7200" b="1" i="1" dirty="0"/>
           </a:p>
         </p:txBody>
       </p:sp>
@@ -4406,7 +4807,13 @@
       </p:grpSpPr>
       <p:sp>
         <p:nvSpPr>
-          <p:cNvPr id="2" name="Título 1"/>
+          <p:cNvPr id="2" name="Title 1">
+            <a:extLst>
+              <a:ext uri="{FF2B5EF4-FFF2-40B4-BE49-F238E27FC236}">
+                <a16:creationId xmlns:a16="http://schemas.microsoft.com/office/drawing/2014/main" id="{10058803-0098-D69B-94E1-8CF2F7283A2E}"/>
+              </a:ext>
+            </a:extLst>
+          </p:cNvPr>
           <p:cNvSpPr>
             <a:spLocks noGrp="1"/>
           </p:cNvSpPr>
@@ -4421,69 +4828,633 @@
           <a:p>
             <a:r>
               <a:rPr lang="pt-BR" dirty="0"/>
-              <a:t>Motivação para </a:t>
-            </a:r>
-            <a:r>
-              <a:rPr lang="pt-BR" dirty="0" smtClean="0"/>
-              <a:t>LSTM</a:t>
-            </a:r>
-            <a:endParaRPr lang="pt-BR" dirty="0"/>
-          </a:p>
-        </p:txBody>
-      </p:sp>
-      <p:sp>
-        <p:nvSpPr>
-          <p:cNvPr id="3" name="Espaço Reservado para Conteúdo 2"/>
-          <p:cNvSpPr>
-            <a:spLocks noGrp="1"/>
-          </p:cNvSpPr>
-          <p:nvPr>
-            <p:ph idx="1"/>
-          </p:nvPr>
-        </p:nvSpPr>
-        <p:spPr/>
-        <p:txBody>
-          <a:bodyPr/>
-          <a:lstStyle/>
-          <a:p>
-            <a:r>
-              <a:rPr lang="pt-BR" dirty="0" smtClean="0"/>
-              <a:t>Resolver </a:t>
-            </a:r>
-            <a:r>
-              <a:rPr lang="pt-BR" dirty="0"/>
-              <a:t>dependências </a:t>
-            </a:r>
-            <a:r>
-              <a:rPr lang="pt-BR" dirty="0" smtClean="0"/>
-              <a:t>longas</a:t>
-            </a:r>
-          </a:p>
-          <a:p>
-            <a:r>
-              <a:rPr lang="pt-BR" dirty="0" smtClean="0"/>
-              <a:t>Evitar </a:t>
-            </a:r>
-            <a:r>
-              <a:rPr lang="pt-BR" dirty="0" err="1"/>
-              <a:t>vanishing</a:t>
-            </a:r>
-            <a:r>
-              <a:rPr lang="pt-BR" dirty="0"/>
-              <a:t> </a:t>
-            </a:r>
-            <a:r>
-              <a:rPr lang="pt-BR" dirty="0" err="1"/>
-              <a:t>gradient</a:t>
-            </a:r>
-            <a:endParaRPr lang="pt-BR" dirty="0"/>
-          </a:p>
-        </p:txBody>
-      </p:sp>
+              <a:t>Atualização do estado e geração da saída</a:t>
+            </a:r>
+            <a:endParaRPr lang="en-US" dirty="0"/>
+          </a:p>
+        </p:txBody>
+      </p:sp>
+      <mc:AlternateContent xmlns:mc="http://schemas.openxmlformats.org/markup-compatibility/2006">
+        <mc:Choice xmlns:a14="http://schemas.microsoft.com/office/drawing/2010/main" Requires="a14">
+          <p:sp>
+            <p:nvSpPr>
+              <p:cNvPr id="3" name="Content Placeholder 2">
+                <a:extLst>
+                  <a:ext uri="{FF2B5EF4-FFF2-40B4-BE49-F238E27FC236}">
+                    <a16:creationId xmlns:a16="http://schemas.microsoft.com/office/drawing/2014/main" id="{988FD72E-BE70-A3E4-42F1-AA2A1AE8D958}"/>
+                  </a:ext>
+                </a:extLst>
+              </p:cNvPr>
+              <p:cNvSpPr>
+                <a:spLocks noGrp="1"/>
+              </p:cNvSpPr>
+              <p:nvPr>
+                <p:ph idx="1"/>
+              </p:nvPr>
+            </p:nvSpPr>
+            <p:spPr>
+              <a:xfrm>
+                <a:off x="5029200" y="1825625"/>
+                <a:ext cx="7032170" cy="4351338"/>
+              </a:xfrm>
+            </p:spPr>
+            <p:txBody>
+              <a:bodyPr/>
+              <a:lstStyle/>
+              <a:p>
+                <a:r>
+                  <a:rPr lang="pt-BR" dirty="0"/>
+                  <a:t>Equações de atualização do estado e de saída do neurônio recorrente:</a:t>
+                </a:r>
+              </a:p>
+              <a:p>
+                <a:pPr marL="0" indent="0" algn="ctr">
+                  <a:buNone/>
+                </a:pPr>
+                <a14:m>
+                  <m:oMathPara xmlns:m="http://schemas.openxmlformats.org/officeDocument/2006/math">
+                    <m:oMathParaPr>
+                      <m:jc m:val="centerGroup"/>
+                    </m:oMathParaPr>
+                    <m:oMath xmlns:m="http://schemas.openxmlformats.org/officeDocument/2006/math">
+                      <m:r>
+                        <a:rPr lang="pt-BR" b="0" i="1" smtClean="0">
+                          <a:latin typeface="Cambria Math" panose="02040503050406030204" pitchFamily="18" charset="0"/>
+                        </a:rPr>
+                        <m:t>h</m:t>
+                      </m:r>
+                      <m:d>
+                        <m:dPr>
+                          <m:begChr m:val="["/>
+                          <m:endChr m:val="]"/>
+                          <m:ctrlPr>
+                            <a:rPr lang="pt-BR" b="0" i="1" smtClean="0">
+                              <a:latin typeface="Cambria Math" panose="02040503050406030204" pitchFamily="18" charset="0"/>
+                            </a:rPr>
+                          </m:ctrlPr>
+                        </m:dPr>
+                        <m:e>
+                          <m:r>
+                            <a:rPr lang="pt-BR" b="0" i="1" smtClean="0">
+                              <a:latin typeface="Cambria Math" panose="02040503050406030204" pitchFamily="18" charset="0"/>
+                            </a:rPr>
+                            <m:t>𝑡</m:t>
+                          </m:r>
+                        </m:e>
+                      </m:d>
+                      <m:r>
+                        <a:rPr lang="pt-BR" b="0" i="1" smtClean="0">
+                          <a:latin typeface="Cambria Math" panose="02040503050406030204" pitchFamily="18" charset="0"/>
+                        </a:rPr>
+                        <m:t>=</m:t>
+                      </m:r>
+                      <m:r>
+                        <a:rPr lang="pt-BR" b="0" i="1" smtClean="0">
+                          <a:latin typeface="Cambria Math" panose="02040503050406030204" pitchFamily="18" charset="0"/>
+                        </a:rPr>
+                        <m:t>𝑓</m:t>
+                      </m:r>
+                      <m:d>
+                        <m:dPr>
+                          <m:ctrlPr>
+                            <a:rPr lang="pt-BR" b="0" i="1" smtClean="0">
+                              <a:latin typeface="Cambria Math" panose="02040503050406030204" pitchFamily="18" charset="0"/>
+                            </a:rPr>
+                          </m:ctrlPr>
+                        </m:dPr>
+                        <m:e>
+                          <m:sSubSup>
+                            <m:sSubSupPr>
+                              <m:ctrlPr>
+                                <a:rPr lang="pt-BR" i="1">
+                                  <a:latin typeface="Cambria Math" panose="02040503050406030204" pitchFamily="18" charset="0"/>
+                                </a:rPr>
+                              </m:ctrlPr>
+                            </m:sSubSupPr>
+                            <m:e>
+                              <m:r>
+                                <a:rPr lang="pt-BR" i="1">
+                                  <a:latin typeface="Cambria Math" panose="02040503050406030204" pitchFamily="18" charset="0"/>
+                                </a:rPr>
+                                <m:t>𝑊</m:t>
+                              </m:r>
+                            </m:e>
+                            <m:sub>
+                              <m:r>
+                                <a:rPr lang="pt-BR" i="1">
+                                  <a:latin typeface="Cambria Math" panose="02040503050406030204" pitchFamily="18" charset="0"/>
+                                </a:rPr>
+                                <m:t>h</m:t>
+                              </m:r>
+                            </m:sub>
+                            <m:sup>
+                              <m:r>
+                                <a:rPr lang="pt-BR" i="1">
+                                  <a:latin typeface="Cambria Math" panose="02040503050406030204" pitchFamily="18" charset="0"/>
+                                </a:rPr>
+                                <m:t>h</m:t>
+                              </m:r>
+                            </m:sup>
+                          </m:sSubSup>
+                          <m:r>
+                            <a:rPr lang="pt-BR" b="0" i="1" smtClean="0">
+                              <a:latin typeface="Cambria Math" panose="02040503050406030204" pitchFamily="18" charset="0"/>
+                            </a:rPr>
+                            <m:t>h</m:t>
+                          </m:r>
+                          <m:d>
+                            <m:dPr>
+                              <m:begChr m:val="["/>
+                              <m:endChr m:val="]"/>
+                              <m:ctrlPr>
+                                <a:rPr lang="pt-BR" b="0" i="1" smtClean="0">
+                                  <a:latin typeface="Cambria Math" panose="02040503050406030204" pitchFamily="18" charset="0"/>
+                                </a:rPr>
+                              </m:ctrlPr>
+                            </m:dPr>
+                            <m:e>
+                              <m:r>
+                                <a:rPr lang="pt-BR" b="0" i="1" smtClean="0">
+                                  <a:latin typeface="Cambria Math" panose="02040503050406030204" pitchFamily="18" charset="0"/>
+                                </a:rPr>
+                                <m:t>𝑡</m:t>
+                              </m:r>
+                              <m:r>
+                                <a:rPr lang="pt-BR" b="0" i="1" smtClean="0">
+                                  <a:latin typeface="Cambria Math" panose="02040503050406030204" pitchFamily="18" charset="0"/>
+                                </a:rPr>
+                                <m:t>−1</m:t>
+                              </m:r>
+                            </m:e>
+                          </m:d>
+                          <m:r>
+                            <a:rPr lang="pt-BR" b="0" i="1" smtClean="0">
+                              <a:latin typeface="Cambria Math" panose="02040503050406030204" pitchFamily="18" charset="0"/>
+                            </a:rPr>
+                            <m:t>+</m:t>
+                          </m:r>
+                          <m:sSubSup>
+                            <m:sSubSupPr>
+                              <m:ctrlPr>
+                                <a:rPr lang="pt-BR" i="1">
+                                  <a:latin typeface="Cambria Math" panose="02040503050406030204" pitchFamily="18" charset="0"/>
+                                </a:rPr>
+                              </m:ctrlPr>
+                            </m:sSubSupPr>
+                            <m:e>
+                              <m:r>
+                                <a:rPr lang="pt-BR" i="1">
+                                  <a:latin typeface="Cambria Math" panose="02040503050406030204" pitchFamily="18" charset="0"/>
+                                </a:rPr>
+                                <m:t>𝑊</m:t>
+                              </m:r>
+                            </m:e>
+                            <m:sub>
+                              <m:r>
+                                <a:rPr lang="pt-BR" b="0" i="1" smtClean="0">
+                                  <a:latin typeface="Cambria Math" panose="02040503050406030204" pitchFamily="18" charset="0"/>
+                                </a:rPr>
+                                <m:t>𝑖</m:t>
+                              </m:r>
+                            </m:sub>
+                            <m:sup>
+                              <m:r>
+                                <a:rPr lang="pt-BR" i="1">
+                                  <a:latin typeface="Cambria Math" panose="02040503050406030204" pitchFamily="18" charset="0"/>
+                                </a:rPr>
+                                <m:t>h</m:t>
+                              </m:r>
+                            </m:sup>
+                          </m:sSubSup>
+                          <m:r>
+                            <a:rPr lang="pt-BR" b="0" i="1" smtClean="0">
+                              <a:latin typeface="Cambria Math" panose="02040503050406030204" pitchFamily="18" charset="0"/>
+                            </a:rPr>
+                            <m:t>𝑥</m:t>
+                          </m:r>
+                          <m:d>
+                            <m:dPr>
+                              <m:begChr m:val="["/>
+                              <m:endChr m:val="]"/>
+                              <m:ctrlPr>
+                                <a:rPr lang="pt-BR" b="0" i="1" smtClean="0">
+                                  <a:latin typeface="Cambria Math" panose="02040503050406030204" pitchFamily="18" charset="0"/>
+                                </a:rPr>
+                              </m:ctrlPr>
+                            </m:dPr>
+                            <m:e>
+                              <m:r>
+                                <a:rPr lang="pt-BR" b="0" i="1" smtClean="0">
+                                  <a:latin typeface="Cambria Math" panose="02040503050406030204" pitchFamily="18" charset="0"/>
+                                </a:rPr>
+                                <m:t>𝑡</m:t>
+                              </m:r>
+                            </m:e>
+                          </m:d>
+                        </m:e>
+                      </m:d>
+                      <m:r>
+                        <a:rPr lang="pt-BR" b="0" i="0" smtClean="0">
+                          <a:latin typeface="Cambria Math" panose="02040503050406030204" pitchFamily="18" charset="0"/>
+                        </a:rPr>
+                        <m:t>,</m:t>
+                      </m:r>
+                    </m:oMath>
+                  </m:oMathPara>
+                </a14:m>
+                <a:endParaRPr lang="en-US" dirty="0"/>
+              </a:p>
+              <a:p>
+                <a:pPr marL="0" indent="0" algn="ctr">
+                  <a:buNone/>
+                </a:pPr>
+                <a14:m>
+                  <m:oMathPara xmlns:m="http://schemas.openxmlformats.org/officeDocument/2006/math">
+                    <m:oMathParaPr>
+                      <m:jc m:val="centerGroup"/>
+                    </m:oMathParaPr>
+                    <m:oMath xmlns:m="http://schemas.openxmlformats.org/officeDocument/2006/math">
+                      <m:r>
+                        <a:rPr lang="pt-BR" b="0" i="1" smtClean="0">
+                          <a:latin typeface="Cambria Math" panose="02040503050406030204" pitchFamily="18" charset="0"/>
+                        </a:rPr>
+                        <m:t>𝑦</m:t>
+                      </m:r>
+                      <m:d>
+                        <m:dPr>
+                          <m:begChr m:val="["/>
+                          <m:endChr m:val="]"/>
+                          <m:ctrlPr>
+                            <a:rPr lang="pt-BR" b="0" i="1" smtClean="0">
+                              <a:latin typeface="Cambria Math" panose="02040503050406030204" pitchFamily="18" charset="0"/>
+                            </a:rPr>
+                          </m:ctrlPr>
+                        </m:dPr>
+                        <m:e>
+                          <m:r>
+                            <a:rPr lang="pt-BR" b="0" i="1" smtClean="0">
+                              <a:latin typeface="Cambria Math" panose="02040503050406030204" pitchFamily="18" charset="0"/>
+                            </a:rPr>
+                            <m:t>𝑡</m:t>
+                          </m:r>
+                        </m:e>
+                      </m:d>
+                      <m:r>
+                        <a:rPr lang="pt-BR" b="0" i="1" smtClean="0">
+                          <a:latin typeface="Cambria Math" panose="02040503050406030204" pitchFamily="18" charset="0"/>
+                        </a:rPr>
+                        <m:t>=</m:t>
+                      </m:r>
+                      <m:sSubSup>
+                        <m:sSubSupPr>
+                          <m:ctrlPr>
+                            <a:rPr lang="pt-BR" i="1">
+                              <a:latin typeface="Cambria Math" panose="02040503050406030204" pitchFamily="18" charset="0"/>
+                            </a:rPr>
+                          </m:ctrlPr>
+                        </m:sSubSupPr>
+                        <m:e>
+                          <m:r>
+                            <a:rPr lang="pt-BR" i="1">
+                              <a:latin typeface="Cambria Math" panose="02040503050406030204" pitchFamily="18" charset="0"/>
+                            </a:rPr>
+                            <m:t>𝑊</m:t>
+                          </m:r>
+                        </m:e>
+                        <m:sub>
+                          <m:r>
+                            <a:rPr lang="pt-BR" i="1">
+                              <a:latin typeface="Cambria Math" panose="02040503050406030204" pitchFamily="18" charset="0"/>
+                            </a:rPr>
+                            <m:t>h</m:t>
+                          </m:r>
+                        </m:sub>
+                        <m:sup>
+                          <m:r>
+                            <a:rPr lang="pt-BR" b="0" i="1" smtClean="0">
+                              <a:latin typeface="Cambria Math" panose="02040503050406030204" pitchFamily="18" charset="0"/>
+                            </a:rPr>
+                            <m:t>𝑜</m:t>
+                          </m:r>
+                        </m:sup>
+                      </m:sSubSup>
+                      <m:r>
+                        <a:rPr lang="pt-BR" b="0" i="1" smtClean="0">
+                          <a:latin typeface="Cambria Math" panose="02040503050406030204" pitchFamily="18" charset="0"/>
+                        </a:rPr>
+                        <m:t>h</m:t>
+                      </m:r>
+                      <m:d>
+                        <m:dPr>
+                          <m:begChr m:val="["/>
+                          <m:endChr m:val="]"/>
+                          <m:ctrlPr>
+                            <a:rPr lang="pt-BR" b="0" i="1" smtClean="0">
+                              <a:latin typeface="Cambria Math" panose="02040503050406030204" pitchFamily="18" charset="0"/>
+                            </a:rPr>
+                          </m:ctrlPr>
+                        </m:dPr>
+                        <m:e>
+                          <m:r>
+                            <a:rPr lang="pt-BR" b="0" i="1" smtClean="0">
+                              <a:latin typeface="Cambria Math" panose="02040503050406030204" pitchFamily="18" charset="0"/>
+                            </a:rPr>
+                            <m:t>𝑡</m:t>
+                          </m:r>
+                        </m:e>
+                      </m:d>
+                      <m:r>
+                        <a:rPr lang="pt-BR" b="0" i="0" smtClean="0">
+                          <a:latin typeface="Cambria Math" panose="02040503050406030204" pitchFamily="18" charset="0"/>
+                        </a:rPr>
+                        <m:t>.</m:t>
+                      </m:r>
+                    </m:oMath>
+                  </m:oMathPara>
+                </a14:m>
+                <a:endParaRPr lang="en-US" dirty="0"/>
+              </a:p>
+              <a:p>
+                <a:r>
+                  <a:rPr lang="en-US" dirty="0" err="1"/>
+                  <a:t>Os</a:t>
+                </a:r>
+                <a:r>
+                  <a:rPr lang="en-US" dirty="0"/>
+                  <a:t> pesos </a:t>
+                </a:r>
+                <a:r>
+                  <a:rPr lang="en-US" dirty="0" err="1"/>
+                  <a:t>são</a:t>
+                </a:r>
+                <a:r>
+                  <a:rPr lang="en-US" dirty="0"/>
+                  <a:t> </a:t>
+                </a:r>
+                <a:r>
+                  <a:rPr lang="en-US" dirty="0" err="1"/>
+                  <a:t>os</a:t>
+                </a:r>
+                <a:r>
+                  <a:rPr lang="en-US" dirty="0"/>
+                  <a:t> </a:t>
+                </a:r>
+                <a:r>
+                  <a:rPr lang="en-US" dirty="0" err="1"/>
+                  <a:t>mesmos</a:t>
+                </a:r>
+                <a:r>
+                  <a:rPr lang="en-US" dirty="0"/>
+                  <a:t> </a:t>
+                </a:r>
+                <a:r>
+                  <a:rPr lang="en-US" dirty="0" err="1"/>
+                  <a:t>em</a:t>
+                </a:r>
+                <a:r>
+                  <a:rPr lang="en-US" dirty="0"/>
+                  <a:t> </a:t>
+                </a:r>
+                <a:r>
+                  <a:rPr lang="en-US" dirty="0" err="1"/>
+                  <a:t>todos</a:t>
+                </a:r>
+                <a:r>
+                  <a:rPr lang="en-US" dirty="0"/>
+                  <a:t> </a:t>
+                </a:r>
+                <a:r>
+                  <a:rPr lang="en-US" dirty="0" err="1"/>
+                  <a:t>os</a:t>
+                </a:r>
+                <a:r>
+                  <a:rPr lang="en-US" dirty="0"/>
+                  <a:t> </a:t>
+                </a:r>
+                <a:r>
+                  <a:rPr lang="en-US" dirty="0" err="1"/>
+                  <a:t>intervalos</a:t>
+                </a:r>
+                <a:r>
+                  <a:rPr lang="en-US" dirty="0"/>
+                  <a:t> de tempo.</a:t>
+                </a:r>
+              </a:p>
+              <a:p>
+                <a:r>
+                  <a:rPr lang="en-US" dirty="0"/>
+                  <a:t>Em </a:t>
+                </a:r>
+                <a:r>
+                  <a:rPr lang="en-US" dirty="0" err="1"/>
+                  <a:t>geral</a:t>
+                </a:r>
+                <a:r>
+                  <a:rPr lang="en-US" dirty="0"/>
+                  <a:t>, </a:t>
+                </a:r>
+                <a:r>
+                  <a:rPr lang="en-US" dirty="0" err="1"/>
+                  <a:t>usa</a:t>
+                </a:r>
+                <a:r>
+                  <a:rPr lang="en-US" dirty="0"/>
+                  <a:t>-se </a:t>
+                </a:r>
+                <a:r>
+                  <a:rPr lang="en-US" dirty="0" err="1"/>
+                  <a:t>funções</a:t>
+                </a:r>
+                <a:r>
+                  <a:rPr lang="en-US" dirty="0"/>
+                  <a:t> de </a:t>
+                </a:r>
+                <a:r>
+                  <a:rPr lang="en-US" dirty="0" err="1"/>
+                  <a:t>ativaçãoto</a:t>
+                </a:r>
+                <a:r>
+                  <a:rPr lang="en-US" dirty="0"/>
+                  <a:t> </a:t>
+                </a:r>
+                <a:r>
+                  <a:rPr lang="en-US" dirty="0" err="1"/>
+                  <a:t>tipo</a:t>
+                </a:r>
+                <a:r>
+                  <a:rPr lang="en-US" dirty="0"/>
+                  <a:t> </a:t>
+                </a:r>
+                <a:r>
+                  <a:rPr lang="en-US" dirty="0" err="1"/>
+                  <a:t>sigmoide</a:t>
+                </a:r>
+                <a:r>
+                  <a:rPr lang="en-US" dirty="0"/>
+                  <a:t> </a:t>
+                </a:r>
+                <a:r>
+                  <a:rPr lang="en-US" dirty="0" err="1"/>
+                  <a:t>ou</a:t>
+                </a:r>
+                <a:r>
+                  <a:rPr lang="en-US" dirty="0"/>
+                  <a:t> </a:t>
+                </a:r>
+                <a:r>
+                  <a:rPr lang="en-US" dirty="0" err="1"/>
+                  <a:t>tangente</a:t>
+                </a:r>
+                <a:r>
+                  <a:rPr lang="en-US" dirty="0"/>
+                  <a:t> </a:t>
+                </a:r>
+                <a:r>
+                  <a:rPr lang="en-US" dirty="0" err="1"/>
+                  <a:t>hiperbólica</a:t>
+                </a:r>
+                <a:r>
+                  <a:rPr lang="en-US" dirty="0"/>
+                  <a:t>.</a:t>
+                </a:r>
+              </a:p>
+              <a:p>
+                <a:pPr algn="ctr"/>
+                <a:endParaRPr lang="en-US" dirty="0"/>
+              </a:p>
+            </p:txBody>
+          </p:sp>
+        </mc:Choice>
+        <mc:Fallback>
+          <p:sp>
+            <p:nvSpPr>
+              <p:cNvPr id="3" name="Content Placeholder 2">
+                <a:extLst>
+                  <a:ext uri="{FF2B5EF4-FFF2-40B4-BE49-F238E27FC236}">
+                    <a16:creationId xmlns:a16="http://schemas.microsoft.com/office/drawing/2014/main" id="{988FD72E-BE70-A3E4-42F1-AA2A1AE8D958}"/>
+                  </a:ext>
+                </a:extLst>
+              </p:cNvPr>
+              <p:cNvSpPr>
+                <a:spLocks noGrp="1" noRot="1" noChangeAspect="1" noMove="1" noResize="1" noEditPoints="1" noAdjustHandles="1" noChangeArrowheads="1" noChangeShapeType="1" noTextEdit="1"/>
+              </p:cNvSpPr>
+              <p:nvPr>
+                <p:ph idx="1"/>
+              </p:nvPr>
+            </p:nvSpPr>
+            <p:spPr>
+              <a:xfrm>
+                <a:off x="5029200" y="1825625"/>
+                <a:ext cx="7032170" cy="4351338"/>
+              </a:xfrm>
+              <a:blipFill>
+                <a:blip r:embed="rId3"/>
+                <a:stretch>
+                  <a:fillRect l="-1560" t="-2241" r="-1733"/>
+                </a:stretch>
+              </a:blipFill>
+            </p:spPr>
+            <p:txBody>
+              <a:bodyPr/>
+              <a:lstStyle/>
+              <a:p>
+                <a:r>
+                  <a:rPr lang="en-US">
+                    <a:noFill/>
+                  </a:rPr>
+                  <a:t> </a:t>
+                </a:r>
+              </a:p>
+            </p:txBody>
+          </p:sp>
+        </mc:Fallback>
+      </mc:AlternateContent>
+      <p:grpSp>
+        <p:nvGrpSpPr>
+          <p:cNvPr id="4" name="Group 3">
+            <a:extLst>
+              <a:ext uri="{FF2B5EF4-FFF2-40B4-BE49-F238E27FC236}">
+                <a16:creationId xmlns:a16="http://schemas.microsoft.com/office/drawing/2014/main" id="{C51FD9C1-76DE-F00A-B18F-DCE8FA3E5715}"/>
+              </a:ext>
+            </a:extLst>
+          </p:cNvPr>
+          <p:cNvGrpSpPr/>
+          <p:nvPr/>
+        </p:nvGrpSpPr>
+        <p:grpSpPr>
+          <a:xfrm>
+            <a:off x="1389861" y="1843580"/>
+            <a:ext cx="1552792" cy="4315427"/>
+            <a:chOff x="1476947" y="2177448"/>
+            <a:chExt cx="1552792" cy="4315427"/>
+          </a:xfrm>
+        </p:grpSpPr>
+        <p:pic>
+          <p:nvPicPr>
+            <p:cNvPr id="5" name="Picture 4">
+              <a:extLst>
+                <a:ext uri="{FF2B5EF4-FFF2-40B4-BE49-F238E27FC236}">
+                  <a16:creationId xmlns:a16="http://schemas.microsoft.com/office/drawing/2014/main" id="{63391EED-302C-FBFB-0474-27E583372AF8}"/>
+                </a:ext>
+              </a:extLst>
+            </p:cNvPr>
+            <p:cNvPicPr>
+              <a:picLocks noChangeAspect="1"/>
+            </p:cNvPicPr>
+            <p:nvPr/>
+          </p:nvPicPr>
+          <p:blipFill>
+            <a:blip r:embed="rId4"/>
+            <a:stretch>
+              <a:fillRect/>
+            </a:stretch>
+          </p:blipFill>
+          <p:spPr>
+            <a:xfrm>
+              <a:off x="1476947" y="2177448"/>
+              <a:ext cx="1552792" cy="4315427"/>
+            </a:xfrm>
+            <a:prstGeom prst="rect">
+              <a:avLst/>
+            </a:prstGeom>
+          </p:spPr>
+        </p:pic>
+        <p:pic>
+          <p:nvPicPr>
+            <p:cNvPr id="6" name="Picture 5">
+              <a:extLst>
+                <a:ext uri="{FF2B5EF4-FFF2-40B4-BE49-F238E27FC236}">
+                  <a16:creationId xmlns:a16="http://schemas.microsoft.com/office/drawing/2014/main" id="{0CD0E170-631A-966A-4288-1BD17021F66D}"/>
+                </a:ext>
+              </a:extLst>
+            </p:cNvPr>
+            <p:cNvPicPr>
+              <a:picLocks noChangeAspect="1"/>
+            </p:cNvPicPr>
+            <p:nvPr/>
+          </p:nvPicPr>
+          <p:blipFill>
+            <a:blip r:embed="rId4"/>
+            <a:srcRect l="59816" t="89723" r="14947" b="2710"/>
+            <a:stretch>
+              <a:fillRect/>
+            </a:stretch>
+          </p:blipFill>
+          <p:spPr>
+            <a:xfrm>
+              <a:off x="2637853" y="6013677"/>
+              <a:ext cx="391886" cy="326571"/>
+            </a:xfrm>
+            <a:prstGeom prst="rect">
+              <a:avLst/>
+            </a:prstGeom>
+          </p:spPr>
+        </p:pic>
+      </p:grpSp>
     </p:spTree>
     <p:extLst>
       <p:ext uri="{BB962C8B-B14F-4D97-AF65-F5344CB8AC3E}">
-        <p14:creationId xmlns:p14="http://schemas.microsoft.com/office/powerpoint/2010/main" val="1343654665"/>
+        <p14:creationId xmlns:p14="http://schemas.microsoft.com/office/powerpoint/2010/main" val="336154921"/>
       </p:ext>
     </p:extLst>
   </p:cSld>
@@ -4512,7 +5483,42 @@
       </p:grpSpPr>
       <p:sp>
         <p:nvSpPr>
-          <p:cNvPr id="3" name="Espaço Reservado para Conteúdo 2"/>
+          <p:cNvPr id="2" name="Title 1">
+            <a:extLst>
+              <a:ext uri="{FF2B5EF4-FFF2-40B4-BE49-F238E27FC236}">
+                <a16:creationId xmlns:a16="http://schemas.microsoft.com/office/drawing/2014/main" id="{D316F952-34AF-BA6E-B7BC-56FB84A3F677}"/>
+              </a:ext>
+            </a:extLst>
+          </p:cNvPr>
+          <p:cNvSpPr>
+            <a:spLocks noGrp="1"/>
+          </p:cNvSpPr>
+          <p:nvPr>
+            <p:ph type="title"/>
+          </p:nvPr>
+        </p:nvSpPr>
+        <p:spPr/>
+        <p:txBody>
+          <a:bodyPr/>
+          <a:lstStyle/>
+          <a:p>
+            <a:r>
+              <a:rPr lang="pt-BR" dirty="0"/>
+              <a:t>Rede neural recorrente</a:t>
+            </a:r>
+            <a:endParaRPr lang="en-US" dirty="0"/>
+          </a:p>
+        </p:txBody>
+      </p:sp>
+      <p:sp>
+        <p:nvSpPr>
+          <p:cNvPr id="3" name="Content Placeholder 2">
+            <a:extLst>
+              <a:ext uri="{FF2B5EF4-FFF2-40B4-BE49-F238E27FC236}">
+                <a16:creationId xmlns:a16="http://schemas.microsoft.com/office/drawing/2014/main" id="{330A4886-E5F5-4A0C-632C-A874615BA66E}"/>
+              </a:ext>
+            </a:extLst>
+          </p:cNvPr>
           <p:cNvSpPr>
             <a:spLocks noGrp="1"/>
           </p:cNvSpPr>
@@ -4522,31 +5528,78 @@
         </p:nvSpPr>
         <p:spPr>
           <a:xfrm>
-            <a:off x="788323" y="2873029"/>
-            <a:ext cx="10515600" cy="1067203"/>
+            <a:off x="838200" y="1825624"/>
+            <a:ext cx="11212286" cy="5032375"/>
           </a:xfrm>
         </p:spPr>
         <p:txBody>
           <a:bodyPr>
-            <a:normAutofit/>
+            <a:normAutofit lnSpcReduction="10000"/>
           </a:bodyPr>
           <a:lstStyle/>
           <a:p>
-            <a:pPr marL="0" indent="0" algn="ctr">
+            <a:r>
+              <a:rPr lang="pt-BR" dirty="0"/>
+              <a:t>As </a:t>
+            </a:r>
+            <a:r>
+              <a:rPr lang="pt-BR" dirty="0" err="1"/>
+              <a:t>RNNs</a:t>
+            </a:r>
+            <a:r>
+              <a:rPr lang="pt-BR" dirty="0"/>
+              <a:t> podem ser vistas como múltiplas cópias da mesma rede, cada uma passando uma mensagem para a sua sucessora.</a:t>
+            </a:r>
+          </a:p>
+          <a:p>
+            <a:pPr marL="0" indent="0">
               <a:buNone/>
             </a:pPr>
-            <a:r>
-              <a:rPr lang="pt-BR" sz="6000" dirty="0" smtClean="0"/>
-              <a:t>Variantes</a:t>
-            </a:r>
-            <a:endParaRPr lang="pt-BR" sz="6000" dirty="0"/>
+            <a:endParaRPr lang="pt-BR" dirty="0"/>
+          </a:p>
+          <a:p>
+            <a:pPr marL="0" indent="0">
+              <a:buNone/>
+            </a:pPr>
+            <a:endParaRPr lang="pt-BR" dirty="0"/>
+          </a:p>
+          <a:p>
+            <a:pPr marL="0" indent="0">
+              <a:buNone/>
+            </a:pPr>
+            <a:endParaRPr lang="pt-BR" dirty="0"/>
+          </a:p>
+          <a:p>
+            <a:pPr marL="0" indent="0">
+              <a:buNone/>
+            </a:pPr>
+            <a:endParaRPr lang="pt-BR" dirty="0"/>
+          </a:p>
+          <a:p>
+            <a:pPr marL="0" indent="0">
+              <a:buNone/>
+            </a:pPr>
+            <a:endParaRPr lang="pt-BR" dirty="0"/>
+          </a:p>
+          <a:p>
+            <a:r>
+              <a:rPr lang="pt-BR" dirty="0"/>
+              <a:t>A mesma função e o mesmo conjunto de pesos são usados ​​em cada passo de tempo.</a:t>
+            </a:r>
+          </a:p>
+          <a:p>
+            <a:r>
+              <a:rPr lang="pt-BR" dirty="0"/>
+              <a:t>São chamadas recorrentes porque executam a mesma tarefa para cada entrada.</a:t>
+            </a:r>
+            <a:endParaRPr lang="en-US" dirty="0"/>
           </a:p>
         </p:txBody>
       </p:sp>
     </p:spTree>
     <p:extLst>
       <p:ext uri="{BB962C8B-B14F-4D97-AF65-F5344CB8AC3E}">
-        <p14:creationId xmlns:p14="http://schemas.microsoft.com/office/powerpoint/2010/main" val="2837701330"/>
+        <p14:creationId xmlns:p14="http://schemas.microsoft.com/office/powerpoint/2010/main" val="879210621"/>
       </p:ext>
     </p:extLst>
   </p:cSld>
@@ -4575,7 +5628,13 @@
       </p:grpSpPr>
       <p:sp>
         <p:nvSpPr>
-          <p:cNvPr id="2" name="Título 1"/>
+          <p:cNvPr id="2" name="Title 1">
+            <a:extLst>
+              <a:ext uri="{FF2B5EF4-FFF2-40B4-BE49-F238E27FC236}">
+                <a16:creationId xmlns:a16="http://schemas.microsoft.com/office/drawing/2014/main" id="{4FF4B591-1BC6-B85F-D4D4-18AFAE757DB9}"/>
+              </a:ext>
+            </a:extLst>
+          </p:cNvPr>
           <p:cNvSpPr>
             <a:spLocks noGrp="1"/>
           </p:cNvSpPr>
@@ -4588,17 +5647,19 @@
           <a:bodyPr/>
           <a:lstStyle/>
           <a:p>
-            <a:r>
-              <a:rPr lang="pt-BR" dirty="0" smtClean="0"/>
-              <a:t>Variantes</a:t>
-            </a:r>
-            <a:endParaRPr lang="pt-BR" dirty="0"/>
-          </a:p>
-        </p:txBody>
-      </p:sp>
-      <p:sp>
-        <p:nvSpPr>
-          <p:cNvPr id="3" name="Espaço Reservado para Conteúdo 2"/>
+            <a:endParaRPr lang="en-US"/>
+          </a:p>
+        </p:txBody>
+      </p:sp>
+      <p:sp>
+        <p:nvSpPr>
+          <p:cNvPr id="3" name="Content Placeholder 2">
+            <a:extLst>
+              <a:ext uri="{FF2B5EF4-FFF2-40B4-BE49-F238E27FC236}">
+                <a16:creationId xmlns:a16="http://schemas.microsoft.com/office/drawing/2014/main" id="{A8D18D08-63C8-FE13-750C-9A4ED4F3D6C6}"/>
+              </a:ext>
+            </a:extLst>
+          </p:cNvPr>
           <p:cNvSpPr>
             <a:spLocks noGrp="1"/>
           </p:cNvSpPr>
@@ -4611,79 +5672,14 @@
           <a:bodyPr/>
           <a:lstStyle/>
           <a:p>
-            <a:r>
-              <a:rPr lang="pt-BR" dirty="0" smtClean="0"/>
-              <a:t>GRU</a:t>
-            </a:r>
-          </a:p>
-          <a:p>
-            <a:pPr lvl="1"/>
-            <a:r>
-              <a:rPr lang="pt-BR" dirty="0"/>
-              <a:t>Versão </a:t>
-            </a:r>
-            <a:r>
-              <a:rPr lang="pt-BR" dirty="0" smtClean="0"/>
-              <a:t>simplificada</a:t>
-            </a:r>
-          </a:p>
-          <a:p>
-            <a:pPr lvl="1"/>
-            <a:r>
-              <a:rPr lang="pt-BR" dirty="0" smtClean="0"/>
-              <a:t>Menos parâmetros</a:t>
-            </a:r>
-          </a:p>
-          <a:p>
-            <a:pPr lvl="1"/>
-            <a:r>
-              <a:rPr lang="pt-BR" dirty="0"/>
-              <a:t>F</a:t>
-            </a:r>
-            <a:r>
-              <a:rPr lang="pt-BR" dirty="0" smtClean="0"/>
-              <a:t>requentemente </a:t>
-            </a:r>
-            <a:r>
-              <a:rPr lang="pt-BR" dirty="0"/>
-              <a:t>mais rápida de treinar. </a:t>
-            </a:r>
-            <a:endParaRPr lang="pt-BR" dirty="0" smtClean="0"/>
-          </a:p>
-          <a:p>
-            <a:r>
-              <a:rPr lang="pt-BR" dirty="0" err="1"/>
-              <a:t>Bidirectional</a:t>
-            </a:r>
-            <a:r>
-              <a:rPr lang="pt-BR" dirty="0"/>
-              <a:t> </a:t>
-            </a:r>
-            <a:r>
-              <a:rPr lang="pt-BR" dirty="0" smtClean="0"/>
-              <a:t>RNN</a:t>
-            </a:r>
-          </a:p>
-          <a:p>
-            <a:pPr lvl="1"/>
-            <a:r>
-              <a:rPr lang="pt-BR" dirty="0"/>
-              <a:t>Considera passado e </a:t>
-            </a:r>
-            <a:r>
-              <a:rPr lang="pt-BR" dirty="0" smtClean="0"/>
-              <a:t>futuro</a:t>
-            </a:r>
-          </a:p>
-          <a:p>
-            <a:endParaRPr lang="pt-BR" dirty="0"/>
+            <a:endParaRPr lang="en-US"/>
           </a:p>
         </p:txBody>
       </p:sp>
     </p:spTree>
     <p:extLst>
       <p:ext uri="{BB962C8B-B14F-4D97-AF65-F5344CB8AC3E}">
-        <p14:creationId xmlns:p14="http://schemas.microsoft.com/office/powerpoint/2010/main" val="2820481937"/>
+        <p14:creationId xmlns:p14="http://schemas.microsoft.com/office/powerpoint/2010/main" val="3688462542"/>
       </p:ext>
     </p:extLst>
   </p:cSld>
@@ -4712,64 +5708,58 @@
       </p:grpSpPr>
       <p:sp>
         <p:nvSpPr>
-          <p:cNvPr id="4" name="Título 1">
-            <a:extLst>
-              <a:ext uri="{FF2B5EF4-FFF2-40B4-BE49-F238E27FC236}">
-                <a16:creationId xmlns:a16="http://schemas.microsoft.com/office/drawing/2014/main" xmlns="" id="{32666AC8-2E17-4DB4-B0F5-60C640CCFD2E}"/>
-              </a:ext>
-            </a:extLst>
-          </p:cNvPr>
-          <p:cNvSpPr txBox="1">
-            <a:spLocks/>
-          </p:cNvSpPr>
-          <p:nvPr/>
-        </p:nvSpPr>
-        <p:spPr>
-          <a:xfrm>
-            <a:off x="1431533" y="2720526"/>
-            <a:ext cx="9144000" cy="1029541"/>
-          </a:xfrm>
-          <a:prstGeom prst="rect">
-            <a:avLst/>
-          </a:prstGeom>
-        </p:spPr>
-        <p:txBody>
-          <a:bodyPr vert="horz" lIns="91440" tIns="45720" rIns="91440" bIns="45720" rtlCol="0" anchor="ctr">
-            <a:normAutofit/>
-          </a:bodyPr>
-          <a:lstStyle>
-            <a:lvl1pPr algn="l" defTabSz="914400" rtl="0" eaLnBrk="1" latinLnBrk="0" hangingPunct="1">
-              <a:lnSpc>
-                <a:spcPct val="90000"/>
-              </a:lnSpc>
-              <a:spcBef>
-                <a:spcPct val="0"/>
-              </a:spcBef>
-              <a:buNone/>
-              <a:defRPr sz="4400" kern="1200">
-                <a:solidFill>
-                  <a:schemeClr val="tx1"/>
-                </a:solidFill>
-                <a:latin typeface="+mj-lt"/>
-                <a:ea typeface="+mj-ea"/>
-                <a:cs typeface="+mj-cs"/>
-              </a:defRPr>
-            </a:lvl1pPr>
-          </a:lstStyle>
-          <a:p>
-            <a:pPr algn="ctr"/>
-            <a:r>
-              <a:rPr lang="pt-BR" sz="6600" dirty="0"/>
-              <a:t>Perguntas?</a:t>
-            </a:r>
-            <a:endParaRPr lang="pt-BR" sz="6600" b="1" i="1" dirty="0"/>
+          <p:cNvPr id="2" name="Title 1">
+            <a:extLst>
+              <a:ext uri="{FF2B5EF4-FFF2-40B4-BE49-F238E27FC236}">
+                <a16:creationId xmlns:a16="http://schemas.microsoft.com/office/drawing/2014/main" id="{F941620E-F055-A200-7D54-3C89067DAB50}"/>
+              </a:ext>
+            </a:extLst>
+          </p:cNvPr>
+          <p:cNvSpPr>
+            <a:spLocks noGrp="1"/>
+          </p:cNvSpPr>
+          <p:nvPr>
+            <p:ph type="title"/>
+          </p:nvPr>
+        </p:nvSpPr>
+        <p:spPr/>
+        <p:txBody>
+          <a:bodyPr/>
+          <a:lstStyle/>
+          <a:p>
+            <a:endParaRPr lang="en-US"/>
+          </a:p>
+        </p:txBody>
+      </p:sp>
+      <p:sp>
+        <p:nvSpPr>
+          <p:cNvPr id="3" name="Content Placeholder 2">
+            <a:extLst>
+              <a:ext uri="{FF2B5EF4-FFF2-40B4-BE49-F238E27FC236}">
+                <a16:creationId xmlns:a16="http://schemas.microsoft.com/office/drawing/2014/main" id="{AFB90F1A-97F6-4A2B-EB59-AE9A21F31FFB}"/>
+              </a:ext>
+            </a:extLst>
+          </p:cNvPr>
+          <p:cNvSpPr>
+            <a:spLocks noGrp="1"/>
+          </p:cNvSpPr>
+          <p:nvPr>
+            <p:ph idx="1"/>
+          </p:nvPr>
+        </p:nvSpPr>
+        <p:spPr/>
+        <p:txBody>
+          <a:bodyPr/>
+          <a:lstStyle/>
+          <a:p>
+            <a:endParaRPr lang="en-US"/>
           </a:p>
         </p:txBody>
       </p:sp>
     </p:spTree>
     <p:extLst>
       <p:ext uri="{BB962C8B-B14F-4D97-AF65-F5344CB8AC3E}">
-        <p14:creationId xmlns:p14="http://schemas.microsoft.com/office/powerpoint/2010/main" val="3773005660"/>
+        <p14:creationId xmlns:p14="http://schemas.microsoft.com/office/powerpoint/2010/main" val="2727199427"/>
       </p:ext>
     </p:extLst>
   </p:cSld>
@@ -4798,64 +5788,535 @@
       </p:grpSpPr>
       <p:sp>
         <p:nvSpPr>
-          <p:cNvPr id="4" name="Título 1">
-            <a:extLst>
-              <a:ext uri="{FF2B5EF4-FFF2-40B4-BE49-F238E27FC236}">
-                <a16:creationId xmlns:a16="http://schemas.microsoft.com/office/drawing/2014/main" xmlns="" id="{32666AC8-2E17-4DB4-B0F5-60C640CCFD2E}"/>
-              </a:ext>
-            </a:extLst>
-          </p:cNvPr>
-          <p:cNvSpPr txBox="1">
-            <a:spLocks/>
-          </p:cNvSpPr>
-          <p:nvPr/>
-        </p:nvSpPr>
-        <p:spPr>
-          <a:xfrm>
-            <a:off x="1431533" y="2720526"/>
-            <a:ext cx="9144000" cy="1029541"/>
-          </a:xfrm>
-          <a:prstGeom prst="rect">
-            <a:avLst/>
-          </a:prstGeom>
-        </p:spPr>
-        <p:txBody>
-          <a:bodyPr vert="horz" lIns="91440" tIns="45720" rIns="91440" bIns="45720" rtlCol="0" anchor="ctr">
-            <a:normAutofit/>
-          </a:bodyPr>
-          <a:lstStyle>
-            <a:lvl1pPr algn="l" defTabSz="914400" rtl="0" eaLnBrk="1" latinLnBrk="0" hangingPunct="1">
-              <a:lnSpc>
-                <a:spcPct val="90000"/>
-              </a:lnSpc>
-              <a:spcBef>
-                <a:spcPct val="0"/>
-              </a:spcBef>
-              <a:buNone/>
-              <a:defRPr sz="4400" kern="1200">
-                <a:solidFill>
-                  <a:schemeClr val="tx1"/>
-                </a:solidFill>
-                <a:latin typeface="+mj-lt"/>
-                <a:ea typeface="+mj-ea"/>
-                <a:cs typeface="+mj-cs"/>
-              </a:defRPr>
-            </a:lvl1pPr>
-          </a:lstStyle>
-          <a:p>
-            <a:pPr algn="ctr"/>
-            <a:r>
-              <a:rPr lang="pt-BR" sz="6600" dirty="0"/>
-              <a:t>Obrigado!</a:t>
-            </a:r>
-            <a:endParaRPr lang="pt-BR" sz="6600" b="1" i="1" dirty="0"/>
+          <p:cNvPr id="2" name="Título 1"/>
+          <p:cNvSpPr>
+            <a:spLocks noGrp="1"/>
+          </p:cNvSpPr>
+          <p:nvPr>
+            <p:ph type="title"/>
+          </p:nvPr>
+        </p:nvSpPr>
+        <p:spPr/>
+        <p:txBody>
+          <a:bodyPr/>
+          <a:lstStyle/>
+          <a:p>
+            <a:r>
+              <a:rPr lang="pt-BR" i="1" dirty="0" err="1"/>
+              <a:t>Backpropagation</a:t>
+            </a:r>
+            <a:r>
+              <a:rPr lang="pt-BR" i="1" dirty="0"/>
+              <a:t> </a:t>
+            </a:r>
+            <a:r>
+              <a:rPr lang="pt-BR" i="1" dirty="0" err="1"/>
+              <a:t>Through</a:t>
+            </a:r>
+            <a:r>
+              <a:rPr lang="pt-BR" i="1" dirty="0"/>
+              <a:t> Time</a:t>
+            </a:r>
+            <a:r>
+              <a:rPr lang="pt-BR" dirty="0"/>
+              <a:t> (BPTT)</a:t>
+            </a:r>
+          </a:p>
+        </p:txBody>
+      </p:sp>
+      <p:sp>
+        <p:nvSpPr>
+          <p:cNvPr id="3" name="Espaço Reservado para Conteúdo 2"/>
+          <p:cNvSpPr>
+            <a:spLocks noGrp="1"/>
+          </p:cNvSpPr>
+          <p:nvPr>
+            <p:ph idx="1"/>
+          </p:nvPr>
+        </p:nvSpPr>
+        <p:spPr/>
+        <p:txBody>
+          <a:bodyPr/>
+          <a:lstStyle/>
+          <a:p>
+            <a:r>
+              <a:rPr lang="pt-BR" dirty="0"/>
+              <a:t>Para que as </a:t>
+            </a:r>
+            <a:r>
+              <a:rPr lang="pt-BR" dirty="0" err="1"/>
+              <a:t>RNNs</a:t>
+            </a:r>
+            <a:r>
+              <a:rPr lang="pt-BR" dirty="0"/>
+              <a:t> aprendam de forma efetiva, usamos uma versão levemente modificada do </a:t>
+            </a:r>
+            <a:r>
+              <a:rPr lang="pt-BR" dirty="0" err="1"/>
+              <a:t>Backpropagation</a:t>
+            </a:r>
+            <a:r>
+              <a:rPr lang="pt-BR"/>
+              <a:t>: BPTT</a:t>
+            </a:r>
+          </a:p>
+          <a:p>
+            <a:r>
+              <a:rPr lang="pt-BR" dirty="0"/>
+              <a:t>Gradiente ao longo do tempo</a:t>
+            </a:r>
+          </a:p>
+          <a:p>
+            <a:r>
+              <a:rPr lang="pt-BR" dirty="0"/>
+              <a:t>Rede “desdobrada”</a:t>
+            </a:r>
+          </a:p>
+          <a:p>
+            <a:r>
+              <a:rPr lang="pt-BR" dirty="0"/>
+              <a:t>Soma gradientes em todos os passos</a:t>
+            </a:r>
+          </a:p>
+          <a:p>
+            <a:r>
+              <a:rPr lang="pt-BR" dirty="0"/>
+              <a:t>Pesos compartilhados</a:t>
+            </a:r>
+          </a:p>
+          <a:p>
+            <a:endParaRPr lang="pt-BR" dirty="0"/>
           </a:p>
         </p:txBody>
       </p:sp>
     </p:spTree>
     <p:extLst>
       <p:ext uri="{BB962C8B-B14F-4D97-AF65-F5344CB8AC3E}">
-        <p14:creationId xmlns:p14="http://schemas.microsoft.com/office/powerpoint/2010/main" val="2655704619"/>
+        <p14:creationId xmlns:p14="http://schemas.microsoft.com/office/powerpoint/2010/main" val="804522834"/>
+      </p:ext>
+    </p:extLst>
+  </p:cSld>
+  <p:clrMapOvr>
+    <a:masterClrMapping/>
+  </p:clrMapOvr>
+</p:sld>
+</file>
+
+<file path=ppt/slides/slide15.xml><?xml version="1.0" encoding="utf-8"?>
+<p:sld xmlns:a="http://schemas.openxmlformats.org/drawingml/2006/main" xmlns:r="http://schemas.openxmlformats.org/officeDocument/2006/relationships" xmlns:p="http://schemas.openxmlformats.org/presentationml/2006/main">
+  <p:cSld>
+    <p:spTree>
+      <p:nvGrpSpPr>
+        <p:cNvPr id="1" name=""/>
+        <p:cNvGrpSpPr/>
+        <p:nvPr/>
+      </p:nvGrpSpPr>
+      <p:grpSpPr>
+        <a:xfrm>
+          <a:off x="0" y="0"/>
+          <a:ext cx="0" cy="0"/>
+          <a:chOff x="0" y="0"/>
+          <a:chExt cx="0" cy="0"/>
+        </a:xfrm>
+      </p:grpSpPr>
+      <p:sp>
+        <p:nvSpPr>
+          <p:cNvPr id="2" name="Título 1"/>
+          <p:cNvSpPr>
+            <a:spLocks noGrp="1"/>
+          </p:cNvSpPr>
+          <p:nvPr>
+            <p:ph type="title"/>
+          </p:nvPr>
+        </p:nvSpPr>
+        <p:spPr/>
+        <p:txBody>
+          <a:bodyPr/>
+          <a:lstStyle/>
+          <a:p>
+            <a:r>
+              <a:rPr lang="pt-BR" dirty="0"/>
+              <a:t>Desaparecimento do gradiente</a:t>
+            </a:r>
+          </a:p>
+        </p:txBody>
+      </p:sp>
+      <p:sp>
+        <p:nvSpPr>
+          <p:cNvPr id="3" name="Espaço Reservado para Conteúdo 2"/>
+          <p:cNvSpPr>
+            <a:spLocks noGrp="1"/>
+          </p:cNvSpPr>
+          <p:nvPr>
+            <p:ph idx="1"/>
+          </p:nvPr>
+        </p:nvSpPr>
+        <p:spPr/>
+        <p:txBody>
+          <a:bodyPr/>
+          <a:lstStyle/>
+          <a:p>
+            <a:r>
+              <a:rPr lang="pt-BR" dirty="0"/>
+              <a:t>Gradientes → muito pequenos</a:t>
+            </a:r>
+          </a:p>
+          <a:p>
+            <a:r>
+              <a:rPr lang="pt-BR" dirty="0"/>
+              <a:t>Informação antiga se perde</a:t>
+            </a:r>
+          </a:p>
+          <a:p>
+            <a:r>
+              <a:rPr lang="pt-BR" dirty="0"/>
+              <a:t>Dificuldade com dependências longas</a:t>
+            </a:r>
+          </a:p>
+          <a:p>
+            <a:r>
+              <a:rPr lang="pt-BR" dirty="0"/>
+              <a:t>Consequência: RNN aprende apenas dependências curtas</a:t>
+            </a:r>
+          </a:p>
+        </p:txBody>
+      </p:sp>
+    </p:spTree>
+    <p:extLst>
+      <p:ext uri="{BB962C8B-B14F-4D97-AF65-F5344CB8AC3E}">
+        <p14:creationId xmlns:p14="http://schemas.microsoft.com/office/powerpoint/2010/main" val="753048316"/>
+      </p:ext>
+    </p:extLst>
+  </p:cSld>
+  <p:clrMapOvr>
+    <a:masterClrMapping/>
+  </p:clrMapOvr>
+</p:sld>
+</file>
+
+<file path=ppt/slides/slide16.xml><?xml version="1.0" encoding="utf-8"?>
+<p:sld xmlns:a="http://schemas.openxmlformats.org/drawingml/2006/main" xmlns:r="http://schemas.openxmlformats.org/officeDocument/2006/relationships" xmlns:p="http://schemas.openxmlformats.org/presentationml/2006/main">
+  <p:cSld>
+    <p:spTree>
+      <p:nvGrpSpPr>
+        <p:cNvPr id="1" name=""/>
+        <p:cNvGrpSpPr/>
+        <p:nvPr/>
+      </p:nvGrpSpPr>
+      <p:grpSpPr>
+        <a:xfrm>
+          <a:off x="0" y="0"/>
+          <a:ext cx="0" cy="0"/>
+          <a:chOff x="0" y="0"/>
+          <a:chExt cx="0" cy="0"/>
+        </a:xfrm>
+      </p:grpSpPr>
+      <p:sp>
+        <p:nvSpPr>
+          <p:cNvPr id="3" name="Espaço Reservado para Conteúdo 2"/>
+          <p:cNvSpPr>
+            <a:spLocks noGrp="1"/>
+          </p:cNvSpPr>
+          <p:nvPr>
+            <p:ph idx="1"/>
+          </p:nvPr>
+        </p:nvSpPr>
+        <p:spPr>
+          <a:xfrm>
+            <a:off x="788323" y="2873029"/>
+            <a:ext cx="10515600" cy="1067203"/>
+          </a:xfrm>
+        </p:spPr>
+        <p:txBody>
+          <a:bodyPr>
+            <a:normAutofit/>
+          </a:bodyPr>
+          <a:lstStyle/>
+          <a:p>
+            <a:pPr marL="0" indent="0" algn="ctr">
+              <a:buNone/>
+            </a:pPr>
+            <a:r>
+              <a:rPr lang="pt-BR" sz="6000" dirty="0"/>
+              <a:t>LSTM</a:t>
+            </a:r>
+          </a:p>
+        </p:txBody>
+      </p:sp>
+    </p:spTree>
+    <p:extLst>
+      <p:ext uri="{BB962C8B-B14F-4D97-AF65-F5344CB8AC3E}">
+        <p14:creationId xmlns:p14="http://schemas.microsoft.com/office/powerpoint/2010/main" val="3863331605"/>
+      </p:ext>
+    </p:extLst>
+  </p:cSld>
+  <p:clrMapOvr>
+    <a:masterClrMapping/>
+  </p:clrMapOvr>
+</p:sld>
+</file>
+
+<file path=ppt/slides/slide17.xml><?xml version="1.0" encoding="utf-8"?>
+<p:sld xmlns:a="http://schemas.openxmlformats.org/drawingml/2006/main" xmlns:r="http://schemas.openxmlformats.org/officeDocument/2006/relationships" xmlns:p="http://schemas.openxmlformats.org/presentationml/2006/main">
+  <p:cSld>
+    <p:spTree>
+      <p:nvGrpSpPr>
+        <p:cNvPr id="1" name=""/>
+        <p:cNvGrpSpPr/>
+        <p:nvPr/>
+      </p:nvGrpSpPr>
+      <p:grpSpPr>
+        <a:xfrm>
+          <a:off x="0" y="0"/>
+          <a:ext cx="0" cy="0"/>
+          <a:chOff x="0" y="0"/>
+          <a:chExt cx="0" cy="0"/>
+        </a:xfrm>
+      </p:grpSpPr>
+      <p:sp>
+        <p:nvSpPr>
+          <p:cNvPr id="2" name="Título 1"/>
+          <p:cNvSpPr>
+            <a:spLocks noGrp="1"/>
+          </p:cNvSpPr>
+          <p:nvPr>
+            <p:ph type="title"/>
+          </p:nvPr>
+        </p:nvSpPr>
+        <p:spPr/>
+        <p:txBody>
+          <a:bodyPr/>
+          <a:lstStyle/>
+          <a:p>
+            <a:r>
+              <a:rPr lang="pt-BR" dirty="0"/>
+              <a:t>Motivação para LSTM</a:t>
+            </a:r>
+          </a:p>
+        </p:txBody>
+      </p:sp>
+      <p:sp>
+        <p:nvSpPr>
+          <p:cNvPr id="3" name="Espaço Reservado para Conteúdo 2"/>
+          <p:cNvSpPr>
+            <a:spLocks noGrp="1"/>
+          </p:cNvSpPr>
+          <p:nvPr>
+            <p:ph idx="1"/>
+          </p:nvPr>
+        </p:nvSpPr>
+        <p:spPr/>
+        <p:txBody>
+          <a:bodyPr/>
+          <a:lstStyle/>
+          <a:p>
+            <a:r>
+              <a:rPr lang="pt-BR" dirty="0"/>
+              <a:t>Resolver dependências longas</a:t>
+            </a:r>
+          </a:p>
+          <a:p>
+            <a:r>
+              <a:rPr lang="pt-BR" dirty="0"/>
+              <a:t>Evitar </a:t>
+            </a:r>
+            <a:r>
+              <a:rPr lang="pt-BR" dirty="0" err="1"/>
+              <a:t>vanishing</a:t>
+            </a:r>
+            <a:r>
+              <a:rPr lang="pt-BR" dirty="0"/>
+              <a:t> </a:t>
+            </a:r>
+            <a:r>
+              <a:rPr lang="pt-BR" dirty="0" err="1"/>
+              <a:t>gradient</a:t>
+            </a:r>
+            <a:endParaRPr lang="pt-BR" dirty="0"/>
+          </a:p>
+        </p:txBody>
+      </p:sp>
+    </p:spTree>
+    <p:extLst>
+      <p:ext uri="{BB962C8B-B14F-4D97-AF65-F5344CB8AC3E}">
+        <p14:creationId xmlns:p14="http://schemas.microsoft.com/office/powerpoint/2010/main" val="1343654665"/>
+      </p:ext>
+    </p:extLst>
+  </p:cSld>
+  <p:clrMapOvr>
+    <a:masterClrMapping/>
+  </p:clrMapOvr>
+</p:sld>
+</file>
+
+<file path=ppt/slides/slide18.xml><?xml version="1.0" encoding="utf-8"?>
+<p:sld xmlns:a="http://schemas.openxmlformats.org/drawingml/2006/main" xmlns:r="http://schemas.openxmlformats.org/officeDocument/2006/relationships" xmlns:p="http://schemas.openxmlformats.org/presentationml/2006/main">
+  <p:cSld>
+    <p:spTree>
+      <p:nvGrpSpPr>
+        <p:cNvPr id="1" name=""/>
+        <p:cNvGrpSpPr/>
+        <p:nvPr/>
+      </p:nvGrpSpPr>
+      <p:grpSpPr>
+        <a:xfrm>
+          <a:off x="0" y="0"/>
+          <a:ext cx="0" cy="0"/>
+          <a:chOff x="0" y="0"/>
+          <a:chExt cx="0" cy="0"/>
+        </a:xfrm>
+      </p:grpSpPr>
+      <p:sp>
+        <p:nvSpPr>
+          <p:cNvPr id="3" name="Espaço Reservado para Conteúdo 2"/>
+          <p:cNvSpPr>
+            <a:spLocks noGrp="1"/>
+          </p:cNvSpPr>
+          <p:nvPr>
+            <p:ph idx="1"/>
+          </p:nvPr>
+        </p:nvSpPr>
+        <p:spPr>
+          <a:xfrm>
+            <a:off x="788323" y="2873029"/>
+            <a:ext cx="10515600" cy="1067203"/>
+          </a:xfrm>
+        </p:spPr>
+        <p:txBody>
+          <a:bodyPr>
+            <a:normAutofit/>
+          </a:bodyPr>
+          <a:lstStyle/>
+          <a:p>
+            <a:pPr marL="0" indent="0" algn="ctr">
+              <a:buNone/>
+            </a:pPr>
+            <a:r>
+              <a:rPr lang="pt-BR" sz="6000" dirty="0"/>
+              <a:t>Variantes</a:t>
+            </a:r>
+          </a:p>
+        </p:txBody>
+      </p:sp>
+    </p:spTree>
+    <p:extLst>
+      <p:ext uri="{BB962C8B-B14F-4D97-AF65-F5344CB8AC3E}">
+        <p14:creationId xmlns:p14="http://schemas.microsoft.com/office/powerpoint/2010/main" val="2837701330"/>
+      </p:ext>
+    </p:extLst>
+  </p:cSld>
+  <p:clrMapOvr>
+    <a:masterClrMapping/>
+  </p:clrMapOvr>
+</p:sld>
+</file>
+
+<file path=ppt/slides/slide19.xml><?xml version="1.0" encoding="utf-8"?>
+<p:sld xmlns:a="http://schemas.openxmlformats.org/drawingml/2006/main" xmlns:r="http://schemas.openxmlformats.org/officeDocument/2006/relationships" xmlns:p="http://schemas.openxmlformats.org/presentationml/2006/main">
+  <p:cSld>
+    <p:spTree>
+      <p:nvGrpSpPr>
+        <p:cNvPr id="1" name=""/>
+        <p:cNvGrpSpPr/>
+        <p:nvPr/>
+      </p:nvGrpSpPr>
+      <p:grpSpPr>
+        <a:xfrm>
+          <a:off x="0" y="0"/>
+          <a:ext cx="0" cy="0"/>
+          <a:chOff x="0" y="0"/>
+          <a:chExt cx="0" cy="0"/>
+        </a:xfrm>
+      </p:grpSpPr>
+      <p:sp>
+        <p:nvSpPr>
+          <p:cNvPr id="2" name="Título 1"/>
+          <p:cNvSpPr>
+            <a:spLocks noGrp="1"/>
+          </p:cNvSpPr>
+          <p:nvPr>
+            <p:ph type="title"/>
+          </p:nvPr>
+        </p:nvSpPr>
+        <p:spPr/>
+        <p:txBody>
+          <a:bodyPr/>
+          <a:lstStyle/>
+          <a:p>
+            <a:r>
+              <a:rPr lang="pt-BR" dirty="0"/>
+              <a:t>Variantes</a:t>
+            </a:r>
+          </a:p>
+        </p:txBody>
+      </p:sp>
+      <p:sp>
+        <p:nvSpPr>
+          <p:cNvPr id="3" name="Espaço Reservado para Conteúdo 2"/>
+          <p:cNvSpPr>
+            <a:spLocks noGrp="1"/>
+          </p:cNvSpPr>
+          <p:nvPr>
+            <p:ph idx="1"/>
+          </p:nvPr>
+        </p:nvSpPr>
+        <p:spPr/>
+        <p:txBody>
+          <a:bodyPr/>
+          <a:lstStyle/>
+          <a:p>
+            <a:r>
+              <a:rPr lang="pt-BR" dirty="0"/>
+              <a:t>GRU</a:t>
+            </a:r>
+          </a:p>
+          <a:p>
+            <a:pPr lvl="1"/>
+            <a:r>
+              <a:rPr lang="pt-BR" dirty="0"/>
+              <a:t>Versão simplificada</a:t>
+            </a:r>
+          </a:p>
+          <a:p>
+            <a:pPr lvl="1"/>
+            <a:r>
+              <a:rPr lang="pt-BR" dirty="0"/>
+              <a:t>Menos parâmetros</a:t>
+            </a:r>
+          </a:p>
+          <a:p>
+            <a:pPr lvl="1"/>
+            <a:r>
+              <a:rPr lang="pt-BR" dirty="0"/>
+              <a:t>Frequentemente mais rápida de treinar. </a:t>
+            </a:r>
+          </a:p>
+          <a:p>
+            <a:r>
+              <a:rPr lang="pt-BR" dirty="0" err="1"/>
+              <a:t>Bidirectional</a:t>
+            </a:r>
+            <a:r>
+              <a:rPr lang="pt-BR" dirty="0"/>
+              <a:t> RNN</a:t>
+            </a:r>
+          </a:p>
+          <a:p>
+            <a:pPr lvl="1"/>
+            <a:r>
+              <a:rPr lang="pt-BR" dirty="0"/>
+              <a:t>Considera passado e futuro</a:t>
+            </a:r>
+          </a:p>
+          <a:p>
+            <a:endParaRPr lang="pt-BR" dirty="0"/>
+          </a:p>
+        </p:txBody>
+      </p:sp>
+    </p:spTree>
+    <p:extLst>
+      <p:ext uri="{BB962C8B-B14F-4D97-AF65-F5344CB8AC3E}">
+        <p14:creationId xmlns:p14="http://schemas.microsoft.com/office/powerpoint/2010/main" val="2820481937"/>
       </p:ext>
     </p:extLst>
   </p:cSld>
@@ -4914,12 +6375,17 @@
             <p:ph idx="1"/>
           </p:nvPr>
         </p:nvSpPr>
-        <p:spPr/>
+        <p:spPr>
+          <a:xfrm>
+            <a:off x="838199" y="1825624"/>
+            <a:ext cx="11353801" cy="5032375"/>
+          </a:xfrm>
+        </p:spPr>
         <p:txBody>
           <a:bodyPr/>
           <a:lstStyle/>
           <a:p>
-            <a:pPr marL="0" lvl="0" indent="0" eaLnBrk="0" fontAlgn="base" hangingPunct="0">
+            <a:pPr eaLnBrk="0" fontAlgn="base" hangingPunct="0">
               <a:lnSpc>
                 <a:spcPct val="100000"/>
               </a:lnSpc>
@@ -4929,14 +6395,22 @@
               <a:spcAft>
                 <a:spcPct val="0"/>
               </a:spcAft>
-              <a:buNone/>
             </a:pPr>
-            <a:endParaRPr lang="pt-BR" altLang="pt-BR" dirty="0">
-              <a:latin typeface="Arial" panose="020B0604020202020204" pitchFamily="34" charset="0"/>
-            </a:endParaRPr>
-          </a:p>
-          <a:p>
-            <a:pPr marL="0" lvl="0" indent="0" eaLnBrk="0" fontAlgn="base" hangingPunct="0">
+            <a:r>
+              <a:rPr lang="pt-BR" altLang="pt-BR" dirty="0"/>
+              <a:t>Muitos problemas são </a:t>
+            </a:r>
+            <a:r>
+              <a:rPr lang="pt-BR" altLang="pt-BR" b="1" dirty="0"/>
+              <a:t>sequenciais</a:t>
+            </a:r>
+            <a:r>
+              <a:rPr lang="pt-BR" altLang="pt-BR" dirty="0"/>
+              <a:t>: </a:t>
+            </a:r>
+          </a:p>
+          <a:p>
+            <a:pPr lvl="1" eaLnBrk="0" fontAlgn="base" hangingPunct="0">
               <a:lnSpc>
                 <a:spcPct val="100000"/>
               </a:lnSpc>
@@ -4946,30 +6420,16 @@
               <a:spcAft>
                 <a:spcPct val="0"/>
               </a:spcAft>
-              <a:buFontTx/>
-              <a:buChar char="•"/>
+              <a:buFont typeface="Wingdings" panose="05000000000000000000" pitchFamily="2" charset="2"/>
+              <a:buChar char="§"/>
             </a:pPr>
             <a:r>
-              <a:rPr lang="pt-BR" altLang="pt-BR" dirty="0">
-                <a:latin typeface="Arial" panose="020B0604020202020204" pitchFamily="34" charset="0"/>
-              </a:rPr>
-              <a:t>Muitos problemas são </a:t>
-            </a:r>
-            <a:r>
-              <a:rPr lang="pt-BR" altLang="pt-BR" b="1" dirty="0">
-                <a:latin typeface="Arial" panose="020B0604020202020204" pitchFamily="34" charset="0"/>
-              </a:rPr>
-              <a:t>sequenciais</a:t>
-            </a:r>
-            <a:r>
-              <a:rPr lang="pt-BR" altLang="pt-BR" dirty="0">
-                <a:latin typeface="Arial" panose="020B0604020202020204" pitchFamily="34" charset="0"/>
-              </a:rPr>
-              <a:t>: </a:t>
-            </a:r>
-          </a:p>
-          <a:p>
-            <a:pPr marL="0" lvl="0" indent="0" eaLnBrk="0" fontAlgn="base" hangingPunct="0">
+              <a:rPr lang="pt-BR" altLang="pt-BR" dirty="0"/>
+              <a:t>Voz </a:t>
+            </a:r>
+          </a:p>
+          <a:p>
+            <a:pPr lvl="1" eaLnBrk="0" fontAlgn="base" hangingPunct="0">
               <a:lnSpc>
                 <a:spcPct val="100000"/>
               </a:lnSpc>
@@ -4979,18 +6439,16 @@
               <a:spcAft>
                 <a:spcPct val="0"/>
               </a:spcAft>
-              <a:buFontTx/>
-              <a:buChar char="•"/>
+              <a:buFont typeface="Wingdings" panose="05000000000000000000" pitchFamily="2" charset="2"/>
+              <a:buChar char="§"/>
             </a:pPr>
             <a:r>
-              <a:rPr lang="pt-BR" altLang="pt-BR" dirty="0">
-                <a:latin typeface="Arial" panose="020B0604020202020204" pitchFamily="34" charset="0"/>
-              </a:rPr>
-              <a:t>Voz </a:t>
-            </a:r>
-          </a:p>
-          <a:p>
-            <a:pPr marL="0" lvl="0" indent="0" eaLnBrk="0" fontAlgn="base" hangingPunct="0">
+              <a:rPr lang="pt-BR" altLang="pt-BR" dirty="0"/>
+              <a:t>Texto </a:t>
+            </a:r>
+          </a:p>
+          <a:p>
+            <a:pPr lvl="1" eaLnBrk="0" fontAlgn="base" hangingPunct="0">
               <a:lnSpc>
                 <a:spcPct val="100000"/>
               </a:lnSpc>
@@ -5000,18 +6458,16 @@
               <a:spcAft>
                 <a:spcPct val="0"/>
               </a:spcAft>
-              <a:buFontTx/>
-              <a:buChar char="•"/>
+              <a:buFont typeface="Wingdings" panose="05000000000000000000" pitchFamily="2" charset="2"/>
+              <a:buChar char="§"/>
             </a:pPr>
             <a:r>
-              <a:rPr lang="pt-BR" altLang="pt-BR" dirty="0">
-                <a:latin typeface="Arial" panose="020B0604020202020204" pitchFamily="34" charset="0"/>
-              </a:rPr>
-              <a:t>Texto </a:t>
-            </a:r>
-          </a:p>
-          <a:p>
-            <a:pPr marL="0" lvl="0" indent="0" eaLnBrk="0" fontAlgn="base" hangingPunct="0">
+              <a:rPr lang="pt-BR" altLang="pt-BR" dirty="0"/>
+              <a:t>Séries temporais </a:t>
+            </a:r>
+          </a:p>
+          <a:p>
+            <a:pPr lvl="1" eaLnBrk="0" fontAlgn="base" hangingPunct="0">
               <a:lnSpc>
                 <a:spcPct val="100000"/>
               </a:lnSpc>
@@ -5021,18 +6477,16 @@
               <a:spcAft>
                 <a:spcPct val="0"/>
               </a:spcAft>
-              <a:buFontTx/>
-              <a:buChar char="•"/>
+              <a:buFont typeface="Wingdings" panose="05000000000000000000" pitchFamily="2" charset="2"/>
+              <a:buChar char="§"/>
             </a:pPr>
             <a:r>
-              <a:rPr lang="pt-BR" altLang="pt-BR" dirty="0">
-                <a:latin typeface="Arial" panose="020B0604020202020204" pitchFamily="34" charset="0"/>
-              </a:rPr>
-              <a:t>Séries temporais </a:t>
-            </a:r>
-          </a:p>
-          <a:p>
-            <a:pPr marL="0" lvl="0" indent="0" eaLnBrk="0" fontAlgn="base" hangingPunct="0">
+              <a:rPr lang="pt-BR" altLang="pt-BR" dirty="0"/>
+              <a:t>Vídeo </a:t>
+            </a:r>
+          </a:p>
+          <a:p>
+            <a:pPr eaLnBrk="0" fontAlgn="base" hangingPunct="0">
               <a:lnSpc>
                 <a:spcPct val="100000"/>
               </a:lnSpc>
@@ -5042,18 +6496,22 @@
               <a:spcAft>
                 <a:spcPct val="0"/>
               </a:spcAft>
-              <a:buFontTx/>
-              <a:buChar char="•"/>
             </a:pPr>
             <a:r>
-              <a:rPr lang="pt-BR" altLang="pt-BR" dirty="0">
-                <a:latin typeface="Arial" panose="020B0604020202020204" pitchFamily="34" charset="0"/>
-              </a:rPr>
-              <a:t>Vídeo </a:t>
-            </a:r>
-          </a:p>
-          <a:p>
-            <a:pPr marL="0" lvl="0" indent="0" eaLnBrk="0" fontAlgn="base" hangingPunct="0">
+              <a:rPr lang="pt-BR" altLang="pt-BR" dirty="0"/>
+              <a:t>Para lidarmos com eles, precisamos modelar </a:t>
+            </a:r>
+            <a:r>
+              <a:rPr lang="pt-BR" altLang="pt-BR" b="1" dirty="0"/>
+              <a:t>dependências temporais</a:t>
+            </a:r>
+            <a:r>
+              <a:rPr lang="pt-BR" altLang="pt-BR" dirty="0"/>
+              <a:t>!</a:t>
+            </a:r>
+          </a:p>
+          <a:p>
+            <a:pPr lvl="1" eaLnBrk="0" fontAlgn="base" hangingPunct="0">
               <a:lnSpc>
                 <a:spcPct val="100000"/>
               </a:lnSpc>
@@ -5063,30 +6521,14 @@
               <a:spcAft>
                 <a:spcPct val="0"/>
               </a:spcAft>
-              <a:buFontTx/>
-              <a:buChar char="•"/>
+              <a:buFont typeface="Wingdings" panose="05000000000000000000" pitchFamily="2" charset="2"/>
+              <a:buChar char="§"/>
             </a:pPr>
             <a:r>
-              <a:rPr lang="pt-BR" altLang="pt-BR" dirty="0">
-                <a:latin typeface="Arial" panose="020B0604020202020204" pitchFamily="34" charset="0"/>
-              </a:rPr>
-              <a:t>Precisamos modelar </a:t>
-            </a:r>
-            <a:r>
-              <a:rPr lang="pt-BR" altLang="pt-BR" b="1" dirty="0">
-                <a:latin typeface="Arial" panose="020B0604020202020204" pitchFamily="34" charset="0"/>
-              </a:rPr>
-              <a:t>dependência temporal</a:t>
-            </a:r>
-            <a:r>
-              <a:rPr lang="pt-BR" altLang="pt-BR" dirty="0">
-                <a:latin typeface="Arial" panose="020B0604020202020204" pitchFamily="34" charset="0"/>
-              </a:rPr>
-              <a:t> </a:t>
-            </a:r>
-          </a:p>
-          <a:p>
-            <a:endParaRPr lang="pt-BR" dirty="0"/>
+              <a:rPr lang="pt-BR" altLang="pt-BR" b="1" dirty="0"/>
+              <a:t>Existe correlação temporal entre as amostras.</a:t>
+            </a:r>
+            <a:endParaRPr lang="pt-BR" altLang="pt-BR" dirty="0"/>
           </a:p>
         </p:txBody>
       </p:sp>
@@ -5094,6 +6536,178 @@
     <p:extLst>
       <p:ext uri="{BB962C8B-B14F-4D97-AF65-F5344CB8AC3E}">
         <p14:creationId xmlns:p14="http://schemas.microsoft.com/office/powerpoint/2010/main" val="1447528735"/>
+      </p:ext>
+    </p:extLst>
+  </p:cSld>
+  <p:clrMapOvr>
+    <a:masterClrMapping/>
+  </p:clrMapOvr>
+</p:sld>
+</file>
+
+<file path=ppt/slides/slide20.xml><?xml version="1.0" encoding="utf-8"?>
+<p:sld xmlns:a="http://schemas.openxmlformats.org/drawingml/2006/main" xmlns:r="http://schemas.openxmlformats.org/officeDocument/2006/relationships" xmlns:p="http://schemas.openxmlformats.org/presentationml/2006/main">
+  <p:cSld>
+    <p:spTree>
+      <p:nvGrpSpPr>
+        <p:cNvPr id="1" name=""/>
+        <p:cNvGrpSpPr/>
+        <p:nvPr/>
+      </p:nvGrpSpPr>
+      <p:grpSpPr>
+        <a:xfrm>
+          <a:off x="0" y="0"/>
+          <a:ext cx="0" cy="0"/>
+          <a:chOff x="0" y="0"/>
+          <a:chExt cx="0" cy="0"/>
+        </a:xfrm>
+      </p:grpSpPr>
+      <p:sp>
+        <p:nvSpPr>
+          <p:cNvPr id="4" name="Título 1">
+            <a:extLst>
+              <a:ext uri="{FF2B5EF4-FFF2-40B4-BE49-F238E27FC236}">
+                <a16:creationId xmlns:a16="http://schemas.microsoft.com/office/drawing/2014/main" id="{32666AC8-2E17-4DB4-B0F5-60C640CCFD2E}"/>
+              </a:ext>
+            </a:extLst>
+          </p:cNvPr>
+          <p:cNvSpPr txBox="1">
+            <a:spLocks/>
+          </p:cNvSpPr>
+          <p:nvPr/>
+        </p:nvSpPr>
+        <p:spPr>
+          <a:xfrm>
+            <a:off x="1431533" y="2720526"/>
+            <a:ext cx="9144000" cy="1029541"/>
+          </a:xfrm>
+          <a:prstGeom prst="rect">
+            <a:avLst/>
+          </a:prstGeom>
+        </p:spPr>
+        <p:txBody>
+          <a:bodyPr vert="horz" lIns="91440" tIns="45720" rIns="91440" bIns="45720" rtlCol="0" anchor="ctr">
+            <a:normAutofit/>
+          </a:bodyPr>
+          <a:lstStyle>
+            <a:lvl1pPr algn="l" defTabSz="914400" rtl="0" eaLnBrk="1" latinLnBrk="0" hangingPunct="1">
+              <a:lnSpc>
+                <a:spcPct val="90000"/>
+              </a:lnSpc>
+              <a:spcBef>
+                <a:spcPct val="0"/>
+              </a:spcBef>
+              <a:buNone/>
+              <a:defRPr sz="4400" kern="1200">
+                <a:solidFill>
+                  <a:schemeClr val="tx1"/>
+                </a:solidFill>
+                <a:latin typeface="+mj-lt"/>
+                <a:ea typeface="+mj-ea"/>
+                <a:cs typeface="+mj-cs"/>
+              </a:defRPr>
+            </a:lvl1pPr>
+          </a:lstStyle>
+          <a:p>
+            <a:pPr algn="ctr"/>
+            <a:r>
+              <a:rPr lang="pt-BR" sz="6600" dirty="0"/>
+              <a:t>Perguntas?</a:t>
+            </a:r>
+            <a:endParaRPr lang="pt-BR" sz="6600" b="1" i="1" dirty="0"/>
+          </a:p>
+        </p:txBody>
+      </p:sp>
+    </p:spTree>
+    <p:extLst>
+      <p:ext uri="{BB962C8B-B14F-4D97-AF65-F5344CB8AC3E}">
+        <p14:creationId xmlns:p14="http://schemas.microsoft.com/office/powerpoint/2010/main" val="3773005660"/>
+      </p:ext>
+    </p:extLst>
+  </p:cSld>
+  <p:clrMapOvr>
+    <a:masterClrMapping/>
+  </p:clrMapOvr>
+</p:sld>
+</file>
+
+<file path=ppt/slides/slide21.xml><?xml version="1.0" encoding="utf-8"?>
+<p:sld xmlns:a="http://schemas.openxmlformats.org/drawingml/2006/main" xmlns:r="http://schemas.openxmlformats.org/officeDocument/2006/relationships" xmlns:p="http://schemas.openxmlformats.org/presentationml/2006/main">
+  <p:cSld>
+    <p:spTree>
+      <p:nvGrpSpPr>
+        <p:cNvPr id="1" name=""/>
+        <p:cNvGrpSpPr/>
+        <p:nvPr/>
+      </p:nvGrpSpPr>
+      <p:grpSpPr>
+        <a:xfrm>
+          <a:off x="0" y="0"/>
+          <a:ext cx="0" cy="0"/>
+          <a:chOff x="0" y="0"/>
+          <a:chExt cx="0" cy="0"/>
+        </a:xfrm>
+      </p:grpSpPr>
+      <p:sp>
+        <p:nvSpPr>
+          <p:cNvPr id="4" name="Título 1">
+            <a:extLst>
+              <a:ext uri="{FF2B5EF4-FFF2-40B4-BE49-F238E27FC236}">
+                <a16:creationId xmlns:a16="http://schemas.microsoft.com/office/drawing/2014/main" id="{32666AC8-2E17-4DB4-B0F5-60C640CCFD2E}"/>
+              </a:ext>
+            </a:extLst>
+          </p:cNvPr>
+          <p:cNvSpPr txBox="1">
+            <a:spLocks/>
+          </p:cNvSpPr>
+          <p:nvPr/>
+        </p:nvSpPr>
+        <p:spPr>
+          <a:xfrm>
+            <a:off x="1431533" y="2720526"/>
+            <a:ext cx="9144000" cy="1029541"/>
+          </a:xfrm>
+          <a:prstGeom prst="rect">
+            <a:avLst/>
+          </a:prstGeom>
+        </p:spPr>
+        <p:txBody>
+          <a:bodyPr vert="horz" lIns="91440" tIns="45720" rIns="91440" bIns="45720" rtlCol="0" anchor="ctr">
+            <a:normAutofit/>
+          </a:bodyPr>
+          <a:lstStyle>
+            <a:lvl1pPr algn="l" defTabSz="914400" rtl="0" eaLnBrk="1" latinLnBrk="0" hangingPunct="1">
+              <a:lnSpc>
+                <a:spcPct val="90000"/>
+              </a:lnSpc>
+              <a:spcBef>
+                <a:spcPct val="0"/>
+              </a:spcBef>
+              <a:buNone/>
+              <a:defRPr sz="4400" kern="1200">
+                <a:solidFill>
+                  <a:schemeClr val="tx1"/>
+                </a:solidFill>
+                <a:latin typeface="+mj-lt"/>
+                <a:ea typeface="+mj-ea"/>
+                <a:cs typeface="+mj-cs"/>
+              </a:defRPr>
+            </a:lvl1pPr>
+          </a:lstStyle>
+          <a:p>
+            <a:pPr algn="ctr"/>
+            <a:r>
+              <a:rPr lang="pt-BR" sz="6600" dirty="0"/>
+              <a:t>Obrigado!</a:t>
+            </a:r>
+            <a:endParaRPr lang="pt-BR" sz="6600" b="1" i="1" dirty="0"/>
+          </a:p>
+        </p:txBody>
+      </p:sp>
+    </p:spTree>
+    <p:extLst>
+      <p:ext uri="{BB962C8B-B14F-4D97-AF65-F5344CB8AC3E}">
+        <p14:creationId xmlns:p14="http://schemas.microsoft.com/office/powerpoint/2010/main" val="2655704619"/>
       </p:ext>
     </p:extLst>
   </p:cSld>
@@ -5125,7 +6739,7 @@
           <p:cNvPr id="2" name="Título 1">
             <a:extLst>
               <a:ext uri="{FF2B5EF4-FFF2-40B4-BE49-F238E27FC236}">
-                <a16:creationId xmlns:a16="http://schemas.microsoft.com/office/drawing/2014/main" xmlns="" id="{94AB8438-E56E-2412-517C-8456E4CA773C}"/>
+                <a16:creationId xmlns:a16="http://schemas.microsoft.com/office/drawing/2014/main" id="{94AB8438-E56E-2412-517C-8456E4CA773C}"/>
               </a:ext>
             </a:extLst>
           </p:cNvPr>
@@ -5142,10 +6756,9 @@
           <a:lstStyle/>
           <a:p>
             <a:r>
-              <a:rPr lang="pt-BR" dirty="0" smtClean="0"/>
-              <a:t>Exemplos</a:t>
-            </a:r>
-            <a:endParaRPr lang="pt-BR" dirty="0"/>
+              <a:rPr lang="pt-BR" dirty="0"/>
+              <a:t>Aplicações</a:t>
+            </a:r>
           </a:p>
         </p:txBody>
       </p:sp>
@@ -5154,7 +6767,7 @@
           <p:cNvPr id="3" name="Espaço Reservado para Conteúdo 2">
             <a:extLst>
               <a:ext uri="{FF2B5EF4-FFF2-40B4-BE49-F238E27FC236}">
-                <a16:creationId xmlns:a16="http://schemas.microsoft.com/office/drawing/2014/main" xmlns="" id="{F7E2B09C-6D56-4C9F-A364-B904CCE2F1A0}"/>
+                <a16:creationId xmlns:a16="http://schemas.microsoft.com/office/drawing/2014/main" id="{F7E2B09C-6D56-4C9F-A364-B904CCE2F1A0}"/>
               </a:ext>
             </a:extLst>
           </p:cNvPr>
@@ -5172,40 +6785,43 @@
           <a:p>
             <a:r>
               <a:rPr lang="pt-BR" dirty="0"/>
-              <a:t>Previsão de séries temporais </a:t>
-            </a:r>
-            <a:endParaRPr lang="pt-BR" dirty="0" smtClean="0"/>
-          </a:p>
-          <a:p>
-            <a:r>
-              <a:rPr lang="pt-BR" dirty="0" smtClean="0"/>
-              <a:t>Tradução </a:t>
-            </a:r>
+              <a:t>Previsão de séries temporais (clima, ações, vendas, etc.)</a:t>
+            </a:r>
+          </a:p>
+          <a:p>
             <a:r>
               <a:rPr lang="pt-BR" dirty="0"/>
-              <a:t>automática </a:t>
-            </a:r>
-            <a:endParaRPr lang="pt-BR" dirty="0" smtClean="0"/>
-          </a:p>
-          <a:p>
-            <a:r>
-              <a:rPr lang="pt-BR" dirty="0" smtClean="0"/>
-              <a:t>Classificação </a:t>
-            </a:r>
+              <a:t>Tradução automática</a:t>
+            </a:r>
+          </a:p>
+          <a:p>
             <a:r>
               <a:rPr lang="pt-BR" dirty="0"/>
-              <a:t>de sentimento </a:t>
-            </a:r>
-            <a:endParaRPr lang="pt-BR" dirty="0" smtClean="0"/>
-          </a:p>
-          <a:p>
-            <a:r>
-              <a:rPr lang="pt-BR" dirty="0" smtClean="0"/>
-              <a:t>Geração </a:t>
-            </a:r>
+              <a:t>Reconhecimento de fala</a:t>
+            </a:r>
+          </a:p>
+          <a:p>
             <a:r>
               <a:rPr lang="pt-BR" dirty="0"/>
-              <a:t>de texto</a:t>
+              <a:t>Tradução fala para texto e vice versa</a:t>
+            </a:r>
+          </a:p>
+          <a:p>
+            <a:r>
+              <a:rPr lang="pt-BR" dirty="0"/>
+              <a:t>Classificação de sentimentos</a:t>
+            </a:r>
+          </a:p>
+          <a:p>
+            <a:r>
+              <a:rPr lang="pt-BR" dirty="0"/>
+              <a:t>Geração de texto</a:t>
+            </a:r>
+          </a:p>
+          <a:p>
+            <a:r>
+              <a:rPr lang="pt-BR" dirty="0"/>
+              <a:t>Legenda de imagens e vídeos</a:t>
             </a:r>
           </a:p>
           <a:p>
@@ -5275,54 +6891,166 @@
             <p:ph idx="1"/>
           </p:nvPr>
         </p:nvSpPr>
-        <p:spPr/>
-        <p:txBody>
-          <a:bodyPr/>
+        <p:spPr>
+          <a:xfrm>
+            <a:off x="4256314" y="1825625"/>
+            <a:ext cx="7935686" cy="5032375"/>
+          </a:xfrm>
+        </p:spPr>
+        <p:txBody>
+          <a:bodyPr>
+            <a:normAutofit/>
+          </a:bodyPr>
           <a:lstStyle/>
           <a:p>
             <a:r>
               <a:rPr lang="pt-BR" dirty="0"/>
-              <a:t>MLP</a:t>
-            </a:r>
-            <a:r>
-              <a:rPr lang="pt-BR" dirty="0" smtClean="0"/>
-              <a:t>:</a:t>
-            </a:r>
-          </a:p>
-          <a:p>
-            <a:pPr lvl="1"/>
-            <a:r>
-              <a:rPr lang="pt-BR" dirty="0" smtClean="0"/>
-              <a:t>Sem memória</a:t>
-            </a:r>
-          </a:p>
-          <a:p>
-            <a:pPr lvl="1"/>
-            <a:r>
-              <a:rPr lang="pt-BR" dirty="0" smtClean="0"/>
-              <a:t>Entrada </a:t>
-            </a:r>
+              <a:t>MLP:</a:t>
+            </a:r>
+          </a:p>
+          <a:p>
+            <a:pPr lvl="1">
+              <a:buFont typeface="Wingdings" panose="05000000000000000000" pitchFamily="2" charset="2"/>
+              <a:buChar char="§"/>
+            </a:pPr>
             <a:r>
               <a:rPr lang="pt-BR" dirty="0"/>
-              <a:t>→ saída </a:t>
-            </a:r>
-            <a:r>
-              <a:rPr lang="pt-BR" dirty="0" smtClean="0"/>
-              <a:t>independente</a:t>
-            </a:r>
-          </a:p>
-          <a:p>
-            <a:r>
-              <a:rPr lang="pt-BR" dirty="0" smtClean="0"/>
-              <a:t>Não </a:t>
-            </a:r>
+              <a:t>Não armazenam informações de estados anteriores (i.e., sem memória)</a:t>
+            </a:r>
+          </a:p>
+          <a:p>
+            <a:pPr lvl="1">
+              <a:buFont typeface="Wingdings" panose="05000000000000000000" pitchFamily="2" charset="2"/>
+              <a:buChar char="§"/>
+            </a:pPr>
             <a:r>
               <a:rPr lang="pt-BR" dirty="0"/>
-              <a:t>modela histórico</a:t>
-            </a:r>
-          </a:p>
-        </p:txBody>
-      </p:sp>
+              <a:t>Cada entrada é tratada de forma independente </a:t>
+            </a:r>
+          </a:p>
+          <a:p>
+            <a:pPr lvl="1">
+              <a:buFont typeface="Wingdings" panose="05000000000000000000" pitchFamily="2" charset="2"/>
+              <a:buChar char="§"/>
+            </a:pPr>
+            <a:r>
+              <a:rPr lang="pt-BR" dirty="0"/>
+              <a:t>Não capturam dependências temporais</a:t>
+            </a:r>
+          </a:p>
+          <a:p>
+            <a:pPr lvl="1">
+              <a:buFont typeface="Wingdings" panose="05000000000000000000" pitchFamily="2" charset="2"/>
+              <a:buChar char="§"/>
+            </a:pPr>
+            <a:r>
+              <a:rPr lang="pt-BR" dirty="0"/>
+              <a:t>Por ser de alimentação direta, a saída depende apenas da entrada atual</a:t>
+            </a:r>
+          </a:p>
+          <a:p>
+            <a:r>
+              <a:rPr lang="pt-BR" dirty="0"/>
+              <a:t>CNN:</a:t>
+            </a:r>
+          </a:p>
+          <a:p>
+            <a:pPr lvl="1">
+              <a:buFont typeface="Wingdings" panose="05000000000000000000" pitchFamily="2" charset="2"/>
+              <a:buChar char="§"/>
+            </a:pPr>
+            <a:r>
+              <a:rPr lang="pt-BR" dirty="0"/>
+              <a:t>Compartilha as limitações das </a:t>
+            </a:r>
+            <a:r>
+              <a:rPr lang="pt-BR" dirty="0" err="1"/>
+              <a:t>MLPs</a:t>
+            </a:r>
+            <a:r>
+              <a:rPr lang="pt-BR" dirty="0"/>
+              <a:t>, com uma exceção:</a:t>
+            </a:r>
+          </a:p>
+          <a:p>
+            <a:pPr lvl="1">
+              <a:buFont typeface="Wingdings" panose="05000000000000000000" pitchFamily="2" charset="2"/>
+              <a:buChar char="§"/>
+            </a:pPr>
+            <a:r>
+              <a:rPr lang="pt-BR" dirty="0"/>
+              <a:t>Modela relações espaciais.</a:t>
+            </a:r>
+          </a:p>
+          <a:p>
+            <a:r>
+              <a:rPr lang="pt-BR" dirty="0"/>
+              <a:t>Ambas famílias exigem que o vetor de entrada tenha um tamanho predefinido e constante.</a:t>
+            </a:r>
+          </a:p>
+        </p:txBody>
+      </p:sp>
+      <p:pic>
+        <p:nvPicPr>
+          <p:cNvPr id="6" name="Picture 5">
+            <a:extLst>
+              <a:ext uri="{FF2B5EF4-FFF2-40B4-BE49-F238E27FC236}">
+                <a16:creationId xmlns:a16="http://schemas.microsoft.com/office/drawing/2014/main" id="{FA8E2659-A57A-38A3-FD87-03127E912402}"/>
+              </a:ext>
+            </a:extLst>
+          </p:cNvPr>
+          <p:cNvPicPr>
+            <a:picLocks noChangeAspect="1"/>
+          </p:cNvPicPr>
+          <p:nvPr/>
+        </p:nvPicPr>
+        <p:blipFill>
+          <a:blip r:embed="rId3"/>
+          <a:srcRect t="2103"/>
+          <a:stretch>
+            <a:fillRect/>
+          </a:stretch>
+        </p:blipFill>
+        <p:spPr>
+          <a:xfrm>
+            <a:off x="986159" y="1943553"/>
+            <a:ext cx="2686768" cy="2310574"/>
+          </a:xfrm>
+          <a:prstGeom prst="rect">
+            <a:avLst/>
+          </a:prstGeom>
+        </p:spPr>
+      </p:pic>
+      <p:pic>
+        <p:nvPicPr>
+          <p:cNvPr id="8" name="Picture 7">
+            <a:extLst>
+              <a:ext uri="{FF2B5EF4-FFF2-40B4-BE49-F238E27FC236}">
+                <a16:creationId xmlns:a16="http://schemas.microsoft.com/office/drawing/2014/main" id="{9AAB68BF-5C1E-7F73-8FBA-8E33B17EBF82}"/>
+              </a:ext>
+            </a:extLst>
+          </p:cNvPr>
+          <p:cNvPicPr>
+            <a:picLocks noChangeAspect="1"/>
+          </p:cNvPicPr>
+          <p:nvPr/>
+        </p:nvPicPr>
+        <p:blipFill>
+          <a:blip r:embed="rId4"/>
+          <a:stretch>
+            <a:fillRect/>
+          </a:stretch>
+        </p:blipFill>
+        <p:spPr>
+          <a:xfrm>
+            <a:off x="529550" y="4795610"/>
+            <a:ext cx="3599986" cy="1889306"/>
+          </a:xfrm>
+          <a:prstGeom prst="rect">
+            <a:avLst/>
+          </a:prstGeom>
+        </p:spPr>
+      </p:pic>
     </p:spTree>
     <p:extLst>
       <p:ext uri="{BB962C8B-B14F-4D97-AF65-F5344CB8AC3E}">
@@ -5355,67 +7083,92 @@
       </p:grpSpPr>
       <p:sp>
         <p:nvSpPr>
-          <p:cNvPr id="2" name="Título 1"/>
-          <p:cNvSpPr>
-            <a:spLocks noGrp="1"/>
-          </p:cNvSpPr>
-          <p:nvPr>
-            <p:ph type="title"/>
-          </p:nvPr>
-        </p:nvSpPr>
-        <p:spPr/>
+          <p:cNvPr id="3" name="Content Placeholder 2">
+            <a:extLst>
+              <a:ext uri="{FF2B5EF4-FFF2-40B4-BE49-F238E27FC236}">
+                <a16:creationId xmlns:a16="http://schemas.microsoft.com/office/drawing/2014/main" id="{97A47F2C-5902-D14E-461A-E03776C92E47}"/>
+              </a:ext>
+            </a:extLst>
+          </p:cNvPr>
+          <p:cNvSpPr>
+            <a:spLocks noGrp="1"/>
+          </p:cNvSpPr>
+          <p:nvPr>
+            <p:ph idx="1"/>
+          </p:nvPr>
+        </p:nvSpPr>
+        <p:spPr>
+          <a:xfrm>
+            <a:off x="7683954" y="3142796"/>
+            <a:ext cx="3962400" cy="972003"/>
+          </a:xfrm>
+        </p:spPr>
         <p:txBody>
           <a:bodyPr/>
           <a:lstStyle/>
           <a:p>
-            <a:r>
-              <a:rPr lang="pt-BR" dirty="0" smtClean="0"/>
-              <a:t>Redes recorrentes</a:t>
-            </a:r>
-            <a:endParaRPr lang="pt-BR" dirty="0"/>
-          </a:p>
-        </p:txBody>
-      </p:sp>
-      <p:sp>
-        <p:nvSpPr>
-          <p:cNvPr id="3" name="Espaço Reservado para Conteúdo 2"/>
-          <p:cNvSpPr>
-            <a:spLocks noGrp="1"/>
-          </p:cNvSpPr>
-          <p:nvPr>
-            <p:ph idx="1"/>
-          </p:nvPr>
-        </p:nvSpPr>
-        <p:spPr/>
-        <p:txBody>
-          <a:bodyPr/>
-          <a:lstStyle/>
-          <a:p>
+            <a:pPr marL="0" indent="0" algn="ctr">
+              <a:buNone/>
+            </a:pPr>
             <a:r>
               <a:rPr lang="pt-BR" dirty="0"/>
-              <a:t>Possui loops de </a:t>
-            </a:r>
-            <a:r>
-              <a:rPr lang="pt-BR" dirty="0" smtClean="0"/>
-              <a:t>feedback</a:t>
-            </a:r>
-          </a:p>
-          <a:p>
-            <a:r>
-              <a:rPr lang="pt-BR" dirty="0" smtClean="0"/>
-              <a:t>Mantém </a:t>
-            </a:r>
-            <a:r>
-              <a:rPr lang="pt-BR" dirty="0"/>
-              <a:t>estado interno (memória)</a:t>
-            </a:r>
-          </a:p>
-        </p:txBody>
-      </p:sp>
+              <a:t>Redes neurais recorrentes têm memória!</a:t>
+            </a:r>
+            <a:endParaRPr lang="en-US" dirty="0"/>
+          </a:p>
+        </p:txBody>
+      </p:sp>
+      <p:pic>
+        <p:nvPicPr>
+          <p:cNvPr id="2050" name="Picture 2" descr="RNN be like! #RNN #NeuralNetwork #meme">
+            <a:extLst>
+              <a:ext uri="{FF2B5EF4-FFF2-40B4-BE49-F238E27FC236}">
+                <a16:creationId xmlns:a16="http://schemas.microsoft.com/office/drawing/2014/main" id="{B99978AC-6F74-4307-94F5-3BAC8F4A5BF6}"/>
+              </a:ext>
+            </a:extLst>
+          </p:cNvPr>
+          <p:cNvPicPr>
+            <a:picLocks noChangeAspect="1" noChangeArrowheads="1"/>
+          </p:cNvPicPr>
+          <p:nvPr/>
+        </p:nvPicPr>
+        <p:blipFill>
+          <a:blip r:embed="rId2">
+            <a:extLst>
+              <a:ext uri="{28A0092B-C50C-407E-A947-70E740481C1C}">
+                <a14:useLocalDpi xmlns:a14="http://schemas.microsoft.com/office/drawing/2010/main" val="0"/>
+              </a:ext>
+            </a:extLst>
+          </a:blip>
+          <a:srcRect/>
+          <a:stretch>
+            <a:fillRect/>
+          </a:stretch>
+        </p:blipFill>
+        <p:spPr bwMode="auto">
+          <a:xfrm>
+            <a:off x="545646" y="1911803"/>
+            <a:ext cx="6551109" cy="3683454"/>
+          </a:xfrm>
+          <a:prstGeom prst="rect">
+            <a:avLst/>
+          </a:prstGeom>
+          <a:noFill/>
+          <a:extLst>
+            <a:ext uri="{909E8E84-426E-40DD-AFC4-6F175D3DCCD1}">
+              <a14:hiddenFill xmlns:a14="http://schemas.microsoft.com/office/drawing/2010/main">
+                <a:solidFill>
+                  <a:srgbClr val="FFFFFF"/>
+                </a:solidFill>
+              </a14:hiddenFill>
+            </a:ext>
+          </a:extLst>
+        </p:spPr>
+      </p:pic>
     </p:spTree>
     <p:extLst>
       <p:ext uri="{BB962C8B-B14F-4D97-AF65-F5344CB8AC3E}">
-        <p14:creationId xmlns:p14="http://schemas.microsoft.com/office/powerpoint/2010/main" val="1598720912"/>
+        <p14:creationId xmlns:p14="http://schemas.microsoft.com/office/powerpoint/2010/main" val="2006836852"/>
       </p:ext>
     </p:extLst>
   </p:cSld>
@@ -5459,7 +7212,7 @@
           <a:p>
             <a:r>
               <a:rPr lang="pt-BR" dirty="0"/>
-              <a:t>Interpretação</a:t>
+              <a:t>Redes recorrentes</a:t>
             </a:r>
           </a:p>
         </p:txBody>
@@ -5474,50 +7227,94 @@
             <p:ph idx="1"/>
           </p:nvPr>
         </p:nvSpPr>
-        <p:spPr/>
-        <p:txBody>
-          <a:bodyPr/>
+        <p:spPr>
+          <a:xfrm>
+            <a:off x="5573486" y="1825624"/>
+            <a:ext cx="6498771" cy="5032375"/>
+          </a:xfrm>
+        </p:spPr>
+        <p:txBody>
+          <a:bodyPr>
+            <a:normAutofit/>
+          </a:bodyPr>
           <a:lstStyle/>
           <a:p>
             <a:r>
               <a:rPr lang="pt-BR" dirty="0"/>
-              <a:t>Combina</a:t>
-            </a:r>
-            <a:r>
-              <a:rPr lang="pt-BR" dirty="0" smtClean="0"/>
-              <a:t>:</a:t>
-            </a:r>
-          </a:p>
-          <a:p>
-            <a:pPr lvl="1"/>
-            <a:r>
-              <a:rPr lang="pt-BR" dirty="0" smtClean="0"/>
-              <a:t>Entrada atual</a:t>
-            </a:r>
-          </a:p>
-          <a:p>
-            <a:pPr lvl="1"/>
-            <a:r>
-              <a:rPr lang="pt-BR" dirty="0" smtClean="0"/>
-              <a:t>Estado passado</a:t>
-            </a:r>
-          </a:p>
-          <a:p>
-            <a:r>
-              <a:rPr lang="pt-BR" dirty="0" smtClean="0"/>
-              <a:t>Modelo </a:t>
-            </a:r>
+              <a:t>Possuem laços de realimentação.</a:t>
+            </a:r>
+          </a:p>
+          <a:p>
             <a:r>
               <a:rPr lang="pt-BR" dirty="0"/>
-              <a:t>depende da história</a:t>
-            </a:r>
-          </a:p>
-        </p:txBody>
-      </p:sp>
+              <a:t>Mantém um estado interno (memória) que armazena informações observadas até o momento.</a:t>
+            </a:r>
+          </a:p>
+          <a:p>
+            <a:r>
+              <a:rPr lang="pt-BR" dirty="0"/>
+              <a:t>A saída da rede depende da entrada atual e do valor do estado interno anterior.</a:t>
+            </a:r>
+          </a:p>
+          <a:p>
+            <a:r>
+              <a:rPr lang="pt-BR" dirty="0"/>
+              <a:t>O estado interno mantém uma memória (que desaparece) sobre o histórico de todas as entradas passadas.</a:t>
+            </a:r>
+          </a:p>
+        </p:txBody>
+      </p:sp>
+      <p:pic>
+        <p:nvPicPr>
+          <p:cNvPr id="3074" name="Picture 2" descr="RNN architecture and the concept of sequential memory |... | Fiveable">
+            <a:extLst>
+              <a:ext uri="{FF2B5EF4-FFF2-40B4-BE49-F238E27FC236}">
+                <a16:creationId xmlns:a16="http://schemas.microsoft.com/office/drawing/2014/main" id="{CF222E86-9883-F0F3-0C3D-DE894656D1F4}"/>
+              </a:ext>
+            </a:extLst>
+          </p:cNvPr>
+          <p:cNvPicPr>
+            <a:picLocks noChangeAspect="1" noChangeArrowheads="1"/>
+          </p:cNvPicPr>
+          <p:nvPr/>
+        </p:nvPicPr>
+        <p:blipFill rotWithShape="1">
+          <a:blip r:embed="rId3">
+            <a:extLst>
+              <a:ext uri="{28A0092B-C50C-407E-A947-70E740481C1C}">
+                <a14:useLocalDpi xmlns:a14="http://schemas.microsoft.com/office/drawing/2010/main" val="0"/>
+              </a:ext>
+            </a:extLst>
+          </a:blip>
+          <a:srcRect l="982" t="38503" r="81251" b="2949"/>
+          <a:stretch>
+            <a:fillRect/>
+          </a:stretch>
+        </p:blipFill>
+        <p:spPr bwMode="auto">
+          <a:xfrm>
+            <a:off x="1534885" y="2296884"/>
+            <a:ext cx="2471058" cy="3663126"/>
+          </a:xfrm>
+          <a:prstGeom prst="rect">
+            <a:avLst/>
+          </a:prstGeom>
+          <a:noFill/>
+          <a:extLst>
+            <a:ext uri="{909E8E84-426E-40DD-AFC4-6F175D3DCCD1}">
+              <a14:hiddenFill xmlns:a14="http://schemas.microsoft.com/office/drawing/2010/main">
+                <a:solidFill>
+                  <a:srgbClr val="FFFFFF"/>
+                </a:solidFill>
+              </a14:hiddenFill>
+            </a:ext>
+          </a:extLst>
+        </p:spPr>
+      </p:pic>
     </p:spTree>
     <p:extLst>
       <p:ext uri="{BB962C8B-B14F-4D97-AF65-F5344CB8AC3E}">
-        <p14:creationId xmlns:p14="http://schemas.microsoft.com/office/powerpoint/2010/main" val="983730567"/>
+        <p14:creationId xmlns:p14="http://schemas.microsoft.com/office/powerpoint/2010/main" val="1598720912"/>
       </p:ext>
     </p:extLst>
   </p:cSld>
@@ -5532,7 +7329,13 @@
   <p:cSld>
     <p:spTree>
       <p:nvGrpSpPr>
-        <p:cNvPr id="1" name=""/>
+        <p:cNvPr id="1" name="">
+          <a:extLst>
+            <a:ext uri="{FF2B5EF4-FFF2-40B4-BE49-F238E27FC236}">
+              <a16:creationId xmlns:a16="http://schemas.microsoft.com/office/drawing/2014/main" id="{3774E3A9-57FD-9928-3B76-20D86E5368F7}"/>
+            </a:ext>
+          </a:extLst>
+        </p:cNvPr>
         <p:cNvGrpSpPr/>
         <p:nvPr/>
       </p:nvGrpSpPr>
@@ -5546,7 +7349,13 @@
       </p:grpSpPr>
       <p:sp>
         <p:nvSpPr>
-          <p:cNvPr id="2" name="Título 1"/>
+          <p:cNvPr id="2" name="Título 1">
+            <a:extLst>
+              <a:ext uri="{FF2B5EF4-FFF2-40B4-BE49-F238E27FC236}">
+                <a16:creationId xmlns:a16="http://schemas.microsoft.com/office/drawing/2014/main" id="{32CAA669-542C-6851-4558-AB1FBFA2F00E}"/>
+              </a:ext>
+            </a:extLst>
+          </p:cNvPr>
           <p:cNvSpPr>
             <a:spLocks noGrp="1"/>
           </p:cNvSpPr>
@@ -5560,31 +7369,21 @@
           <a:lstStyle/>
           <a:p>
             <a:r>
-              <a:rPr lang="pt-BR" i="1" dirty="0" err="1"/>
-              <a:t>Backpropagation</a:t>
-            </a:r>
-            <a:r>
-              <a:rPr lang="pt-BR" i="1" dirty="0"/>
-              <a:t> </a:t>
-            </a:r>
-            <a:r>
-              <a:rPr lang="pt-BR" i="1" dirty="0" err="1"/>
-              <a:t>Through</a:t>
-            </a:r>
-            <a:r>
-              <a:rPr lang="pt-BR" i="1" dirty="0"/>
-              <a:t> Time</a:t>
-            </a:r>
-            <a:r>
               <a:rPr lang="pt-BR" dirty="0"/>
-              <a:t> (BPTT)</a:t>
-            </a:r>
-          </a:p>
-        </p:txBody>
-      </p:sp>
-      <p:sp>
-        <p:nvSpPr>
-          <p:cNvPr id="3" name="Espaço Reservado para Conteúdo 2"/>
+              <a:t>Redes recorrentes</a:t>
+            </a:r>
+          </a:p>
+        </p:txBody>
+      </p:sp>
+      <p:sp>
+        <p:nvSpPr>
+          <p:cNvPr id="3" name="Espaço Reservado para Conteúdo 2">
+            <a:extLst>
+              <a:ext uri="{FF2B5EF4-FFF2-40B4-BE49-F238E27FC236}">
+                <a16:creationId xmlns:a16="http://schemas.microsoft.com/office/drawing/2014/main" id="{7BC8D1AF-6B61-5C93-6D51-B0F1660220EB}"/>
+              </a:ext>
+            </a:extLst>
+          </p:cNvPr>
           <p:cNvSpPr>
             <a:spLocks noGrp="1"/>
           </p:cNvSpPr>
@@ -5592,85 +7391,108 @@
             <p:ph idx="1"/>
           </p:nvPr>
         </p:nvSpPr>
-        <p:spPr/>
+        <p:spPr>
+          <a:xfrm>
+            <a:off x="5573486" y="1825624"/>
+            <a:ext cx="6498771" cy="5032375"/>
+          </a:xfrm>
+        </p:spPr>
         <p:txBody>
           <a:bodyPr/>
           <a:lstStyle/>
           <a:p>
             <a:r>
               <a:rPr lang="pt-BR" dirty="0"/>
-              <a:t>Para que as </a:t>
-            </a:r>
+              <a:t>Uma RNN utiliza informações sequenciais, modelando as dependências temporais entre as amostras de entrada.</a:t>
+            </a:r>
+          </a:p>
+          <a:p>
+            <a:r>
+              <a:rPr lang="pt-BR" b="1" dirty="0"/>
+              <a:t>Exemplo</a:t>
+            </a:r>
+            <a:r>
+              <a:rPr lang="pt-BR" dirty="0"/>
+              <a:t>: se quisermos prever a próxima palavra em uma frase, precisamos saber quais palavras vieram antes dela.</a:t>
+            </a:r>
+          </a:p>
+          <a:p>
             <a:r>
               <a:rPr lang="pt-BR" dirty="0" err="1"/>
               <a:t>RNNs</a:t>
             </a:r>
             <a:r>
               <a:rPr lang="pt-BR" dirty="0"/>
-              <a:t> aprendam de forma efetiva, usamos uma versão levemente modificada do </a:t>
-            </a:r>
-            <a:r>
-              <a:rPr lang="pt-BR" dirty="0" err="1" smtClean="0"/>
-              <a:t>Backpropagation</a:t>
-            </a:r>
-            <a:r>
-              <a:rPr lang="pt-BR" smtClean="0"/>
-              <a:t>: BPTT</a:t>
-            </a:r>
-          </a:p>
-          <a:p>
-            <a:r>
-              <a:rPr lang="pt-BR" dirty="0" smtClean="0"/>
-              <a:t>Gradiente </a:t>
+              <a:t> são projetadas para processar sequências de </a:t>
+            </a:r>
+            <a:r>
+              <a:rPr lang="pt-BR" b="1" dirty="0"/>
+              <a:t>comprimento variável</a:t>
             </a:r>
             <a:r>
               <a:rPr lang="pt-BR" dirty="0"/>
-              <a:t>ao longo do </a:t>
-            </a:r>
-            <a:r>
-              <a:rPr lang="pt-BR" dirty="0" smtClean="0"/>
-              <a:t>tempo</a:t>
-            </a:r>
-          </a:p>
-          <a:p>
-            <a:r>
-              <a:rPr lang="pt-BR" dirty="0" smtClean="0"/>
-              <a:t>Rede </a:t>
-            </a:r>
+              <a:t>. </a:t>
+            </a:r>
+          </a:p>
+          <a:p>
             <a:r>
               <a:rPr lang="pt-BR" dirty="0"/>
-              <a:t>“</a:t>
-            </a:r>
-            <a:r>
-              <a:rPr lang="pt-BR" dirty="0" smtClean="0"/>
-              <a:t>desdobrada”</a:t>
-            </a:r>
-          </a:p>
-          <a:p>
-            <a:r>
-              <a:rPr lang="pt-BR" dirty="0"/>
-              <a:t>Soma gradientes em todos os </a:t>
-            </a:r>
-            <a:r>
-              <a:rPr lang="pt-BR" dirty="0" smtClean="0"/>
-              <a:t>passos</a:t>
-            </a:r>
-          </a:p>
-          <a:p>
-            <a:r>
-              <a:rPr lang="pt-BR" dirty="0" smtClean="0"/>
-              <a:t>Pesos compartilhados</a:t>
-            </a:r>
-          </a:p>
-          <a:p>
-            <a:endParaRPr lang="pt-BR" dirty="0"/>
-          </a:p>
-        </p:txBody>
-      </p:sp>
+              <a:t>Elas mapeiam todo o histórico de entradas anteriores para cada saída.</a:t>
+            </a:r>
+          </a:p>
+        </p:txBody>
+      </p:sp>
+      <p:pic>
+        <p:nvPicPr>
+          <p:cNvPr id="3074" name="Picture 2" descr="RNN architecture and the concept of sequential memory |... | Fiveable">
+            <a:extLst>
+              <a:ext uri="{FF2B5EF4-FFF2-40B4-BE49-F238E27FC236}">
+                <a16:creationId xmlns:a16="http://schemas.microsoft.com/office/drawing/2014/main" id="{65461C4D-C555-02A7-8AE3-2D52AC2FCB0C}"/>
+              </a:ext>
+            </a:extLst>
+          </p:cNvPr>
+          <p:cNvPicPr>
+            <a:picLocks noChangeAspect="1" noChangeArrowheads="1"/>
+          </p:cNvPicPr>
+          <p:nvPr/>
+        </p:nvPicPr>
+        <p:blipFill rotWithShape="1">
+          <a:blip r:embed="rId3">
+            <a:extLst>
+              <a:ext uri="{28A0092B-C50C-407E-A947-70E740481C1C}">
+                <a14:useLocalDpi xmlns:a14="http://schemas.microsoft.com/office/drawing/2010/main" val="0"/>
+              </a:ext>
+            </a:extLst>
+          </a:blip>
+          <a:srcRect l="982" t="38503" r="81251" b="2949"/>
+          <a:stretch>
+            <a:fillRect/>
+          </a:stretch>
+        </p:blipFill>
+        <p:spPr bwMode="auto">
+          <a:xfrm>
+            <a:off x="1534885" y="2296884"/>
+            <a:ext cx="2471058" cy="3663126"/>
+          </a:xfrm>
+          <a:prstGeom prst="rect">
+            <a:avLst/>
+          </a:prstGeom>
+          <a:noFill/>
+          <a:extLst>
+            <a:ext uri="{909E8E84-426E-40DD-AFC4-6F175D3DCCD1}">
+              <a14:hiddenFill xmlns:a14="http://schemas.microsoft.com/office/drawing/2010/main">
+                <a:solidFill>
+                  <a:srgbClr val="FFFFFF"/>
+                </a:solidFill>
+              </a14:hiddenFill>
+            </a:ext>
+          </a:extLst>
+        </p:spPr>
+      </p:pic>
     </p:spTree>
     <p:extLst>
       <p:ext uri="{BB962C8B-B14F-4D97-AF65-F5344CB8AC3E}">
-        <p14:creationId xmlns:p14="http://schemas.microsoft.com/office/powerpoint/2010/main" val="804522834"/>
+        <p14:creationId xmlns:p14="http://schemas.microsoft.com/office/powerpoint/2010/main" val="4020878568"/>
       </p:ext>
     </p:extLst>
   </p:cSld>
@@ -5699,30 +7521,13 @@
       </p:grpSpPr>
       <p:sp>
         <p:nvSpPr>
-          <p:cNvPr id="2" name="Título 1"/>
-          <p:cNvSpPr>
-            <a:spLocks noGrp="1"/>
-          </p:cNvSpPr>
-          <p:nvPr>
-            <p:ph type="title"/>
-          </p:nvPr>
-        </p:nvSpPr>
-        <p:spPr/>
-        <p:txBody>
-          <a:bodyPr/>
-          <a:lstStyle/>
-          <a:p>
-            <a:r>
-              <a:rPr lang="pt-BR" dirty="0" smtClean="0"/>
-              <a:t>Desaparecimento do gradiente</a:t>
-            </a:r>
-            <a:endParaRPr lang="pt-BR" dirty="0"/>
-          </a:p>
-        </p:txBody>
-      </p:sp>
-      <p:sp>
-        <p:nvSpPr>
-          <p:cNvPr id="3" name="Espaço Reservado para Conteúdo 2"/>
+          <p:cNvPr id="3" name="Content Placeholder 2">
+            <a:extLst>
+              <a:ext uri="{FF2B5EF4-FFF2-40B4-BE49-F238E27FC236}">
+                <a16:creationId xmlns:a16="http://schemas.microsoft.com/office/drawing/2014/main" id="{BBA7CF3C-2AB5-ECC1-9920-3B2DE38CC33B}"/>
+              </a:ext>
+            </a:extLst>
+          </p:cNvPr>
           <p:cNvSpPr>
             <a:spLocks noGrp="1"/>
           </p:cNvSpPr>
@@ -5730,64 +7535,33 @@
             <p:ph idx="1"/>
           </p:nvPr>
         </p:nvSpPr>
-        <p:spPr/>
-        <p:txBody>
-          <a:bodyPr/>
-          <a:lstStyle/>
-          <a:p>
-            <a:r>
-              <a:rPr lang="pt-BR" dirty="0"/>
-              <a:t>Gradientes → muito </a:t>
-            </a:r>
-            <a:r>
-              <a:rPr lang="pt-BR" dirty="0" smtClean="0"/>
-              <a:t>pequenos</a:t>
-            </a:r>
-          </a:p>
-          <a:p>
-            <a:r>
-              <a:rPr lang="pt-BR" dirty="0" smtClean="0"/>
-              <a:t>Informação </a:t>
-            </a:r>
-            <a:r>
-              <a:rPr lang="pt-BR" dirty="0"/>
-              <a:t>antiga se </a:t>
-            </a:r>
-            <a:r>
-              <a:rPr lang="pt-BR" dirty="0" smtClean="0"/>
-              <a:t>perde</a:t>
-            </a:r>
-          </a:p>
-          <a:p>
-            <a:r>
-              <a:rPr lang="pt-BR" dirty="0" smtClean="0"/>
-              <a:t>Dificuldade </a:t>
-            </a:r>
-            <a:r>
-              <a:rPr lang="pt-BR" dirty="0"/>
-              <a:t>com dependências </a:t>
-            </a:r>
-            <a:r>
-              <a:rPr lang="pt-BR" dirty="0" smtClean="0"/>
-              <a:t>longas</a:t>
-            </a:r>
-          </a:p>
-          <a:p>
-            <a:r>
-              <a:rPr lang="pt-BR" dirty="0" smtClean="0"/>
-              <a:t>Consequência: </a:t>
-            </a:r>
-            <a:r>
-              <a:rPr lang="pt-BR" dirty="0"/>
-              <a:t>RNN aprende apenas dependências curtas</a:t>
-            </a:r>
+        <p:spPr>
+          <a:xfrm>
+            <a:off x="838200" y="2796041"/>
+            <a:ext cx="10515600" cy="1265918"/>
+          </a:xfrm>
+        </p:spPr>
+        <p:txBody>
+          <a:bodyPr>
+            <a:normAutofit/>
+          </a:bodyPr>
+          <a:lstStyle/>
+          <a:p>
+            <a:pPr marL="0" indent="0" algn="ctr">
+              <a:buNone/>
+            </a:pPr>
+            <a:r>
+              <a:rPr lang="pt-BR" sz="6000" dirty="0"/>
+              <a:t>Componentes de uma RNN</a:t>
+            </a:r>
+            <a:endParaRPr lang="en-US" sz="6000" dirty="0"/>
           </a:p>
         </p:txBody>
       </p:sp>
     </p:spTree>
     <p:extLst>
       <p:ext uri="{BB962C8B-B14F-4D97-AF65-F5344CB8AC3E}">
-        <p14:creationId xmlns:p14="http://schemas.microsoft.com/office/powerpoint/2010/main" val="753048316"/>
+        <p14:creationId xmlns:p14="http://schemas.microsoft.com/office/powerpoint/2010/main" val="3514049726"/>
       </p:ext>
     </p:extLst>
   </p:cSld>
@@ -5816,41 +7590,533 @@
       </p:grpSpPr>
       <p:sp>
         <p:nvSpPr>
-          <p:cNvPr id="3" name="Espaço Reservado para Conteúdo 2"/>
-          <p:cNvSpPr>
-            <a:spLocks noGrp="1"/>
-          </p:cNvSpPr>
-          <p:nvPr>
-            <p:ph idx="1"/>
-          </p:nvPr>
-        </p:nvSpPr>
+          <p:cNvPr id="2" name="Title 1">
+            <a:extLst>
+              <a:ext uri="{FF2B5EF4-FFF2-40B4-BE49-F238E27FC236}">
+                <a16:creationId xmlns:a16="http://schemas.microsoft.com/office/drawing/2014/main" id="{671F0C14-67BD-40CF-9A8F-E9FC30FC96E5}"/>
+              </a:ext>
+            </a:extLst>
+          </p:cNvPr>
+          <p:cNvSpPr>
+            <a:spLocks noGrp="1"/>
+          </p:cNvSpPr>
+          <p:nvPr>
+            <p:ph type="title"/>
+          </p:nvPr>
+        </p:nvSpPr>
+        <p:spPr/>
+        <p:txBody>
+          <a:bodyPr/>
+          <a:lstStyle/>
+          <a:p>
+            <a:r>
+              <a:rPr lang="pt-BR" dirty="0"/>
+              <a:t>Neurônio recorrente</a:t>
+            </a:r>
+            <a:endParaRPr lang="en-US" dirty="0"/>
+          </a:p>
+        </p:txBody>
+      </p:sp>
+      <mc:AlternateContent xmlns:mc="http://schemas.openxmlformats.org/markup-compatibility/2006">
+        <mc:Choice xmlns:a14="http://schemas.microsoft.com/office/drawing/2010/main" Requires="a14">
+          <p:sp>
+            <p:nvSpPr>
+              <p:cNvPr id="3" name="Content Placeholder 2">
+                <a:extLst>
+                  <a:ext uri="{FF2B5EF4-FFF2-40B4-BE49-F238E27FC236}">
+                    <a16:creationId xmlns:a16="http://schemas.microsoft.com/office/drawing/2014/main" id="{6FF8CB8C-0F2B-7C4F-63CA-34C693F26321}"/>
+                  </a:ext>
+                </a:extLst>
+              </p:cNvPr>
+              <p:cNvSpPr>
+                <a:spLocks noGrp="1"/>
+              </p:cNvSpPr>
+              <p:nvPr>
+                <p:ph idx="1"/>
+              </p:nvPr>
+            </p:nvSpPr>
+            <p:spPr>
+              <a:xfrm>
+                <a:off x="5812971" y="1825624"/>
+                <a:ext cx="6226629" cy="5032375"/>
+              </a:xfrm>
+            </p:spPr>
+            <p:txBody>
+              <a:bodyPr/>
+              <a:lstStyle/>
+              <a:p>
+                <a14:m>
+                  <m:oMath xmlns:m="http://schemas.openxmlformats.org/officeDocument/2006/math">
+                    <m:r>
+                      <a:rPr lang="pt-BR" b="0" i="1" smtClean="0">
+                        <a:latin typeface="Cambria Math" panose="02040503050406030204" pitchFamily="18" charset="0"/>
+                      </a:rPr>
+                      <m:t>𝑥</m:t>
+                    </m:r>
+                  </m:oMath>
+                </a14:m>
+                <a:r>
+                  <a:rPr lang="en-US" dirty="0"/>
+                  <a:t>: entrada</a:t>
+                </a:r>
+              </a:p>
+              <a:p>
+                <a14:m>
+                  <m:oMath xmlns:m="http://schemas.openxmlformats.org/officeDocument/2006/math">
+                    <m:r>
+                      <a:rPr lang="pt-BR" b="0" i="1" smtClean="0">
+                        <a:latin typeface="Cambria Math" panose="02040503050406030204" pitchFamily="18" charset="0"/>
+                      </a:rPr>
+                      <m:t>𝑦</m:t>
+                    </m:r>
+                  </m:oMath>
+                </a14:m>
+                <a:r>
+                  <a:rPr lang="en-US" dirty="0"/>
+                  <a:t>: </a:t>
+                </a:r>
+                <a:r>
+                  <a:rPr lang="en-US" dirty="0" err="1"/>
+                  <a:t>saída</a:t>
+                </a:r>
+                <a:endParaRPr lang="en-US" dirty="0"/>
+              </a:p>
+              <a:p>
+                <a14:m>
+                  <m:oMath xmlns:m="http://schemas.openxmlformats.org/officeDocument/2006/math">
+                    <m:r>
+                      <a:rPr lang="pt-BR" b="0" i="1" smtClean="0">
+                        <a:latin typeface="Cambria Math" panose="02040503050406030204" pitchFamily="18" charset="0"/>
+                      </a:rPr>
+                      <m:t>h</m:t>
+                    </m:r>
+                  </m:oMath>
+                </a14:m>
+                <a:r>
+                  <a:rPr lang="en-US" dirty="0"/>
+                  <a:t>: </a:t>
+                </a:r>
+                <a:r>
+                  <a:rPr lang="en-US" dirty="0" err="1"/>
+                  <a:t>estado</a:t>
+                </a:r>
+                <a:r>
+                  <a:rPr lang="en-US" dirty="0"/>
+                  <a:t> </a:t>
+                </a:r>
+                <a:r>
+                  <a:rPr lang="en-US" dirty="0" err="1"/>
+                  <a:t>interno</a:t>
+                </a:r>
+                <a:r>
+                  <a:rPr lang="en-US" dirty="0"/>
+                  <a:t> (</a:t>
+                </a:r>
+                <a:r>
+                  <a:rPr lang="en-US" dirty="0" err="1"/>
+                  <a:t>memória</a:t>
+                </a:r>
+                <a:r>
+                  <a:rPr lang="en-US" dirty="0"/>
+                  <a:t> da rede)</a:t>
+                </a:r>
+              </a:p>
+              <a:p>
+                <a14:m>
+                  <m:oMath xmlns:m="http://schemas.openxmlformats.org/officeDocument/2006/math">
+                    <m:sSubSup>
+                      <m:sSubSupPr>
+                        <m:ctrlPr>
+                          <a:rPr lang="pt-BR" i="1" smtClean="0">
+                            <a:latin typeface="Cambria Math" panose="02040503050406030204" pitchFamily="18" charset="0"/>
+                          </a:rPr>
+                        </m:ctrlPr>
+                      </m:sSubSupPr>
+                      <m:e>
+                        <m:r>
+                          <a:rPr lang="pt-BR" b="0" i="1" smtClean="0">
+                            <a:latin typeface="Cambria Math" panose="02040503050406030204" pitchFamily="18" charset="0"/>
+                          </a:rPr>
+                          <m:t>𝑊</m:t>
+                        </m:r>
+                      </m:e>
+                      <m:sub>
+                        <m:r>
+                          <a:rPr lang="pt-BR" b="0" i="1" smtClean="0">
+                            <a:latin typeface="Cambria Math" panose="02040503050406030204" pitchFamily="18" charset="0"/>
+                          </a:rPr>
+                          <m:t>𝑖</m:t>
+                        </m:r>
+                      </m:sub>
+                      <m:sup>
+                        <m:r>
+                          <a:rPr lang="pt-BR" b="0" i="1" smtClean="0">
+                            <a:latin typeface="Cambria Math" panose="02040503050406030204" pitchFamily="18" charset="0"/>
+                          </a:rPr>
+                          <m:t>h</m:t>
+                        </m:r>
+                      </m:sup>
+                    </m:sSubSup>
+                  </m:oMath>
+                </a14:m>
+                <a:r>
+                  <a:rPr lang="en-US" dirty="0"/>
+                  <a:t>: pesos de entrada</a:t>
+                </a:r>
+              </a:p>
+              <a:p>
+                <a14:m>
+                  <m:oMath xmlns:m="http://schemas.openxmlformats.org/officeDocument/2006/math">
+                    <m:sSubSup>
+                      <m:sSubSupPr>
+                        <m:ctrlPr>
+                          <a:rPr lang="pt-BR" i="1">
+                            <a:latin typeface="Cambria Math" panose="02040503050406030204" pitchFamily="18" charset="0"/>
+                          </a:rPr>
+                        </m:ctrlPr>
+                      </m:sSubSupPr>
+                      <m:e>
+                        <m:r>
+                          <a:rPr lang="pt-BR" i="1">
+                            <a:latin typeface="Cambria Math" panose="02040503050406030204" pitchFamily="18" charset="0"/>
+                          </a:rPr>
+                          <m:t>𝑊</m:t>
+                        </m:r>
+                      </m:e>
+                      <m:sub>
+                        <m:r>
+                          <a:rPr lang="pt-BR" b="0" i="1" smtClean="0">
+                            <a:latin typeface="Cambria Math" panose="02040503050406030204" pitchFamily="18" charset="0"/>
+                          </a:rPr>
+                          <m:t>h</m:t>
+                        </m:r>
+                      </m:sub>
+                      <m:sup>
+                        <m:r>
+                          <a:rPr lang="pt-BR" i="1">
+                            <a:latin typeface="Cambria Math" panose="02040503050406030204" pitchFamily="18" charset="0"/>
+                          </a:rPr>
+                          <m:t>h</m:t>
+                        </m:r>
+                      </m:sup>
+                    </m:sSubSup>
+                  </m:oMath>
+                </a14:m>
+                <a:r>
+                  <a:rPr lang="en-US" dirty="0"/>
+                  <a:t>: pesos da </a:t>
+                </a:r>
+                <a:r>
+                  <a:rPr lang="en-US" dirty="0" err="1"/>
+                  <a:t>camada</a:t>
+                </a:r>
+                <a:r>
+                  <a:rPr lang="en-US" dirty="0"/>
+                  <a:t> </a:t>
+                </a:r>
+                <a:r>
+                  <a:rPr lang="en-US" dirty="0" err="1"/>
+                  <a:t>recorrente</a:t>
+                </a:r>
+                <a:endParaRPr lang="en-US" dirty="0"/>
+              </a:p>
+              <a:p>
+                <a14:m>
+                  <m:oMath xmlns:m="http://schemas.openxmlformats.org/officeDocument/2006/math">
+                    <m:sSubSup>
+                      <m:sSubSupPr>
+                        <m:ctrlPr>
+                          <a:rPr lang="pt-BR" i="1">
+                            <a:latin typeface="Cambria Math" panose="02040503050406030204" pitchFamily="18" charset="0"/>
+                          </a:rPr>
+                        </m:ctrlPr>
+                      </m:sSubSupPr>
+                      <m:e>
+                        <m:r>
+                          <a:rPr lang="pt-BR" i="1">
+                            <a:latin typeface="Cambria Math" panose="02040503050406030204" pitchFamily="18" charset="0"/>
+                          </a:rPr>
+                          <m:t>𝑊</m:t>
+                        </m:r>
+                      </m:e>
+                      <m:sub>
+                        <m:r>
+                          <a:rPr lang="pt-BR" b="0" i="1" smtClean="0">
+                            <a:latin typeface="Cambria Math" panose="02040503050406030204" pitchFamily="18" charset="0"/>
+                          </a:rPr>
+                          <m:t>h</m:t>
+                        </m:r>
+                      </m:sub>
+                      <m:sup>
+                        <m:r>
+                          <a:rPr lang="pt-BR" b="0" i="1" smtClean="0">
+                            <a:latin typeface="Cambria Math" panose="02040503050406030204" pitchFamily="18" charset="0"/>
+                          </a:rPr>
+                          <m:t>𝑜</m:t>
+                        </m:r>
+                      </m:sup>
+                    </m:sSubSup>
+                  </m:oMath>
+                </a14:m>
+                <a:r>
+                  <a:rPr lang="en-US" dirty="0"/>
+                  <a:t>: pesos de </a:t>
+                </a:r>
+                <a:r>
+                  <a:rPr lang="en-US" dirty="0" err="1"/>
+                  <a:t>saída</a:t>
+                </a:r>
+                <a:endParaRPr lang="en-US" dirty="0"/>
+              </a:p>
+              <a:p>
+                <a14:m>
+                  <m:oMath xmlns:m="http://schemas.openxmlformats.org/officeDocument/2006/math">
+                    <m:sSup>
+                      <m:sSupPr>
+                        <m:ctrlPr>
+                          <a:rPr lang="pt-BR" i="1" smtClean="0">
+                            <a:latin typeface="Cambria Math" panose="02040503050406030204" pitchFamily="18" charset="0"/>
+                          </a:rPr>
+                        </m:ctrlPr>
+                      </m:sSupPr>
+                      <m:e>
+                        <m:r>
+                          <a:rPr lang="pt-BR" b="0" i="1" smtClean="0">
+                            <a:latin typeface="Cambria Math" panose="02040503050406030204" pitchFamily="18" charset="0"/>
+                          </a:rPr>
+                          <m:t>𝑧</m:t>
+                        </m:r>
+                      </m:e>
+                      <m:sup>
+                        <m:r>
+                          <a:rPr lang="pt-BR" b="0" i="1" smtClean="0">
+                            <a:latin typeface="Cambria Math" panose="02040503050406030204" pitchFamily="18" charset="0"/>
+                          </a:rPr>
+                          <m:t>−1</m:t>
+                        </m:r>
+                      </m:sup>
+                    </m:sSup>
+                  </m:oMath>
+                </a14:m>
+                <a:r>
+                  <a:rPr lang="pt-BR" dirty="0"/>
+                  <a:t>: unidade de retardo de tempo</a:t>
+                </a:r>
+              </a:p>
+              <a:p>
+                <a:r>
+                  <a:rPr lang="en-US" dirty="0"/>
+                  <a:t>       : </a:t>
+                </a:r>
+                <a:r>
+                  <a:rPr lang="en-US" dirty="0" err="1"/>
+                  <a:t>função</a:t>
+                </a:r>
+                <a:r>
+                  <a:rPr lang="en-US" dirty="0"/>
+                  <a:t> de </a:t>
+                </a:r>
+                <a:r>
+                  <a:rPr lang="en-US" dirty="0" err="1"/>
+                  <a:t>ativação</a:t>
+                </a:r>
+                <a:r>
+                  <a:rPr lang="en-US" dirty="0"/>
+                  <a:t>, </a:t>
+                </a:r>
+                <a14:m>
+                  <m:oMath xmlns:m="http://schemas.openxmlformats.org/officeDocument/2006/math">
+                    <m:r>
+                      <a:rPr lang="pt-BR" b="0" i="1" smtClean="0">
+                        <a:latin typeface="Cambria Math" panose="02040503050406030204" pitchFamily="18" charset="0"/>
+                      </a:rPr>
+                      <m:t>𝑓</m:t>
+                    </m:r>
+                    <m:r>
+                      <a:rPr lang="pt-BR" b="0" i="1" smtClean="0">
+                        <a:latin typeface="Cambria Math" panose="02040503050406030204" pitchFamily="18" charset="0"/>
+                      </a:rPr>
+                      <m:t>(.)</m:t>
+                    </m:r>
+                  </m:oMath>
+                </a14:m>
+                <a:endParaRPr lang="en-US" dirty="0"/>
+              </a:p>
+              <a:p>
+                <a:endParaRPr lang="en-US" dirty="0"/>
+              </a:p>
+              <a:p>
+                <a:endParaRPr lang="en-US" dirty="0"/>
+              </a:p>
+              <a:p>
+                <a:endParaRPr lang="en-US" dirty="0"/>
+              </a:p>
+              <a:p>
+                <a:endParaRPr lang="en-US" dirty="0"/>
+              </a:p>
+            </p:txBody>
+          </p:sp>
+        </mc:Choice>
+        <mc:Fallback>
+          <p:sp>
+            <p:nvSpPr>
+              <p:cNvPr id="3" name="Content Placeholder 2">
+                <a:extLst>
+                  <a:ext uri="{FF2B5EF4-FFF2-40B4-BE49-F238E27FC236}">
+                    <a16:creationId xmlns:a16="http://schemas.microsoft.com/office/drawing/2014/main" id="{6FF8CB8C-0F2B-7C4F-63CA-34C693F26321}"/>
+                  </a:ext>
+                </a:extLst>
+              </p:cNvPr>
+              <p:cNvSpPr>
+                <a:spLocks noGrp="1" noRot="1" noChangeAspect="1" noMove="1" noResize="1" noEditPoints="1" noAdjustHandles="1" noChangeArrowheads="1" noChangeShapeType="1" noTextEdit="1"/>
+              </p:cNvSpPr>
+              <p:nvPr>
+                <p:ph idx="1"/>
+              </p:nvPr>
+            </p:nvSpPr>
+            <p:spPr>
+              <a:xfrm>
+                <a:off x="5812971" y="1825624"/>
+                <a:ext cx="6226629" cy="5032375"/>
+              </a:xfrm>
+              <a:blipFill>
+                <a:blip r:embed="rId3"/>
+                <a:stretch>
+                  <a:fillRect l="-1763" t="-1937"/>
+                </a:stretch>
+              </a:blipFill>
+            </p:spPr>
+            <p:txBody>
+              <a:bodyPr/>
+              <a:lstStyle/>
+              <a:p>
+                <a:r>
+                  <a:rPr lang="en-US">
+                    <a:noFill/>
+                  </a:rPr>
+                  <a:t> </a:t>
+                </a:r>
+              </a:p>
+            </p:txBody>
+          </p:sp>
+        </mc:Fallback>
+      </mc:AlternateContent>
+      <p:grpSp>
+        <p:nvGrpSpPr>
+          <p:cNvPr id="7" name="Group 6">
+            <a:extLst>
+              <a:ext uri="{FF2B5EF4-FFF2-40B4-BE49-F238E27FC236}">
+                <a16:creationId xmlns:a16="http://schemas.microsoft.com/office/drawing/2014/main" id="{07CF1336-6500-31F8-A99F-18490071D204}"/>
+              </a:ext>
+            </a:extLst>
+          </p:cNvPr>
+          <p:cNvGrpSpPr/>
+          <p:nvPr/>
+        </p:nvGrpSpPr>
+        <p:grpSpPr>
+          <a:xfrm>
+            <a:off x="2424004" y="1825624"/>
+            <a:ext cx="1552792" cy="4315427"/>
+            <a:chOff x="1476947" y="2177448"/>
+            <a:chExt cx="1552792" cy="4315427"/>
+          </a:xfrm>
+        </p:grpSpPr>
+        <p:pic>
+          <p:nvPicPr>
+            <p:cNvPr id="5" name="Picture 4">
+              <a:extLst>
+                <a:ext uri="{FF2B5EF4-FFF2-40B4-BE49-F238E27FC236}">
+                  <a16:creationId xmlns:a16="http://schemas.microsoft.com/office/drawing/2014/main" id="{2C831661-2CE6-5B2F-909B-4F2436E81BEC}"/>
+                </a:ext>
+              </a:extLst>
+            </p:cNvPr>
+            <p:cNvPicPr>
+              <a:picLocks noChangeAspect="1"/>
+            </p:cNvPicPr>
+            <p:nvPr/>
+          </p:nvPicPr>
+          <p:blipFill>
+            <a:blip r:embed="rId4"/>
+            <a:stretch>
+              <a:fillRect/>
+            </a:stretch>
+          </p:blipFill>
+          <p:spPr>
+            <a:xfrm>
+              <a:off x="1476947" y="2177448"/>
+              <a:ext cx="1552792" cy="4315427"/>
+            </a:xfrm>
+            <a:prstGeom prst="rect">
+              <a:avLst/>
+            </a:prstGeom>
+          </p:spPr>
+        </p:pic>
+        <p:pic>
+          <p:nvPicPr>
+            <p:cNvPr id="6" name="Picture 5">
+              <a:extLst>
+                <a:ext uri="{FF2B5EF4-FFF2-40B4-BE49-F238E27FC236}">
+                  <a16:creationId xmlns:a16="http://schemas.microsoft.com/office/drawing/2014/main" id="{30F1C619-774A-B347-226C-0EA89894C739}"/>
+                </a:ext>
+              </a:extLst>
+            </p:cNvPr>
+            <p:cNvPicPr>
+              <a:picLocks noChangeAspect="1"/>
+            </p:cNvPicPr>
+            <p:nvPr/>
+          </p:nvPicPr>
+          <p:blipFill>
+            <a:blip r:embed="rId4"/>
+            <a:srcRect l="59816" t="89723" r="14947" b="2710"/>
+            <a:stretch>
+              <a:fillRect/>
+            </a:stretch>
+          </p:blipFill>
+          <p:spPr>
+            <a:xfrm>
+              <a:off x="2637853" y="6013677"/>
+              <a:ext cx="391886" cy="326571"/>
+            </a:xfrm>
+            <a:prstGeom prst="rect">
+              <a:avLst/>
+            </a:prstGeom>
+          </p:spPr>
+        </p:pic>
+      </p:grpSp>
+      <p:pic>
+        <p:nvPicPr>
+          <p:cNvPr id="10" name="Picture 9">
+            <a:extLst>
+              <a:ext uri="{FF2B5EF4-FFF2-40B4-BE49-F238E27FC236}">
+                <a16:creationId xmlns:a16="http://schemas.microsoft.com/office/drawing/2014/main" id="{377ED572-EE63-9E0B-64E3-7DF577A4C2BA}"/>
+              </a:ext>
+            </a:extLst>
+          </p:cNvPr>
+          <p:cNvPicPr>
+            <a:picLocks noChangeAspect="1"/>
+          </p:cNvPicPr>
+          <p:nvPr/>
+        </p:nvPicPr>
+        <p:blipFill>
+          <a:blip r:embed="rId5"/>
+          <a:stretch>
+            <a:fillRect/>
+          </a:stretch>
+        </p:blipFill>
         <p:spPr>
           <a:xfrm>
-            <a:off x="788323" y="2873029"/>
-            <a:ext cx="10515600" cy="1067203"/>
+            <a:off x="6096000" y="5405405"/>
+            <a:ext cx="466790" cy="466790"/>
           </a:xfrm>
+          <a:prstGeom prst="rect">
+            <a:avLst/>
+          </a:prstGeom>
         </p:spPr>
-        <p:txBody>
-          <a:bodyPr>
-            <a:normAutofit/>
-          </a:bodyPr>
-          <a:lstStyle/>
-          <a:p>
-            <a:pPr marL="0" indent="0" algn="ctr">
-              <a:buNone/>
-            </a:pPr>
-            <a:r>
-              <a:rPr lang="pt-BR" sz="6000" dirty="0" smtClean="0"/>
-              <a:t>LSTM</a:t>
-            </a:r>
-            <a:endParaRPr lang="pt-BR" sz="6000" dirty="0"/>
-          </a:p>
-        </p:txBody>
-      </p:sp>
+      </p:pic>
     </p:spTree>
     <p:extLst>
       <p:ext uri="{BB962C8B-B14F-4D97-AF65-F5344CB8AC3E}">
-        <p14:creationId xmlns:p14="http://schemas.microsoft.com/office/powerpoint/2010/main" val="3863331605"/>
+        <p14:creationId xmlns:p14="http://schemas.microsoft.com/office/powerpoint/2010/main" val="3484164396"/>
       </p:ext>
     </p:extLst>
   </p:cSld>

--- a/slides/C24_RNN.pptx
+++ b/slides/C24_RNN.pptx
@@ -5,10 +5,10 @@
     <p:sldMasterId id="2147483648" r:id="rId1"/>
   </p:sldMasterIdLst>
   <p:notesMasterIdLst>
-    <p:notesMasterId r:id="rId23"/>
+    <p:notesMasterId r:id="rId24"/>
   </p:notesMasterIdLst>
   <p:handoutMasterIdLst>
-    <p:handoutMasterId r:id="rId24"/>
+    <p:handoutMasterId r:id="rId25"/>
   </p:handoutMasterIdLst>
   <p:sldIdLst>
     <p:sldId id="256" r:id="rId2"/>
@@ -20,18 +20,19 @@
     <p:sldId id="326" r:id="rId8"/>
     <p:sldId id="328" r:id="rId9"/>
     <p:sldId id="329" r:id="rId10"/>
-    <p:sldId id="332" r:id="rId11"/>
-    <p:sldId id="333" r:id="rId12"/>
-    <p:sldId id="330" r:id="rId13"/>
-    <p:sldId id="331" r:id="rId14"/>
-    <p:sldId id="319" r:id="rId15"/>
-    <p:sldId id="320" r:id="rId16"/>
-    <p:sldId id="322" r:id="rId17"/>
-    <p:sldId id="321" r:id="rId18"/>
-    <p:sldId id="324" r:id="rId19"/>
-    <p:sldId id="323" r:id="rId20"/>
-    <p:sldId id="293" r:id="rId21"/>
-    <p:sldId id="306" r:id="rId22"/>
+    <p:sldId id="334" r:id="rId11"/>
+    <p:sldId id="332" r:id="rId12"/>
+    <p:sldId id="333" r:id="rId13"/>
+    <p:sldId id="330" r:id="rId14"/>
+    <p:sldId id="331" r:id="rId15"/>
+    <p:sldId id="319" r:id="rId16"/>
+    <p:sldId id="320" r:id="rId17"/>
+    <p:sldId id="322" r:id="rId18"/>
+    <p:sldId id="321" r:id="rId19"/>
+    <p:sldId id="324" r:id="rId20"/>
+    <p:sldId id="323" r:id="rId21"/>
+    <p:sldId id="293" r:id="rId22"/>
+    <p:sldId id="306" r:id="rId23"/>
   </p:sldIdLst>
   <p:sldSz cx="12192000" cy="6858000"/>
   <p:notesSz cx="7315200" cy="9601200"/>
@@ -1293,6 +1294,114 @@
   <p:cSld>
     <p:spTree>
       <p:nvGrpSpPr>
+        <p:cNvPr id="1" name="">
+          <a:extLst>
+            <a:ext uri="{FF2B5EF4-FFF2-40B4-BE49-F238E27FC236}">
+              <a16:creationId xmlns:a16="http://schemas.microsoft.com/office/drawing/2014/main" id="{31181A3B-733B-928E-1D84-1F64E3273B8B}"/>
+            </a:ext>
+          </a:extLst>
+        </p:cNvPr>
+        <p:cNvGrpSpPr/>
+        <p:nvPr/>
+      </p:nvGrpSpPr>
+      <p:grpSpPr>
+        <a:xfrm>
+          <a:off x="0" y="0"/>
+          <a:ext cx="0" cy="0"/>
+          <a:chOff x="0" y="0"/>
+          <a:chExt cx="0" cy="0"/>
+        </a:xfrm>
+      </p:grpSpPr>
+      <p:sp>
+        <p:nvSpPr>
+          <p:cNvPr id="2" name="Slide Image Placeholder 1">
+            <a:extLst>
+              <a:ext uri="{FF2B5EF4-FFF2-40B4-BE49-F238E27FC236}">
+                <a16:creationId xmlns:a16="http://schemas.microsoft.com/office/drawing/2014/main" id="{E3272983-0C6A-43FE-BA89-508E0B2125CA}"/>
+              </a:ext>
+            </a:extLst>
+          </p:cNvPr>
+          <p:cNvSpPr>
+            <a:spLocks noGrp="1" noRot="1" noChangeAspect="1"/>
+          </p:cNvSpPr>
+          <p:nvPr>
+            <p:ph type="sldImg"/>
+          </p:nvPr>
+        </p:nvSpPr>
+        <p:spPr/>
+      </p:sp>
+      <p:sp>
+        <p:nvSpPr>
+          <p:cNvPr id="3" name="Notes Placeholder 2">
+            <a:extLst>
+              <a:ext uri="{FF2B5EF4-FFF2-40B4-BE49-F238E27FC236}">
+                <a16:creationId xmlns:a16="http://schemas.microsoft.com/office/drawing/2014/main" id="{AE2D7C08-7E68-409C-ED9B-AB35F3D74089}"/>
+              </a:ext>
+            </a:extLst>
+          </p:cNvPr>
+          <p:cNvSpPr>
+            <a:spLocks noGrp="1"/>
+          </p:cNvSpPr>
+          <p:nvPr>
+            <p:ph type="body" idx="1"/>
+          </p:nvPr>
+        </p:nvSpPr>
+        <p:spPr/>
+        <p:txBody>
+          <a:bodyPr/>
+          <a:lstStyle/>
+          <a:p>
+            <a:endParaRPr lang="en-US" dirty="0"/>
+          </a:p>
+        </p:txBody>
+      </p:sp>
+      <p:sp>
+        <p:nvSpPr>
+          <p:cNvPr id="4" name="Slide Number Placeholder 3">
+            <a:extLst>
+              <a:ext uri="{FF2B5EF4-FFF2-40B4-BE49-F238E27FC236}">
+                <a16:creationId xmlns:a16="http://schemas.microsoft.com/office/drawing/2014/main" id="{D6ED3A18-642E-C99A-850A-9619C8CAE361}"/>
+              </a:ext>
+            </a:extLst>
+          </p:cNvPr>
+          <p:cNvSpPr>
+            <a:spLocks noGrp="1"/>
+          </p:cNvSpPr>
+          <p:nvPr>
+            <p:ph type="sldNum" sz="quarter" idx="5"/>
+          </p:nvPr>
+        </p:nvSpPr>
+        <p:spPr/>
+        <p:txBody>
+          <a:bodyPr/>
+          <a:lstStyle/>
+          <a:p>
+            <a:fld id="{6FC8D850-966F-45A6-8DE7-15B891E7D40D}" type="slidenum">
+              <a:rPr lang="pt-BR" smtClean="0"/>
+              <a:t>10</a:t>
+            </a:fld>
+            <a:endParaRPr lang="pt-BR"/>
+          </a:p>
+        </p:txBody>
+      </p:sp>
+    </p:spTree>
+    <p:extLst>
+      <p:ext uri="{BB962C8B-B14F-4D97-AF65-F5344CB8AC3E}">
+        <p14:creationId xmlns:p14="http://schemas.microsoft.com/office/powerpoint/2010/main" val="876467571"/>
+      </p:ext>
+    </p:extLst>
+  </p:cSld>
+  <p:clrMapOvr>
+    <a:masterClrMapping/>
+  </p:clrMapOvr>
+</p:notes>
+</file>
+
+<file path=ppt/notesSlides/notesSlide8.xml><?xml version="1.0" encoding="utf-8"?>
+<p:notes xmlns:a="http://schemas.openxmlformats.org/drawingml/2006/main" xmlns:r="http://schemas.openxmlformats.org/officeDocument/2006/relationships" xmlns:p="http://schemas.openxmlformats.org/presentationml/2006/main">
+  <p:cSld>
+    <p:spTree>
+      <p:nvGrpSpPr>
         <p:cNvPr id="1" name=""/>
         <p:cNvGrpSpPr/>
         <p:nvPr/>
@@ -1366,7 +1475,7 @@
           <a:p>
             <a:fld id="{6FC8D850-966F-45A6-8DE7-15B891E7D40D}" type="slidenum">
               <a:rPr lang="pt-BR" smtClean="0"/>
-              <a:t>10</a:t>
+              <a:t>11</a:t>
             </a:fld>
             <a:endParaRPr lang="pt-BR"/>
           </a:p>
@@ -4793,6 +4902,656 @@
   <p:cSld>
     <p:spTree>
       <p:nvGrpSpPr>
+        <p:cNvPr id="1" name="">
+          <a:extLst>
+            <a:ext uri="{FF2B5EF4-FFF2-40B4-BE49-F238E27FC236}">
+              <a16:creationId xmlns:a16="http://schemas.microsoft.com/office/drawing/2014/main" id="{54D77AF7-AEE9-58FC-8805-639651C8A0E0}"/>
+            </a:ext>
+          </a:extLst>
+        </p:cNvPr>
+        <p:cNvGrpSpPr/>
+        <p:nvPr/>
+      </p:nvGrpSpPr>
+      <p:grpSpPr>
+        <a:xfrm>
+          <a:off x="0" y="0"/>
+          <a:ext cx="0" cy="0"/>
+          <a:chOff x="0" y="0"/>
+          <a:chExt cx="0" cy="0"/>
+        </a:xfrm>
+      </p:grpSpPr>
+      <p:sp>
+        <p:nvSpPr>
+          <p:cNvPr id="2" name="Title 1">
+            <a:extLst>
+              <a:ext uri="{FF2B5EF4-FFF2-40B4-BE49-F238E27FC236}">
+                <a16:creationId xmlns:a16="http://schemas.microsoft.com/office/drawing/2014/main" id="{A7B90BF9-4F35-7CC8-B4A2-9A0C7D20F69B}"/>
+              </a:ext>
+            </a:extLst>
+          </p:cNvPr>
+          <p:cNvSpPr>
+            <a:spLocks noGrp="1"/>
+          </p:cNvSpPr>
+          <p:nvPr>
+            <p:ph type="title"/>
+          </p:nvPr>
+        </p:nvSpPr>
+        <p:spPr/>
+        <p:txBody>
+          <a:bodyPr/>
+          <a:lstStyle/>
+          <a:p>
+            <a:r>
+              <a:rPr lang="pt-BR" dirty="0"/>
+              <a:t>Neurônio recorrente</a:t>
+            </a:r>
+            <a:endParaRPr lang="en-US" dirty="0"/>
+          </a:p>
+        </p:txBody>
+      </p:sp>
+      <p:sp>
+        <p:nvSpPr>
+          <p:cNvPr id="6" name="Content Placeholder 5">
+            <a:extLst>
+              <a:ext uri="{FF2B5EF4-FFF2-40B4-BE49-F238E27FC236}">
+                <a16:creationId xmlns:a16="http://schemas.microsoft.com/office/drawing/2014/main" id="{32AD1736-B6E9-B84B-54CD-849BC507F765}"/>
+              </a:ext>
+            </a:extLst>
+          </p:cNvPr>
+          <p:cNvSpPr>
+            <a:spLocks noGrp="1"/>
+          </p:cNvSpPr>
+          <p:nvPr>
+            <p:ph idx="1"/>
+          </p:nvPr>
+        </p:nvSpPr>
+        <p:spPr>
+          <a:xfrm>
+            <a:off x="7609114" y="1825625"/>
+            <a:ext cx="3744686" cy="4351338"/>
+          </a:xfrm>
+        </p:spPr>
+        <p:txBody>
+          <a:bodyPr/>
+          <a:lstStyle/>
+          <a:p>
+            <a:r>
+              <a:rPr lang="pt-BR" dirty="0"/>
+              <a:t>Outra forma de representação do neurônio.</a:t>
+            </a:r>
+            <a:endParaRPr lang="en-US" dirty="0"/>
+          </a:p>
+        </p:txBody>
+      </p:sp>
+      <p:grpSp>
+        <p:nvGrpSpPr>
+          <p:cNvPr id="55" name="Group 54">
+            <a:extLst>
+              <a:ext uri="{FF2B5EF4-FFF2-40B4-BE49-F238E27FC236}">
+                <a16:creationId xmlns:a16="http://schemas.microsoft.com/office/drawing/2014/main" id="{F1FC8C81-094A-585B-4F3A-F0DE5D997784}"/>
+              </a:ext>
+            </a:extLst>
+          </p:cNvPr>
+          <p:cNvGrpSpPr/>
+          <p:nvPr/>
+        </p:nvGrpSpPr>
+        <p:grpSpPr>
+          <a:xfrm>
+            <a:off x="654502" y="2093487"/>
+            <a:ext cx="3830414" cy="3478284"/>
+            <a:chOff x="654502" y="2093487"/>
+            <a:chExt cx="3830414" cy="3478284"/>
+          </a:xfrm>
+        </p:grpSpPr>
+        <p:sp>
+          <p:nvSpPr>
+            <p:cNvPr id="7" name="Rectangle: Rounded Corners 6">
+              <a:extLst>
+                <a:ext uri="{FF2B5EF4-FFF2-40B4-BE49-F238E27FC236}">
+                  <a16:creationId xmlns:a16="http://schemas.microsoft.com/office/drawing/2014/main" id="{0310BD8F-0E7C-F10A-9C86-B2303040BE7D}"/>
+                </a:ext>
+              </a:extLst>
+            </p:cNvPr>
+            <p:cNvSpPr/>
+            <p:nvPr/>
+          </p:nvSpPr>
+          <p:spPr>
+            <a:xfrm>
+              <a:off x="968829" y="2950029"/>
+              <a:ext cx="3069771" cy="1981200"/>
+            </a:xfrm>
+            <a:prstGeom prst="roundRect">
+              <a:avLst/>
+            </a:prstGeom>
+          </p:spPr>
+          <p:style>
+            <a:lnRef idx="1">
+              <a:schemeClr val="accent6"/>
+            </a:lnRef>
+            <a:fillRef idx="2">
+              <a:schemeClr val="accent6"/>
+            </a:fillRef>
+            <a:effectRef idx="1">
+              <a:schemeClr val="accent6"/>
+            </a:effectRef>
+            <a:fontRef idx="minor">
+              <a:schemeClr val="dk1"/>
+            </a:fontRef>
+          </p:style>
+          <p:txBody>
+            <a:bodyPr rtlCol="0" anchor="ctr"/>
+            <a:lstStyle/>
+            <a:p>
+              <a:pPr algn="ctr"/>
+              <a:endParaRPr lang="en-US"/>
+            </a:p>
+          </p:txBody>
+        </p:sp>
+        <p:sp>
+          <p:nvSpPr>
+            <p:cNvPr id="25" name="Rectangle 24">
+              <a:extLst>
+                <a:ext uri="{FF2B5EF4-FFF2-40B4-BE49-F238E27FC236}">
+                  <a16:creationId xmlns:a16="http://schemas.microsoft.com/office/drawing/2014/main" id="{B7B0CC01-48A2-5CAE-7F49-62D52A2AF9AD}"/>
+                </a:ext>
+              </a:extLst>
+            </p:cNvPr>
+            <p:cNvSpPr/>
+            <p:nvPr/>
+          </p:nvSpPr>
+          <p:spPr>
+            <a:xfrm>
+              <a:off x="2002971" y="4190999"/>
+              <a:ext cx="674915" cy="359229"/>
+            </a:xfrm>
+            <a:prstGeom prst="rect">
+              <a:avLst/>
+            </a:prstGeom>
+          </p:spPr>
+          <p:style>
+            <a:lnRef idx="2">
+              <a:schemeClr val="accent2">
+                <a:shade val="15000"/>
+              </a:schemeClr>
+            </a:lnRef>
+            <a:fillRef idx="1">
+              <a:schemeClr val="accent2"/>
+            </a:fillRef>
+            <a:effectRef idx="0">
+              <a:schemeClr val="accent2"/>
+            </a:effectRef>
+            <a:fontRef idx="minor">
+              <a:schemeClr val="lt1"/>
+            </a:fontRef>
+          </p:style>
+          <p:txBody>
+            <a:bodyPr rtlCol="0" anchor="ctr"/>
+            <a:lstStyle/>
+            <a:p>
+              <a:pPr algn="ctr"/>
+              <a:r>
+                <a:rPr lang="pt-BR" dirty="0" err="1">
+                  <a:solidFill>
+                    <a:schemeClr val="tx1"/>
+                  </a:solidFill>
+                </a:rPr>
+                <a:t>tanh</a:t>
+              </a:r>
+              <a:endParaRPr lang="en-US" dirty="0">
+                <a:solidFill>
+                  <a:schemeClr val="tx1"/>
+                </a:solidFill>
+              </a:endParaRPr>
+            </a:p>
+          </p:txBody>
+        </p:sp>
+        <mc:AlternateContent xmlns:mc="http://schemas.openxmlformats.org/markup-compatibility/2006" xmlns:a14="http://schemas.microsoft.com/office/drawing/2010/main">
+          <mc:Choice Requires="a14">
+            <p:sp>
+              <p:nvSpPr>
+                <p:cNvPr id="28" name="Oval 27">
+                  <a:extLst>
+                    <a:ext uri="{FF2B5EF4-FFF2-40B4-BE49-F238E27FC236}">
+                      <a16:creationId xmlns:a16="http://schemas.microsoft.com/office/drawing/2014/main" id="{03DB30CA-971F-1223-BF82-5944AA83DAE8}"/>
+                    </a:ext>
+                  </a:extLst>
+                </p:cNvPr>
+                <p:cNvSpPr/>
+                <p:nvPr/>
+              </p:nvSpPr>
+              <p:spPr>
+                <a:xfrm>
+                  <a:off x="963387" y="5139771"/>
+                  <a:ext cx="432000" cy="432000"/>
+                </a:xfrm>
+                <a:prstGeom prst="ellipse">
+                  <a:avLst/>
+                </a:prstGeom>
+                <a:solidFill>
+                  <a:schemeClr val="accent1">
+                    <a:lumMod val="20000"/>
+                    <a:lumOff val="80000"/>
+                  </a:schemeClr>
+                </a:solidFill>
+              </p:spPr>
+              <p:style>
+                <a:lnRef idx="1">
+                  <a:schemeClr val="accent3"/>
+                </a:lnRef>
+                <a:fillRef idx="2">
+                  <a:schemeClr val="accent3"/>
+                </a:fillRef>
+                <a:effectRef idx="1">
+                  <a:schemeClr val="accent3"/>
+                </a:effectRef>
+                <a:fontRef idx="minor">
+                  <a:schemeClr val="dk1"/>
+                </a:fontRef>
+              </p:style>
+              <p:txBody>
+                <a:bodyPr rtlCol="0" anchor="ctr"/>
+                <a:lstStyle/>
+                <a:p>
+                  <a:pPr algn="ctr"/>
+                  <a14:m>
+                    <m:oMathPara xmlns:m="http://schemas.openxmlformats.org/officeDocument/2006/math">
+                      <m:oMathParaPr>
+                        <m:jc m:val="center"/>
+                      </m:oMathParaPr>
+                      <m:oMath xmlns:m="http://schemas.openxmlformats.org/officeDocument/2006/math">
+                        <m:r>
+                          <a:rPr lang="pt-BR" b="0" i="1" smtClean="0">
+                            <a:latin typeface="Cambria Math" panose="02040503050406030204" pitchFamily="18" charset="0"/>
+                          </a:rPr>
+                          <m:t>𝑥</m:t>
+                        </m:r>
+                        <m:r>
+                          <a:rPr lang="pt-BR" b="0" i="1" smtClean="0">
+                            <a:latin typeface="Cambria Math" panose="02040503050406030204" pitchFamily="18" charset="0"/>
+                          </a:rPr>
+                          <m:t>[</m:t>
+                        </m:r>
+                        <m:r>
+                          <a:rPr lang="pt-BR" b="0" i="1" smtClean="0">
+                            <a:latin typeface="Cambria Math" panose="02040503050406030204" pitchFamily="18" charset="0"/>
+                          </a:rPr>
+                          <m:t>𝑡</m:t>
+                        </m:r>
+                        <m:r>
+                          <a:rPr lang="pt-BR" b="0" i="1" smtClean="0">
+                            <a:latin typeface="Cambria Math" panose="02040503050406030204" pitchFamily="18" charset="0"/>
+                          </a:rPr>
+                          <m:t>]</m:t>
+                        </m:r>
+                      </m:oMath>
+                    </m:oMathPara>
+                  </a14:m>
+                  <a:endParaRPr lang="en-US" dirty="0"/>
+                </a:p>
+              </p:txBody>
+            </p:sp>
+          </mc:Choice>
+          <mc:Fallback xmlns="">
+            <p:sp>
+              <p:nvSpPr>
+                <p:cNvPr id="28" name="Oval 27">
+                  <a:extLst>
+                    <a:ext uri="{FF2B5EF4-FFF2-40B4-BE49-F238E27FC236}">
+                      <a16:creationId xmlns:a16="http://schemas.microsoft.com/office/drawing/2014/main" id="{03DB30CA-971F-1223-BF82-5944AA83DAE8}"/>
+                    </a:ext>
+                  </a:extLst>
+                </p:cNvPr>
+                <p:cNvSpPr>
+                  <a:spLocks noRot="1" noChangeAspect="1" noMove="1" noResize="1" noEditPoints="1" noAdjustHandles="1" noChangeArrowheads="1" noChangeShapeType="1" noTextEdit="1"/>
+                </p:cNvSpPr>
+                <p:nvPr/>
+              </p:nvSpPr>
+              <p:spPr>
+                <a:xfrm>
+                  <a:off x="963387" y="5139771"/>
+                  <a:ext cx="432000" cy="432000"/>
+                </a:xfrm>
+                <a:prstGeom prst="ellipse">
+                  <a:avLst/>
+                </a:prstGeom>
+                <a:blipFill>
+                  <a:blip r:embed="rId3"/>
+                  <a:stretch>
+                    <a:fillRect l="-13889" r="-12500" b="-5556"/>
+                  </a:stretch>
+                </a:blipFill>
+              </p:spPr>
+              <p:txBody>
+                <a:bodyPr/>
+                <a:lstStyle/>
+                <a:p>
+                  <a:r>
+                    <a:rPr lang="en-US">
+                      <a:noFill/>
+                    </a:rPr>
+                    <a:t> </a:t>
+                  </a:r>
+                </a:p>
+              </p:txBody>
+            </p:sp>
+          </mc:Fallback>
+        </mc:AlternateContent>
+        <p:cxnSp>
+          <p:nvCxnSpPr>
+            <p:cNvPr id="32" name="Connector: Elbow 31">
+              <a:extLst>
+                <a:ext uri="{FF2B5EF4-FFF2-40B4-BE49-F238E27FC236}">
+                  <a16:creationId xmlns:a16="http://schemas.microsoft.com/office/drawing/2014/main" id="{88D081D5-3BD3-DB47-44D4-01356D923649}"/>
+                </a:ext>
+              </a:extLst>
+            </p:cNvPr>
+            <p:cNvCxnSpPr>
+              <a:cxnSpLocks/>
+              <a:stCxn id="28" idx="0"/>
+              <a:endCxn id="25" idx="2"/>
+            </p:cNvCxnSpPr>
+            <p:nvPr/>
+          </p:nvCxnSpPr>
+          <p:spPr>
+            <a:xfrm rot="5400000" flipH="1" flipV="1">
+              <a:off x="1465137" y="4264479"/>
+              <a:ext cx="589543" cy="1161042"/>
+            </a:xfrm>
+            <a:prstGeom prst="bentConnector3">
+              <a:avLst>
+                <a:gd name="adj1" fmla="val 70311"/>
+              </a:avLst>
+            </a:prstGeom>
+            <a:ln>
+              <a:tailEnd type="triangle"/>
+            </a:ln>
+          </p:spPr>
+          <p:style>
+            <a:lnRef idx="1">
+              <a:schemeClr val="dk1"/>
+            </a:lnRef>
+            <a:fillRef idx="0">
+              <a:schemeClr val="dk1"/>
+            </a:fillRef>
+            <a:effectRef idx="0">
+              <a:schemeClr val="dk1"/>
+            </a:effectRef>
+            <a:fontRef idx="minor">
+              <a:schemeClr val="tx1"/>
+            </a:fontRef>
+          </p:style>
+        </p:cxnSp>
+        <p:cxnSp>
+          <p:nvCxnSpPr>
+            <p:cNvPr id="35" name="Connector: Elbow 34">
+              <a:extLst>
+                <a:ext uri="{FF2B5EF4-FFF2-40B4-BE49-F238E27FC236}">
+                  <a16:creationId xmlns:a16="http://schemas.microsoft.com/office/drawing/2014/main" id="{C5432765-70CB-E050-EE29-01A4C98D1B3F}"/>
+                </a:ext>
+              </a:extLst>
+            </p:cNvPr>
+            <p:cNvCxnSpPr>
+              <a:cxnSpLocks/>
+              <a:stCxn id="25" idx="0"/>
+            </p:cNvCxnSpPr>
+            <p:nvPr/>
+          </p:nvCxnSpPr>
+          <p:spPr>
+            <a:xfrm rot="5400000" flipH="1" flipV="1">
+              <a:off x="2914652" y="2620736"/>
+              <a:ext cx="996041" cy="2144486"/>
+            </a:xfrm>
+            <a:prstGeom prst="bentConnector2">
+              <a:avLst/>
+            </a:prstGeom>
+            <a:ln>
+              <a:tailEnd type="triangle"/>
+            </a:ln>
+          </p:spPr>
+          <p:style>
+            <a:lnRef idx="1">
+              <a:schemeClr val="dk1"/>
+            </a:lnRef>
+            <a:fillRef idx="0">
+              <a:schemeClr val="dk1"/>
+            </a:fillRef>
+            <a:effectRef idx="0">
+              <a:schemeClr val="dk1"/>
+            </a:effectRef>
+            <a:fontRef idx="minor">
+              <a:schemeClr val="tx1"/>
+            </a:fontRef>
+          </p:style>
+        </p:cxnSp>
+        <mc:AlternateContent xmlns:mc="http://schemas.openxmlformats.org/markup-compatibility/2006" xmlns:a14="http://schemas.microsoft.com/office/drawing/2010/main">
+          <mc:Choice Requires="a14">
+            <p:sp>
+              <p:nvSpPr>
+                <p:cNvPr id="37" name="Oval 36">
+                  <a:extLst>
+                    <a:ext uri="{FF2B5EF4-FFF2-40B4-BE49-F238E27FC236}">
+                      <a16:creationId xmlns:a16="http://schemas.microsoft.com/office/drawing/2014/main" id="{C83DC4B7-2C13-1CCB-8C68-6B3BE9405B2B}"/>
+                    </a:ext>
+                  </a:extLst>
+                </p:cNvPr>
+                <p:cNvSpPr/>
+                <p:nvPr/>
+              </p:nvSpPr>
+              <p:spPr>
+                <a:xfrm>
+                  <a:off x="3606600" y="2093487"/>
+                  <a:ext cx="432000" cy="432000"/>
+                </a:xfrm>
+                <a:prstGeom prst="ellipse">
+                  <a:avLst/>
+                </a:prstGeom>
+                <a:solidFill>
+                  <a:schemeClr val="accent1">
+                    <a:lumMod val="20000"/>
+                    <a:lumOff val="80000"/>
+                  </a:schemeClr>
+                </a:solidFill>
+              </p:spPr>
+              <p:style>
+                <a:lnRef idx="1">
+                  <a:schemeClr val="accent3"/>
+                </a:lnRef>
+                <a:fillRef idx="2">
+                  <a:schemeClr val="accent3"/>
+                </a:fillRef>
+                <a:effectRef idx="1">
+                  <a:schemeClr val="accent3"/>
+                </a:effectRef>
+                <a:fontRef idx="minor">
+                  <a:schemeClr val="dk1"/>
+                </a:fontRef>
+              </p:style>
+              <p:txBody>
+                <a:bodyPr rtlCol="0" anchor="ctr"/>
+                <a:lstStyle/>
+                <a:p>
+                  <a:pPr algn="ctr"/>
+                  <a14:m>
+                    <m:oMathPara xmlns:m="http://schemas.openxmlformats.org/officeDocument/2006/math">
+                      <m:oMathParaPr>
+                        <m:jc m:val="center"/>
+                      </m:oMathParaPr>
+                      <m:oMath xmlns:m="http://schemas.openxmlformats.org/officeDocument/2006/math">
+                        <m:r>
+                          <a:rPr lang="pt-BR" b="0" i="1" smtClean="0">
+                            <a:latin typeface="Cambria Math" panose="02040503050406030204" pitchFamily="18" charset="0"/>
+                          </a:rPr>
+                          <m:t>h</m:t>
+                        </m:r>
+                        <m:r>
+                          <a:rPr lang="pt-BR" b="0" i="1" smtClean="0">
+                            <a:latin typeface="Cambria Math" panose="02040503050406030204" pitchFamily="18" charset="0"/>
+                          </a:rPr>
+                          <m:t>[</m:t>
+                        </m:r>
+                        <m:r>
+                          <a:rPr lang="pt-BR" b="0" i="1" smtClean="0">
+                            <a:latin typeface="Cambria Math" panose="02040503050406030204" pitchFamily="18" charset="0"/>
+                          </a:rPr>
+                          <m:t>𝑡</m:t>
+                        </m:r>
+                        <m:r>
+                          <a:rPr lang="pt-BR" b="0" i="1" smtClean="0">
+                            <a:latin typeface="Cambria Math" panose="02040503050406030204" pitchFamily="18" charset="0"/>
+                          </a:rPr>
+                          <m:t>]</m:t>
+                        </m:r>
+                      </m:oMath>
+                    </m:oMathPara>
+                  </a14:m>
+                  <a:endParaRPr lang="en-US" dirty="0"/>
+                </a:p>
+              </p:txBody>
+            </p:sp>
+          </mc:Choice>
+          <mc:Fallback xmlns="">
+            <p:sp>
+              <p:nvSpPr>
+                <p:cNvPr id="37" name="Oval 36">
+                  <a:extLst>
+                    <a:ext uri="{FF2B5EF4-FFF2-40B4-BE49-F238E27FC236}">
+                      <a16:creationId xmlns:a16="http://schemas.microsoft.com/office/drawing/2014/main" id="{C83DC4B7-2C13-1CCB-8C68-6B3BE9405B2B}"/>
+                    </a:ext>
+                  </a:extLst>
+                </p:cNvPr>
+                <p:cNvSpPr>
+                  <a:spLocks noRot="1" noChangeAspect="1" noMove="1" noResize="1" noEditPoints="1" noAdjustHandles="1" noChangeArrowheads="1" noChangeShapeType="1" noTextEdit="1"/>
+                </p:cNvSpPr>
+                <p:nvPr/>
+              </p:nvSpPr>
+              <p:spPr>
+                <a:xfrm>
+                  <a:off x="3606600" y="2093487"/>
+                  <a:ext cx="432000" cy="432000"/>
+                </a:xfrm>
+                <a:prstGeom prst="ellipse">
+                  <a:avLst/>
+                </a:prstGeom>
+                <a:blipFill>
+                  <a:blip r:embed="rId4"/>
+                  <a:stretch>
+                    <a:fillRect l="-20833" r="-12500" b="-5556"/>
+                  </a:stretch>
+                </a:blipFill>
+              </p:spPr>
+              <p:txBody>
+                <a:bodyPr/>
+                <a:lstStyle/>
+                <a:p>
+                  <a:r>
+                    <a:rPr lang="en-US">
+                      <a:noFill/>
+                    </a:rPr>
+                    <a:t> </a:t>
+                  </a:r>
+                </a:p>
+              </p:txBody>
+            </p:sp>
+          </mc:Fallback>
+        </mc:AlternateContent>
+        <p:cxnSp>
+          <p:nvCxnSpPr>
+            <p:cNvPr id="39" name="Straight Arrow Connector 38">
+              <a:extLst>
+                <a:ext uri="{FF2B5EF4-FFF2-40B4-BE49-F238E27FC236}">
+                  <a16:creationId xmlns:a16="http://schemas.microsoft.com/office/drawing/2014/main" id="{E36D1BA2-8986-9A38-5DBF-FC5C2135B588}"/>
+                </a:ext>
+              </a:extLst>
+            </p:cNvPr>
+            <p:cNvCxnSpPr>
+              <a:endCxn id="37" idx="4"/>
+            </p:cNvCxnSpPr>
+            <p:nvPr/>
+          </p:nvCxnSpPr>
+          <p:spPr>
+            <a:xfrm flipV="1">
+              <a:off x="3822600" y="2525487"/>
+              <a:ext cx="0" cy="669471"/>
+            </a:xfrm>
+            <a:prstGeom prst="straightConnector1">
+              <a:avLst/>
+            </a:prstGeom>
+            <a:ln>
+              <a:tailEnd type="triangle"/>
+            </a:ln>
+          </p:spPr>
+          <p:style>
+            <a:lnRef idx="1">
+              <a:schemeClr val="dk1"/>
+            </a:lnRef>
+            <a:fillRef idx="0">
+              <a:schemeClr val="dk1"/>
+            </a:fillRef>
+            <a:effectRef idx="0">
+              <a:schemeClr val="dk1"/>
+            </a:effectRef>
+            <a:fontRef idx="minor">
+              <a:schemeClr val="tx1"/>
+            </a:fontRef>
+          </p:style>
+        </p:cxnSp>
+        <p:cxnSp>
+          <p:nvCxnSpPr>
+            <p:cNvPr id="46" name="Connector: Elbow 45">
+              <a:extLst>
+                <a:ext uri="{FF2B5EF4-FFF2-40B4-BE49-F238E27FC236}">
+                  <a16:creationId xmlns:a16="http://schemas.microsoft.com/office/drawing/2014/main" id="{64662ABC-6DDD-AA92-96BF-BCFBA039FB72}"/>
+                </a:ext>
+              </a:extLst>
+            </p:cNvPr>
+            <p:cNvCxnSpPr>
+              <a:cxnSpLocks/>
+            </p:cNvCxnSpPr>
+            <p:nvPr/>
+          </p:nvCxnSpPr>
+          <p:spPr>
+            <a:xfrm>
+              <a:off x="654502" y="3184071"/>
+              <a:ext cx="921744" cy="1552235"/>
+            </a:xfrm>
+            <a:prstGeom prst="bentConnector2">
+              <a:avLst/>
+            </a:prstGeom>
+          </p:spPr>
+          <p:style>
+            <a:lnRef idx="1">
+              <a:schemeClr val="dk1"/>
+            </a:lnRef>
+            <a:fillRef idx="0">
+              <a:schemeClr val="dk1"/>
+            </a:fillRef>
+            <a:effectRef idx="0">
+              <a:schemeClr val="dk1"/>
+            </a:effectRef>
+            <a:fontRef idx="minor">
+              <a:schemeClr val="tx1"/>
+            </a:fontRef>
+          </p:style>
+        </p:cxnSp>
+      </p:grpSp>
+    </p:spTree>
+    <p:extLst>
+      <p:ext uri="{BB962C8B-B14F-4D97-AF65-F5344CB8AC3E}">
+        <p14:creationId xmlns:p14="http://schemas.microsoft.com/office/powerpoint/2010/main" val="4185264603"/>
+      </p:ext>
+    </p:extLst>
+  </p:cSld>
+  <p:clrMapOvr>
+    <a:masterClrMapping/>
+  </p:clrMapOvr>
+</p:sld>
+</file>
+
+<file path=ppt/slides/slide11.xml><?xml version="1.0" encoding="utf-8"?>
+<p:sld xmlns:a="http://schemas.openxmlformats.org/drawingml/2006/main" xmlns:r="http://schemas.openxmlformats.org/officeDocument/2006/relationships" xmlns:p="http://schemas.openxmlformats.org/presentationml/2006/main">
+  <p:cSld>
+    <p:spTree>
+      <p:nvGrpSpPr>
         <p:cNvPr id="1" name=""/>
         <p:cNvGrpSpPr/>
         <p:nvPr/>
@@ -4834,8 +5593,8 @@
           </a:p>
         </p:txBody>
       </p:sp>
-      <mc:AlternateContent xmlns:mc="http://schemas.openxmlformats.org/markup-compatibility/2006">
-        <mc:Choice xmlns:a14="http://schemas.microsoft.com/office/drawing/2010/main" Requires="a14">
+      <mc:AlternateContent xmlns:mc="http://schemas.openxmlformats.org/markup-compatibility/2006" xmlns:a14="http://schemas.microsoft.com/office/drawing/2010/main">
+        <mc:Choice Requires="a14">
           <p:sp>
             <p:nvSpPr>
               <p:cNvPr id="3" name="Content Placeholder 2">
@@ -5068,6 +5827,12 @@
                 <a:pPr marL="0" indent="0" algn="ctr">
                   <a:buNone/>
                 </a:pPr>
+                <a:endParaRPr lang="en-US" sz="700" dirty="0"/>
+              </a:p>
+              <a:p>
+                <a:pPr marL="0" indent="0" algn="ctr">
+                  <a:buNone/>
+                </a:pPr>
                 <a14:m>
                   <m:oMathPara xmlns:m="http://schemas.openxmlformats.org/officeDocument/2006/math">
                     <m:oMathParaPr>
@@ -5271,31 +6036,35 @@
                 </a:r>
                 <a:r>
                   <a:rPr lang="en-US" dirty="0" err="1"/>
-                  <a:t>ativaçãoto</a:t>
+                  <a:t>ativação</a:t>
                 </a:r>
                 <a:r>
                   <a:rPr lang="en-US" dirty="0"/>
-                  <a:t> </a:t>
+                  <a:t>, </a:t>
+                </a:r>
+                <a14:m>
+                  <m:oMath xmlns:m="http://schemas.openxmlformats.org/officeDocument/2006/math">
+                    <m:r>
+                      <a:rPr lang="pt-BR" b="0" i="1" smtClean="0">
+                        <a:latin typeface="Cambria Math" panose="02040503050406030204" pitchFamily="18" charset="0"/>
+                      </a:rPr>
+                      <m:t>𝑓</m:t>
+                    </m:r>
+                    <m:r>
+                      <a:rPr lang="pt-BR" b="0" i="1" smtClean="0">
+                        <a:latin typeface="Cambria Math" panose="02040503050406030204" pitchFamily="18" charset="0"/>
+                      </a:rPr>
+                      <m:t>(.)</m:t>
+                    </m:r>
+                  </m:oMath>
+                </a14:m>
+                <a:r>
+                  <a:rPr lang="en-US" dirty="0"/>
+                  <a:t>, do </a:t>
                 </a:r>
                 <a:r>
                   <a:rPr lang="en-US" dirty="0" err="1"/>
                   <a:t>tipo</a:t>
-                </a:r>
-                <a:r>
-                  <a:rPr lang="en-US" dirty="0"/>
-                  <a:t> </a:t>
-                </a:r>
-                <a:r>
-                  <a:rPr lang="en-US" dirty="0" err="1"/>
-                  <a:t>sigmoide</a:t>
-                </a:r>
-                <a:r>
-                  <a:rPr lang="en-US" dirty="0"/>
-                  <a:t> </a:t>
-                </a:r>
-                <a:r>
-                  <a:rPr lang="en-US" dirty="0" err="1"/>
-                  <a:t>ou</a:t>
                 </a:r>
                 <a:r>
                   <a:rPr lang="en-US" dirty="0"/>
@@ -5325,7 +6094,7 @@
             </p:txBody>
           </p:sp>
         </mc:Choice>
-        <mc:Fallback>
+        <mc:Fallback xmlns="">
           <p:sp>
             <p:nvSpPr>
               <p:cNvPr id="3" name="Content Placeholder 2">
@@ -5350,7 +6119,7 @@
               <a:blipFill>
                 <a:blip r:embed="rId3"/>
                 <a:stretch>
-                  <a:fillRect l="-1560" t="-2241" r="-1733"/>
+                  <a:fillRect l="-1560" t="-2241" r="-2860"/>
                 </a:stretch>
               </a:blipFill>
             </p:spPr>
@@ -5371,10 +6140,10 @@
       </mc:AlternateContent>
       <p:grpSp>
         <p:nvGrpSpPr>
-          <p:cNvPr id="4" name="Group 3">
+          <p:cNvPr id="31" name="Group 30">
             <a:extLst>
               <a:ext uri="{FF2B5EF4-FFF2-40B4-BE49-F238E27FC236}">
-                <a16:creationId xmlns:a16="http://schemas.microsoft.com/office/drawing/2014/main" id="{C51FD9C1-76DE-F00A-B18F-DCE8FA3E5715}"/>
+                <a16:creationId xmlns:a16="http://schemas.microsoft.com/office/drawing/2014/main" id="{560B2E5E-F285-DBAC-12F8-C23E7602EBB5}"/>
               </a:ext>
             </a:extLst>
           </p:cNvPr>
@@ -5383,223 +6152,1304 @@
         </p:nvGrpSpPr>
         <p:grpSpPr>
           <a:xfrm>
-            <a:off x="1389861" y="1843580"/>
-            <a:ext cx="1552792" cy="4315427"/>
-            <a:chOff x="1476947" y="2177448"/>
-            <a:chExt cx="1552792" cy="4315427"/>
+            <a:off x="2225506" y="1747612"/>
+            <a:ext cx="1483094" cy="4507363"/>
+            <a:chOff x="2454106" y="1782434"/>
+            <a:chExt cx="1483094" cy="4507363"/>
           </a:xfrm>
         </p:grpSpPr>
-        <p:pic>
-          <p:nvPicPr>
-            <p:cNvPr id="5" name="Picture 4">
+        <mc:AlternateContent xmlns:mc="http://schemas.openxmlformats.org/markup-compatibility/2006" xmlns:a14="http://schemas.microsoft.com/office/drawing/2010/main">
+          <mc:Choice Requires="a14">
+            <p:sp>
+              <p:nvSpPr>
+                <p:cNvPr id="7" name="Rectangle 6">
+                  <a:extLst>
+                    <a:ext uri="{FF2B5EF4-FFF2-40B4-BE49-F238E27FC236}">
+                      <a16:creationId xmlns:a16="http://schemas.microsoft.com/office/drawing/2014/main" id="{AE887D84-DA42-AA16-05E5-E57F08F6CD24}"/>
+                    </a:ext>
+                  </a:extLst>
+                </p:cNvPr>
+                <p:cNvSpPr/>
+                <p:nvPr/>
+              </p:nvSpPr>
+              <p:spPr>
+                <a:xfrm>
+                  <a:off x="2460638" y="2426299"/>
+                  <a:ext cx="468000" cy="468000"/>
+                </a:xfrm>
+                <a:prstGeom prst="rect">
+                  <a:avLst/>
+                </a:prstGeom>
+              </p:spPr>
+              <p:style>
+                <a:lnRef idx="1">
+                  <a:schemeClr val="accent5"/>
+                </a:lnRef>
+                <a:fillRef idx="2">
+                  <a:schemeClr val="accent5"/>
+                </a:fillRef>
+                <a:effectRef idx="1">
+                  <a:schemeClr val="accent5"/>
+                </a:effectRef>
+                <a:fontRef idx="minor">
+                  <a:schemeClr val="dk1"/>
+                </a:fontRef>
+              </p:style>
+              <p:txBody>
+                <a:bodyPr rtlCol="0" anchor="ctr"/>
+                <a:lstStyle/>
+                <a:p>
+                  <a:pPr algn="ctr"/>
+                  <a14:m>
+                    <m:oMathPara xmlns:m="http://schemas.openxmlformats.org/officeDocument/2006/math">
+                      <m:oMathParaPr>
+                        <m:jc m:val="center"/>
+                      </m:oMathParaPr>
+                      <m:oMath xmlns:m="http://schemas.openxmlformats.org/officeDocument/2006/math">
+                        <m:sSubSup>
+                          <m:sSubSupPr>
+                            <m:ctrlPr>
+                              <a:rPr lang="pt-BR" i="1">
+                                <a:latin typeface="Cambria Math" panose="02040503050406030204" pitchFamily="18" charset="0"/>
+                              </a:rPr>
+                            </m:ctrlPr>
+                          </m:sSubSupPr>
+                          <m:e>
+                            <m:r>
+                              <a:rPr lang="pt-BR" b="1" i="1">
+                                <a:latin typeface="Cambria Math" panose="02040503050406030204" pitchFamily="18" charset="0"/>
+                              </a:rPr>
+                              <m:t>𝑾</m:t>
+                            </m:r>
+                          </m:e>
+                          <m:sub>
+                            <m:r>
+                              <a:rPr lang="pt-BR" i="1">
+                                <a:latin typeface="Cambria Math" panose="02040503050406030204" pitchFamily="18" charset="0"/>
+                              </a:rPr>
+                              <m:t>h</m:t>
+                            </m:r>
+                          </m:sub>
+                          <m:sup>
+                            <m:r>
+                              <a:rPr lang="pt-BR" i="1">
+                                <a:latin typeface="Cambria Math" panose="02040503050406030204" pitchFamily="18" charset="0"/>
+                              </a:rPr>
+                              <m:t>𝑜</m:t>
+                            </m:r>
+                          </m:sup>
+                        </m:sSubSup>
+                      </m:oMath>
+                    </m:oMathPara>
+                  </a14:m>
+                  <a:endParaRPr lang="en-US" dirty="0"/>
+                </a:p>
+              </p:txBody>
+            </p:sp>
+          </mc:Choice>
+          <mc:Fallback xmlns="">
+            <p:sp>
+              <p:nvSpPr>
+                <p:cNvPr id="7" name="Rectangle 6">
+                  <a:extLst>
+                    <a:ext uri="{FF2B5EF4-FFF2-40B4-BE49-F238E27FC236}">
+                      <a16:creationId xmlns:a16="http://schemas.microsoft.com/office/drawing/2014/main" id="{AE887D84-DA42-AA16-05E5-E57F08F6CD24}"/>
+                    </a:ext>
+                  </a:extLst>
+                </p:cNvPr>
+                <p:cNvSpPr>
+                  <a:spLocks noRot="1" noChangeAspect="1" noMove="1" noResize="1" noEditPoints="1" noAdjustHandles="1" noChangeArrowheads="1" noChangeShapeType="1" noTextEdit="1"/>
+                </p:cNvSpPr>
+                <p:nvPr/>
+              </p:nvSpPr>
+              <p:spPr>
+                <a:xfrm>
+                  <a:off x="2460638" y="2426299"/>
+                  <a:ext cx="468000" cy="468000"/>
+                </a:xfrm>
+                <a:prstGeom prst="rect">
+                  <a:avLst/>
+                </a:prstGeom>
+                <a:blipFill>
+                  <a:blip r:embed="rId4"/>
+                  <a:stretch>
+                    <a:fillRect l="-8974"/>
+                  </a:stretch>
+                </a:blipFill>
+              </p:spPr>
+              <p:txBody>
+                <a:bodyPr/>
+                <a:lstStyle/>
+                <a:p>
+                  <a:r>
+                    <a:rPr lang="en-US">
+                      <a:noFill/>
+                    </a:rPr>
+                    <a:t> </a:t>
+                  </a:r>
+                </a:p>
+              </p:txBody>
+            </p:sp>
+          </mc:Fallback>
+        </mc:AlternateContent>
+        <mc:AlternateContent xmlns:mc="http://schemas.openxmlformats.org/markup-compatibility/2006" xmlns:a14="http://schemas.microsoft.com/office/drawing/2010/main">
+          <mc:Choice Requires="a14">
+            <p:sp>
+              <p:nvSpPr>
+                <p:cNvPr id="8" name="Rectangle 7">
+                  <a:extLst>
+                    <a:ext uri="{FF2B5EF4-FFF2-40B4-BE49-F238E27FC236}">
+                      <a16:creationId xmlns:a16="http://schemas.microsoft.com/office/drawing/2014/main" id="{F230F679-3391-3C1F-BE37-CD6B2704F1F1}"/>
+                    </a:ext>
+                  </a:extLst>
+                </p:cNvPr>
+                <p:cNvSpPr/>
+                <p:nvPr/>
+              </p:nvSpPr>
+              <p:spPr>
+                <a:xfrm>
+                  <a:off x="2454106" y="5193854"/>
+                  <a:ext cx="468000" cy="468000"/>
+                </a:xfrm>
+                <a:prstGeom prst="rect">
+                  <a:avLst/>
+                </a:prstGeom>
+              </p:spPr>
+              <p:style>
+                <a:lnRef idx="1">
+                  <a:schemeClr val="accent5"/>
+                </a:lnRef>
+                <a:fillRef idx="2">
+                  <a:schemeClr val="accent5"/>
+                </a:fillRef>
+                <a:effectRef idx="1">
+                  <a:schemeClr val="accent5"/>
+                </a:effectRef>
+                <a:fontRef idx="minor">
+                  <a:schemeClr val="dk1"/>
+                </a:fontRef>
+              </p:style>
+              <p:txBody>
+                <a:bodyPr rtlCol="0" anchor="ctr"/>
+                <a:lstStyle/>
+                <a:p>
+                  <a:pPr algn="ctr"/>
+                  <a14:m>
+                    <m:oMathPara xmlns:m="http://schemas.openxmlformats.org/officeDocument/2006/math">
+                      <m:oMathParaPr>
+                        <m:jc m:val="centerGroup"/>
+                      </m:oMathParaPr>
+                      <m:oMath xmlns:m="http://schemas.openxmlformats.org/officeDocument/2006/math">
+                        <m:sSubSup>
+                          <m:sSubSupPr>
+                            <m:ctrlPr>
+                              <a:rPr lang="pt-BR" i="1" smtClean="0">
+                                <a:latin typeface="Cambria Math" panose="02040503050406030204" pitchFamily="18" charset="0"/>
+                              </a:rPr>
+                            </m:ctrlPr>
+                          </m:sSubSupPr>
+                          <m:e>
+                            <m:r>
+                              <a:rPr lang="pt-BR" b="1" i="1">
+                                <a:latin typeface="Cambria Math" panose="02040503050406030204" pitchFamily="18" charset="0"/>
+                              </a:rPr>
+                              <m:t>𝑾</m:t>
+                            </m:r>
+                          </m:e>
+                          <m:sub>
+                            <m:r>
+                              <a:rPr lang="pt-BR" b="0" i="1" smtClean="0">
+                                <a:latin typeface="Cambria Math" panose="02040503050406030204" pitchFamily="18" charset="0"/>
+                              </a:rPr>
+                              <m:t>𝑖</m:t>
+                            </m:r>
+                          </m:sub>
+                          <m:sup>
+                            <m:r>
+                              <a:rPr lang="pt-BR" b="0" i="1" smtClean="0">
+                                <a:latin typeface="Cambria Math" panose="02040503050406030204" pitchFamily="18" charset="0"/>
+                              </a:rPr>
+                              <m:t>h</m:t>
+                            </m:r>
+                          </m:sup>
+                        </m:sSubSup>
+                      </m:oMath>
+                    </m:oMathPara>
+                  </a14:m>
+                  <a:endParaRPr lang="en-US" dirty="0"/>
+                </a:p>
+              </p:txBody>
+            </p:sp>
+          </mc:Choice>
+          <mc:Fallback xmlns="">
+            <p:sp>
+              <p:nvSpPr>
+                <p:cNvPr id="8" name="Rectangle 7">
+                  <a:extLst>
+                    <a:ext uri="{FF2B5EF4-FFF2-40B4-BE49-F238E27FC236}">
+                      <a16:creationId xmlns:a16="http://schemas.microsoft.com/office/drawing/2014/main" id="{F230F679-3391-3C1F-BE37-CD6B2704F1F1}"/>
+                    </a:ext>
+                  </a:extLst>
+                </p:cNvPr>
+                <p:cNvSpPr>
+                  <a:spLocks noRot="1" noChangeAspect="1" noMove="1" noResize="1" noEditPoints="1" noAdjustHandles="1" noChangeArrowheads="1" noChangeShapeType="1" noTextEdit="1"/>
+                </p:cNvSpPr>
+                <p:nvPr/>
+              </p:nvSpPr>
+              <p:spPr>
+                <a:xfrm>
+                  <a:off x="2454106" y="5193854"/>
+                  <a:ext cx="468000" cy="468000"/>
+                </a:xfrm>
+                <a:prstGeom prst="rect">
+                  <a:avLst/>
+                </a:prstGeom>
+                <a:blipFill>
+                  <a:blip r:embed="rId5"/>
+                  <a:stretch>
+                    <a:fillRect l="-8974"/>
+                  </a:stretch>
+                </a:blipFill>
+              </p:spPr>
+              <p:txBody>
+                <a:bodyPr/>
+                <a:lstStyle/>
+                <a:p>
+                  <a:r>
+                    <a:rPr lang="en-US">
+                      <a:noFill/>
+                    </a:rPr>
+                    <a:t> </a:t>
+                  </a:r>
+                </a:p>
+              </p:txBody>
+            </p:sp>
+          </mc:Fallback>
+        </mc:AlternateContent>
+        <mc:AlternateContent xmlns:mc="http://schemas.openxmlformats.org/markup-compatibility/2006" xmlns:a14="http://schemas.microsoft.com/office/drawing/2010/main">
+          <mc:Choice Requires="a14">
+            <p:sp>
+              <p:nvSpPr>
+                <p:cNvPr id="9" name="Rectangle 8">
+                  <a:extLst>
+                    <a:ext uri="{FF2B5EF4-FFF2-40B4-BE49-F238E27FC236}">
+                      <a16:creationId xmlns:a16="http://schemas.microsoft.com/office/drawing/2014/main" id="{8A7AB051-C981-845A-ED07-494F16185233}"/>
+                    </a:ext>
+                  </a:extLst>
+                </p:cNvPr>
+                <p:cNvSpPr/>
+                <p:nvPr/>
+              </p:nvSpPr>
+              <p:spPr>
+                <a:xfrm>
+                  <a:off x="3469200" y="3913371"/>
+                  <a:ext cx="468000" cy="468000"/>
+                </a:xfrm>
+                <a:prstGeom prst="rect">
+                  <a:avLst/>
+                </a:prstGeom>
+              </p:spPr>
+              <p:style>
+                <a:lnRef idx="1">
+                  <a:schemeClr val="accent5"/>
+                </a:lnRef>
+                <a:fillRef idx="2">
+                  <a:schemeClr val="accent5"/>
+                </a:fillRef>
+                <a:effectRef idx="1">
+                  <a:schemeClr val="accent5"/>
+                </a:effectRef>
+                <a:fontRef idx="minor">
+                  <a:schemeClr val="dk1"/>
+                </a:fontRef>
+              </p:style>
+              <p:txBody>
+                <a:bodyPr rtlCol="0" anchor="ctr"/>
+                <a:lstStyle/>
+                <a:p>
+                  <a:pPr algn="ctr"/>
+                  <a14:m>
+                    <m:oMathPara xmlns:m="http://schemas.openxmlformats.org/officeDocument/2006/math">
+                      <m:oMathParaPr>
+                        <m:jc m:val="center"/>
+                      </m:oMathParaPr>
+                      <m:oMath xmlns:m="http://schemas.openxmlformats.org/officeDocument/2006/math">
+                        <m:sSubSup>
+                          <m:sSubSupPr>
+                            <m:ctrlPr>
+                              <a:rPr lang="pt-BR" i="1" smtClean="0">
+                                <a:latin typeface="Cambria Math" panose="02040503050406030204" pitchFamily="18" charset="0"/>
+                              </a:rPr>
+                            </m:ctrlPr>
+                          </m:sSubSupPr>
+                          <m:e>
+                            <m:r>
+                              <a:rPr lang="pt-BR" b="1" i="1">
+                                <a:latin typeface="Cambria Math" panose="02040503050406030204" pitchFamily="18" charset="0"/>
+                              </a:rPr>
+                              <m:t>𝑾</m:t>
+                            </m:r>
+                          </m:e>
+                          <m:sub>
+                            <m:r>
+                              <a:rPr lang="pt-BR" i="1">
+                                <a:latin typeface="Cambria Math" panose="02040503050406030204" pitchFamily="18" charset="0"/>
+                              </a:rPr>
+                              <m:t>h</m:t>
+                            </m:r>
+                          </m:sub>
+                          <m:sup>
+                            <m:r>
+                              <a:rPr lang="pt-BR" b="0" i="1" smtClean="0">
+                                <a:latin typeface="Cambria Math" panose="02040503050406030204" pitchFamily="18" charset="0"/>
+                              </a:rPr>
+                              <m:t>h</m:t>
+                            </m:r>
+                          </m:sup>
+                        </m:sSubSup>
+                      </m:oMath>
+                    </m:oMathPara>
+                  </a14:m>
+                  <a:endParaRPr lang="en-US" dirty="0"/>
+                </a:p>
+              </p:txBody>
+            </p:sp>
+          </mc:Choice>
+          <mc:Fallback xmlns="">
+            <p:sp>
+              <p:nvSpPr>
+                <p:cNvPr id="9" name="Rectangle 8">
+                  <a:extLst>
+                    <a:ext uri="{FF2B5EF4-FFF2-40B4-BE49-F238E27FC236}">
+                      <a16:creationId xmlns:a16="http://schemas.microsoft.com/office/drawing/2014/main" id="{8A7AB051-C981-845A-ED07-494F16185233}"/>
+                    </a:ext>
+                  </a:extLst>
+                </p:cNvPr>
+                <p:cNvSpPr>
+                  <a:spLocks noRot="1" noChangeAspect="1" noMove="1" noResize="1" noEditPoints="1" noAdjustHandles="1" noChangeArrowheads="1" noChangeShapeType="1" noTextEdit="1"/>
+                </p:cNvSpPr>
+                <p:nvPr/>
+              </p:nvSpPr>
+              <p:spPr>
+                <a:xfrm>
+                  <a:off x="3469200" y="3913371"/>
+                  <a:ext cx="468000" cy="468000"/>
+                </a:xfrm>
+                <a:prstGeom prst="rect">
+                  <a:avLst/>
+                </a:prstGeom>
+                <a:blipFill>
+                  <a:blip r:embed="rId6"/>
+                  <a:stretch>
+                    <a:fillRect l="-10390"/>
+                  </a:stretch>
+                </a:blipFill>
+              </p:spPr>
+              <p:txBody>
+                <a:bodyPr/>
+                <a:lstStyle/>
+                <a:p>
+                  <a:r>
+                    <a:rPr lang="en-US">
+                      <a:noFill/>
+                    </a:rPr>
+                    <a:t> </a:t>
+                  </a:r>
+                </a:p>
+              </p:txBody>
+            </p:sp>
+          </mc:Fallback>
+        </mc:AlternateContent>
+        <mc:AlternateContent xmlns:mc="http://schemas.openxmlformats.org/markup-compatibility/2006" xmlns:a14="http://schemas.microsoft.com/office/drawing/2010/main">
+          <mc:Choice Requires="a14">
+            <p:sp>
+              <p:nvSpPr>
+                <p:cNvPr id="10" name="Oval 9">
+                  <a:extLst>
+                    <a:ext uri="{FF2B5EF4-FFF2-40B4-BE49-F238E27FC236}">
+                      <a16:creationId xmlns:a16="http://schemas.microsoft.com/office/drawing/2014/main" id="{77DB4635-07B7-7486-7E5D-3ACF28B45B63}"/>
+                    </a:ext>
+                  </a:extLst>
+                </p:cNvPr>
+                <p:cNvSpPr/>
+                <p:nvPr/>
+              </p:nvSpPr>
+              <p:spPr>
+                <a:xfrm>
+                  <a:off x="2475878" y="1782434"/>
+                  <a:ext cx="432000" cy="432000"/>
+                </a:xfrm>
+                <a:prstGeom prst="ellipse">
+                  <a:avLst/>
+                </a:prstGeom>
+              </p:spPr>
+              <p:style>
+                <a:lnRef idx="1">
+                  <a:schemeClr val="accent3"/>
+                </a:lnRef>
+                <a:fillRef idx="2">
+                  <a:schemeClr val="accent3"/>
+                </a:fillRef>
+                <a:effectRef idx="1">
+                  <a:schemeClr val="accent3"/>
+                </a:effectRef>
+                <a:fontRef idx="minor">
+                  <a:schemeClr val="dk1"/>
+                </a:fontRef>
+              </p:style>
+              <p:txBody>
+                <a:bodyPr rtlCol="0" anchor="ctr"/>
+                <a:lstStyle/>
+                <a:p>
+                  <a:pPr algn="ctr"/>
+                  <a14:m>
+                    <m:oMathPara xmlns:m="http://schemas.openxmlformats.org/officeDocument/2006/math">
+                      <m:oMathParaPr>
+                        <m:jc m:val="center"/>
+                      </m:oMathParaPr>
+                      <m:oMath xmlns:m="http://schemas.openxmlformats.org/officeDocument/2006/math">
+                        <m:r>
+                          <a:rPr lang="pt-BR" b="1" i="1">
+                            <a:latin typeface="Cambria Math" panose="02040503050406030204" pitchFamily="18" charset="0"/>
+                          </a:rPr>
+                          <m:t>𝒚</m:t>
+                        </m:r>
+                      </m:oMath>
+                    </m:oMathPara>
+                  </a14:m>
+                  <a:endParaRPr lang="en-US" b="1" dirty="0"/>
+                </a:p>
+              </p:txBody>
+            </p:sp>
+          </mc:Choice>
+          <mc:Fallback xmlns="">
+            <p:sp>
+              <p:nvSpPr>
+                <p:cNvPr id="10" name="Oval 9">
+                  <a:extLst>
+                    <a:ext uri="{FF2B5EF4-FFF2-40B4-BE49-F238E27FC236}">
+                      <a16:creationId xmlns:a16="http://schemas.microsoft.com/office/drawing/2014/main" id="{77DB4635-07B7-7486-7E5D-3ACF28B45B63}"/>
+                    </a:ext>
+                  </a:extLst>
+                </p:cNvPr>
+                <p:cNvSpPr>
+                  <a:spLocks noRot="1" noChangeAspect="1" noMove="1" noResize="1" noEditPoints="1" noAdjustHandles="1" noChangeArrowheads="1" noChangeShapeType="1" noTextEdit="1"/>
+                </p:cNvSpPr>
+                <p:nvPr/>
+              </p:nvSpPr>
+              <p:spPr>
+                <a:xfrm>
+                  <a:off x="2475878" y="1782434"/>
+                  <a:ext cx="432000" cy="432000"/>
+                </a:xfrm>
+                <a:prstGeom prst="ellipse">
+                  <a:avLst/>
+                </a:prstGeom>
+                <a:blipFill>
+                  <a:blip r:embed="rId7"/>
+                  <a:stretch>
+                    <a:fillRect/>
+                  </a:stretch>
+                </a:blipFill>
+              </p:spPr>
+              <p:txBody>
+                <a:bodyPr/>
+                <a:lstStyle/>
+                <a:p>
+                  <a:r>
+                    <a:rPr lang="en-US">
+                      <a:noFill/>
+                    </a:rPr>
+                    <a:t> </a:t>
+                  </a:r>
+                </a:p>
+              </p:txBody>
+            </p:sp>
+          </mc:Fallback>
+        </mc:AlternateContent>
+        <mc:AlternateContent xmlns:mc="http://schemas.openxmlformats.org/markup-compatibility/2006" xmlns:a14="http://schemas.microsoft.com/office/drawing/2010/main">
+          <mc:Choice Requires="a14">
+            <p:sp>
+              <p:nvSpPr>
+                <p:cNvPr id="11" name="Oval 10">
+                  <a:extLst>
+                    <a:ext uri="{FF2B5EF4-FFF2-40B4-BE49-F238E27FC236}">
+                      <a16:creationId xmlns:a16="http://schemas.microsoft.com/office/drawing/2014/main" id="{4E44AABE-4653-C0B2-EB11-C0FEB69735D2}"/>
+                    </a:ext>
+                  </a:extLst>
+                </p:cNvPr>
+                <p:cNvSpPr/>
+                <p:nvPr/>
+              </p:nvSpPr>
+              <p:spPr>
+                <a:xfrm>
+                  <a:off x="2475878" y="3931371"/>
+                  <a:ext cx="432000" cy="432000"/>
+                </a:xfrm>
+                <a:prstGeom prst="ellipse">
+                  <a:avLst/>
+                </a:prstGeom>
+              </p:spPr>
+              <p:style>
+                <a:lnRef idx="1">
+                  <a:schemeClr val="accent3"/>
+                </a:lnRef>
+                <a:fillRef idx="2">
+                  <a:schemeClr val="accent3"/>
+                </a:fillRef>
+                <a:effectRef idx="1">
+                  <a:schemeClr val="accent3"/>
+                </a:effectRef>
+                <a:fontRef idx="minor">
+                  <a:schemeClr val="dk1"/>
+                </a:fontRef>
+              </p:style>
+              <p:txBody>
+                <a:bodyPr rtlCol="0" anchor="ctr"/>
+                <a:lstStyle/>
+                <a:p>
+                  <a:pPr algn="ctr"/>
+                  <a14:m>
+                    <m:oMathPara xmlns:m="http://schemas.openxmlformats.org/officeDocument/2006/math">
+                      <m:oMathParaPr>
+                        <m:jc m:val="center"/>
+                      </m:oMathParaPr>
+                      <m:oMath xmlns:m="http://schemas.openxmlformats.org/officeDocument/2006/math">
+                        <m:r>
+                          <a:rPr lang="pt-BR" b="1" i="1" smtClean="0">
+                            <a:latin typeface="Cambria Math" panose="02040503050406030204" pitchFamily="18" charset="0"/>
+                          </a:rPr>
+                          <m:t>𝒉</m:t>
+                        </m:r>
+                      </m:oMath>
+                    </m:oMathPara>
+                  </a14:m>
+                  <a:endParaRPr lang="en-US" b="1" dirty="0"/>
+                </a:p>
+              </p:txBody>
+            </p:sp>
+          </mc:Choice>
+          <mc:Fallback xmlns="">
+            <p:sp>
+              <p:nvSpPr>
+                <p:cNvPr id="11" name="Oval 10">
+                  <a:extLst>
+                    <a:ext uri="{FF2B5EF4-FFF2-40B4-BE49-F238E27FC236}">
+                      <a16:creationId xmlns:a16="http://schemas.microsoft.com/office/drawing/2014/main" id="{4E44AABE-4653-C0B2-EB11-C0FEB69735D2}"/>
+                    </a:ext>
+                  </a:extLst>
+                </p:cNvPr>
+                <p:cNvSpPr>
+                  <a:spLocks noRot="1" noChangeAspect="1" noMove="1" noResize="1" noEditPoints="1" noAdjustHandles="1" noChangeArrowheads="1" noChangeShapeType="1" noTextEdit="1"/>
+                </p:cNvSpPr>
+                <p:nvPr/>
+              </p:nvSpPr>
+              <p:spPr>
+                <a:xfrm>
+                  <a:off x="2475878" y="3931371"/>
+                  <a:ext cx="432000" cy="432000"/>
+                </a:xfrm>
+                <a:prstGeom prst="ellipse">
+                  <a:avLst/>
+                </a:prstGeom>
+                <a:blipFill>
+                  <a:blip r:embed="rId8"/>
+                  <a:stretch>
+                    <a:fillRect/>
+                  </a:stretch>
+                </a:blipFill>
+              </p:spPr>
+              <p:txBody>
+                <a:bodyPr/>
+                <a:lstStyle/>
+                <a:p>
+                  <a:r>
+                    <a:rPr lang="en-US">
+                      <a:noFill/>
+                    </a:rPr>
+                    <a:t> </a:t>
+                  </a:r>
+                </a:p>
+              </p:txBody>
+            </p:sp>
+          </mc:Fallback>
+        </mc:AlternateContent>
+        <mc:AlternateContent xmlns:mc="http://schemas.openxmlformats.org/markup-compatibility/2006" xmlns:a14="http://schemas.microsoft.com/office/drawing/2010/main">
+          <mc:Choice Requires="a14">
+            <p:sp>
+              <p:nvSpPr>
+                <p:cNvPr id="12" name="Oval 11">
+                  <a:extLst>
+                    <a:ext uri="{FF2B5EF4-FFF2-40B4-BE49-F238E27FC236}">
+                      <a16:creationId xmlns:a16="http://schemas.microsoft.com/office/drawing/2014/main" id="{C141CD42-7D53-F5BD-BEF6-04056881C93C}"/>
+                    </a:ext>
+                  </a:extLst>
+                </p:cNvPr>
+                <p:cNvSpPr/>
+                <p:nvPr/>
+              </p:nvSpPr>
+              <p:spPr>
+                <a:xfrm>
+                  <a:off x="2475878" y="5857797"/>
+                  <a:ext cx="432000" cy="432000"/>
+                </a:xfrm>
+                <a:prstGeom prst="ellipse">
+                  <a:avLst/>
+                </a:prstGeom>
+              </p:spPr>
+              <p:style>
+                <a:lnRef idx="1">
+                  <a:schemeClr val="accent3"/>
+                </a:lnRef>
+                <a:fillRef idx="2">
+                  <a:schemeClr val="accent3"/>
+                </a:fillRef>
+                <a:effectRef idx="1">
+                  <a:schemeClr val="accent3"/>
+                </a:effectRef>
+                <a:fontRef idx="minor">
+                  <a:schemeClr val="dk1"/>
+                </a:fontRef>
+              </p:style>
+              <p:txBody>
+                <a:bodyPr rtlCol="0" anchor="ctr"/>
+                <a:lstStyle/>
+                <a:p>
+                  <a:pPr algn="ctr"/>
+                  <a14:m>
+                    <m:oMathPara xmlns:m="http://schemas.openxmlformats.org/officeDocument/2006/math">
+                      <m:oMathParaPr>
+                        <m:jc m:val="center"/>
+                      </m:oMathParaPr>
+                      <m:oMath xmlns:m="http://schemas.openxmlformats.org/officeDocument/2006/math">
+                        <m:r>
+                          <a:rPr lang="pt-BR" b="1" i="1" smtClean="0">
+                            <a:latin typeface="Cambria Math" panose="02040503050406030204" pitchFamily="18" charset="0"/>
+                          </a:rPr>
+                          <m:t>𝒙</m:t>
+                        </m:r>
+                      </m:oMath>
+                    </m:oMathPara>
+                  </a14:m>
+                  <a:endParaRPr lang="en-US" b="1" dirty="0"/>
+                </a:p>
+              </p:txBody>
+            </p:sp>
+          </mc:Choice>
+          <mc:Fallback xmlns="">
+            <p:sp>
+              <p:nvSpPr>
+                <p:cNvPr id="12" name="Oval 11">
+                  <a:extLst>
+                    <a:ext uri="{FF2B5EF4-FFF2-40B4-BE49-F238E27FC236}">
+                      <a16:creationId xmlns:a16="http://schemas.microsoft.com/office/drawing/2014/main" id="{C141CD42-7D53-F5BD-BEF6-04056881C93C}"/>
+                    </a:ext>
+                  </a:extLst>
+                </p:cNvPr>
+                <p:cNvSpPr>
+                  <a:spLocks noRot="1" noChangeAspect="1" noMove="1" noResize="1" noEditPoints="1" noAdjustHandles="1" noChangeArrowheads="1" noChangeShapeType="1" noTextEdit="1"/>
+                </p:cNvSpPr>
+                <p:nvPr/>
+              </p:nvSpPr>
+              <p:spPr>
+                <a:xfrm>
+                  <a:off x="2475878" y="5857797"/>
+                  <a:ext cx="432000" cy="432000"/>
+                </a:xfrm>
+                <a:prstGeom prst="ellipse">
+                  <a:avLst/>
+                </a:prstGeom>
+                <a:blipFill>
+                  <a:blip r:embed="rId9"/>
+                  <a:stretch>
+                    <a:fillRect/>
+                  </a:stretch>
+                </a:blipFill>
+              </p:spPr>
+              <p:txBody>
+                <a:bodyPr/>
+                <a:lstStyle/>
+                <a:p>
+                  <a:r>
+                    <a:rPr lang="en-US">
+                      <a:noFill/>
+                    </a:rPr>
+                    <a:t> </a:t>
+                  </a:r>
+                </a:p>
+              </p:txBody>
+            </p:sp>
+          </mc:Fallback>
+        </mc:AlternateContent>
+        <mc:AlternateContent xmlns:mc="http://schemas.openxmlformats.org/markup-compatibility/2006" xmlns:a14="http://schemas.microsoft.com/office/drawing/2010/main">
+          <mc:Choice Requires="a14">
+            <p:sp>
+              <p:nvSpPr>
+                <p:cNvPr id="13" name="Diamond 12">
+                  <a:extLst>
+                    <a:ext uri="{FF2B5EF4-FFF2-40B4-BE49-F238E27FC236}">
+                      <a16:creationId xmlns:a16="http://schemas.microsoft.com/office/drawing/2014/main" id="{67CA677B-560B-7B59-D4A5-7FE1ADE51CA4}"/>
+                    </a:ext>
+                  </a:extLst>
+                </p:cNvPr>
+                <p:cNvSpPr/>
+                <p:nvPr/>
+              </p:nvSpPr>
+              <p:spPr>
+                <a:xfrm>
+                  <a:off x="2971382" y="3226750"/>
+                  <a:ext cx="546518" cy="468000"/>
+                </a:xfrm>
+                <a:prstGeom prst="diamond">
+                  <a:avLst/>
+                </a:prstGeom>
+              </p:spPr>
+              <p:style>
+                <a:lnRef idx="2">
+                  <a:schemeClr val="dk1"/>
+                </a:lnRef>
+                <a:fillRef idx="1">
+                  <a:schemeClr val="lt1"/>
+                </a:fillRef>
+                <a:effectRef idx="0">
+                  <a:schemeClr val="dk1"/>
+                </a:effectRef>
+                <a:fontRef idx="minor">
+                  <a:schemeClr val="dk1"/>
+                </a:fontRef>
+              </p:style>
+              <p:txBody>
+                <a:bodyPr rtlCol="0" anchor="ctr"/>
+                <a:lstStyle/>
+                <a:p>
+                  <a:pPr algn="ctr"/>
+                  <a14:m>
+                    <m:oMathPara xmlns:m="http://schemas.openxmlformats.org/officeDocument/2006/math">
+                      <m:oMathParaPr>
+                        <m:jc m:val="centerGroup"/>
+                      </m:oMathParaPr>
+                      <m:oMath xmlns:m="http://schemas.openxmlformats.org/officeDocument/2006/math">
+                        <m:sSup>
+                          <m:sSupPr>
+                            <m:ctrlPr>
+                              <a:rPr lang="en-US" i="1" smtClean="0">
+                                <a:latin typeface="Cambria Math" panose="02040503050406030204" pitchFamily="18" charset="0"/>
+                              </a:rPr>
+                            </m:ctrlPr>
+                          </m:sSupPr>
+                          <m:e>
+                            <m:r>
+                              <a:rPr lang="pt-BR" b="0" i="1" smtClean="0">
+                                <a:latin typeface="Cambria Math" panose="02040503050406030204" pitchFamily="18" charset="0"/>
+                              </a:rPr>
+                              <m:t>𝑧</m:t>
+                            </m:r>
+                          </m:e>
+                          <m:sup>
+                            <m:r>
+                              <a:rPr lang="pt-BR" b="0" i="1" smtClean="0">
+                                <a:latin typeface="Cambria Math" panose="02040503050406030204" pitchFamily="18" charset="0"/>
+                              </a:rPr>
+                              <m:t>−1</m:t>
+                            </m:r>
+                          </m:sup>
+                        </m:sSup>
+                      </m:oMath>
+                    </m:oMathPara>
+                  </a14:m>
+                  <a:endParaRPr lang="en-US" dirty="0"/>
+                </a:p>
+              </p:txBody>
+            </p:sp>
+          </mc:Choice>
+          <mc:Fallback xmlns="">
+            <p:sp>
+              <p:nvSpPr>
+                <p:cNvPr id="13" name="Diamond 12">
+                  <a:extLst>
+                    <a:ext uri="{FF2B5EF4-FFF2-40B4-BE49-F238E27FC236}">
+                      <a16:creationId xmlns:a16="http://schemas.microsoft.com/office/drawing/2014/main" id="{67CA677B-560B-7B59-D4A5-7FE1ADE51CA4}"/>
+                    </a:ext>
+                  </a:extLst>
+                </p:cNvPr>
+                <p:cNvSpPr>
+                  <a:spLocks noRot="1" noChangeAspect="1" noMove="1" noResize="1" noEditPoints="1" noAdjustHandles="1" noChangeArrowheads="1" noChangeShapeType="1" noTextEdit="1"/>
+                </p:cNvSpPr>
+                <p:nvPr/>
+              </p:nvSpPr>
+              <p:spPr>
+                <a:xfrm>
+                  <a:off x="2971382" y="3226750"/>
+                  <a:ext cx="546518" cy="468000"/>
+                </a:xfrm>
+                <a:prstGeom prst="diamond">
+                  <a:avLst/>
+                </a:prstGeom>
+                <a:blipFill>
+                  <a:blip r:embed="rId10"/>
+                  <a:stretch>
+                    <a:fillRect/>
+                  </a:stretch>
+                </a:blipFill>
+              </p:spPr>
+              <p:txBody>
+                <a:bodyPr/>
+                <a:lstStyle/>
+                <a:p>
+                  <a:r>
+                    <a:rPr lang="en-US">
+                      <a:noFill/>
+                    </a:rPr>
+                    <a:t> </a:t>
+                  </a:r>
+                </a:p>
+              </p:txBody>
+            </p:sp>
+          </mc:Fallback>
+        </mc:AlternateContent>
+        <mc:AlternateContent xmlns:mc="http://schemas.openxmlformats.org/markup-compatibility/2006" xmlns:a14="http://schemas.microsoft.com/office/drawing/2010/main">
+          <mc:Choice Requires="a14">
+            <p:sp>
+              <p:nvSpPr>
+                <p:cNvPr id="14" name="Oval 13">
+                  <a:extLst>
+                    <a:ext uri="{FF2B5EF4-FFF2-40B4-BE49-F238E27FC236}">
+                      <a16:creationId xmlns:a16="http://schemas.microsoft.com/office/drawing/2014/main" id="{3903BD0D-90B7-3563-DEA8-0074E8E8DE22}"/>
+                    </a:ext>
+                  </a:extLst>
+                </p:cNvPr>
+                <p:cNvSpPr/>
+                <p:nvPr/>
+              </p:nvSpPr>
+              <p:spPr>
+                <a:xfrm>
+                  <a:off x="2468334" y="4565911"/>
+                  <a:ext cx="432000" cy="432000"/>
+                </a:xfrm>
+                <a:prstGeom prst="ellipse">
+                  <a:avLst/>
+                </a:prstGeom>
+              </p:spPr>
+              <p:style>
+                <a:lnRef idx="1">
+                  <a:schemeClr val="accent3"/>
+                </a:lnRef>
+                <a:fillRef idx="2">
+                  <a:schemeClr val="accent3"/>
+                </a:fillRef>
+                <a:effectRef idx="1">
+                  <a:schemeClr val="accent3"/>
+                </a:effectRef>
+                <a:fontRef idx="minor">
+                  <a:schemeClr val="dk1"/>
+                </a:fontRef>
+              </p:style>
+              <p:txBody>
+                <a:bodyPr rtlCol="0" anchor="ctr"/>
+                <a:lstStyle/>
+                <a:p>
+                  <a:pPr algn="ctr"/>
+                  <a14:m>
+                    <m:oMathPara xmlns:m="http://schemas.openxmlformats.org/officeDocument/2006/math">
+                      <m:oMathParaPr>
+                        <m:jc m:val="center"/>
+                      </m:oMathParaPr>
+                      <m:oMath xmlns:m="http://schemas.openxmlformats.org/officeDocument/2006/math">
+                        <m:r>
+                          <m:rPr>
+                            <m:sty m:val="p"/>
+                          </m:rPr>
+                          <a:rPr lang="pt-BR" sz="1400" b="0" i="0" smtClean="0">
+                            <a:latin typeface="Cambria Math" panose="02040503050406030204" pitchFamily="18" charset="0"/>
+                          </a:rPr>
+                          <m:t>tanh</m:t>
+                        </m:r>
+                      </m:oMath>
+                    </m:oMathPara>
+                  </a14:m>
+                  <a:endParaRPr lang="en-US" sz="1400" dirty="0"/>
+                </a:p>
+              </p:txBody>
+            </p:sp>
+          </mc:Choice>
+          <mc:Fallback xmlns="">
+            <p:sp>
+              <p:nvSpPr>
+                <p:cNvPr id="14" name="Oval 13">
+                  <a:extLst>
+                    <a:ext uri="{FF2B5EF4-FFF2-40B4-BE49-F238E27FC236}">
+                      <a16:creationId xmlns:a16="http://schemas.microsoft.com/office/drawing/2014/main" id="{3903BD0D-90B7-3563-DEA8-0074E8E8DE22}"/>
+                    </a:ext>
+                  </a:extLst>
+                </p:cNvPr>
+                <p:cNvSpPr>
+                  <a:spLocks noRot="1" noChangeAspect="1" noMove="1" noResize="1" noEditPoints="1" noAdjustHandles="1" noChangeArrowheads="1" noChangeShapeType="1" noTextEdit="1"/>
+                </p:cNvSpPr>
+                <p:nvPr/>
+              </p:nvSpPr>
+              <p:spPr>
+                <a:xfrm>
+                  <a:off x="2468334" y="4565911"/>
+                  <a:ext cx="432000" cy="432000"/>
+                </a:xfrm>
+                <a:prstGeom prst="ellipse">
+                  <a:avLst/>
+                </a:prstGeom>
+                <a:blipFill>
+                  <a:blip r:embed="rId11"/>
+                  <a:stretch>
+                    <a:fillRect l="-8333"/>
+                  </a:stretch>
+                </a:blipFill>
+              </p:spPr>
+              <p:txBody>
+                <a:bodyPr/>
+                <a:lstStyle/>
+                <a:p>
+                  <a:r>
+                    <a:rPr lang="en-US">
+                      <a:noFill/>
+                    </a:rPr>
+                    <a:t> </a:t>
+                  </a:r>
+                </a:p>
+              </p:txBody>
+            </p:sp>
+          </mc:Fallback>
+        </mc:AlternateContent>
+        <p:cxnSp>
+          <p:nvCxnSpPr>
+            <p:cNvPr id="16" name="Straight Arrow Connector 15">
               <a:extLst>
                 <a:ext uri="{FF2B5EF4-FFF2-40B4-BE49-F238E27FC236}">
-                  <a16:creationId xmlns:a16="http://schemas.microsoft.com/office/drawing/2014/main" id="{63391EED-302C-FBFB-0474-27E583372AF8}"/>
+                  <a16:creationId xmlns:a16="http://schemas.microsoft.com/office/drawing/2014/main" id="{9D809E63-736B-4875-9A6F-0C0E3D0EE791}"/>
                 </a:ext>
               </a:extLst>
             </p:cNvPr>
-            <p:cNvPicPr>
-              <a:picLocks noChangeAspect="1"/>
-            </p:cNvPicPr>
+            <p:cNvCxnSpPr>
+              <a:stCxn id="12" idx="0"/>
+              <a:endCxn id="8" idx="2"/>
+            </p:cNvCxnSpPr>
             <p:nvPr/>
-          </p:nvPicPr>
-          <p:blipFill>
-            <a:blip r:embed="rId4"/>
-            <a:stretch>
-              <a:fillRect/>
-            </a:stretch>
-          </p:blipFill>
+          </p:nvCxnSpPr>
           <p:spPr>
-            <a:xfrm>
-              <a:off x="1476947" y="2177448"/>
-              <a:ext cx="1552792" cy="4315427"/>
+            <a:xfrm flipH="1" flipV="1">
+              <a:off x="2688106" y="5661854"/>
+              <a:ext cx="3772" cy="195943"/>
             </a:xfrm>
-            <a:prstGeom prst="rect">
+            <a:prstGeom prst="straightConnector1">
               <a:avLst/>
             </a:prstGeom>
+            <a:ln>
+              <a:tailEnd type="triangle"/>
+            </a:ln>
           </p:spPr>
-        </p:pic>
-        <p:pic>
-          <p:nvPicPr>
-            <p:cNvPr id="6" name="Picture 5">
+          <p:style>
+            <a:lnRef idx="1">
+              <a:schemeClr val="dk1"/>
+            </a:lnRef>
+            <a:fillRef idx="0">
+              <a:schemeClr val="dk1"/>
+            </a:fillRef>
+            <a:effectRef idx="0">
+              <a:schemeClr val="dk1"/>
+            </a:effectRef>
+            <a:fontRef idx="minor">
+              <a:schemeClr val="tx1"/>
+            </a:fontRef>
+          </p:style>
+        </p:cxnSp>
+        <p:cxnSp>
+          <p:nvCxnSpPr>
+            <p:cNvPr id="17" name="Straight Arrow Connector 16">
               <a:extLst>
                 <a:ext uri="{FF2B5EF4-FFF2-40B4-BE49-F238E27FC236}">
-                  <a16:creationId xmlns:a16="http://schemas.microsoft.com/office/drawing/2014/main" id="{0CD0E170-631A-966A-4288-1BD17021F66D}"/>
+                  <a16:creationId xmlns:a16="http://schemas.microsoft.com/office/drawing/2014/main" id="{6F863549-E754-FB83-0BC8-ADCD812A40BF}"/>
                 </a:ext>
               </a:extLst>
             </p:cNvPr>
-            <p:cNvPicPr>
-              <a:picLocks noChangeAspect="1"/>
-            </p:cNvPicPr>
+            <p:cNvCxnSpPr/>
             <p:nvPr/>
-          </p:nvPicPr>
-          <p:blipFill>
-            <a:blip r:embed="rId4"/>
-            <a:srcRect l="59816" t="89723" r="14947" b="2710"/>
-            <a:stretch>
-              <a:fillRect/>
-            </a:stretch>
-          </p:blipFill>
+          </p:nvCxnSpPr>
+          <p:spPr>
+            <a:xfrm flipH="1" flipV="1">
+              <a:off x="2691878" y="4997911"/>
+              <a:ext cx="3772" cy="195943"/>
+            </a:xfrm>
+            <a:prstGeom prst="straightConnector1">
+              <a:avLst/>
+            </a:prstGeom>
+            <a:ln>
+              <a:tailEnd type="triangle"/>
+            </a:ln>
+          </p:spPr>
+          <p:style>
+            <a:lnRef idx="1">
+              <a:schemeClr val="dk1"/>
+            </a:lnRef>
+            <a:fillRef idx="0">
+              <a:schemeClr val="dk1"/>
+            </a:fillRef>
+            <a:effectRef idx="0">
+              <a:schemeClr val="dk1"/>
+            </a:effectRef>
+            <a:fontRef idx="minor">
+              <a:schemeClr val="tx1"/>
+            </a:fontRef>
+          </p:style>
+        </p:cxnSp>
+        <p:cxnSp>
+          <p:nvCxnSpPr>
+            <p:cNvPr id="18" name="Straight Arrow Connector 17">
+              <a:extLst>
+                <a:ext uri="{FF2B5EF4-FFF2-40B4-BE49-F238E27FC236}">
+                  <a16:creationId xmlns:a16="http://schemas.microsoft.com/office/drawing/2014/main" id="{BBA22B2C-803A-7AAF-2961-172354C4261D}"/>
+                </a:ext>
+              </a:extLst>
+            </p:cNvPr>
+            <p:cNvCxnSpPr/>
+            <p:nvPr/>
+          </p:nvCxnSpPr>
+          <p:spPr>
+            <a:xfrm flipH="1" flipV="1">
+              <a:off x="2688106" y="4369968"/>
+              <a:ext cx="3772" cy="195943"/>
+            </a:xfrm>
+            <a:prstGeom prst="straightConnector1">
+              <a:avLst/>
+            </a:prstGeom>
+            <a:ln>
+              <a:tailEnd type="triangle"/>
+            </a:ln>
+          </p:spPr>
+          <p:style>
+            <a:lnRef idx="1">
+              <a:schemeClr val="dk1"/>
+            </a:lnRef>
+            <a:fillRef idx="0">
+              <a:schemeClr val="dk1"/>
+            </a:fillRef>
+            <a:effectRef idx="0">
+              <a:schemeClr val="dk1"/>
+            </a:effectRef>
+            <a:fontRef idx="minor">
+              <a:schemeClr val="tx1"/>
+            </a:fontRef>
+          </p:style>
+        </p:cxnSp>
+        <p:cxnSp>
+          <p:nvCxnSpPr>
+            <p:cNvPr id="20" name="Straight Arrow Connector 19">
+              <a:extLst>
+                <a:ext uri="{FF2B5EF4-FFF2-40B4-BE49-F238E27FC236}">
+                  <a16:creationId xmlns:a16="http://schemas.microsoft.com/office/drawing/2014/main" id="{B7602213-99C2-6D91-68C2-350E51CB45BA}"/>
+                </a:ext>
+              </a:extLst>
+            </p:cNvPr>
+            <p:cNvCxnSpPr>
+              <a:stCxn id="11" idx="0"/>
+              <a:endCxn id="7" idx="2"/>
+            </p:cNvCxnSpPr>
+            <p:nvPr/>
+          </p:nvCxnSpPr>
+          <p:spPr>
+            <a:xfrm flipV="1">
+              <a:off x="2691878" y="2894299"/>
+              <a:ext cx="2760" cy="1037072"/>
+            </a:xfrm>
+            <a:prstGeom prst="straightConnector1">
+              <a:avLst/>
+            </a:prstGeom>
+            <a:ln>
+              <a:tailEnd type="triangle"/>
+            </a:ln>
+          </p:spPr>
+          <p:style>
+            <a:lnRef idx="1">
+              <a:schemeClr val="dk1"/>
+            </a:lnRef>
+            <a:fillRef idx="0">
+              <a:schemeClr val="dk1"/>
+            </a:fillRef>
+            <a:effectRef idx="0">
+              <a:schemeClr val="dk1"/>
+            </a:effectRef>
+            <a:fontRef idx="minor">
+              <a:schemeClr val="tx1"/>
+            </a:fontRef>
+          </p:style>
+        </p:cxnSp>
+        <p:cxnSp>
+          <p:nvCxnSpPr>
+            <p:cNvPr id="22" name="Connector: Elbow 21">
+              <a:extLst>
+                <a:ext uri="{FF2B5EF4-FFF2-40B4-BE49-F238E27FC236}">
+                  <a16:creationId xmlns:a16="http://schemas.microsoft.com/office/drawing/2014/main" id="{0B339F9D-BF4A-F570-33E8-268CA4955E06}"/>
+                </a:ext>
+              </a:extLst>
+            </p:cNvPr>
+            <p:cNvCxnSpPr>
+              <a:stCxn id="13" idx="3"/>
+              <a:endCxn id="9" idx="0"/>
+            </p:cNvCxnSpPr>
+            <p:nvPr/>
+          </p:nvCxnSpPr>
           <p:spPr>
             <a:xfrm>
-              <a:off x="2637853" y="6013677"/>
-              <a:ext cx="391886" cy="326571"/>
+              <a:off x="3517900" y="3460750"/>
+              <a:ext cx="185300" cy="452621"/>
             </a:xfrm>
-            <a:prstGeom prst="rect">
+            <a:prstGeom prst="bentConnector2">
               <a:avLst/>
             </a:prstGeom>
+            <a:ln>
+              <a:tailEnd type="triangle"/>
+            </a:ln>
           </p:spPr>
-        </p:pic>
+          <p:style>
+            <a:lnRef idx="1">
+              <a:schemeClr val="dk1"/>
+            </a:lnRef>
+            <a:fillRef idx="0">
+              <a:schemeClr val="dk1"/>
+            </a:fillRef>
+            <a:effectRef idx="0">
+              <a:schemeClr val="dk1"/>
+            </a:effectRef>
+            <a:fontRef idx="minor">
+              <a:schemeClr val="tx1"/>
+            </a:fontRef>
+          </p:style>
+        </p:cxnSp>
+        <p:cxnSp>
+          <p:nvCxnSpPr>
+            <p:cNvPr id="24" name="Straight Connector 23">
+              <a:extLst>
+                <a:ext uri="{FF2B5EF4-FFF2-40B4-BE49-F238E27FC236}">
+                  <a16:creationId xmlns:a16="http://schemas.microsoft.com/office/drawing/2014/main" id="{48CF9987-D9A4-3B7F-13F8-EECF2B070EC6}"/>
+                </a:ext>
+              </a:extLst>
+            </p:cNvPr>
+            <p:cNvCxnSpPr>
+              <a:stCxn id="13" idx="1"/>
+            </p:cNvCxnSpPr>
+            <p:nvPr/>
+          </p:nvCxnSpPr>
+          <p:spPr>
+            <a:xfrm flipH="1">
+              <a:off x="2704578" y="3460750"/>
+              <a:ext cx="266804" cy="0"/>
+            </a:xfrm>
+            <a:prstGeom prst="line">
+              <a:avLst/>
+            </a:prstGeom>
+            <a:ln>
+              <a:headEnd type="triangle" w="med" len="med"/>
+              <a:tailEnd type="none" w="med" len="med"/>
+            </a:ln>
+          </p:spPr>
+          <p:style>
+            <a:lnRef idx="1">
+              <a:schemeClr val="dk1"/>
+            </a:lnRef>
+            <a:fillRef idx="0">
+              <a:schemeClr val="dk1"/>
+            </a:fillRef>
+            <a:effectRef idx="0">
+              <a:schemeClr val="dk1"/>
+            </a:effectRef>
+            <a:fontRef idx="minor">
+              <a:schemeClr val="tx1"/>
+            </a:fontRef>
+          </p:style>
+        </p:cxnSp>
+        <p:cxnSp>
+          <p:nvCxnSpPr>
+            <p:cNvPr id="28" name="Connector: Elbow 27">
+              <a:extLst>
+                <a:ext uri="{FF2B5EF4-FFF2-40B4-BE49-F238E27FC236}">
+                  <a16:creationId xmlns:a16="http://schemas.microsoft.com/office/drawing/2014/main" id="{BE173DAD-6279-DA18-890C-558E2E4BEDFA}"/>
+                </a:ext>
+              </a:extLst>
+            </p:cNvPr>
+            <p:cNvCxnSpPr>
+              <a:cxnSpLocks/>
+              <a:stCxn id="9" idx="2"/>
+              <a:endCxn id="14" idx="6"/>
+            </p:cNvCxnSpPr>
+            <p:nvPr/>
+          </p:nvCxnSpPr>
+          <p:spPr>
+            <a:xfrm rot="5400000">
+              <a:off x="3101497" y="4180208"/>
+              <a:ext cx="400540" cy="802866"/>
+            </a:xfrm>
+            <a:prstGeom prst="bentConnector2">
+              <a:avLst/>
+            </a:prstGeom>
+            <a:ln>
+              <a:tailEnd type="triangle"/>
+            </a:ln>
+          </p:spPr>
+          <p:style>
+            <a:lnRef idx="1">
+              <a:schemeClr val="dk1"/>
+            </a:lnRef>
+            <a:fillRef idx="0">
+              <a:schemeClr val="dk1"/>
+            </a:fillRef>
+            <a:effectRef idx="0">
+              <a:schemeClr val="dk1"/>
+            </a:effectRef>
+            <a:fontRef idx="minor">
+              <a:schemeClr val="tx1"/>
+            </a:fontRef>
+          </p:style>
+        </p:cxnSp>
+        <p:cxnSp>
+          <p:nvCxnSpPr>
+            <p:cNvPr id="30" name="Straight Arrow Connector 29">
+              <a:extLst>
+                <a:ext uri="{FF2B5EF4-FFF2-40B4-BE49-F238E27FC236}">
+                  <a16:creationId xmlns:a16="http://schemas.microsoft.com/office/drawing/2014/main" id="{DA99DD4B-EF59-5C44-CC1D-6ED353F56C0E}"/>
+                </a:ext>
+              </a:extLst>
+            </p:cNvPr>
+            <p:cNvCxnSpPr/>
+            <p:nvPr/>
+          </p:nvCxnSpPr>
+          <p:spPr>
+            <a:xfrm flipH="1" flipV="1">
+              <a:off x="2694721" y="2223759"/>
+              <a:ext cx="3772" cy="195943"/>
+            </a:xfrm>
+            <a:prstGeom prst="straightConnector1">
+              <a:avLst/>
+            </a:prstGeom>
+            <a:ln>
+              <a:tailEnd type="triangle"/>
+            </a:ln>
+          </p:spPr>
+          <p:style>
+            <a:lnRef idx="1">
+              <a:schemeClr val="dk1"/>
+            </a:lnRef>
+            <a:fillRef idx="0">
+              <a:schemeClr val="dk1"/>
+            </a:fillRef>
+            <a:effectRef idx="0">
+              <a:schemeClr val="dk1"/>
+            </a:effectRef>
+            <a:fontRef idx="minor">
+              <a:schemeClr val="tx1"/>
+            </a:fontRef>
+          </p:style>
+        </p:cxnSp>
       </p:grpSp>
     </p:spTree>
     <p:extLst>
       <p:ext uri="{BB962C8B-B14F-4D97-AF65-F5344CB8AC3E}">
         <p14:creationId xmlns:p14="http://schemas.microsoft.com/office/powerpoint/2010/main" val="336154921"/>
-      </p:ext>
-    </p:extLst>
-  </p:cSld>
-  <p:clrMapOvr>
-    <a:masterClrMapping/>
-  </p:clrMapOvr>
-</p:sld>
-</file>
-
-<file path=ppt/slides/slide11.xml><?xml version="1.0" encoding="utf-8"?>
-<p:sld xmlns:a="http://schemas.openxmlformats.org/drawingml/2006/main" xmlns:r="http://schemas.openxmlformats.org/officeDocument/2006/relationships" xmlns:p="http://schemas.openxmlformats.org/presentationml/2006/main">
-  <p:cSld>
-    <p:spTree>
-      <p:nvGrpSpPr>
-        <p:cNvPr id="1" name=""/>
-        <p:cNvGrpSpPr/>
-        <p:nvPr/>
-      </p:nvGrpSpPr>
-      <p:grpSpPr>
-        <a:xfrm>
-          <a:off x="0" y="0"/>
-          <a:ext cx="0" cy="0"/>
-          <a:chOff x="0" y="0"/>
-          <a:chExt cx="0" cy="0"/>
-        </a:xfrm>
-      </p:grpSpPr>
-      <p:sp>
-        <p:nvSpPr>
-          <p:cNvPr id="2" name="Title 1">
-            <a:extLst>
-              <a:ext uri="{FF2B5EF4-FFF2-40B4-BE49-F238E27FC236}">
-                <a16:creationId xmlns:a16="http://schemas.microsoft.com/office/drawing/2014/main" id="{D316F952-34AF-BA6E-B7BC-56FB84A3F677}"/>
-              </a:ext>
-            </a:extLst>
-          </p:cNvPr>
-          <p:cNvSpPr>
-            <a:spLocks noGrp="1"/>
-          </p:cNvSpPr>
-          <p:nvPr>
-            <p:ph type="title"/>
-          </p:nvPr>
-        </p:nvSpPr>
-        <p:spPr/>
-        <p:txBody>
-          <a:bodyPr/>
-          <a:lstStyle/>
-          <a:p>
-            <a:r>
-              <a:rPr lang="pt-BR" dirty="0"/>
-              <a:t>Rede neural recorrente</a:t>
-            </a:r>
-            <a:endParaRPr lang="en-US" dirty="0"/>
-          </a:p>
-        </p:txBody>
-      </p:sp>
-      <p:sp>
-        <p:nvSpPr>
-          <p:cNvPr id="3" name="Content Placeholder 2">
-            <a:extLst>
-              <a:ext uri="{FF2B5EF4-FFF2-40B4-BE49-F238E27FC236}">
-                <a16:creationId xmlns:a16="http://schemas.microsoft.com/office/drawing/2014/main" id="{330A4886-E5F5-4A0C-632C-A874615BA66E}"/>
-              </a:ext>
-            </a:extLst>
-          </p:cNvPr>
-          <p:cNvSpPr>
-            <a:spLocks noGrp="1"/>
-          </p:cNvSpPr>
-          <p:nvPr>
-            <p:ph idx="1"/>
-          </p:nvPr>
-        </p:nvSpPr>
-        <p:spPr>
-          <a:xfrm>
-            <a:off x="838200" y="1825624"/>
-            <a:ext cx="11212286" cy="5032375"/>
-          </a:xfrm>
-        </p:spPr>
-        <p:txBody>
-          <a:bodyPr>
-            <a:normAutofit lnSpcReduction="10000"/>
-          </a:bodyPr>
-          <a:lstStyle/>
-          <a:p>
-            <a:r>
-              <a:rPr lang="pt-BR" dirty="0"/>
-              <a:t>As </a:t>
-            </a:r>
-            <a:r>
-              <a:rPr lang="pt-BR" dirty="0" err="1"/>
-              <a:t>RNNs</a:t>
-            </a:r>
-            <a:r>
-              <a:rPr lang="pt-BR" dirty="0"/>
-              <a:t> podem ser vistas como múltiplas cópias da mesma rede, cada uma passando uma mensagem para a sua sucessora.</a:t>
-            </a:r>
-          </a:p>
-          <a:p>
-            <a:pPr marL="0" indent="0">
-              <a:buNone/>
-            </a:pPr>
-            <a:endParaRPr lang="pt-BR" dirty="0"/>
-          </a:p>
-          <a:p>
-            <a:pPr marL="0" indent="0">
-              <a:buNone/>
-            </a:pPr>
-            <a:endParaRPr lang="pt-BR" dirty="0"/>
-          </a:p>
-          <a:p>
-            <a:pPr marL="0" indent="0">
-              <a:buNone/>
-            </a:pPr>
-            <a:endParaRPr lang="pt-BR" dirty="0"/>
-          </a:p>
-          <a:p>
-            <a:pPr marL="0" indent="0">
-              <a:buNone/>
-            </a:pPr>
-            <a:endParaRPr lang="pt-BR" dirty="0"/>
-          </a:p>
-          <a:p>
-            <a:pPr marL="0" indent="0">
-              <a:buNone/>
-            </a:pPr>
-            <a:endParaRPr lang="pt-BR" dirty="0"/>
-          </a:p>
-          <a:p>
-            <a:r>
-              <a:rPr lang="pt-BR" dirty="0"/>
-              <a:t>A mesma função e o mesmo conjunto de pesos são usados ​​em cada passo de tempo.</a:t>
-            </a:r>
-          </a:p>
-          <a:p>
-            <a:r>
-              <a:rPr lang="pt-BR" dirty="0"/>
-              <a:t>São chamadas recorrentes porque executam a mesma tarefa para cada entrada.</a:t>
-            </a:r>
-            <a:endParaRPr lang="en-US" dirty="0"/>
-          </a:p>
-        </p:txBody>
-      </p:sp>
-    </p:spTree>
-    <p:extLst>
-      <p:ext uri="{BB962C8B-B14F-4D97-AF65-F5344CB8AC3E}">
-        <p14:creationId xmlns:p14="http://schemas.microsoft.com/office/powerpoint/2010/main" val="879210621"/>
       </p:ext>
     </p:extLst>
   </p:cSld>
@@ -5631,7 +7481,7 @@
           <p:cNvPr id="2" name="Title 1">
             <a:extLst>
               <a:ext uri="{FF2B5EF4-FFF2-40B4-BE49-F238E27FC236}">
-                <a16:creationId xmlns:a16="http://schemas.microsoft.com/office/drawing/2014/main" id="{4FF4B591-1BC6-B85F-D4D4-18AFAE757DB9}"/>
+                <a16:creationId xmlns:a16="http://schemas.microsoft.com/office/drawing/2014/main" id="{D316F952-34AF-BA6E-B7BC-56FB84A3F677}"/>
               </a:ext>
             </a:extLst>
           </p:cNvPr>
@@ -5647,7 +7497,11 @@
           <a:bodyPr/>
           <a:lstStyle/>
           <a:p>
-            <a:endParaRPr lang="en-US"/>
+            <a:r>
+              <a:rPr lang="pt-BR" dirty="0"/>
+              <a:t>Rede neural recorrente</a:t>
+            </a:r>
+            <a:endParaRPr lang="en-US" dirty="0"/>
           </a:p>
         </p:txBody>
       </p:sp>
@@ -5656,7 +7510,7 @@
           <p:cNvPr id="3" name="Content Placeholder 2">
             <a:extLst>
               <a:ext uri="{FF2B5EF4-FFF2-40B4-BE49-F238E27FC236}">
-                <a16:creationId xmlns:a16="http://schemas.microsoft.com/office/drawing/2014/main" id="{A8D18D08-63C8-FE13-750C-9A4ED4F3D6C6}"/>
+                <a16:creationId xmlns:a16="http://schemas.microsoft.com/office/drawing/2014/main" id="{330A4886-E5F5-4A0C-632C-A874615BA66E}"/>
               </a:ext>
             </a:extLst>
           </p:cNvPr>
@@ -5667,19 +7521,80 @@
             <p:ph idx="1"/>
           </p:nvPr>
         </p:nvSpPr>
-        <p:spPr/>
-        <p:txBody>
-          <a:bodyPr/>
+        <p:spPr>
+          <a:xfrm>
+            <a:off x="838200" y="1825624"/>
+            <a:ext cx="11212286" cy="5032375"/>
+          </a:xfrm>
+        </p:spPr>
+        <p:txBody>
+          <a:bodyPr>
+            <a:normAutofit lnSpcReduction="10000"/>
+          </a:bodyPr>
           <a:lstStyle/>
           <a:p>
-            <a:endParaRPr lang="en-US"/>
+            <a:r>
+              <a:rPr lang="pt-BR" dirty="0"/>
+              <a:t>As </a:t>
+            </a:r>
+            <a:r>
+              <a:rPr lang="pt-BR" dirty="0" err="1"/>
+              <a:t>RNNs</a:t>
+            </a:r>
+            <a:r>
+              <a:rPr lang="pt-BR" dirty="0"/>
+              <a:t> podem ser vistas como múltiplas cópias da mesma rede, cada uma passando uma mensagem para a sua sucessora.</a:t>
+            </a:r>
+          </a:p>
+          <a:p>
+            <a:pPr marL="0" indent="0">
+              <a:buNone/>
+            </a:pPr>
+            <a:endParaRPr lang="pt-BR" dirty="0"/>
+          </a:p>
+          <a:p>
+            <a:pPr marL="0" indent="0">
+              <a:buNone/>
+            </a:pPr>
+            <a:endParaRPr lang="pt-BR" dirty="0"/>
+          </a:p>
+          <a:p>
+            <a:pPr marL="0" indent="0">
+              <a:buNone/>
+            </a:pPr>
+            <a:endParaRPr lang="pt-BR" dirty="0"/>
+          </a:p>
+          <a:p>
+            <a:pPr marL="0" indent="0">
+              <a:buNone/>
+            </a:pPr>
+            <a:endParaRPr lang="pt-BR" dirty="0"/>
+          </a:p>
+          <a:p>
+            <a:pPr marL="0" indent="0">
+              <a:buNone/>
+            </a:pPr>
+            <a:endParaRPr lang="pt-BR" dirty="0"/>
+          </a:p>
+          <a:p>
+            <a:r>
+              <a:rPr lang="pt-BR" dirty="0"/>
+              <a:t>A mesma função e o mesmo conjunto de pesos são usados ​​em cada passo de tempo.</a:t>
+            </a:r>
+          </a:p>
+          <a:p>
+            <a:r>
+              <a:rPr lang="pt-BR" dirty="0"/>
+              <a:t>São chamadas recorrentes porque executam a mesma tarefa para cada entrada.</a:t>
+            </a:r>
+            <a:endParaRPr lang="en-US" dirty="0"/>
           </a:p>
         </p:txBody>
       </p:sp>
     </p:spTree>
     <p:extLst>
       <p:ext uri="{BB962C8B-B14F-4D97-AF65-F5344CB8AC3E}">
-        <p14:creationId xmlns:p14="http://schemas.microsoft.com/office/powerpoint/2010/main" val="3688462542"/>
+        <p14:creationId xmlns:p14="http://schemas.microsoft.com/office/powerpoint/2010/main" val="879210621"/>
       </p:ext>
     </p:extLst>
   </p:cSld>
@@ -5711,7 +7626,7 @@
           <p:cNvPr id="2" name="Title 1">
             <a:extLst>
               <a:ext uri="{FF2B5EF4-FFF2-40B4-BE49-F238E27FC236}">
-                <a16:creationId xmlns:a16="http://schemas.microsoft.com/office/drawing/2014/main" id="{F941620E-F055-A200-7D54-3C89067DAB50}"/>
+                <a16:creationId xmlns:a16="http://schemas.microsoft.com/office/drawing/2014/main" id="{4FF4B591-1BC6-B85F-D4D4-18AFAE757DB9}"/>
               </a:ext>
             </a:extLst>
           </p:cNvPr>
@@ -5736,7 +7651,7 @@
           <p:cNvPr id="3" name="Content Placeholder 2">
             <a:extLst>
               <a:ext uri="{FF2B5EF4-FFF2-40B4-BE49-F238E27FC236}">
-                <a16:creationId xmlns:a16="http://schemas.microsoft.com/office/drawing/2014/main" id="{AFB90F1A-97F6-4A2B-EB59-AE9A21F31FFB}"/>
+                <a16:creationId xmlns:a16="http://schemas.microsoft.com/office/drawing/2014/main" id="{A8D18D08-63C8-FE13-750C-9A4ED4F3D6C6}"/>
               </a:ext>
             </a:extLst>
           </p:cNvPr>
@@ -5759,7 +7674,7 @@
     </p:spTree>
     <p:extLst>
       <p:ext uri="{BB962C8B-B14F-4D97-AF65-F5344CB8AC3E}">
-        <p14:creationId xmlns:p14="http://schemas.microsoft.com/office/powerpoint/2010/main" val="2727199427"/>
+        <p14:creationId xmlns:p14="http://schemas.microsoft.com/office/powerpoint/2010/main" val="3688462542"/>
       </p:ext>
     </p:extLst>
   </p:cSld>
@@ -5788,7 +7703,13 @@
       </p:grpSpPr>
       <p:sp>
         <p:nvSpPr>
-          <p:cNvPr id="2" name="Título 1"/>
+          <p:cNvPr id="2" name="Title 1">
+            <a:extLst>
+              <a:ext uri="{FF2B5EF4-FFF2-40B4-BE49-F238E27FC236}">
+                <a16:creationId xmlns:a16="http://schemas.microsoft.com/office/drawing/2014/main" id="{F941620E-F055-A200-7D54-3C89067DAB50}"/>
+              </a:ext>
+            </a:extLst>
+          </p:cNvPr>
           <p:cNvSpPr>
             <a:spLocks noGrp="1"/>
           </p:cNvSpPr>
@@ -5801,32 +7722,19 @@
           <a:bodyPr/>
           <a:lstStyle/>
           <a:p>
-            <a:r>
-              <a:rPr lang="pt-BR" i="1" dirty="0" err="1"/>
-              <a:t>Backpropagation</a:t>
-            </a:r>
-            <a:r>
-              <a:rPr lang="pt-BR" i="1" dirty="0"/>
-              <a:t> </a:t>
-            </a:r>
-            <a:r>
-              <a:rPr lang="pt-BR" i="1" dirty="0" err="1"/>
-              <a:t>Through</a:t>
-            </a:r>
-            <a:r>
-              <a:rPr lang="pt-BR" i="1" dirty="0"/>
-              <a:t> Time</a:t>
-            </a:r>
-            <a:r>
-              <a:rPr lang="pt-BR" dirty="0"/>
-              <a:t> (BPTT)</a:t>
-            </a:r>
-          </a:p>
-        </p:txBody>
-      </p:sp>
-      <p:sp>
-        <p:nvSpPr>
-          <p:cNvPr id="3" name="Espaço Reservado para Conteúdo 2"/>
+            <a:endParaRPr lang="en-US"/>
+          </a:p>
+        </p:txBody>
+      </p:sp>
+      <p:sp>
+        <p:nvSpPr>
+          <p:cNvPr id="3" name="Content Placeholder 2">
+            <a:extLst>
+              <a:ext uri="{FF2B5EF4-FFF2-40B4-BE49-F238E27FC236}">
+                <a16:creationId xmlns:a16="http://schemas.microsoft.com/office/drawing/2014/main" id="{AFB90F1A-97F6-4A2B-EB59-AE9A21F31FFB}"/>
+              </a:ext>
+            </a:extLst>
+          </p:cNvPr>
           <p:cNvSpPr>
             <a:spLocks noGrp="1"/>
           </p:cNvSpPr>
@@ -5839,60 +7747,14 @@
           <a:bodyPr/>
           <a:lstStyle/>
           <a:p>
-            <a:r>
-              <a:rPr lang="pt-BR" dirty="0"/>
-              <a:t>Para que as </a:t>
-            </a:r>
-            <a:r>
-              <a:rPr lang="pt-BR" dirty="0" err="1"/>
-              <a:t>RNNs</a:t>
-            </a:r>
-            <a:r>
-              <a:rPr lang="pt-BR" dirty="0"/>
-              <a:t> aprendam de forma efetiva, usamos uma versão levemente modificada do </a:t>
-            </a:r>
-            <a:r>
-              <a:rPr lang="pt-BR" dirty="0" err="1"/>
-              <a:t>Backpropagation</a:t>
-            </a:r>
-            <a:r>
-              <a:rPr lang="pt-BR"/>
-              <a:t>: BPTT</a:t>
-            </a:r>
-          </a:p>
-          <a:p>
-            <a:r>
-              <a:rPr lang="pt-BR" dirty="0"/>
-              <a:t>Gradiente ao longo do tempo</a:t>
-            </a:r>
-          </a:p>
-          <a:p>
-            <a:r>
-              <a:rPr lang="pt-BR" dirty="0"/>
-              <a:t>Rede “desdobrada”</a:t>
-            </a:r>
-          </a:p>
-          <a:p>
-            <a:r>
-              <a:rPr lang="pt-BR" dirty="0"/>
-              <a:t>Soma gradientes em todos os passos</a:t>
-            </a:r>
-          </a:p>
-          <a:p>
-            <a:r>
-              <a:rPr lang="pt-BR" dirty="0"/>
-              <a:t>Pesos compartilhados</a:t>
-            </a:r>
-          </a:p>
-          <a:p>
-            <a:endParaRPr lang="pt-BR" dirty="0"/>
+            <a:endParaRPr lang="en-US"/>
           </a:p>
         </p:txBody>
       </p:sp>
     </p:spTree>
     <p:extLst>
       <p:ext uri="{BB962C8B-B14F-4D97-AF65-F5344CB8AC3E}">
-        <p14:creationId xmlns:p14="http://schemas.microsoft.com/office/powerpoint/2010/main" val="804522834"/>
+        <p14:creationId xmlns:p14="http://schemas.microsoft.com/office/powerpoint/2010/main" val="2727199427"/>
       </p:ext>
     </p:extLst>
   </p:cSld>
@@ -5935,8 +7797,24 @@
           <a:lstStyle/>
           <a:p>
             <a:r>
+              <a:rPr lang="pt-BR" i="1" dirty="0" err="1"/>
+              <a:t>Backpropagation</a:t>
+            </a:r>
+            <a:r>
+              <a:rPr lang="pt-BR" i="1" dirty="0"/>
+              <a:t> </a:t>
+            </a:r>
+            <a:r>
+              <a:rPr lang="pt-BR" i="1" dirty="0" err="1"/>
+              <a:t>Through</a:t>
+            </a:r>
+            <a:r>
+              <a:rPr lang="pt-BR" i="1" dirty="0"/>
+              <a:t> Time</a:t>
+            </a:r>
+            <a:r>
               <a:rPr lang="pt-BR" dirty="0"/>
-              <a:t>Desaparecimento do gradiente</a:t>
+              <a:t> (BPTT)</a:t>
             </a:r>
           </a:p>
         </p:txBody>
@@ -5958,33 +7836,58 @@
           <a:p>
             <a:r>
               <a:rPr lang="pt-BR" dirty="0"/>
-              <a:t>Gradientes → muito pequenos</a:t>
-            </a:r>
-          </a:p>
-          <a:p>
+              <a:t>Para que as </a:t>
+            </a:r>
+            <a:r>
+              <a:rPr lang="pt-BR" dirty="0" err="1"/>
+              <a:t>RNNs</a:t>
+            </a:r>
             <a:r>
               <a:rPr lang="pt-BR" dirty="0"/>
-              <a:t>Informação antiga se perde</a:t>
+              <a:t> aprendam de forma efetiva, usamos uma versão levemente modificada do </a:t>
+            </a:r>
+            <a:r>
+              <a:rPr lang="pt-BR" dirty="0" err="1"/>
+              <a:t>Backpropagation</a:t>
+            </a:r>
+            <a:r>
+              <a:rPr lang="pt-BR"/>
+              <a:t>: BPTT</a:t>
             </a:r>
           </a:p>
           <a:p>
             <a:r>
               <a:rPr lang="pt-BR" dirty="0"/>
-              <a:t>Dificuldade com dependências longas</a:t>
+              <a:t>Gradiente ao longo do tempo</a:t>
             </a:r>
           </a:p>
           <a:p>
             <a:r>
               <a:rPr lang="pt-BR" dirty="0"/>
-              <a:t>Consequência: RNN aprende apenas dependências curtas</a:t>
-            </a:r>
+              <a:t>Rede “desdobrada”</a:t>
+            </a:r>
+          </a:p>
+          <a:p>
+            <a:r>
+              <a:rPr lang="pt-BR" dirty="0"/>
+              <a:t>Soma gradientes em todos os passos</a:t>
+            </a:r>
+          </a:p>
+          <a:p>
+            <a:r>
+              <a:rPr lang="pt-BR" dirty="0"/>
+              <a:t>Pesos compartilhados</a:t>
+            </a:r>
+          </a:p>
+          <a:p>
+            <a:endParaRPr lang="pt-BR" dirty="0"/>
           </a:p>
         </p:txBody>
       </p:sp>
     </p:spTree>
     <p:extLst>
       <p:ext uri="{BB962C8B-B14F-4D97-AF65-F5344CB8AC3E}">
-        <p14:creationId xmlns:p14="http://schemas.microsoft.com/office/powerpoint/2010/main" val="753048316"/>
+        <p14:creationId xmlns:p14="http://schemas.microsoft.com/office/powerpoint/2010/main" val="804522834"/>
       </p:ext>
     </p:extLst>
   </p:cSld>
@@ -6013,6 +7916,28 @@
       </p:grpSpPr>
       <p:sp>
         <p:nvSpPr>
+          <p:cNvPr id="2" name="Título 1"/>
+          <p:cNvSpPr>
+            <a:spLocks noGrp="1"/>
+          </p:cNvSpPr>
+          <p:nvPr>
+            <p:ph type="title"/>
+          </p:nvPr>
+        </p:nvSpPr>
+        <p:spPr/>
+        <p:txBody>
+          <a:bodyPr/>
+          <a:lstStyle/>
+          <a:p>
+            <a:r>
+              <a:rPr lang="pt-BR" dirty="0"/>
+              <a:t>Desaparecimento do gradiente</a:t>
+            </a:r>
+          </a:p>
+        </p:txBody>
+      </p:sp>
+      <p:sp>
+        <p:nvSpPr>
           <p:cNvPr id="3" name="Espaço Reservado para Conteúdo 2"/>
           <p:cNvSpPr>
             <a:spLocks noGrp="1"/>
@@ -6021,24 +7946,32 @@
             <p:ph idx="1"/>
           </p:nvPr>
         </p:nvSpPr>
-        <p:spPr>
-          <a:xfrm>
-            <a:off x="788323" y="2873029"/>
-            <a:ext cx="10515600" cy="1067203"/>
-          </a:xfrm>
-        </p:spPr>
-        <p:txBody>
-          <a:bodyPr>
-            <a:normAutofit/>
-          </a:bodyPr>
+        <p:spPr/>
+        <p:txBody>
+          <a:bodyPr/>
           <a:lstStyle/>
           <a:p>
-            <a:pPr marL="0" indent="0" algn="ctr">
-              <a:buNone/>
-            </a:pPr>
-            <a:r>
-              <a:rPr lang="pt-BR" sz="6000" dirty="0"/>
-              <a:t>LSTM</a:t>
+            <a:r>
+              <a:rPr lang="pt-BR" dirty="0"/>
+              <a:t>Gradientes → muito pequenos</a:t>
+            </a:r>
+          </a:p>
+          <a:p>
+            <a:r>
+              <a:rPr lang="pt-BR" dirty="0"/>
+              <a:t>Informação antiga se perde</a:t>
+            </a:r>
+          </a:p>
+          <a:p>
+            <a:r>
+              <a:rPr lang="pt-BR" dirty="0"/>
+              <a:t>Dificuldade com dependências longas</a:t>
+            </a:r>
+          </a:p>
+          <a:p>
+            <a:r>
+              <a:rPr lang="pt-BR" dirty="0"/>
+              <a:t>Consequência: RNN aprende apenas dependências curtas</a:t>
             </a:r>
           </a:p>
         </p:txBody>
@@ -6046,7 +7979,7 @@
     </p:spTree>
     <p:extLst>
       <p:ext uri="{BB962C8B-B14F-4D97-AF65-F5344CB8AC3E}">
-        <p14:creationId xmlns:p14="http://schemas.microsoft.com/office/powerpoint/2010/main" val="3863331605"/>
+        <p14:creationId xmlns:p14="http://schemas.microsoft.com/office/powerpoint/2010/main" val="753048316"/>
       </p:ext>
     </p:extLst>
   </p:cSld>
@@ -6075,71 +8008,40 @@
       </p:grpSpPr>
       <p:sp>
         <p:nvSpPr>
-          <p:cNvPr id="2" name="Título 1"/>
+          <p:cNvPr id="3" name="Espaço Reservado para Conteúdo 2"/>
           <p:cNvSpPr>
             <a:spLocks noGrp="1"/>
           </p:cNvSpPr>
           <p:nvPr>
-            <p:ph type="title"/>
-          </p:nvPr>
-        </p:nvSpPr>
-        <p:spPr/>
-        <p:txBody>
-          <a:bodyPr/>
+            <p:ph idx="1"/>
+          </p:nvPr>
+        </p:nvSpPr>
+        <p:spPr>
+          <a:xfrm>
+            <a:off x="788323" y="2873029"/>
+            <a:ext cx="10515600" cy="1067203"/>
+          </a:xfrm>
+        </p:spPr>
+        <p:txBody>
+          <a:bodyPr>
+            <a:normAutofit/>
+          </a:bodyPr>
           <a:lstStyle/>
           <a:p>
-            <a:r>
-              <a:rPr lang="pt-BR" dirty="0"/>
-              <a:t>Motivação para LSTM</a:t>
-            </a:r>
-          </a:p>
-        </p:txBody>
-      </p:sp>
-      <p:sp>
-        <p:nvSpPr>
-          <p:cNvPr id="3" name="Espaço Reservado para Conteúdo 2"/>
-          <p:cNvSpPr>
-            <a:spLocks noGrp="1"/>
-          </p:cNvSpPr>
-          <p:nvPr>
-            <p:ph idx="1"/>
-          </p:nvPr>
-        </p:nvSpPr>
-        <p:spPr/>
-        <p:txBody>
-          <a:bodyPr/>
-          <a:lstStyle/>
-          <a:p>
-            <a:r>
-              <a:rPr lang="pt-BR" dirty="0"/>
-              <a:t>Resolver dependências longas</a:t>
-            </a:r>
-          </a:p>
-          <a:p>
-            <a:r>
-              <a:rPr lang="pt-BR" dirty="0"/>
-              <a:t>Evitar </a:t>
-            </a:r>
-            <a:r>
-              <a:rPr lang="pt-BR" dirty="0" err="1"/>
-              <a:t>vanishing</a:t>
-            </a:r>
-            <a:r>
-              <a:rPr lang="pt-BR" dirty="0"/>
-              <a:t> </a:t>
-            </a:r>
-            <a:r>
-              <a:rPr lang="pt-BR" dirty="0" err="1"/>
-              <a:t>gradient</a:t>
-            </a:r>
-            <a:endParaRPr lang="pt-BR" dirty="0"/>
+            <a:pPr marL="0" indent="0" algn="ctr">
+              <a:buNone/>
+            </a:pPr>
+            <a:r>
+              <a:rPr lang="pt-BR" sz="6000" dirty="0"/>
+              <a:t>LSTM</a:t>
+            </a:r>
           </a:p>
         </p:txBody>
       </p:sp>
     </p:spTree>
     <p:extLst>
       <p:ext uri="{BB962C8B-B14F-4D97-AF65-F5344CB8AC3E}">
-        <p14:creationId xmlns:p14="http://schemas.microsoft.com/office/powerpoint/2010/main" val="1343654665"/>
+        <p14:creationId xmlns:p14="http://schemas.microsoft.com/office/powerpoint/2010/main" val="3863331605"/>
       </p:ext>
     </p:extLst>
   </p:cSld>
@@ -6168,6 +8070,28 @@
       </p:grpSpPr>
       <p:sp>
         <p:nvSpPr>
+          <p:cNvPr id="2" name="Título 1"/>
+          <p:cNvSpPr>
+            <a:spLocks noGrp="1"/>
+          </p:cNvSpPr>
+          <p:nvPr>
+            <p:ph type="title"/>
+          </p:nvPr>
+        </p:nvSpPr>
+        <p:spPr/>
+        <p:txBody>
+          <a:bodyPr/>
+          <a:lstStyle/>
+          <a:p>
+            <a:r>
+              <a:rPr lang="pt-BR" dirty="0"/>
+              <a:t>Motivação para LSTM</a:t>
+            </a:r>
+          </a:p>
+        </p:txBody>
+      </p:sp>
+      <p:sp>
+        <p:nvSpPr>
           <p:cNvPr id="3" name="Espaço Reservado para Conteúdo 2"/>
           <p:cNvSpPr>
             <a:spLocks noGrp="1"/>
@@ -6176,32 +8100,41 @@
             <p:ph idx="1"/>
           </p:nvPr>
         </p:nvSpPr>
-        <p:spPr>
-          <a:xfrm>
-            <a:off x="788323" y="2873029"/>
-            <a:ext cx="10515600" cy="1067203"/>
-          </a:xfrm>
-        </p:spPr>
-        <p:txBody>
-          <a:bodyPr>
-            <a:normAutofit/>
-          </a:bodyPr>
+        <p:spPr/>
+        <p:txBody>
+          <a:bodyPr/>
           <a:lstStyle/>
           <a:p>
-            <a:pPr marL="0" indent="0" algn="ctr">
-              <a:buNone/>
-            </a:pPr>
-            <a:r>
-              <a:rPr lang="pt-BR" sz="6000" dirty="0"/>
-              <a:t>Variantes</a:t>
-            </a:r>
+            <a:r>
+              <a:rPr lang="pt-BR" dirty="0"/>
+              <a:t>Resolver dependências longas</a:t>
+            </a:r>
+          </a:p>
+          <a:p>
+            <a:r>
+              <a:rPr lang="pt-BR" dirty="0"/>
+              <a:t>Evitar </a:t>
+            </a:r>
+            <a:r>
+              <a:rPr lang="pt-BR" dirty="0" err="1"/>
+              <a:t>vanishing</a:t>
+            </a:r>
+            <a:r>
+              <a:rPr lang="pt-BR" dirty="0"/>
+              <a:t> </a:t>
+            </a:r>
+            <a:r>
+              <a:rPr lang="pt-BR" dirty="0" err="1"/>
+              <a:t>gradient</a:t>
+            </a:r>
+            <a:endParaRPr lang="pt-BR" dirty="0"/>
           </a:p>
         </p:txBody>
       </p:sp>
     </p:spTree>
     <p:extLst>
       <p:ext uri="{BB962C8B-B14F-4D97-AF65-F5344CB8AC3E}">
-        <p14:creationId xmlns:p14="http://schemas.microsoft.com/office/powerpoint/2010/main" val="2837701330"/>
+        <p14:creationId xmlns:p14="http://schemas.microsoft.com/office/powerpoint/2010/main" val="1343654665"/>
       </p:ext>
     </p:extLst>
   </p:cSld>
@@ -6230,93 +8163,40 @@
       </p:grpSpPr>
       <p:sp>
         <p:nvSpPr>
-          <p:cNvPr id="2" name="Título 1"/>
+          <p:cNvPr id="3" name="Espaço Reservado para Conteúdo 2"/>
           <p:cNvSpPr>
             <a:spLocks noGrp="1"/>
           </p:cNvSpPr>
           <p:nvPr>
-            <p:ph type="title"/>
-          </p:nvPr>
-        </p:nvSpPr>
-        <p:spPr/>
-        <p:txBody>
-          <a:bodyPr/>
+            <p:ph idx="1"/>
+          </p:nvPr>
+        </p:nvSpPr>
+        <p:spPr>
+          <a:xfrm>
+            <a:off x="788323" y="2873029"/>
+            <a:ext cx="10515600" cy="1067203"/>
+          </a:xfrm>
+        </p:spPr>
+        <p:txBody>
+          <a:bodyPr>
+            <a:normAutofit/>
+          </a:bodyPr>
           <a:lstStyle/>
           <a:p>
-            <a:r>
-              <a:rPr lang="pt-BR" dirty="0"/>
+            <a:pPr marL="0" indent="0" algn="ctr">
+              <a:buNone/>
+            </a:pPr>
+            <a:r>
+              <a:rPr lang="pt-BR" sz="6000" dirty="0"/>
               <a:t>Variantes</a:t>
             </a:r>
-          </a:p>
-        </p:txBody>
-      </p:sp>
-      <p:sp>
-        <p:nvSpPr>
-          <p:cNvPr id="3" name="Espaço Reservado para Conteúdo 2"/>
-          <p:cNvSpPr>
-            <a:spLocks noGrp="1"/>
-          </p:cNvSpPr>
-          <p:nvPr>
-            <p:ph idx="1"/>
-          </p:nvPr>
-        </p:nvSpPr>
-        <p:spPr/>
-        <p:txBody>
-          <a:bodyPr/>
-          <a:lstStyle/>
-          <a:p>
-            <a:r>
-              <a:rPr lang="pt-BR" dirty="0"/>
-              <a:t>GRU</a:t>
-            </a:r>
-          </a:p>
-          <a:p>
-            <a:pPr lvl="1"/>
-            <a:r>
-              <a:rPr lang="pt-BR" dirty="0"/>
-              <a:t>Versão simplificada</a:t>
-            </a:r>
-          </a:p>
-          <a:p>
-            <a:pPr lvl="1"/>
-            <a:r>
-              <a:rPr lang="pt-BR" dirty="0"/>
-              <a:t>Menos parâmetros</a:t>
-            </a:r>
-          </a:p>
-          <a:p>
-            <a:pPr lvl="1"/>
-            <a:r>
-              <a:rPr lang="pt-BR" dirty="0"/>
-              <a:t>Frequentemente mais rápida de treinar. </a:t>
-            </a:r>
-          </a:p>
-          <a:p>
-            <a:r>
-              <a:rPr lang="pt-BR" dirty="0" err="1"/>
-              <a:t>Bidirectional</a:t>
-            </a:r>
-            <a:r>
-              <a:rPr lang="pt-BR" dirty="0"/>
-              <a:t> RNN</a:t>
-            </a:r>
-          </a:p>
-          <a:p>
-            <a:pPr lvl="1"/>
-            <a:r>
-              <a:rPr lang="pt-BR" dirty="0"/>
-              <a:t>Considera passado e futuro</a:t>
-            </a:r>
-          </a:p>
-          <a:p>
-            <a:endParaRPr lang="pt-BR" dirty="0"/>
           </a:p>
         </p:txBody>
       </p:sp>
     </p:spTree>
     <p:extLst>
       <p:ext uri="{BB962C8B-B14F-4D97-AF65-F5344CB8AC3E}">
-        <p14:creationId xmlns:p14="http://schemas.microsoft.com/office/powerpoint/2010/main" val="2820481937"/>
+        <p14:creationId xmlns:p14="http://schemas.microsoft.com/office/powerpoint/2010/main" val="2837701330"/>
       </p:ext>
     </p:extLst>
   </p:cSld>
@@ -6564,6 +8444,121 @@
       </p:grpSpPr>
       <p:sp>
         <p:nvSpPr>
+          <p:cNvPr id="2" name="Título 1"/>
+          <p:cNvSpPr>
+            <a:spLocks noGrp="1"/>
+          </p:cNvSpPr>
+          <p:nvPr>
+            <p:ph type="title"/>
+          </p:nvPr>
+        </p:nvSpPr>
+        <p:spPr/>
+        <p:txBody>
+          <a:bodyPr/>
+          <a:lstStyle/>
+          <a:p>
+            <a:r>
+              <a:rPr lang="pt-BR" dirty="0"/>
+              <a:t>Variantes</a:t>
+            </a:r>
+          </a:p>
+        </p:txBody>
+      </p:sp>
+      <p:sp>
+        <p:nvSpPr>
+          <p:cNvPr id="3" name="Espaço Reservado para Conteúdo 2"/>
+          <p:cNvSpPr>
+            <a:spLocks noGrp="1"/>
+          </p:cNvSpPr>
+          <p:nvPr>
+            <p:ph idx="1"/>
+          </p:nvPr>
+        </p:nvSpPr>
+        <p:spPr/>
+        <p:txBody>
+          <a:bodyPr/>
+          <a:lstStyle/>
+          <a:p>
+            <a:r>
+              <a:rPr lang="pt-BR" dirty="0"/>
+              <a:t>GRU</a:t>
+            </a:r>
+          </a:p>
+          <a:p>
+            <a:pPr lvl="1"/>
+            <a:r>
+              <a:rPr lang="pt-BR" dirty="0"/>
+              <a:t>Versão simplificada</a:t>
+            </a:r>
+          </a:p>
+          <a:p>
+            <a:pPr lvl="1"/>
+            <a:r>
+              <a:rPr lang="pt-BR" dirty="0"/>
+              <a:t>Menos parâmetros</a:t>
+            </a:r>
+          </a:p>
+          <a:p>
+            <a:pPr lvl="1"/>
+            <a:r>
+              <a:rPr lang="pt-BR" dirty="0"/>
+              <a:t>Frequentemente mais rápida de treinar. </a:t>
+            </a:r>
+          </a:p>
+          <a:p>
+            <a:r>
+              <a:rPr lang="pt-BR" dirty="0" err="1"/>
+              <a:t>Bidirectional</a:t>
+            </a:r>
+            <a:r>
+              <a:rPr lang="pt-BR" dirty="0"/>
+              <a:t> RNN</a:t>
+            </a:r>
+          </a:p>
+          <a:p>
+            <a:pPr lvl="1"/>
+            <a:r>
+              <a:rPr lang="pt-BR" dirty="0"/>
+              <a:t>Considera passado e futuro</a:t>
+            </a:r>
+          </a:p>
+          <a:p>
+            <a:endParaRPr lang="pt-BR" dirty="0"/>
+          </a:p>
+        </p:txBody>
+      </p:sp>
+    </p:spTree>
+    <p:extLst>
+      <p:ext uri="{BB962C8B-B14F-4D97-AF65-F5344CB8AC3E}">
+        <p14:creationId xmlns:p14="http://schemas.microsoft.com/office/powerpoint/2010/main" val="2820481937"/>
+      </p:ext>
+    </p:extLst>
+  </p:cSld>
+  <p:clrMapOvr>
+    <a:masterClrMapping/>
+  </p:clrMapOvr>
+</p:sld>
+</file>
+
+<file path=ppt/slides/slide21.xml><?xml version="1.0" encoding="utf-8"?>
+<p:sld xmlns:a="http://schemas.openxmlformats.org/drawingml/2006/main" xmlns:r="http://schemas.openxmlformats.org/officeDocument/2006/relationships" xmlns:p="http://schemas.openxmlformats.org/presentationml/2006/main">
+  <p:cSld>
+    <p:spTree>
+      <p:nvGrpSpPr>
+        <p:cNvPr id="1" name=""/>
+        <p:cNvGrpSpPr/>
+        <p:nvPr/>
+      </p:nvGrpSpPr>
+      <p:grpSpPr>
+        <a:xfrm>
+          <a:off x="0" y="0"/>
+          <a:ext cx="0" cy="0"/>
+          <a:chOff x="0" y="0"/>
+          <a:chExt cx="0" cy="0"/>
+        </a:xfrm>
+      </p:grpSpPr>
+      <p:sp>
+        <p:nvSpPr>
           <p:cNvPr id="4" name="Título 1">
             <a:extLst>
               <a:ext uri="{FF2B5EF4-FFF2-40B4-BE49-F238E27FC236}">
@@ -6631,7 +8626,7 @@
 </p:sld>
 </file>
 
-<file path=ppt/slides/slide21.xml><?xml version="1.0" encoding="utf-8"?>
+<file path=ppt/slides/slide22.xml><?xml version="1.0" encoding="utf-8"?>
 <p:sld xmlns:a="http://schemas.openxmlformats.org/drawingml/2006/main" xmlns:r="http://schemas.openxmlformats.org/officeDocument/2006/relationships" xmlns:p="http://schemas.openxmlformats.org/presentationml/2006/main">
   <p:cSld>
     <p:spTree>
@@ -7611,14 +9606,14 @@
           <a:p>
             <a:r>
               <a:rPr lang="pt-BR" dirty="0"/>
-              <a:t>Neurônio recorrente</a:t>
+              <a:t>Neurônio (ou célula) recorrente</a:t>
             </a:r>
             <a:endParaRPr lang="en-US" dirty="0"/>
           </a:p>
         </p:txBody>
       </p:sp>
-      <mc:AlternateContent xmlns:mc="http://schemas.openxmlformats.org/markup-compatibility/2006">
-        <mc:Choice xmlns:a14="http://schemas.microsoft.com/office/drawing/2010/main" Requires="a14">
+      <mc:AlternateContent xmlns:mc="http://schemas.openxmlformats.org/markup-compatibility/2006" xmlns:a14="http://schemas.microsoft.com/office/drawing/2010/main">
+        <mc:Choice Requires="a14">
           <p:sp>
             <p:nvSpPr>
               <p:cNvPr id="3" name="Content Placeholder 2">
@@ -7957,7 +9952,7 @@
             </p:txBody>
           </p:sp>
         </mc:Choice>
-        <mc:Fallback>
+        <mc:Fallback xmlns="">
           <p:sp>
             <p:nvSpPr>
               <p:cNvPr id="3" name="Content Placeholder 2">
@@ -8001,88 +9996,6 @@
           </p:sp>
         </mc:Fallback>
       </mc:AlternateContent>
-      <p:grpSp>
-        <p:nvGrpSpPr>
-          <p:cNvPr id="7" name="Group 6">
-            <a:extLst>
-              <a:ext uri="{FF2B5EF4-FFF2-40B4-BE49-F238E27FC236}">
-                <a16:creationId xmlns:a16="http://schemas.microsoft.com/office/drawing/2014/main" id="{07CF1336-6500-31F8-A99F-18490071D204}"/>
-              </a:ext>
-            </a:extLst>
-          </p:cNvPr>
-          <p:cNvGrpSpPr/>
-          <p:nvPr/>
-        </p:nvGrpSpPr>
-        <p:grpSpPr>
-          <a:xfrm>
-            <a:off x="2424004" y="1825624"/>
-            <a:ext cx="1552792" cy="4315427"/>
-            <a:chOff x="1476947" y="2177448"/>
-            <a:chExt cx="1552792" cy="4315427"/>
-          </a:xfrm>
-        </p:grpSpPr>
-        <p:pic>
-          <p:nvPicPr>
-            <p:cNvPr id="5" name="Picture 4">
-              <a:extLst>
-                <a:ext uri="{FF2B5EF4-FFF2-40B4-BE49-F238E27FC236}">
-                  <a16:creationId xmlns:a16="http://schemas.microsoft.com/office/drawing/2014/main" id="{2C831661-2CE6-5B2F-909B-4F2436E81BEC}"/>
-                </a:ext>
-              </a:extLst>
-            </p:cNvPr>
-            <p:cNvPicPr>
-              <a:picLocks noChangeAspect="1"/>
-            </p:cNvPicPr>
-            <p:nvPr/>
-          </p:nvPicPr>
-          <p:blipFill>
-            <a:blip r:embed="rId4"/>
-            <a:stretch>
-              <a:fillRect/>
-            </a:stretch>
-          </p:blipFill>
-          <p:spPr>
-            <a:xfrm>
-              <a:off x="1476947" y="2177448"/>
-              <a:ext cx="1552792" cy="4315427"/>
-            </a:xfrm>
-            <a:prstGeom prst="rect">
-              <a:avLst/>
-            </a:prstGeom>
-          </p:spPr>
-        </p:pic>
-        <p:pic>
-          <p:nvPicPr>
-            <p:cNvPr id="6" name="Picture 5">
-              <a:extLst>
-                <a:ext uri="{FF2B5EF4-FFF2-40B4-BE49-F238E27FC236}">
-                  <a16:creationId xmlns:a16="http://schemas.microsoft.com/office/drawing/2014/main" id="{30F1C619-774A-B347-226C-0EA89894C739}"/>
-                </a:ext>
-              </a:extLst>
-            </p:cNvPr>
-            <p:cNvPicPr>
-              <a:picLocks noChangeAspect="1"/>
-            </p:cNvPicPr>
-            <p:nvPr/>
-          </p:nvPicPr>
-          <p:blipFill>
-            <a:blip r:embed="rId4"/>
-            <a:srcRect l="59816" t="89723" r="14947" b="2710"/>
-            <a:stretch>
-              <a:fillRect/>
-            </a:stretch>
-          </p:blipFill>
-          <p:spPr>
-            <a:xfrm>
-              <a:off x="2637853" y="6013677"/>
-              <a:ext cx="391886" cy="326571"/>
-            </a:xfrm>
-            <a:prstGeom prst="rect">
-              <a:avLst/>
-            </a:prstGeom>
-          </p:spPr>
-        </p:pic>
-      </p:grpSp>
       <p:pic>
         <p:nvPicPr>
           <p:cNvPr id="10" name="Picture 9">
@@ -8098,7 +10011,7 @@
           <p:nvPr/>
         </p:nvPicPr>
         <p:blipFill>
-          <a:blip r:embed="rId5"/>
+          <a:blip r:embed="rId4"/>
           <a:stretch>
             <a:fillRect/>
           </a:stretch>
@@ -8113,6 +10026,1314 @@
           </a:prstGeom>
         </p:spPr>
       </p:pic>
+      <p:grpSp>
+        <p:nvGrpSpPr>
+          <p:cNvPr id="4" name="Group 3">
+            <a:extLst>
+              <a:ext uri="{FF2B5EF4-FFF2-40B4-BE49-F238E27FC236}">
+                <a16:creationId xmlns:a16="http://schemas.microsoft.com/office/drawing/2014/main" id="{93818980-F547-0E5A-1FB3-02FC98C202F2}"/>
+              </a:ext>
+            </a:extLst>
+          </p:cNvPr>
+          <p:cNvGrpSpPr/>
+          <p:nvPr/>
+        </p:nvGrpSpPr>
+        <p:grpSpPr>
+          <a:xfrm>
+            <a:off x="2225506" y="1747612"/>
+            <a:ext cx="1483094" cy="4507363"/>
+            <a:chOff x="2454106" y="1782434"/>
+            <a:chExt cx="1483094" cy="4507363"/>
+          </a:xfrm>
+        </p:grpSpPr>
+        <mc:AlternateContent xmlns:mc="http://schemas.openxmlformats.org/markup-compatibility/2006" xmlns:a14="http://schemas.microsoft.com/office/drawing/2010/main">
+          <mc:Choice Requires="a14">
+            <p:sp>
+              <p:nvSpPr>
+                <p:cNvPr id="8" name="Rectangle 7">
+                  <a:extLst>
+                    <a:ext uri="{FF2B5EF4-FFF2-40B4-BE49-F238E27FC236}">
+                      <a16:creationId xmlns:a16="http://schemas.microsoft.com/office/drawing/2014/main" id="{01A64FDC-EF69-BEDA-15E2-93E0F6665937}"/>
+                    </a:ext>
+                  </a:extLst>
+                </p:cNvPr>
+                <p:cNvSpPr/>
+                <p:nvPr/>
+              </p:nvSpPr>
+              <p:spPr>
+                <a:xfrm>
+                  <a:off x="2460638" y="2426299"/>
+                  <a:ext cx="468000" cy="468000"/>
+                </a:xfrm>
+                <a:prstGeom prst="rect">
+                  <a:avLst/>
+                </a:prstGeom>
+              </p:spPr>
+              <p:style>
+                <a:lnRef idx="1">
+                  <a:schemeClr val="accent5"/>
+                </a:lnRef>
+                <a:fillRef idx="2">
+                  <a:schemeClr val="accent5"/>
+                </a:fillRef>
+                <a:effectRef idx="1">
+                  <a:schemeClr val="accent5"/>
+                </a:effectRef>
+                <a:fontRef idx="minor">
+                  <a:schemeClr val="dk1"/>
+                </a:fontRef>
+              </p:style>
+              <p:txBody>
+                <a:bodyPr rtlCol="0" anchor="ctr"/>
+                <a:lstStyle/>
+                <a:p>
+                  <a:pPr algn="ctr"/>
+                  <a14:m>
+                    <m:oMathPara xmlns:m="http://schemas.openxmlformats.org/officeDocument/2006/math">
+                      <m:oMathParaPr>
+                        <m:jc m:val="center"/>
+                      </m:oMathParaPr>
+                      <m:oMath xmlns:m="http://schemas.openxmlformats.org/officeDocument/2006/math">
+                        <m:sSubSup>
+                          <m:sSubSupPr>
+                            <m:ctrlPr>
+                              <a:rPr lang="pt-BR" i="1">
+                                <a:latin typeface="Cambria Math" panose="02040503050406030204" pitchFamily="18" charset="0"/>
+                              </a:rPr>
+                            </m:ctrlPr>
+                          </m:sSubSupPr>
+                          <m:e>
+                            <m:r>
+                              <a:rPr lang="pt-BR" b="1" i="1">
+                                <a:latin typeface="Cambria Math" panose="02040503050406030204" pitchFamily="18" charset="0"/>
+                              </a:rPr>
+                              <m:t>𝑾</m:t>
+                            </m:r>
+                          </m:e>
+                          <m:sub>
+                            <m:r>
+                              <a:rPr lang="pt-BR" i="1">
+                                <a:latin typeface="Cambria Math" panose="02040503050406030204" pitchFamily="18" charset="0"/>
+                              </a:rPr>
+                              <m:t>h</m:t>
+                            </m:r>
+                          </m:sub>
+                          <m:sup>
+                            <m:r>
+                              <a:rPr lang="pt-BR" i="1">
+                                <a:latin typeface="Cambria Math" panose="02040503050406030204" pitchFamily="18" charset="0"/>
+                              </a:rPr>
+                              <m:t>𝑜</m:t>
+                            </m:r>
+                          </m:sup>
+                        </m:sSubSup>
+                      </m:oMath>
+                    </m:oMathPara>
+                  </a14:m>
+                  <a:endParaRPr lang="en-US" dirty="0"/>
+                </a:p>
+              </p:txBody>
+            </p:sp>
+          </mc:Choice>
+          <mc:Fallback xmlns="">
+            <p:sp>
+              <p:nvSpPr>
+                <p:cNvPr id="8" name="Rectangle 7">
+                  <a:extLst>
+                    <a:ext uri="{FF2B5EF4-FFF2-40B4-BE49-F238E27FC236}">
+                      <a16:creationId xmlns:a16="http://schemas.microsoft.com/office/drawing/2014/main" id="{01A64FDC-EF69-BEDA-15E2-93E0F6665937}"/>
+                    </a:ext>
+                  </a:extLst>
+                </p:cNvPr>
+                <p:cNvSpPr>
+                  <a:spLocks noRot="1" noChangeAspect="1" noMove="1" noResize="1" noEditPoints="1" noAdjustHandles="1" noChangeArrowheads="1" noChangeShapeType="1" noTextEdit="1"/>
+                </p:cNvSpPr>
+                <p:nvPr/>
+              </p:nvSpPr>
+              <p:spPr>
+                <a:xfrm>
+                  <a:off x="2460638" y="2426299"/>
+                  <a:ext cx="468000" cy="468000"/>
+                </a:xfrm>
+                <a:prstGeom prst="rect">
+                  <a:avLst/>
+                </a:prstGeom>
+                <a:blipFill>
+                  <a:blip r:embed="rId5"/>
+                  <a:stretch>
+                    <a:fillRect l="-8974"/>
+                  </a:stretch>
+                </a:blipFill>
+              </p:spPr>
+              <p:txBody>
+                <a:bodyPr/>
+                <a:lstStyle/>
+                <a:p>
+                  <a:r>
+                    <a:rPr lang="en-US">
+                      <a:noFill/>
+                    </a:rPr>
+                    <a:t> </a:t>
+                  </a:r>
+                </a:p>
+              </p:txBody>
+            </p:sp>
+          </mc:Fallback>
+        </mc:AlternateContent>
+        <mc:AlternateContent xmlns:mc="http://schemas.openxmlformats.org/markup-compatibility/2006" xmlns:a14="http://schemas.microsoft.com/office/drawing/2010/main">
+          <mc:Choice Requires="a14">
+            <p:sp>
+              <p:nvSpPr>
+                <p:cNvPr id="9" name="Rectangle 8">
+                  <a:extLst>
+                    <a:ext uri="{FF2B5EF4-FFF2-40B4-BE49-F238E27FC236}">
+                      <a16:creationId xmlns:a16="http://schemas.microsoft.com/office/drawing/2014/main" id="{186D7FAB-7118-5D20-2DBF-2FF3EAF87830}"/>
+                    </a:ext>
+                  </a:extLst>
+                </p:cNvPr>
+                <p:cNvSpPr/>
+                <p:nvPr/>
+              </p:nvSpPr>
+              <p:spPr>
+                <a:xfrm>
+                  <a:off x="2454106" y="5193854"/>
+                  <a:ext cx="468000" cy="468000"/>
+                </a:xfrm>
+                <a:prstGeom prst="rect">
+                  <a:avLst/>
+                </a:prstGeom>
+              </p:spPr>
+              <p:style>
+                <a:lnRef idx="1">
+                  <a:schemeClr val="accent5"/>
+                </a:lnRef>
+                <a:fillRef idx="2">
+                  <a:schemeClr val="accent5"/>
+                </a:fillRef>
+                <a:effectRef idx="1">
+                  <a:schemeClr val="accent5"/>
+                </a:effectRef>
+                <a:fontRef idx="minor">
+                  <a:schemeClr val="dk1"/>
+                </a:fontRef>
+              </p:style>
+              <p:txBody>
+                <a:bodyPr rtlCol="0" anchor="ctr"/>
+                <a:lstStyle/>
+                <a:p>
+                  <a:pPr algn="ctr"/>
+                  <a14:m>
+                    <m:oMathPara xmlns:m="http://schemas.openxmlformats.org/officeDocument/2006/math">
+                      <m:oMathParaPr>
+                        <m:jc m:val="centerGroup"/>
+                      </m:oMathParaPr>
+                      <m:oMath xmlns:m="http://schemas.openxmlformats.org/officeDocument/2006/math">
+                        <m:sSubSup>
+                          <m:sSubSupPr>
+                            <m:ctrlPr>
+                              <a:rPr lang="pt-BR" i="1" smtClean="0">
+                                <a:latin typeface="Cambria Math" panose="02040503050406030204" pitchFamily="18" charset="0"/>
+                              </a:rPr>
+                            </m:ctrlPr>
+                          </m:sSubSupPr>
+                          <m:e>
+                            <m:r>
+                              <a:rPr lang="pt-BR" b="1" i="1">
+                                <a:latin typeface="Cambria Math" panose="02040503050406030204" pitchFamily="18" charset="0"/>
+                              </a:rPr>
+                              <m:t>𝑾</m:t>
+                            </m:r>
+                          </m:e>
+                          <m:sub>
+                            <m:r>
+                              <a:rPr lang="pt-BR" b="0" i="1" smtClean="0">
+                                <a:latin typeface="Cambria Math" panose="02040503050406030204" pitchFamily="18" charset="0"/>
+                              </a:rPr>
+                              <m:t>𝑖</m:t>
+                            </m:r>
+                          </m:sub>
+                          <m:sup>
+                            <m:r>
+                              <a:rPr lang="pt-BR" b="0" i="1" smtClean="0">
+                                <a:latin typeface="Cambria Math" panose="02040503050406030204" pitchFamily="18" charset="0"/>
+                              </a:rPr>
+                              <m:t>h</m:t>
+                            </m:r>
+                          </m:sup>
+                        </m:sSubSup>
+                      </m:oMath>
+                    </m:oMathPara>
+                  </a14:m>
+                  <a:endParaRPr lang="en-US" dirty="0"/>
+                </a:p>
+              </p:txBody>
+            </p:sp>
+          </mc:Choice>
+          <mc:Fallback xmlns="">
+            <p:sp>
+              <p:nvSpPr>
+                <p:cNvPr id="9" name="Rectangle 8">
+                  <a:extLst>
+                    <a:ext uri="{FF2B5EF4-FFF2-40B4-BE49-F238E27FC236}">
+                      <a16:creationId xmlns:a16="http://schemas.microsoft.com/office/drawing/2014/main" id="{186D7FAB-7118-5D20-2DBF-2FF3EAF87830}"/>
+                    </a:ext>
+                  </a:extLst>
+                </p:cNvPr>
+                <p:cNvSpPr>
+                  <a:spLocks noRot="1" noChangeAspect="1" noMove="1" noResize="1" noEditPoints="1" noAdjustHandles="1" noChangeArrowheads="1" noChangeShapeType="1" noTextEdit="1"/>
+                </p:cNvSpPr>
+                <p:nvPr/>
+              </p:nvSpPr>
+              <p:spPr>
+                <a:xfrm>
+                  <a:off x="2454106" y="5193854"/>
+                  <a:ext cx="468000" cy="468000"/>
+                </a:xfrm>
+                <a:prstGeom prst="rect">
+                  <a:avLst/>
+                </a:prstGeom>
+                <a:blipFill>
+                  <a:blip r:embed="rId6"/>
+                  <a:stretch>
+                    <a:fillRect l="-8974"/>
+                  </a:stretch>
+                </a:blipFill>
+              </p:spPr>
+              <p:txBody>
+                <a:bodyPr/>
+                <a:lstStyle/>
+                <a:p>
+                  <a:r>
+                    <a:rPr lang="en-US">
+                      <a:noFill/>
+                    </a:rPr>
+                    <a:t> </a:t>
+                  </a:r>
+                </a:p>
+              </p:txBody>
+            </p:sp>
+          </mc:Fallback>
+        </mc:AlternateContent>
+        <mc:AlternateContent xmlns:mc="http://schemas.openxmlformats.org/markup-compatibility/2006" xmlns:a14="http://schemas.microsoft.com/office/drawing/2010/main">
+          <mc:Choice Requires="a14">
+            <p:sp>
+              <p:nvSpPr>
+                <p:cNvPr id="11" name="Rectangle 10">
+                  <a:extLst>
+                    <a:ext uri="{FF2B5EF4-FFF2-40B4-BE49-F238E27FC236}">
+                      <a16:creationId xmlns:a16="http://schemas.microsoft.com/office/drawing/2014/main" id="{C07E56CD-571A-F75D-A1A7-7B928CD4CBCE}"/>
+                    </a:ext>
+                  </a:extLst>
+                </p:cNvPr>
+                <p:cNvSpPr/>
+                <p:nvPr/>
+              </p:nvSpPr>
+              <p:spPr>
+                <a:xfrm>
+                  <a:off x="3469200" y="3913371"/>
+                  <a:ext cx="468000" cy="468000"/>
+                </a:xfrm>
+                <a:prstGeom prst="rect">
+                  <a:avLst/>
+                </a:prstGeom>
+              </p:spPr>
+              <p:style>
+                <a:lnRef idx="1">
+                  <a:schemeClr val="accent5"/>
+                </a:lnRef>
+                <a:fillRef idx="2">
+                  <a:schemeClr val="accent5"/>
+                </a:fillRef>
+                <a:effectRef idx="1">
+                  <a:schemeClr val="accent5"/>
+                </a:effectRef>
+                <a:fontRef idx="minor">
+                  <a:schemeClr val="dk1"/>
+                </a:fontRef>
+              </p:style>
+              <p:txBody>
+                <a:bodyPr rtlCol="0" anchor="ctr"/>
+                <a:lstStyle/>
+                <a:p>
+                  <a:pPr algn="ctr"/>
+                  <a14:m>
+                    <m:oMathPara xmlns:m="http://schemas.openxmlformats.org/officeDocument/2006/math">
+                      <m:oMathParaPr>
+                        <m:jc m:val="center"/>
+                      </m:oMathParaPr>
+                      <m:oMath xmlns:m="http://schemas.openxmlformats.org/officeDocument/2006/math">
+                        <m:sSubSup>
+                          <m:sSubSupPr>
+                            <m:ctrlPr>
+                              <a:rPr lang="pt-BR" i="1" smtClean="0">
+                                <a:latin typeface="Cambria Math" panose="02040503050406030204" pitchFamily="18" charset="0"/>
+                              </a:rPr>
+                            </m:ctrlPr>
+                          </m:sSubSupPr>
+                          <m:e>
+                            <m:r>
+                              <a:rPr lang="pt-BR" b="1" i="1">
+                                <a:latin typeface="Cambria Math" panose="02040503050406030204" pitchFamily="18" charset="0"/>
+                              </a:rPr>
+                              <m:t>𝑾</m:t>
+                            </m:r>
+                          </m:e>
+                          <m:sub>
+                            <m:r>
+                              <a:rPr lang="pt-BR" i="1">
+                                <a:latin typeface="Cambria Math" panose="02040503050406030204" pitchFamily="18" charset="0"/>
+                              </a:rPr>
+                              <m:t>h</m:t>
+                            </m:r>
+                          </m:sub>
+                          <m:sup>
+                            <m:r>
+                              <a:rPr lang="pt-BR" b="0" i="1" smtClean="0">
+                                <a:latin typeface="Cambria Math" panose="02040503050406030204" pitchFamily="18" charset="0"/>
+                              </a:rPr>
+                              <m:t>h</m:t>
+                            </m:r>
+                          </m:sup>
+                        </m:sSubSup>
+                      </m:oMath>
+                    </m:oMathPara>
+                  </a14:m>
+                  <a:endParaRPr lang="en-US" dirty="0"/>
+                </a:p>
+              </p:txBody>
+            </p:sp>
+          </mc:Choice>
+          <mc:Fallback xmlns="">
+            <p:sp>
+              <p:nvSpPr>
+                <p:cNvPr id="11" name="Rectangle 10">
+                  <a:extLst>
+                    <a:ext uri="{FF2B5EF4-FFF2-40B4-BE49-F238E27FC236}">
+                      <a16:creationId xmlns:a16="http://schemas.microsoft.com/office/drawing/2014/main" id="{C07E56CD-571A-F75D-A1A7-7B928CD4CBCE}"/>
+                    </a:ext>
+                  </a:extLst>
+                </p:cNvPr>
+                <p:cNvSpPr>
+                  <a:spLocks noRot="1" noChangeAspect="1" noMove="1" noResize="1" noEditPoints="1" noAdjustHandles="1" noChangeArrowheads="1" noChangeShapeType="1" noTextEdit="1"/>
+                </p:cNvSpPr>
+                <p:nvPr/>
+              </p:nvSpPr>
+              <p:spPr>
+                <a:xfrm>
+                  <a:off x="3469200" y="3913371"/>
+                  <a:ext cx="468000" cy="468000"/>
+                </a:xfrm>
+                <a:prstGeom prst="rect">
+                  <a:avLst/>
+                </a:prstGeom>
+                <a:blipFill>
+                  <a:blip r:embed="rId7"/>
+                  <a:stretch>
+                    <a:fillRect l="-10390"/>
+                  </a:stretch>
+                </a:blipFill>
+              </p:spPr>
+              <p:txBody>
+                <a:bodyPr/>
+                <a:lstStyle/>
+                <a:p>
+                  <a:r>
+                    <a:rPr lang="en-US">
+                      <a:noFill/>
+                    </a:rPr>
+                    <a:t> </a:t>
+                  </a:r>
+                </a:p>
+              </p:txBody>
+            </p:sp>
+          </mc:Fallback>
+        </mc:AlternateContent>
+        <mc:AlternateContent xmlns:mc="http://schemas.openxmlformats.org/markup-compatibility/2006" xmlns:a14="http://schemas.microsoft.com/office/drawing/2010/main">
+          <mc:Choice Requires="a14">
+            <p:sp>
+              <p:nvSpPr>
+                <p:cNvPr id="12" name="Oval 11">
+                  <a:extLst>
+                    <a:ext uri="{FF2B5EF4-FFF2-40B4-BE49-F238E27FC236}">
+                      <a16:creationId xmlns:a16="http://schemas.microsoft.com/office/drawing/2014/main" id="{0DFE758E-AA0D-24E9-ACDD-5EB509378589}"/>
+                    </a:ext>
+                  </a:extLst>
+                </p:cNvPr>
+                <p:cNvSpPr/>
+                <p:nvPr/>
+              </p:nvSpPr>
+              <p:spPr>
+                <a:xfrm>
+                  <a:off x="2475878" y="1782434"/>
+                  <a:ext cx="432000" cy="432000"/>
+                </a:xfrm>
+                <a:prstGeom prst="ellipse">
+                  <a:avLst/>
+                </a:prstGeom>
+              </p:spPr>
+              <p:style>
+                <a:lnRef idx="1">
+                  <a:schemeClr val="accent3"/>
+                </a:lnRef>
+                <a:fillRef idx="2">
+                  <a:schemeClr val="accent3"/>
+                </a:fillRef>
+                <a:effectRef idx="1">
+                  <a:schemeClr val="accent3"/>
+                </a:effectRef>
+                <a:fontRef idx="minor">
+                  <a:schemeClr val="dk1"/>
+                </a:fontRef>
+              </p:style>
+              <p:txBody>
+                <a:bodyPr rtlCol="0" anchor="ctr"/>
+                <a:lstStyle/>
+                <a:p>
+                  <a:pPr algn="ctr"/>
+                  <a14:m>
+                    <m:oMathPara xmlns:m="http://schemas.openxmlformats.org/officeDocument/2006/math">
+                      <m:oMathParaPr>
+                        <m:jc m:val="center"/>
+                      </m:oMathParaPr>
+                      <m:oMath xmlns:m="http://schemas.openxmlformats.org/officeDocument/2006/math">
+                        <m:r>
+                          <a:rPr lang="pt-BR" b="1" i="1">
+                            <a:latin typeface="Cambria Math" panose="02040503050406030204" pitchFamily="18" charset="0"/>
+                          </a:rPr>
+                          <m:t>𝒚</m:t>
+                        </m:r>
+                      </m:oMath>
+                    </m:oMathPara>
+                  </a14:m>
+                  <a:endParaRPr lang="en-US" b="1" dirty="0"/>
+                </a:p>
+              </p:txBody>
+            </p:sp>
+          </mc:Choice>
+          <mc:Fallback xmlns="">
+            <p:sp>
+              <p:nvSpPr>
+                <p:cNvPr id="12" name="Oval 11">
+                  <a:extLst>
+                    <a:ext uri="{FF2B5EF4-FFF2-40B4-BE49-F238E27FC236}">
+                      <a16:creationId xmlns:a16="http://schemas.microsoft.com/office/drawing/2014/main" id="{0DFE758E-AA0D-24E9-ACDD-5EB509378589}"/>
+                    </a:ext>
+                  </a:extLst>
+                </p:cNvPr>
+                <p:cNvSpPr>
+                  <a:spLocks noRot="1" noChangeAspect="1" noMove="1" noResize="1" noEditPoints="1" noAdjustHandles="1" noChangeArrowheads="1" noChangeShapeType="1" noTextEdit="1"/>
+                </p:cNvSpPr>
+                <p:nvPr/>
+              </p:nvSpPr>
+              <p:spPr>
+                <a:xfrm>
+                  <a:off x="2475878" y="1782434"/>
+                  <a:ext cx="432000" cy="432000"/>
+                </a:xfrm>
+                <a:prstGeom prst="ellipse">
+                  <a:avLst/>
+                </a:prstGeom>
+                <a:blipFill>
+                  <a:blip r:embed="rId8"/>
+                  <a:stretch>
+                    <a:fillRect/>
+                  </a:stretch>
+                </a:blipFill>
+              </p:spPr>
+              <p:txBody>
+                <a:bodyPr/>
+                <a:lstStyle/>
+                <a:p>
+                  <a:r>
+                    <a:rPr lang="en-US">
+                      <a:noFill/>
+                    </a:rPr>
+                    <a:t> </a:t>
+                  </a:r>
+                </a:p>
+              </p:txBody>
+            </p:sp>
+          </mc:Fallback>
+        </mc:AlternateContent>
+        <mc:AlternateContent xmlns:mc="http://schemas.openxmlformats.org/markup-compatibility/2006" xmlns:a14="http://schemas.microsoft.com/office/drawing/2010/main">
+          <mc:Choice Requires="a14">
+            <p:sp>
+              <p:nvSpPr>
+                <p:cNvPr id="13" name="Oval 12">
+                  <a:extLst>
+                    <a:ext uri="{FF2B5EF4-FFF2-40B4-BE49-F238E27FC236}">
+                      <a16:creationId xmlns:a16="http://schemas.microsoft.com/office/drawing/2014/main" id="{536A747D-2D61-6719-5F86-0A8E352880D4}"/>
+                    </a:ext>
+                  </a:extLst>
+                </p:cNvPr>
+                <p:cNvSpPr/>
+                <p:nvPr/>
+              </p:nvSpPr>
+              <p:spPr>
+                <a:xfrm>
+                  <a:off x="2475878" y="3931371"/>
+                  <a:ext cx="432000" cy="432000"/>
+                </a:xfrm>
+                <a:prstGeom prst="ellipse">
+                  <a:avLst/>
+                </a:prstGeom>
+              </p:spPr>
+              <p:style>
+                <a:lnRef idx="1">
+                  <a:schemeClr val="accent3"/>
+                </a:lnRef>
+                <a:fillRef idx="2">
+                  <a:schemeClr val="accent3"/>
+                </a:fillRef>
+                <a:effectRef idx="1">
+                  <a:schemeClr val="accent3"/>
+                </a:effectRef>
+                <a:fontRef idx="minor">
+                  <a:schemeClr val="dk1"/>
+                </a:fontRef>
+              </p:style>
+              <p:txBody>
+                <a:bodyPr rtlCol="0" anchor="ctr"/>
+                <a:lstStyle/>
+                <a:p>
+                  <a:pPr algn="ctr"/>
+                  <a14:m>
+                    <m:oMathPara xmlns:m="http://schemas.openxmlformats.org/officeDocument/2006/math">
+                      <m:oMathParaPr>
+                        <m:jc m:val="center"/>
+                      </m:oMathParaPr>
+                      <m:oMath xmlns:m="http://schemas.openxmlformats.org/officeDocument/2006/math">
+                        <m:r>
+                          <a:rPr lang="pt-BR" b="1" i="1" smtClean="0">
+                            <a:latin typeface="Cambria Math" panose="02040503050406030204" pitchFamily="18" charset="0"/>
+                          </a:rPr>
+                          <m:t>𝒉</m:t>
+                        </m:r>
+                      </m:oMath>
+                    </m:oMathPara>
+                  </a14:m>
+                  <a:endParaRPr lang="en-US" b="1" dirty="0"/>
+                </a:p>
+              </p:txBody>
+            </p:sp>
+          </mc:Choice>
+          <mc:Fallback xmlns="">
+            <p:sp>
+              <p:nvSpPr>
+                <p:cNvPr id="13" name="Oval 12">
+                  <a:extLst>
+                    <a:ext uri="{FF2B5EF4-FFF2-40B4-BE49-F238E27FC236}">
+                      <a16:creationId xmlns:a16="http://schemas.microsoft.com/office/drawing/2014/main" id="{536A747D-2D61-6719-5F86-0A8E352880D4}"/>
+                    </a:ext>
+                  </a:extLst>
+                </p:cNvPr>
+                <p:cNvSpPr>
+                  <a:spLocks noRot="1" noChangeAspect="1" noMove="1" noResize="1" noEditPoints="1" noAdjustHandles="1" noChangeArrowheads="1" noChangeShapeType="1" noTextEdit="1"/>
+                </p:cNvSpPr>
+                <p:nvPr/>
+              </p:nvSpPr>
+              <p:spPr>
+                <a:xfrm>
+                  <a:off x="2475878" y="3931371"/>
+                  <a:ext cx="432000" cy="432000"/>
+                </a:xfrm>
+                <a:prstGeom prst="ellipse">
+                  <a:avLst/>
+                </a:prstGeom>
+                <a:blipFill>
+                  <a:blip r:embed="rId9"/>
+                  <a:stretch>
+                    <a:fillRect/>
+                  </a:stretch>
+                </a:blipFill>
+              </p:spPr>
+              <p:txBody>
+                <a:bodyPr/>
+                <a:lstStyle/>
+                <a:p>
+                  <a:r>
+                    <a:rPr lang="en-US">
+                      <a:noFill/>
+                    </a:rPr>
+                    <a:t> </a:t>
+                  </a:r>
+                </a:p>
+              </p:txBody>
+            </p:sp>
+          </mc:Fallback>
+        </mc:AlternateContent>
+        <mc:AlternateContent xmlns:mc="http://schemas.openxmlformats.org/markup-compatibility/2006" xmlns:a14="http://schemas.microsoft.com/office/drawing/2010/main">
+          <mc:Choice Requires="a14">
+            <p:sp>
+              <p:nvSpPr>
+                <p:cNvPr id="14" name="Oval 13">
+                  <a:extLst>
+                    <a:ext uri="{FF2B5EF4-FFF2-40B4-BE49-F238E27FC236}">
+                      <a16:creationId xmlns:a16="http://schemas.microsoft.com/office/drawing/2014/main" id="{2FE8CA7C-772F-3BB3-6BD7-E3F13B6038B0}"/>
+                    </a:ext>
+                  </a:extLst>
+                </p:cNvPr>
+                <p:cNvSpPr/>
+                <p:nvPr/>
+              </p:nvSpPr>
+              <p:spPr>
+                <a:xfrm>
+                  <a:off x="2475878" y="5857797"/>
+                  <a:ext cx="432000" cy="432000"/>
+                </a:xfrm>
+                <a:prstGeom prst="ellipse">
+                  <a:avLst/>
+                </a:prstGeom>
+              </p:spPr>
+              <p:style>
+                <a:lnRef idx="1">
+                  <a:schemeClr val="accent3"/>
+                </a:lnRef>
+                <a:fillRef idx="2">
+                  <a:schemeClr val="accent3"/>
+                </a:fillRef>
+                <a:effectRef idx="1">
+                  <a:schemeClr val="accent3"/>
+                </a:effectRef>
+                <a:fontRef idx="minor">
+                  <a:schemeClr val="dk1"/>
+                </a:fontRef>
+              </p:style>
+              <p:txBody>
+                <a:bodyPr rtlCol="0" anchor="ctr"/>
+                <a:lstStyle/>
+                <a:p>
+                  <a:pPr algn="ctr"/>
+                  <a14:m>
+                    <m:oMathPara xmlns:m="http://schemas.openxmlformats.org/officeDocument/2006/math">
+                      <m:oMathParaPr>
+                        <m:jc m:val="center"/>
+                      </m:oMathParaPr>
+                      <m:oMath xmlns:m="http://schemas.openxmlformats.org/officeDocument/2006/math">
+                        <m:r>
+                          <a:rPr lang="pt-BR" b="1" i="1" smtClean="0">
+                            <a:latin typeface="Cambria Math" panose="02040503050406030204" pitchFamily="18" charset="0"/>
+                          </a:rPr>
+                          <m:t>𝒙</m:t>
+                        </m:r>
+                      </m:oMath>
+                    </m:oMathPara>
+                  </a14:m>
+                  <a:endParaRPr lang="en-US" b="1" dirty="0"/>
+                </a:p>
+              </p:txBody>
+            </p:sp>
+          </mc:Choice>
+          <mc:Fallback xmlns="">
+            <p:sp>
+              <p:nvSpPr>
+                <p:cNvPr id="14" name="Oval 13">
+                  <a:extLst>
+                    <a:ext uri="{FF2B5EF4-FFF2-40B4-BE49-F238E27FC236}">
+                      <a16:creationId xmlns:a16="http://schemas.microsoft.com/office/drawing/2014/main" id="{2FE8CA7C-772F-3BB3-6BD7-E3F13B6038B0}"/>
+                    </a:ext>
+                  </a:extLst>
+                </p:cNvPr>
+                <p:cNvSpPr>
+                  <a:spLocks noRot="1" noChangeAspect="1" noMove="1" noResize="1" noEditPoints="1" noAdjustHandles="1" noChangeArrowheads="1" noChangeShapeType="1" noTextEdit="1"/>
+                </p:cNvSpPr>
+                <p:nvPr/>
+              </p:nvSpPr>
+              <p:spPr>
+                <a:xfrm>
+                  <a:off x="2475878" y="5857797"/>
+                  <a:ext cx="432000" cy="432000"/>
+                </a:xfrm>
+                <a:prstGeom prst="ellipse">
+                  <a:avLst/>
+                </a:prstGeom>
+                <a:blipFill>
+                  <a:blip r:embed="rId10"/>
+                  <a:stretch>
+                    <a:fillRect/>
+                  </a:stretch>
+                </a:blipFill>
+              </p:spPr>
+              <p:txBody>
+                <a:bodyPr/>
+                <a:lstStyle/>
+                <a:p>
+                  <a:r>
+                    <a:rPr lang="en-US">
+                      <a:noFill/>
+                    </a:rPr>
+                    <a:t> </a:t>
+                  </a:r>
+                </a:p>
+              </p:txBody>
+            </p:sp>
+          </mc:Fallback>
+        </mc:AlternateContent>
+        <mc:AlternateContent xmlns:mc="http://schemas.openxmlformats.org/markup-compatibility/2006" xmlns:a14="http://schemas.microsoft.com/office/drawing/2010/main">
+          <mc:Choice Requires="a14">
+            <p:sp>
+              <p:nvSpPr>
+                <p:cNvPr id="15" name="Diamond 14">
+                  <a:extLst>
+                    <a:ext uri="{FF2B5EF4-FFF2-40B4-BE49-F238E27FC236}">
+                      <a16:creationId xmlns:a16="http://schemas.microsoft.com/office/drawing/2014/main" id="{59379733-07D8-5D46-149B-54EB96CC6129}"/>
+                    </a:ext>
+                  </a:extLst>
+                </p:cNvPr>
+                <p:cNvSpPr/>
+                <p:nvPr/>
+              </p:nvSpPr>
+              <p:spPr>
+                <a:xfrm>
+                  <a:off x="2971382" y="3226750"/>
+                  <a:ext cx="546518" cy="468000"/>
+                </a:xfrm>
+                <a:prstGeom prst="diamond">
+                  <a:avLst/>
+                </a:prstGeom>
+              </p:spPr>
+              <p:style>
+                <a:lnRef idx="2">
+                  <a:schemeClr val="dk1"/>
+                </a:lnRef>
+                <a:fillRef idx="1">
+                  <a:schemeClr val="lt1"/>
+                </a:fillRef>
+                <a:effectRef idx="0">
+                  <a:schemeClr val="dk1"/>
+                </a:effectRef>
+                <a:fontRef idx="minor">
+                  <a:schemeClr val="dk1"/>
+                </a:fontRef>
+              </p:style>
+              <p:txBody>
+                <a:bodyPr rtlCol="0" anchor="ctr"/>
+                <a:lstStyle/>
+                <a:p>
+                  <a:pPr algn="ctr"/>
+                  <a14:m>
+                    <m:oMathPara xmlns:m="http://schemas.openxmlformats.org/officeDocument/2006/math">
+                      <m:oMathParaPr>
+                        <m:jc m:val="centerGroup"/>
+                      </m:oMathParaPr>
+                      <m:oMath xmlns:m="http://schemas.openxmlformats.org/officeDocument/2006/math">
+                        <m:sSup>
+                          <m:sSupPr>
+                            <m:ctrlPr>
+                              <a:rPr lang="en-US" i="1" smtClean="0">
+                                <a:latin typeface="Cambria Math" panose="02040503050406030204" pitchFamily="18" charset="0"/>
+                              </a:rPr>
+                            </m:ctrlPr>
+                          </m:sSupPr>
+                          <m:e>
+                            <m:r>
+                              <a:rPr lang="pt-BR" b="0" i="1" smtClean="0">
+                                <a:latin typeface="Cambria Math" panose="02040503050406030204" pitchFamily="18" charset="0"/>
+                              </a:rPr>
+                              <m:t>𝑧</m:t>
+                            </m:r>
+                          </m:e>
+                          <m:sup>
+                            <m:r>
+                              <a:rPr lang="pt-BR" b="0" i="1" smtClean="0">
+                                <a:latin typeface="Cambria Math" panose="02040503050406030204" pitchFamily="18" charset="0"/>
+                              </a:rPr>
+                              <m:t>−1</m:t>
+                            </m:r>
+                          </m:sup>
+                        </m:sSup>
+                      </m:oMath>
+                    </m:oMathPara>
+                  </a14:m>
+                  <a:endParaRPr lang="en-US" dirty="0"/>
+                </a:p>
+              </p:txBody>
+            </p:sp>
+          </mc:Choice>
+          <mc:Fallback xmlns="">
+            <p:sp>
+              <p:nvSpPr>
+                <p:cNvPr id="15" name="Diamond 14">
+                  <a:extLst>
+                    <a:ext uri="{FF2B5EF4-FFF2-40B4-BE49-F238E27FC236}">
+                      <a16:creationId xmlns:a16="http://schemas.microsoft.com/office/drawing/2014/main" id="{59379733-07D8-5D46-149B-54EB96CC6129}"/>
+                    </a:ext>
+                  </a:extLst>
+                </p:cNvPr>
+                <p:cNvSpPr>
+                  <a:spLocks noRot="1" noChangeAspect="1" noMove="1" noResize="1" noEditPoints="1" noAdjustHandles="1" noChangeArrowheads="1" noChangeShapeType="1" noTextEdit="1"/>
+                </p:cNvSpPr>
+                <p:nvPr/>
+              </p:nvSpPr>
+              <p:spPr>
+                <a:xfrm>
+                  <a:off x="2971382" y="3226750"/>
+                  <a:ext cx="546518" cy="468000"/>
+                </a:xfrm>
+                <a:prstGeom prst="diamond">
+                  <a:avLst/>
+                </a:prstGeom>
+                <a:blipFill>
+                  <a:blip r:embed="rId11"/>
+                  <a:stretch>
+                    <a:fillRect/>
+                  </a:stretch>
+                </a:blipFill>
+              </p:spPr>
+              <p:txBody>
+                <a:bodyPr/>
+                <a:lstStyle/>
+                <a:p>
+                  <a:r>
+                    <a:rPr lang="en-US">
+                      <a:noFill/>
+                    </a:rPr>
+                    <a:t> </a:t>
+                  </a:r>
+                </a:p>
+              </p:txBody>
+            </p:sp>
+          </mc:Fallback>
+        </mc:AlternateContent>
+        <mc:AlternateContent xmlns:mc="http://schemas.openxmlformats.org/markup-compatibility/2006" xmlns:a14="http://schemas.microsoft.com/office/drawing/2010/main">
+          <mc:Choice Requires="a14">
+            <p:sp>
+              <p:nvSpPr>
+                <p:cNvPr id="16" name="Oval 15">
+                  <a:extLst>
+                    <a:ext uri="{FF2B5EF4-FFF2-40B4-BE49-F238E27FC236}">
+                      <a16:creationId xmlns:a16="http://schemas.microsoft.com/office/drawing/2014/main" id="{BA8FA2A5-55CF-3204-8044-DC2B8D19B59B}"/>
+                    </a:ext>
+                  </a:extLst>
+                </p:cNvPr>
+                <p:cNvSpPr/>
+                <p:nvPr/>
+              </p:nvSpPr>
+              <p:spPr>
+                <a:xfrm>
+                  <a:off x="2468334" y="4565911"/>
+                  <a:ext cx="432000" cy="432000"/>
+                </a:xfrm>
+                <a:prstGeom prst="ellipse">
+                  <a:avLst/>
+                </a:prstGeom>
+              </p:spPr>
+              <p:style>
+                <a:lnRef idx="1">
+                  <a:schemeClr val="accent3"/>
+                </a:lnRef>
+                <a:fillRef idx="2">
+                  <a:schemeClr val="accent3"/>
+                </a:fillRef>
+                <a:effectRef idx="1">
+                  <a:schemeClr val="accent3"/>
+                </a:effectRef>
+                <a:fontRef idx="minor">
+                  <a:schemeClr val="dk1"/>
+                </a:fontRef>
+              </p:style>
+              <p:txBody>
+                <a:bodyPr rtlCol="0" anchor="ctr"/>
+                <a:lstStyle/>
+                <a:p>
+                  <a:pPr algn="ctr"/>
+                  <a14:m>
+                    <m:oMathPara xmlns:m="http://schemas.openxmlformats.org/officeDocument/2006/math">
+                      <m:oMathParaPr>
+                        <m:jc m:val="center"/>
+                      </m:oMathParaPr>
+                      <m:oMath xmlns:m="http://schemas.openxmlformats.org/officeDocument/2006/math">
+                        <m:r>
+                          <m:rPr>
+                            <m:sty m:val="p"/>
+                          </m:rPr>
+                          <a:rPr lang="pt-BR" sz="1400" b="0" i="0" smtClean="0">
+                            <a:latin typeface="Cambria Math" panose="02040503050406030204" pitchFamily="18" charset="0"/>
+                          </a:rPr>
+                          <m:t>tanh</m:t>
+                        </m:r>
+                      </m:oMath>
+                    </m:oMathPara>
+                  </a14:m>
+                  <a:endParaRPr lang="en-US" sz="1400" dirty="0"/>
+                </a:p>
+              </p:txBody>
+            </p:sp>
+          </mc:Choice>
+          <mc:Fallback xmlns="">
+            <p:sp>
+              <p:nvSpPr>
+                <p:cNvPr id="16" name="Oval 15">
+                  <a:extLst>
+                    <a:ext uri="{FF2B5EF4-FFF2-40B4-BE49-F238E27FC236}">
+                      <a16:creationId xmlns:a16="http://schemas.microsoft.com/office/drawing/2014/main" id="{BA8FA2A5-55CF-3204-8044-DC2B8D19B59B}"/>
+                    </a:ext>
+                  </a:extLst>
+                </p:cNvPr>
+                <p:cNvSpPr>
+                  <a:spLocks noRot="1" noChangeAspect="1" noMove="1" noResize="1" noEditPoints="1" noAdjustHandles="1" noChangeArrowheads="1" noChangeShapeType="1" noTextEdit="1"/>
+                </p:cNvSpPr>
+                <p:nvPr/>
+              </p:nvSpPr>
+              <p:spPr>
+                <a:xfrm>
+                  <a:off x="2468334" y="4565911"/>
+                  <a:ext cx="432000" cy="432000"/>
+                </a:xfrm>
+                <a:prstGeom prst="ellipse">
+                  <a:avLst/>
+                </a:prstGeom>
+                <a:blipFill>
+                  <a:blip r:embed="rId12"/>
+                  <a:stretch>
+                    <a:fillRect l="-8333"/>
+                  </a:stretch>
+                </a:blipFill>
+              </p:spPr>
+              <p:txBody>
+                <a:bodyPr/>
+                <a:lstStyle/>
+                <a:p>
+                  <a:r>
+                    <a:rPr lang="en-US">
+                      <a:noFill/>
+                    </a:rPr>
+                    <a:t> </a:t>
+                  </a:r>
+                </a:p>
+              </p:txBody>
+            </p:sp>
+          </mc:Fallback>
+        </mc:AlternateContent>
+        <p:cxnSp>
+          <p:nvCxnSpPr>
+            <p:cNvPr id="17" name="Straight Arrow Connector 16">
+              <a:extLst>
+                <a:ext uri="{FF2B5EF4-FFF2-40B4-BE49-F238E27FC236}">
+                  <a16:creationId xmlns:a16="http://schemas.microsoft.com/office/drawing/2014/main" id="{D74BCD5F-A26B-5098-88E1-CB8911BEF0B7}"/>
+                </a:ext>
+              </a:extLst>
+            </p:cNvPr>
+            <p:cNvCxnSpPr>
+              <a:stCxn id="14" idx="0"/>
+              <a:endCxn id="9" idx="2"/>
+            </p:cNvCxnSpPr>
+            <p:nvPr/>
+          </p:nvCxnSpPr>
+          <p:spPr>
+            <a:xfrm flipH="1" flipV="1">
+              <a:off x="2688106" y="5661854"/>
+              <a:ext cx="3772" cy="195943"/>
+            </a:xfrm>
+            <a:prstGeom prst="straightConnector1">
+              <a:avLst/>
+            </a:prstGeom>
+            <a:ln>
+              <a:tailEnd type="triangle"/>
+            </a:ln>
+          </p:spPr>
+          <p:style>
+            <a:lnRef idx="1">
+              <a:schemeClr val="dk1"/>
+            </a:lnRef>
+            <a:fillRef idx="0">
+              <a:schemeClr val="dk1"/>
+            </a:fillRef>
+            <a:effectRef idx="0">
+              <a:schemeClr val="dk1"/>
+            </a:effectRef>
+            <a:fontRef idx="minor">
+              <a:schemeClr val="tx1"/>
+            </a:fontRef>
+          </p:style>
+        </p:cxnSp>
+        <p:cxnSp>
+          <p:nvCxnSpPr>
+            <p:cNvPr id="18" name="Straight Arrow Connector 17">
+              <a:extLst>
+                <a:ext uri="{FF2B5EF4-FFF2-40B4-BE49-F238E27FC236}">
+                  <a16:creationId xmlns:a16="http://schemas.microsoft.com/office/drawing/2014/main" id="{D4D61A13-9F5D-8BB8-1C60-28D90D0C40B3}"/>
+                </a:ext>
+              </a:extLst>
+            </p:cNvPr>
+            <p:cNvCxnSpPr/>
+            <p:nvPr/>
+          </p:nvCxnSpPr>
+          <p:spPr>
+            <a:xfrm flipH="1" flipV="1">
+              <a:off x="2691878" y="4997911"/>
+              <a:ext cx="3772" cy="195943"/>
+            </a:xfrm>
+            <a:prstGeom prst="straightConnector1">
+              <a:avLst/>
+            </a:prstGeom>
+            <a:ln>
+              <a:tailEnd type="triangle"/>
+            </a:ln>
+          </p:spPr>
+          <p:style>
+            <a:lnRef idx="1">
+              <a:schemeClr val="dk1"/>
+            </a:lnRef>
+            <a:fillRef idx="0">
+              <a:schemeClr val="dk1"/>
+            </a:fillRef>
+            <a:effectRef idx="0">
+              <a:schemeClr val="dk1"/>
+            </a:effectRef>
+            <a:fontRef idx="minor">
+              <a:schemeClr val="tx1"/>
+            </a:fontRef>
+          </p:style>
+        </p:cxnSp>
+        <p:cxnSp>
+          <p:nvCxnSpPr>
+            <p:cNvPr id="19" name="Straight Arrow Connector 18">
+              <a:extLst>
+                <a:ext uri="{FF2B5EF4-FFF2-40B4-BE49-F238E27FC236}">
+                  <a16:creationId xmlns:a16="http://schemas.microsoft.com/office/drawing/2014/main" id="{A6D5D1B1-5D0C-A928-E4A0-19B840DC8462}"/>
+                </a:ext>
+              </a:extLst>
+            </p:cNvPr>
+            <p:cNvCxnSpPr/>
+            <p:nvPr/>
+          </p:nvCxnSpPr>
+          <p:spPr>
+            <a:xfrm flipH="1" flipV="1">
+              <a:off x="2688106" y="4369968"/>
+              <a:ext cx="3772" cy="195943"/>
+            </a:xfrm>
+            <a:prstGeom prst="straightConnector1">
+              <a:avLst/>
+            </a:prstGeom>
+            <a:ln>
+              <a:tailEnd type="triangle"/>
+            </a:ln>
+          </p:spPr>
+          <p:style>
+            <a:lnRef idx="1">
+              <a:schemeClr val="dk1"/>
+            </a:lnRef>
+            <a:fillRef idx="0">
+              <a:schemeClr val="dk1"/>
+            </a:fillRef>
+            <a:effectRef idx="0">
+              <a:schemeClr val="dk1"/>
+            </a:effectRef>
+            <a:fontRef idx="minor">
+              <a:schemeClr val="tx1"/>
+            </a:fontRef>
+          </p:style>
+        </p:cxnSp>
+        <p:cxnSp>
+          <p:nvCxnSpPr>
+            <p:cNvPr id="20" name="Straight Arrow Connector 19">
+              <a:extLst>
+                <a:ext uri="{FF2B5EF4-FFF2-40B4-BE49-F238E27FC236}">
+                  <a16:creationId xmlns:a16="http://schemas.microsoft.com/office/drawing/2014/main" id="{41AE4C5E-26C8-56CF-D359-49E2A105C2BC}"/>
+                </a:ext>
+              </a:extLst>
+            </p:cNvPr>
+            <p:cNvCxnSpPr>
+              <a:stCxn id="13" idx="0"/>
+              <a:endCxn id="8" idx="2"/>
+            </p:cNvCxnSpPr>
+            <p:nvPr/>
+          </p:nvCxnSpPr>
+          <p:spPr>
+            <a:xfrm flipV="1">
+              <a:off x="2691878" y="2894299"/>
+              <a:ext cx="2760" cy="1037072"/>
+            </a:xfrm>
+            <a:prstGeom prst="straightConnector1">
+              <a:avLst/>
+            </a:prstGeom>
+            <a:ln>
+              <a:tailEnd type="triangle"/>
+            </a:ln>
+          </p:spPr>
+          <p:style>
+            <a:lnRef idx="1">
+              <a:schemeClr val="dk1"/>
+            </a:lnRef>
+            <a:fillRef idx="0">
+              <a:schemeClr val="dk1"/>
+            </a:fillRef>
+            <a:effectRef idx="0">
+              <a:schemeClr val="dk1"/>
+            </a:effectRef>
+            <a:fontRef idx="minor">
+              <a:schemeClr val="tx1"/>
+            </a:fontRef>
+          </p:style>
+        </p:cxnSp>
+        <p:cxnSp>
+          <p:nvCxnSpPr>
+            <p:cNvPr id="21" name="Connector: Elbow 20">
+              <a:extLst>
+                <a:ext uri="{FF2B5EF4-FFF2-40B4-BE49-F238E27FC236}">
+                  <a16:creationId xmlns:a16="http://schemas.microsoft.com/office/drawing/2014/main" id="{5C4D3998-08DD-3820-D170-02DFE501BF6A}"/>
+                </a:ext>
+              </a:extLst>
+            </p:cNvPr>
+            <p:cNvCxnSpPr>
+              <a:stCxn id="15" idx="3"/>
+              <a:endCxn id="11" idx="0"/>
+            </p:cNvCxnSpPr>
+            <p:nvPr/>
+          </p:nvCxnSpPr>
+          <p:spPr>
+            <a:xfrm>
+              <a:off x="3517900" y="3460750"/>
+              <a:ext cx="185300" cy="452621"/>
+            </a:xfrm>
+            <a:prstGeom prst="bentConnector2">
+              <a:avLst/>
+            </a:prstGeom>
+            <a:ln>
+              <a:tailEnd type="triangle"/>
+            </a:ln>
+          </p:spPr>
+          <p:style>
+            <a:lnRef idx="1">
+              <a:schemeClr val="dk1"/>
+            </a:lnRef>
+            <a:fillRef idx="0">
+              <a:schemeClr val="dk1"/>
+            </a:fillRef>
+            <a:effectRef idx="0">
+              <a:schemeClr val="dk1"/>
+            </a:effectRef>
+            <a:fontRef idx="minor">
+              <a:schemeClr val="tx1"/>
+            </a:fontRef>
+          </p:style>
+        </p:cxnSp>
+        <p:cxnSp>
+          <p:nvCxnSpPr>
+            <p:cNvPr id="22" name="Straight Connector 21">
+              <a:extLst>
+                <a:ext uri="{FF2B5EF4-FFF2-40B4-BE49-F238E27FC236}">
+                  <a16:creationId xmlns:a16="http://schemas.microsoft.com/office/drawing/2014/main" id="{7029FFC5-80B8-0F57-67F9-B90CD57A4845}"/>
+                </a:ext>
+              </a:extLst>
+            </p:cNvPr>
+            <p:cNvCxnSpPr>
+              <a:stCxn id="15" idx="1"/>
+            </p:cNvCxnSpPr>
+            <p:nvPr/>
+          </p:nvCxnSpPr>
+          <p:spPr>
+            <a:xfrm flipH="1">
+              <a:off x="2704578" y="3460750"/>
+              <a:ext cx="266804" cy="0"/>
+            </a:xfrm>
+            <a:prstGeom prst="line">
+              <a:avLst/>
+            </a:prstGeom>
+            <a:ln>
+              <a:headEnd type="triangle" w="med" len="med"/>
+              <a:tailEnd type="none" w="med" len="med"/>
+            </a:ln>
+          </p:spPr>
+          <p:style>
+            <a:lnRef idx="1">
+              <a:schemeClr val="dk1"/>
+            </a:lnRef>
+            <a:fillRef idx="0">
+              <a:schemeClr val="dk1"/>
+            </a:fillRef>
+            <a:effectRef idx="0">
+              <a:schemeClr val="dk1"/>
+            </a:effectRef>
+            <a:fontRef idx="minor">
+              <a:schemeClr val="tx1"/>
+            </a:fontRef>
+          </p:style>
+        </p:cxnSp>
+        <p:cxnSp>
+          <p:nvCxnSpPr>
+            <p:cNvPr id="23" name="Connector: Elbow 22">
+              <a:extLst>
+                <a:ext uri="{FF2B5EF4-FFF2-40B4-BE49-F238E27FC236}">
+                  <a16:creationId xmlns:a16="http://schemas.microsoft.com/office/drawing/2014/main" id="{CD4A7C63-26B6-7B49-354D-6EA8E40614ED}"/>
+                </a:ext>
+              </a:extLst>
+            </p:cNvPr>
+            <p:cNvCxnSpPr>
+              <a:cxnSpLocks/>
+              <a:stCxn id="11" idx="2"/>
+              <a:endCxn id="16" idx="6"/>
+            </p:cNvCxnSpPr>
+            <p:nvPr/>
+          </p:nvCxnSpPr>
+          <p:spPr>
+            <a:xfrm rot="5400000">
+              <a:off x="3101497" y="4180208"/>
+              <a:ext cx="400540" cy="802866"/>
+            </a:xfrm>
+            <a:prstGeom prst="bentConnector2">
+              <a:avLst/>
+            </a:prstGeom>
+            <a:ln>
+              <a:tailEnd type="triangle"/>
+            </a:ln>
+          </p:spPr>
+          <p:style>
+            <a:lnRef idx="1">
+              <a:schemeClr val="dk1"/>
+            </a:lnRef>
+            <a:fillRef idx="0">
+              <a:schemeClr val="dk1"/>
+            </a:fillRef>
+            <a:effectRef idx="0">
+              <a:schemeClr val="dk1"/>
+            </a:effectRef>
+            <a:fontRef idx="minor">
+              <a:schemeClr val="tx1"/>
+            </a:fontRef>
+          </p:style>
+        </p:cxnSp>
+        <p:cxnSp>
+          <p:nvCxnSpPr>
+            <p:cNvPr id="24" name="Straight Arrow Connector 23">
+              <a:extLst>
+                <a:ext uri="{FF2B5EF4-FFF2-40B4-BE49-F238E27FC236}">
+                  <a16:creationId xmlns:a16="http://schemas.microsoft.com/office/drawing/2014/main" id="{3952B2F4-490F-BC90-DE7A-C07F43FC886C}"/>
+                </a:ext>
+              </a:extLst>
+            </p:cNvPr>
+            <p:cNvCxnSpPr/>
+            <p:nvPr/>
+          </p:nvCxnSpPr>
+          <p:spPr>
+            <a:xfrm flipH="1" flipV="1">
+              <a:off x="2694721" y="2223759"/>
+              <a:ext cx="3772" cy="195943"/>
+            </a:xfrm>
+            <a:prstGeom prst="straightConnector1">
+              <a:avLst/>
+            </a:prstGeom>
+            <a:ln>
+              <a:tailEnd type="triangle"/>
+            </a:ln>
+          </p:spPr>
+          <p:style>
+            <a:lnRef idx="1">
+              <a:schemeClr val="dk1"/>
+            </a:lnRef>
+            <a:fillRef idx="0">
+              <a:schemeClr val="dk1"/>
+            </a:fillRef>
+            <a:effectRef idx="0">
+              <a:schemeClr val="dk1"/>
+            </a:effectRef>
+            <a:fontRef idx="minor">
+              <a:schemeClr val="tx1"/>
+            </a:fontRef>
+          </p:style>
+        </p:cxnSp>
+      </p:grpSp>
     </p:spTree>
     <p:extLst>
       <p:ext uri="{BB962C8B-B14F-4D97-AF65-F5344CB8AC3E}">

--- a/slides/C24_RNN.pptx
+++ b/slides/C24_RNN.pptx
@@ -44,25 +44,25 @@
     <p:sldId id="365" r:id="rId32"/>
     <p:sldId id="366" r:id="rId33"/>
     <p:sldId id="367" r:id="rId34"/>
-    <p:sldId id="360" r:id="rId35"/>
-    <p:sldId id="337" r:id="rId36"/>
-    <p:sldId id="322" r:id="rId37"/>
-    <p:sldId id="321" r:id="rId38"/>
-    <p:sldId id="324" r:id="rId39"/>
-    <p:sldId id="323" r:id="rId40"/>
-    <p:sldId id="293" r:id="rId41"/>
-    <p:sldId id="306" r:id="rId42"/>
-    <p:sldId id="335" r:id="rId43"/>
-    <p:sldId id="330" r:id="rId44"/>
-    <p:sldId id="340" r:id="rId45"/>
-    <p:sldId id="348" r:id="rId46"/>
-    <p:sldId id="350" r:id="rId47"/>
-    <p:sldId id="353" r:id="rId48"/>
-    <p:sldId id="354" r:id="rId49"/>
-    <p:sldId id="357" r:id="rId50"/>
-    <p:sldId id="359" r:id="rId51"/>
-    <p:sldId id="363" r:id="rId52"/>
-    <p:sldId id="364" r:id="rId53"/>
+    <p:sldId id="368" r:id="rId35"/>
+    <p:sldId id="371" r:id="rId36"/>
+    <p:sldId id="360" r:id="rId37"/>
+    <p:sldId id="337" r:id="rId38"/>
+    <p:sldId id="293" r:id="rId39"/>
+    <p:sldId id="306" r:id="rId40"/>
+    <p:sldId id="335" r:id="rId41"/>
+    <p:sldId id="330" r:id="rId42"/>
+    <p:sldId id="340" r:id="rId43"/>
+    <p:sldId id="348" r:id="rId44"/>
+    <p:sldId id="350" r:id="rId45"/>
+    <p:sldId id="353" r:id="rId46"/>
+    <p:sldId id="354" r:id="rId47"/>
+    <p:sldId id="357" r:id="rId48"/>
+    <p:sldId id="359" r:id="rId49"/>
+    <p:sldId id="363" r:id="rId50"/>
+    <p:sldId id="364" r:id="rId51"/>
+    <p:sldId id="369" r:id="rId52"/>
+    <p:sldId id="370" r:id="rId53"/>
   </p:sldIdLst>
   <p:sldSz cx="12192000" cy="6858000"/>
   <p:notesSz cx="7315200" cy="9601200"/>
@@ -1383,6 +1383,28 @@
           <a:bodyPr/>
           <a:lstStyle/>
           <a:p>
+            <a:r>
+              <a:rPr lang="pt-BR" dirty="0"/>
+              <a:t>Referências</a:t>
+            </a:r>
+          </a:p>
+          <a:p>
+            <a:r>
+              <a:rPr lang="pt-BR" dirty="0"/>
+              <a:t>[1] https://towardsdatascience.com/a-brief-introduction-to-recurrent-neural-networks-638f64a61ff4/</a:t>
+            </a:r>
+          </a:p>
+          <a:p>
+            <a:r>
+              <a:rPr lang="pt-BR" dirty="0"/>
+              <a:t>[2] https://colah.github.io/posts/2015-08-Understanding-LSTMs/</a:t>
+            </a:r>
+          </a:p>
+          <a:p>
+            <a:r>
+              <a:rPr lang="pt-BR" dirty="0"/>
+              <a:t>[3] https://www.sintef.no/contentassets/9689621c8cda44d9b2bc91c5fba21135/bianchi.pdf</a:t>
+            </a:r>
             <a:endParaRPr lang="en-US" dirty="0"/>
           </a:p>
         </p:txBody>
@@ -1404,7 +1426,200 @@
           <a:p>
             <a:fld id="{6FC8D850-966F-45A6-8DE7-15B891E7D40D}" type="slidenum">
               <a:rPr lang="pt-BR" smtClean="0"/>
-              <a:t>48</a:t>
+              <a:t>34</a:t>
+            </a:fld>
+            <a:endParaRPr lang="pt-BR"/>
+          </a:p>
+        </p:txBody>
+      </p:sp>
+    </p:spTree>
+    <p:extLst>
+      <p:ext uri="{BB962C8B-B14F-4D97-AF65-F5344CB8AC3E}">
+        <p14:creationId xmlns:p14="http://schemas.microsoft.com/office/powerpoint/2010/main" val="2822707279"/>
+      </p:ext>
+    </p:extLst>
+  </p:cSld>
+  <p:clrMapOvr>
+    <a:masterClrMapping/>
+  </p:clrMapOvr>
+</p:notes>
+</file>
+
+<file path=ppt/notesSlides/notesSlide16.xml><?xml version="1.0" encoding="utf-8"?>
+<p:notes xmlns:a="http://schemas.openxmlformats.org/drawingml/2006/main" xmlns:r="http://schemas.openxmlformats.org/officeDocument/2006/relationships" xmlns:p="http://schemas.openxmlformats.org/presentationml/2006/main">
+  <p:cSld>
+    <p:spTree>
+      <p:nvGrpSpPr>
+        <p:cNvPr id="1" name=""/>
+        <p:cNvGrpSpPr/>
+        <p:nvPr/>
+      </p:nvGrpSpPr>
+      <p:grpSpPr>
+        <a:xfrm>
+          <a:off x="0" y="0"/>
+          <a:ext cx="0" cy="0"/>
+          <a:chOff x="0" y="0"/>
+          <a:chExt cx="0" cy="0"/>
+        </a:xfrm>
+      </p:grpSpPr>
+      <p:sp>
+        <p:nvSpPr>
+          <p:cNvPr id="2" name="Slide Image Placeholder 1"/>
+          <p:cNvSpPr>
+            <a:spLocks noGrp="1" noRot="1" noChangeAspect="1"/>
+          </p:cNvSpPr>
+          <p:nvPr>
+            <p:ph type="sldImg"/>
+          </p:nvPr>
+        </p:nvSpPr>
+        <p:spPr/>
+      </p:sp>
+      <p:sp>
+        <p:nvSpPr>
+          <p:cNvPr id="3" name="Notes Placeholder 2"/>
+          <p:cNvSpPr>
+            <a:spLocks noGrp="1"/>
+          </p:cNvSpPr>
+          <p:nvPr>
+            <p:ph type="body" idx="1"/>
+          </p:nvPr>
+        </p:nvSpPr>
+        <p:spPr/>
+        <p:txBody>
+          <a:bodyPr/>
+          <a:lstStyle/>
+          <a:p>
+            <a:r>
+              <a:rPr lang="pt-BR" dirty="0"/>
+              <a:t>Referências</a:t>
+            </a:r>
+          </a:p>
+          <a:p>
+            <a:r>
+              <a:rPr lang="pt-BR" dirty="0"/>
+              <a:t>[1] https://towardsdatascience.com/a-brief-introduction-to-recurrent-neural-networks-638f64a61ff4/</a:t>
+            </a:r>
+          </a:p>
+          <a:p>
+            <a:r>
+              <a:rPr lang="pt-BR" dirty="0"/>
+              <a:t>[2] https://colah.github.io/posts/2015-08-Understanding-LSTMs/</a:t>
+            </a:r>
+          </a:p>
+          <a:p>
+            <a:r>
+              <a:rPr lang="pt-BR" dirty="0"/>
+              <a:t>[3] https://www.sintef.no/contentassets/9689621c8cda44d9b2bc91c5fba21135/bianchi.pdf</a:t>
+            </a:r>
+            <a:endParaRPr lang="en-US" dirty="0"/>
+          </a:p>
+          <a:p>
+            <a:endParaRPr lang="en-US" dirty="0"/>
+          </a:p>
+        </p:txBody>
+      </p:sp>
+      <p:sp>
+        <p:nvSpPr>
+          <p:cNvPr id="4" name="Slide Number Placeholder 3"/>
+          <p:cNvSpPr>
+            <a:spLocks noGrp="1"/>
+          </p:cNvSpPr>
+          <p:nvPr>
+            <p:ph type="sldNum" sz="quarter" idx="5"/>
+          </p:nvPr>
+        </p:nvSpPr>
+        <p:spPr/>
+        <p:txBody>
+          <a:bodyPr/>
+          <a:lstStyle/>
+          <a:p>
+            <a:fld id="{6FC8D850-966F-45A6-8DE7-15B891E7D40D}" type="slidenum">
+              <a:rPr lang="pt-BR" smtClean="0"/>
+              <a:t>35</a:t>
+            </a:fld>
+            <a:endParaRPr lang="pt-BR"/>
+          </a:p>
+        </p:txBody>
+      </p:sp>
+    </p:spTree>
+    <p:extLst>
+      <p:ext uri="{BB962C8B-B14F-4D97-AF65-F5344CB8AC3E}">
+        <p14:creationId xmlns:p14="http://schemas.microsoft.com/office/powerpoint/2010/main" val="2724354959"/>
+      </p:ext>
+    </p:extLst>
+  </p:cSld>
+  <p:clrMapOvr>
+    <a:masterClrMapping/>
+  </p:clrMapOvr>
+</p:notes>
+</file>
+
+<file path=ppt/notesSlides/notesSlide17.xml><?xml version="1.0" encoding="utf-8"?>
+<p:notes xmlns:a="http://schemas.openxmlformats.org/drawingml/2006/main" xmlns:r="http://schemas.openxmlformats.org/officeDocument/2006/relationships" xmlns:p="http://schemas.openxmlformats.org/presentationml/2006/main">
+  <p:cSld>
+    <p:spTree>
+      <p:nvGrpSpPr>
+        <p:cNvPr id="1" name=""/>
+        <p:cNvGrpSpPr/>
+        <p:nvPr/>
+      </p:nvGrpSpPr>
+      <p:grpSpPr>
+        <a:xfrm>
+          <a:off x="0" y="0"/>
+          <a:ext cx="0" cy="0"/>
+          <a:chOff x="0" y="0"/>
+          <a:chExt cx="0" cy="0"/>
+        </a:xfrm>
+      </p:grpSpPr>
+      <p:sp>
+        <p:nvSpPr>
+          <p:cNvPr id="2" name="Slide Image Placeholder 1"/>
+          <p:cNvSpPr>
+            <a:spLocks noGrp="1" noRot="1" noChangeAspect="1"/>
+          </p:cNvSpPr>
+          <p:nvPr>
+            <p:ph type="sldImg"/>
+          </p:nvPr>
+        </p:nvSpPr>
+        <p:spPr/>
+      </p:sp>
+      <p:sp>
+        <p:nvSpPr>
+          <p:cNvPr id="3" name="Notes Placeholder 2"/>
+          <p:cNvSpPr>
+            <a:spLocks noGrp="1"/>
+          </p:cNvSpPr>
+          <p:nvPr>
+            <p:ph type="body" idx="1"/>
+          </p:nvPr>
+        </p:nvSpPr>
+        <p:spPr/>
+        <p:txBody>
+          <a:bodyPr/>
+          <a:lstStyle/>
+          <a:p>
+            <a:endParaRPr lang="en-US" dirty="0"/>
+          </a:p>
+        </p:txBody>
+      </p:sp>
+      <p:sp>
+        <p:nvSpPr>
+          <p:cNvPr id="4" name="Slide Number Placeholder 3"/>
+          <p:cNvSpPr>
+            <a:spLocks noGrp="1"/>
+          </p:cNvSpPr>
+          <p:nvPr>
+            <p:ph type="sldNum" sz="quarter" idx="5"/>
+          </p:nvPr>
+        </p:nvSpPr>
+        <p:spPr/>
+        <p:txBody>
+          <a:bodyPr/>
+          <a:lstStyle/>
+          <a:p>
+            <a:fld id="{6FC8D850-966F-45A6-8DE7-15B891E7D40D}" type="slidenum">
+              <a:rPr lang="pt-BR" smtClean="0"/>
+              <a:t>46</a:t>
             </a:fld>
             <a:endParaRPr lang="pt-BR"/>
           </a:p>
@@ -1423,7 +1638,7 @@
 </p:notes>
 </file>
 
-<file path=ppt/notesSlides/notesSlide16.xml><?xml version="1.0" encoding="utf-8"?>
+<file path=ppt/notesSlides/notesSlide18.xml><?xml version="1.0" encoding="utf-8"?>
 <p:notes xmlns:a="http://schemas.openxmlformats.org/drawingml/2006/main" xmlns:r="http://schemas.openxmlformats.org/officeDocument/2006/relationships" xmlns:p="http://schemas.openxmlformats.org/presentationml/2006/main">
   <p:cSld>
     <p:spTree>
@@ -1512,7 +1727,7 @@
           <a:p>
             <a:fld id="{6FC8D850-966F-45A6-8DE7-15B891E7D40D}" type="slidenum">
               <a:rPr lang="pt-BR" smtClean="0"/>
-              <a:t>49</a:t>
+              <a:t>47</a:t>
             </a:fld>
             <a:endParaRPr lang="pt-BR"/>
           </a:p>
@@ -1531,7 +1746,7 @@
 </p:notes>
 </file>
 
-<file path=ppt/notesSlides/notesSlide17.xml><?xml version="1.0" encoding="utf-8"?>
+<file path=ppt/notesSlides/notesSlide19.xml><?xml version="1.0" encoding="utf-8"?>
 <p:notes xmlns:a="http://schemas.openxmlformats.org/drawingml/2006/main" xmlns:r="http://schemas.openxmlformats.org/officeDocument/2006/relationships" xmlns:p="http://schemas.openxmlformats.org/presentationml/2006/main">
   <p:cSld>
     <p:spTree>
@@ -1620,7 +1835,7 @@
           <a:p>
             <a:fld id="{6FC8D850-966F-45A6-8DE7-15B891E7D40D}" type="slidenum">
               <a:rPr lang="pt-BR" smtClean="0"/>
-              <a:t>50</a:t>
+              <a:t>48</a:t>
             </a:fld>
             <a:endParaRPr lang="pt-BR"/>
           </a:p>
@@ -1639,7 +1854,91 @@
 </p:notes>
 </file>
 
-<file path=ppt/notesSlides/notesSlide18.xml><?xml version="1.0" encoding="utf-8"?>
+<file path=ppt/notesSlides/notesSlide2.xml><?xml version="1.0" encoding="utf-8"?>
+<p:notes xmlns:a="http://schemas.openxmlformats.org/drawingml/2006/main" xmlns:r="http://schemas.openxmlformats.org/officeDocument/2006/relationships" xmlns:p="http://schemas.openxmlformats.org/presentationml/2006/main">
+  <p:cSld>
+    <p:spTree>
+      <p:nvGrpSpPr>
+        <p:cNvPr id="1" name=""/>
+        <p:cNvGrpSpPr/>
+        <p:nvPr/>
+      </p:nvGrpSpPr>
+      <p:grpSpPr>
+        <a:xfrm>
+          <a:off x="0" y="0"/>
+          <a:ext cx="0" cy="0"/>
+          <a:chOff x="0" y="0"/>
+          <a:chExt cx="0" cy="0"/>
+        </a:xfrm>
+      </p:grpSpPr>
+      <p:sp>
+        <p:nvSpPr>
+          <p:cNvPr id="2" name="Espaço Reservado para Imagem de Slide 1"/>
+          <p:cNvSpPr>
+            <a:spLocks noGrp="1" noRot="1" noChangeAspect="1"/>
+          </p:cNvSpPr>
+          <p:nvPr>
+            <p:ph type="sldImg"/>
+          </p:nvPr>
+        </p:nvSpPr>
+        <p:spPr/>
+      </p:sp>
+      <p:sp>
+        <p:nvSpPr>
+          <p:cNvPr id="3" name="Espaço Reservado para Anotações 2"/>
+          <p:cNvSpPr>
+            <a:spLocks noGrp="1"/>
+          </p:cNvSpPr>
+          <p:nvPr>
+            <p:ph type="body" idx="1"/>
+          </p:nvPr>
+        </p:nvSpPr>
+        <p:spPr/>
+        <p:txBody>
+          <a:bodyPr/>
+          <a:lstStyle/>
+          <a:p>
+            <a:endParaRPr lang="pt-BR" dirty="0"/>
+          </a:p>
+        </p:txBody>
+      </p:sp>
+      <p:sp>
+        <p:nvSpPr>
+          <p:cNvPr id="4" name="Espaço Reservado para Número de Slide 3"/>
+          <p:cNvSpPr>
+            <a:spLocks noGrp="1"/>
+          </p:cNvSpPr>
+          <p:nvPr>
+            <p:ph type="sldNum" sz="quarter" idx="10"/>
+          </p:nvPr>
+        </p:nvSpPr>
+        <p:spPr/>
+        <p:txBody>
+          <a:bodyPr/>
+          <a:lstStyle/>
+          <a:p>
+            <a:fld id="{6FC8D850-966F-45A6-8DE7-15B891E7D40D}" type="slidenum">
+              <a:rPr lang="pt-BR" smtClean="0"/>
+              <a:t>3</a:t>
+            </a:fld>
+            <a:endParaRPr lang="pt-BR"/>
+          </a:p>
+        </p:txBody>
+      </p:sp>
+    </p:spTree>
+    <p:extLst>
+      <p:ext uri="{BB962C8B-B14F-4D97-AF65-F5344CB8AC3E}">
+        <p14:creationId xmlns:p14="http://schemas.microsoft.com/office/powerpoint/2010/main" val="1891829611"/>
+      </p:ext>
+    </p:extLst>
+  </p:cSld>
+  <p:clrMapOvr>
+    <a:masterClrMapping/>
+  </p:clrMapOvr>
+</p:notes>
+</file>
+
+<file path=ppt/notesSlides/notesSlide20.xml><?xml version="1.0" encoding="utf-8"?>
 <p:notes xmlns:a="http://schemas.openxmlformats.org/drawingml/2006/main" xmlns:r="http://schemas.openxmlformats.org/officeDocument/2006/relationships" xmlns:p="http://schemas.openxmlformats.org/presentationml/2006/main">
   <p:cSld>
     <p:spTree>
@@ -1728,7 +2027,7 @@
           <a:p>
             <a:fld id="{6FC8D850-966F-45A6-8DE7-15B891E7D40D}" type="slidenum">
               <a:rPr lang="pt-BR" smtClean="0"/>
-              <a:t>51</a:t>
+              <a:t>49</a:t>
             </a:fld>
             <a:endParaRPr lang="pt-BR"/>
           </a:p>
@@ -1747,7 +2046,7 @@
 </p:notes>
 </file>
 
-<file path=ppt/notesSlides/notesSlide19.xml><?xml version="1.0" encoding="utf-8"?>
+<file path=ppt/notesSlides/notesSlide21.xml><?xml version="1.0" encoding="utf-8"?>
 <p:notes xmlns:a="http://schemas.openxmlformats.org/drawingml/2006/main" xmlns:r="http://schemas.openxmlformats.org/officeDocument/2006/relationships" xmlns:p="http://schemas.openxmlformats.org/presentationml/2006/main">
   <p:cSld>
     <p:spTree>
@@ -1836,7 +2135,7 @@
           <a:p>
             <a:fld id="{6FC8D850-966F-45A6-8DE7-15B891E7D40D}" type="slidenum">
               <a:rPr lang="pt-BR" smtClean="0"/>
-              <a:t>52</a:t>
+              <a:t>50</a:t>
             </a:fld>
             <a:endParaRPr lang="pt-BR"/>
           </a:p>
@@ -1855,12 +2154,18 @@
 </p:notes>
 </file>
 
-<file path=ppt/notesSlides/notesSlide2.xml><?xml version="1.0" encoding="utf-8"?>
+<file path=ppt/notesSlides/notesSlide22.xml><?xml version="1.0" encoding="utf-8"?>
 <p:notes xmlns:a="http://schemas.openxmlformats.org/drawingml/2006/main" xmlns:r="http://schemas.openxmlformats.org/officeDocument/2006/relationships" xmlns:p="http://schemas.openxmlformats.org/presentationml/2006/main">
   <p:cSld>
     <p:spTree>
       <p:nvGrpSpPr>
-        <p:cNvPr id="1" name=""/>
+        <p:cNvPr id="1" name="">
+          <a:extLst>
+            <a:ext uri="{FF2B5EF4-FFF2-40B4-BE49-F238E27FC236}">
+              <a16:creationId xmlns:a16="http://schemas.microsoft.com/office/drawing/2014/main" id="{72845150-E3A0-4AA8-1B82-4EB9CA0E8FB5}"/>
+            </a:ext>
+          </a:extLst>
+        </p:cNvPr>
         <p:cNvGrpSpPr/>
         <p:nvPr/>
       </p:nvGrpSpPr>
@@ -1874,7 +2179,13 @@
       </p:grpSpPr>
       <p:sp>
         <p:nvSpPr>
-          <p:cNvPr id="2" name="Espaço Reservado para Imagem de Slide 1"/>
+          <p:cNvPr id="2" name="Slide Image Placeholder 1">
+            <a:extLst>
+              <a:ext uri="{FF2B5EF4-FFF2-40B4-BE49-F238E27FC236}">
+                <a16:creationId xmlns:a16="http://schemas.microsoft.com/office/drawing/2014/main" id="{A53E8584-A895-574E-5864-7A79AC884593}"/>
+              </a:ext>
+            </a:extLst>
+          </p:cNvPr>
           <p:cNvSpPr>
             <a:spLocks noGrp="1" noRot="1" noChangeAspect="1"/>
           </p:cNvSpPr>
@@ -1886,7 +2197,13 @@
       </p:sp>
       <p:sp>
         <p:nvSpPr>
-          <p:cNvPr id="3" name="Espaço Reservado para Anotações 2"/>
+          <p:cNvPr id="3" name="Notes Placeholder 2">
+            <a:extLst>
+              <a:ext uri="{FF2B5EF4-FFF2-40B4-BE49-F238E27FC236}">
+                <a16:creationId xmlns:a16="http://schemas.microsoft.com/office/drawing/2014/main" id="{C4C0F3F9-B45E-5A1E-7FC6-0155077F718C}"/>
+              </a:ext>
+            </a:extLst>
+          </p:cNvPr>
           <p:cNvSpPr>
             <a:spLocks noGrp="1"/>
           </p:cNvSpPr>
@@ -1899,18 +2216,24 @@
           <a:bodyPr/>
           <a:lstStyle/>
           <a:p>
-            <a:endParaRPr lang="pt-BR" dirty="0"/>
+            <a:endParaRPr lang="en-US" dirty="0"/>
           </a:p>
         </p:txBody>
       </p:sp>
       <p:sp>
         <p:nvSpPr>
-          <p:cNvPr id="4" name="Espaço Reservado para Número de Slide 3"/>
+          <p:cNvPr id="4" name="Slide Number Placeholder 3">
+            <a:extLst>
+              <a:ext uri="{FF2B5EF4-FFF2-40B4-BE49-F238E27FC236}">
+                <a16:creationId xmlns:a16="http://schemas.microsoft.com/office/drawing/2014/main" id="{761CD3A3-7795-BD62-EC53-236C1B172A31}"/>
+              </a:ext>
+            </a:extLst>
+          </p:cNvPr>
           <p:cNvSpPr>
             <a:spLocks noGrp="1"/>
           </p:cNvSpPr>
           <p:nvPr>
-            <p:ph type="sldNum" sz="quarter" idx="10"/>
+            <p:ph type="sldNum" sz="quarter" idx="5"/>
           </p:nvPr>
         </p:nvSpPr>
         <p:spPr/>
@@ -1920,7 +2243,7 @@
           <a:p>
             <a:fld id="{6FC8D850-966F-45A6-8DE7-15B891E7D40D}" type="slidenum">
               <a:rPr lang="pt-BR" smtClean="0"/>
-              <a:t>3</a:t>
+              <a:t>51</a:t>
             </a:fld>
             <a:endParaRPr lang="pt-BR"/>
           </a:p>
@@ -1929,7 +2252,115 @@
     </p:spTree>
     <p:extLst>
       <p:ext uri="{BB962C8B-B14F-4D97-AF65-F5344CB8AC3E}">
-        <p14:creationId xmlns:p14="http://schemas.microsoft.com/office/powerpoint/2010/main" val="1891829611"/>
+        <p14:creationId xmlns:p14="http://schemas.microsoft.com/office/powerpoint/2010/main" val="3768610720"/>
+      </p:ext>
+    </p:extLst>
+  </p:cSld>
+  <p:clrMapOvr>
+    <a:masterClrMapping/>
+  </p:clrMapOvr>
+</p:notes>
+</file>
+
+<file path=ppt/notesSlides/notesSlide23.xml><?xml version="1.0" encoding="utf-8"?>
+<p:notes xmlns:a="http://schemas.openxmlformats.org/drawingml/2006/main" xmlns:r="http://schemas.openxmlformats.org/officeDocument/2006/relationships" xmlns:p="http://schemas.openxmlformats.org/presentationml/2006/main">
+  <p:cSld>
+    <p:spTree>
+      <p:nvGrpSpPr>
+        <p:cNvPr id="1" name="">
+          <a:extLst>
+            <a:ext uri="{FF2B5EF4-FFF2-40B4-BE49-F238E27FC236}">
+              <a16:creationId xmlns:a16="http://schemas.microsoft.com/office/drawing/2014/main" id="{AFC3BFA3-59AF-04F9-0576-93E8CE77BD79}"/>
+            </a:ext>
+          </a:extLst>
+        </p:cNvPr>
+        <p:cNvGrpSpPr/>
+        <p:nvPr/>
+      </p:nvGrpSpPr>
+      <p:grpSpPr>
+        <a:xfrm>
+          <a:off x="0" y="0"/>
+          <a:ext cx="0" cy="0"/>
+          <a:chOff x="0" y="0"/>
+          <a:chExt cx="0" cy="0"/>
+        </a:xfrm>
+      </p:grpSpPr>
+      <p:sp>
+        <p:nvSpPr>
+          <p:cNvPr id="2" name="Slide Image Placeholder 1">
+            <a:extLst>
+              <a:ext uri="{FF2B5EF4-FFF2-40B4-BE49-F238E27FC236}">
+                <a16:creationId xmlns:a16="http://schemas.microsoft.com/office/drawing/2014/main" id="{90AC571C-6EE6-6F3D-F881-BE06D868B348}"/>
+              </a:ext>
+            </a:extLst>
+          </p:cNvPr>
+          <p:cNvSpPr>
+            <a:spLocks noGrp="1" noRot="1" noChangeAspect="1"/>
+          </p:cNvSpPr>
+          <p:nvPr>
+            <p:ph type="sldImg"/>
+          </p:nvPr>
+        </p:nvSpPr>
+        <p:spPr/>
+      </p:sp>
+      <p:sp>
+        <p:nvSpPr>
+          <p:cNvPr id="3" name="Notes Placeholder 2">
+            <a:extLst>
+              <a:ext uri="{FF2B5EF4-FFF2-40B4-BE49-F238E27FC236}">
+                <a16:creationId xmlns:a16="http://schemas.microsoft.com/office/drawing/2014/main" id="{30E6B7E9-D7F9-10C6-4778-8BEC26413A2B}"/>
+              </a:ext>
+            </a:extLst>
+          </p:cNvPr>
+          <p:cNvSpPr>
+            <a:spLocks noGrp="1"/>
+          </p:cNvSpPr>
+          <p:nvPr>
+            <p:ph type="body" idx="1"/>
+          </p:nvPr>
+        </p:nvSpPr>
+        <p:spPr/>
+        <p:txBody>
+          <a:bodyPr/>
+          <a:lstStyle/>
+          <a:p>
+            <a:endParaRPr lang="en-US" dirty="0"/>
+          </a:p>
+        </p:txBody>
+      </p:sp>
+      <p:sp>
+        <p:nvSpPr>
+          <p:cNvPr id="4" name="Slide Number Placeholder 3">
+            <a:extLst>
+              <a:ext uri="{FF2B5EF4-FFF2-40B4-BE49-F238E27FC236}">
+                <a16:creationId xmlns:a16="http://schemas.microsoft.com/office/drawing/2014/main" id="{17BE00AF-4D89-539C-EE0E-6F52B8BD503D}"/>
+              </a:ext>
+            </a:extLst>
+          </p:cNvPr>
+          <p:cNvSpPr>
+            <a:spLocks noGrp="1"/>
+          </p:cNvSpPr>
+          <p:nvPr>
+            <p:ph type="sldNum" sz="quarter" idx="5"/>
+          </p:nvPr>
+        </p:nvSpPr>
+        <p:spPr/>
+        <p:txBody>
+          <a:bodyPr/>
+          <a:lstStyle/>
+          <a:p>
+            <a:fld id="{6FC8D850-966F-45A6-8DE7-15B891E7D40D}" type="slidenum">
+              <a:rPr lang="pt-BR" smtClean="0"/>
+              <a:t>52</a:t>
+            </a:fld>
+            <a:endParaRPr lang="pt-BR"/>
+          </a:p>
+        </p:txBody>
+      </p:sp>
+    </p:spTree>
+    <p:extLst>
+      <p:ext uri="{BB962C8B-B14F-4D97-AF65-F5344CB8AC3E}">
+        <p14:creationId xmlns:p14="http://schemas.microsoft.com/office/powerpoint/2010/main" val="2241456937"/>
       </p:ext>
     </p:extLst>
   </p:cSld>
@@ -6736,8 +7167,8 @@
           </a:p>
         </p:txBody>
       </p:sp>
-      <mc:AlternateContent xmlns:mc="http://schemas.openxmlformats.org/markup-compatibility/2006">
-        <mc:Choice xmlns:a14="http://schemas.microsoft.com/office/drawing/2010/main" Requires="a14">
+      <mc:AlternateContent xmlns:mc="http://schemas.openxmlformats.org/markup-compatibility/2006" xmlns:a14="http://schemas.microsoft.com/office/drawing/2010/main">
+        <mc:Choice Requires="a14">
           <p:sp>
             <p:nvSpPr>
               <p:cNvPr id="3" name="Content Placeholder 2">
@@ -7335,7 +7766,7 @@
             </p:txBody>
           </p:sp>
         </mc:Choice>
-        <mc:Fallback>
+        <mc:Fallback xmlns="">
           <p:sp>
             <p:nvSpPr>
               <p:cNvPr id="3" name="Content Placeholder 2">
@@ -13613,6 +14044,14 @@
               <a:rPr lang="pt-BR" i="1" dirty="0" err="1"/>
               <a:t>memory</a:t>
             </a:r>
+            <a:r>
+              <a:rPr lang="pt-BR" i="1" dirty="0"/>
+              <a:t> </a:t>
+            </a:r>
+            <a:r>
+              <a:rPr lang="pt-BR" dirty="0"/>
+              <a:t>(LSTM)</a:t>
+            </a:r>
             <a:endParaRPr lang="en-US" i="1" dirty="0"/>
           </a:p>
         </p:txBody>
@@ -13799,6 +14238,10 @@
               <a:rPr lang="pt-BR" i="1" dirty="0" err="1"/>
               <a:t>memory</a:t>
             </a:r>
+            <a:r>
+              <a:rPr lang="pt-BR" dirty="0"/>
+              <a:t> (LSTM)</a:t>
+            </a:r>
             <a:endParaRPr lang="en-US" i="1" dirty="0"/>
           </a:p>
         </p:txBody>
@@ -13944,8 +14387,8 @@
           </a:p>
         </p:txBody>
       </p:sp>
-      <mc:AlternateContent xmlns:mc="http://schemas.openxmlformats.org/markup-compatibility/2006">
-        <mc:Choice xmlns:a14="http://schemas.microsoft.com/office/drawing/2010/main" Requires="a14">
+      <mc:AlternateContent xmlns:mc="http://schemas.openxmlformats.org/markup-compatibility/2006" xmlns:a14="http://schemas.microsoft.com/office/drawing/2010/main">
+        <mc:Choice Requires="a14">
           <p:sp>
             <p:nvSpPr>
               <p:cNvPr id="3" name="Content Placeholder 2">
@@ -14134,7 +14577,7 @@
             </p:txBody>
           </p:sp>
         </mc:Choice>
-        <mc:Fallback>
+        <mc:Fallback xmlns="">
           <p:sp>
             <p:nvSpPr>
               <p:cNvPr id="3" name="Content Placeholder 2">
@@ -14303,7 +14746,7 @@
           <a:p>
             <a:r>
               <a:rPr lang="en-US" dirty="0"/>
-              <a:t>Porta do </a:t>
+              <a:t>Porta de </a:t>
             </a:r>
             <a:r>
               <a:rPr lang="en-US" dirty="0" err="1"/>
@@ -14333,8 +14776,8 @@
             </p:nvSpPr>
             <p:spPr>
               <a:xfrm>
-                <a:off x="5995555" y="1825624"/>
-                <a:ext cx="6196445" cy="5032375"/>
+                <a:off x="6096000" y="1825624"/>
+                <a:ext cx="6096001" cy="5032375"/>
               </a:xfrm>
             </p:spPr>
             <p:txBody>
@@ -14434,7 +14877,13 @@
                                       <a:rPr lang="pt-BR" sz="2000" b="0" i="1" smtClean="0">
                                         <a:latin typeface="Cambria Math" panose="02040503050406030204" pitchFamily="18" charset="0"/>
                                       </a:rPr>
-                                      <m:t>0,</m:t>
+                                      <m:t>0</m:t>
+                                    </m:r>
+                                    <m:r>
+                                      <a:rPr lang="pt-BR" sz="2000" b="0" i="1" smtClean="0">
+                                        <a:latin typeface="Cambria Math" panose="02040503050406030204" pitchFamily="18" charset="0"/>
+                                      </a:rPr>
+                                      <m:t>,</m:t>
                                     </m:r>
                                   </m:e>
                                   <m:e>
@@ -14529,7 +14978,13 @@
                                       <a:rPr lang="pt-BR" sz="2000" b="0" i="1" smtClean="0">
                                         <a:latin typeface="Cambria Math" panose="02040503050406030204" pitchFamily="18" charset="0"/>
                                       </a:rPr>
-                                      <m:t>1,</m:t>
+                                      <m:t>1</m:t>
+                                    </m:r>
+                                    <m:r>
+                                      <a:rPr lang="pt-BR" sz="2000" b="0" i="1" smtClean="0">
+                                        <a:latin typeface="Cambria Math" panose="02040503050406030204" pitchFamily="18" charset="0"/>
+                                      </a:rPr>
+                                      <m:t>,</m:t>
                                     </m:r>
                                   </m:e>
                                   <m:e>
@@ -14760,13 +15215,13 @@
             </p:nvSpPr>
             <p:spPr>
               <a:xfrm>
-                <a:off x="5995555" y="1825624"/>
-                <a:ext cx="6196445" cy="5032375"/>
+                <a:off x="6096000" y="1825624"/>
+                <a:ext cx="6096001" cy="5032375"/>
               </a:xfrm>
               <a:blipFill>
                 <a:blip r:embed="rId2"/>
                 <a:stretch>
-                  <a:fillRect l="-1772" t="-2663" r="-3150"/>
+                  <a:fillRect l="-1800" t="-2663" r="-1800"/>
                 </a:stretch>
               </a:blipFill>
             </p:spPr>
@@ -15005,8 +15460,8 @@
           </a:p>
         </p:txBody>
       </p:sp>
-      <mc:AlternateContent xmlns:mc="http://schemas.openxmlformats.org/markup-compatibility/2006">
-        <mc:Choice xmlns:a14="http://schemas.microsoft.com/office/drawing/2010/main" Requires="a14">
+      <mc:AlternateContent xmlns:mc="http://schemas.openxmlformats.org/markup-compatibility/2006" xmlns:a14="http://schemas.microsoft.com/office/drawing/2010/main">
+        <mc:Choice Requires="a14">
           <p:sp>
             <p:nvSpPr>
               <p:cNvPr id="3" name="Content Placeholder 2">
@@ -15425,7 +15880,7 @@
             </p:txBody>
           </p:sp>
         </mc:Choice>
-        <mc:Fallback>
+        <mc:Fallback xmlns="">
           <p:sp>
             <p:nvSpPr>
               <p:cNvPr id="3" name="Content Placeholder 2">
@@ -15570,8 +16025,8 @@
           </a:p>
         </p:txBody>
       </p:sp>
-      <mc:AlternateContent xmlns:mc="http://schemas.openxmlformats.org/markup-compatibility/2006">
-        <mc:Choice xmlns:a14="http://schemas.microsoft.com/office/drawing/2010/main" Requires="a14">
+      <mc:AlternateContent xmlns:mc="http://schemas.openxmlformats.org/markup-compatibility/2006" xmlns:a14="http://schemas.microsoft.com/office/drawing/2010/main">
+        <mc:Choice Requires="a14">
           <p:sp>
             <p:nvSpPr>
               <p:cNvPr id="3" name="Content Placeholder 2">
@@ -15977,7 +16432,7 @@
             </p:txBody>
           </p:sp>
         </mc:Choice>
-        <mc:Fallback>
+        <mc:Fallback xmlns="">
           <p:sp>
             <p:nvSpPr>
               <p:cNvPr id="3" name="Content Placeholder 2">
@@ -16128,12 +16583,20 @@
               <a:rPr lang="pt-BR" i="1" dirty="0" err="1"/>
               <a:t>memory</a:t>
             </a:r>
+            <a:r>
+              <a:rPr lang="pt-BR" i="1" dirty="0"/>
+              <a:t> </a:t>
+            </a:r>
+            <a:r>
+              <a:rPr lang="pt-BR" dirty="0"/>
+              <a:t>(LSTM)</a:t>
+            </a:r>
             <a:endParaRPr lang="en-US" dirty="0"/>
           </a:p>
         </p:txBody>
       </p:sp>
-      <mc:AlternateContent xmlns:mc="http://schemas.openxmlformats.org/markup-compatibility/2006">
-        <mc:Choice xmlns:a14="http://schemas.microsoft.com/office/drawing/2010/main" Requires="a14">
+      <mc:AlternateContent xmlns:mc="http://schemas.openxmlformats.org/markup-compatibility/2006" xmlns:a14="http://schemas.microsoft.com/office/drawing/2010/main">
+        <mc:Choice Requires="a14">
           <p:sp>
             <p:nvSpPr>
               <p:cNvPr id="3" name="Content Placeholder 2">
@@ -16242,7 +16705,7 @@
             </p:txBody>
           </p:sp>
         </mc:Choice>
-        <mc:Fallback>
+        <mc:Fallback xmlns="">
           <p:sp>
             <p:nvSpPr>
               <p:cNvPr id="3" name="Content Placeholder 2">
@@ -16356,8 +16819,8 @@
           </a:p>
         </p:txBody>
       </p:sp>
-      <mc:AlternateContent xmlns:mc="http://schemas.openxmlformats.org/markup-compatibility/2006">
-        <mc:Choice xmlns:a14="http://schemas.microsoft.com/office/drawing/2010/main" Requires="a14">
+      <mc:AlternateContent xmlns:mc="http://schemas.openxmlformats.org/markup-compatibility/2006" xmlns:a14="http://schemas.microsoft.com/office/drawing/2010/main">
+        <mc:Choice Requires="a14">
           <p:sp>
             <p:nvSpPr>
               <p:cNvPr id="3" name="Content Placeholder 2">
@@ -16581,7 +17044,7 @@
             </p:txBody>
           </p:sp>
         </mc:Choice>
-        <mc:Fallback>
+        <mc:Fallback xmlns="">
           <p:sp>
             <p:nvSpPr>
               <p:cNvPr id="3" name="Content Placeholder 2">
@@ -16639,6 +17102,362 @@
 </file>
 
 <file path=ppt/slides/slide34.xml><?xml version="1.0" encoding="utf-8"?>
+<p:sld xmlns:a="http://schemas.openxmlformats.org/drawingml/2006/main" xmlns:r="http://schemas.openxmlformats.org/officeDocument/2006/relationships" xmlns:p="http://schemas.openxmlformats.org/presentationml/2006/main">
+  <p:cSld>
+    <p:spTree>
+      <p:nvGrpSpPr>
+        <p:cNvPr id="1" name=""/>
+        <p:cNvGrpSpPr/>
+        <p:nvPr/>
+      </p:nvGrpSpPr>
+      <p:grpSpPr>
+        <a:xfrm>
+          <a:off x="0" y="0"/>
+          <a:ext cx="0" cy="0"/>
+          <a:chOff x="0" y="0"/>
+          <a:chExt cx="0" cy="0"/>
+        </a:xfrm>
+      </p:grpSpPr>
+      <p:sp>
+        <p:nvSpPr>
+          <p:cNvPr id="2" name="Title 1">
+            <a:extLst>
+              <a:ext uri="{FF2B5EF4-FFF2-40B4-BE49-F238E27FC236}">
+                <a16:creationId xmlns:a16="http://schemas.microsoft.com/office/drawing/2014/main" id="{45D02D76-2EBA-1393-BE09-7CDA497C6318}"/>
+              </a:ext>
+            </a:extLst>
+          </p:cNvPr>
+          <p:cNvSpPr>
+            <a:spLocks noGrp="1"/>
+          </p:cNvSpPr>
+          <p:nvPr>
+            <p:ph type="title"/>
+          </p:nvPr>
+        </p:nvSpPr>
+        <p:spPr/>
+        <p:txBody>
+          <a:bodyPr/>
+          <a:lstStyle/>
+          <a:p>
+            <a:r>
+              <a:rPr lang="pt-BR" i="1" dirty="0" err="1"/>
+              <a:t>Gated</a:t>
+            </a:r>
+            <a:r>
+              <a:rPr lang="pt-BR" i="1" dirty="0"/>
+              <a:t> </a:t>
+            </a:r>
+            <a:r>
+              <a:rPr lang="pt-BR" i="1" dirty="0" err="1"/>
+              <a:t>recurrent</a:t>
+            </a:r>
+            <a:r>
+              <a:rPr lang="pt-BR" i="1" dirty="0"/>
+              <a:t> </a:t>
+            </a:r>
+            <a:r>
+              <a:rPr lang="pt-BR" i="1" dirty="0" err="1"/>
+              <a:t>unit</a:t>
+            </a:r>
+            <a:r>
+              <a:rPr lang="pt-BR" dirty="0"/>
+              <a:t> (GRU)</a:t>
+            </a:r>
+            <a:endParaRPr lang="en-US" dirty="0"/>
+          </a:p>
+        </p:txBody>
+      </p:sp>
+      <p:sp>
+        <p:nvSpPr>
+          <p:cNvPr id="3" name="Content Placeholder 2">
+            <a:extLst>
+              <a:ext uri="{FF2B5EF4-FFF2-40B4-BE49-F238E27FC236}">
+                <a16:creationId xmlns:a16="http://schemas.microsoft.com/office/drawing/2014/main" id="{7EBE64A2-9011-342C-7697-75B6C4877646}"/>
+              </a:ext>
+            </a:extLst>
+          </p:cNvPr>
+          <p:cNvSpPr>
+            <a:spLocks noGrp="1"/>
+          </p:cNvSpPr>
+          <p:nvPr>
+            <p:ph idx="1"/>
+          </p:nvPr>
+        </p:nvSpPr>
+        <p:spPr>
+          <a:xfrm>
+            <a:off x="5448692" y="1825624"/>
+            <a:ext cx="6743307" cy="5032375"/>
+          </a:xfrm>
+        </p:spPr>
+        <p:txBody>
+          <a:bodyPr>
+            <a:normAutofit lnSpcReduction="10000"/>
+          </a:bodyPr>
+          <a:lstStyle/>
+          <a:p>
+            <a:r>
+              <a:rPr lang="pt-BR" dirty="0"/>
+              <a:t>Com o sucesso das </a:t>
+            </a:r>
+            <a:r>
+              <a:rPr lang="pt-BR" dirty="0" err="1"/>
+              <a:t>LSTMs</a:t>
+            </a:r>
+            <a:r>
+              <a:rPr lang="pt-BR" dirty="0"/>
+              <a:t> em capturar dependências de longo prazo, arquiteturas simplificadas foram propostas com o objetivo de acelerar a computação.</a:t>
+            </a:r>
+          </a:p>
+          <a:p>
+            <a:r>
+              <a:rPr lang="pt-BR" dirty="0" err="1"/>
+              <a:t>GRUs</a:t>
+            </a:r>
+            <a:r>
+              <a:rPr lang="pt-BR" dirty="0"/>
+              <a:t> foram propostas em 2014 por Cho et al.</a:t>
+            </a:r>
+          </a:p>
+          <a:p>
+            <a:r>
+              <a:rPr lang="pt-BR" dirty="0"/>
+              <a:t>São uma versão simplificada da célula de memória LSTM.</a:t>
+            </a:r>
+          </a:p>
+          <a:p>
+            <a:r>
+              <a:rPr lang="pt-BR" dirty="0"/>
+              <a:t>Em geral, atingem desempenho comparável, mas com a vantagem de terem menos parâmetros e serem mais rápidas em termos de computação.</a:t>
+            </a:r>
+            <a:endParaRPr lang="en-US" dirty="0"/>
+          </a:p>
+        </p:txBody>
+      </p:sp>
+      <p:pic>
+        <p:nvPicPr>
+          <p:cNvPr id="9" name="Picture 8">
+            <a:extLst>
+              <a:ext uri="{FF2B5EF4-FFF2-40B4-BE49-F238E27FC236}">
+                <a16:creationId xmlns:a16="http://schemas.microsoft.com/office/drawing/2014/main" id="{184A36DE-8349-8BBF-2D03-55B024955ADC}"/>
+              </a:ext>
+            </a:extLst>
+          </p:cNvPr>
+          <p:cNvPicPr>
+            <a:picLocks noChangeAspect="1"/>
+          </p:cNvPicPr>
+          <p:nvPr/>
+        </p:nvPicPr>
+        <p:blipFill>
+          <a:blip r:embed="rId3">
+            <a:extLst>
+              <a:ext uri="{28A0092B-C50C-407E-A947-70E740481C1C}">
+                <a14:useLocalDpi xmlns:a14="http://schemas.microsoft.com/office/drawing/2010/main" val="0"/>
+              </a:ext>
+            </a:extLst>
+          </a:blip>
+          <a:stretch>
+            <a:fillRect/>
+          </a:stretch>
+        </p:blipFill>
+        <p:spPr>
+          <a:xfrm>
+            <a:off x="240352" y="2681361"/>
+            <a:ext cx="4929495" cy="2657328"/>
+          </a:xfrm>
+          <a:prstGeom prst="rect">
+            <a:avLst/>
+          </a:prstGeom>
+        </p:spPr>
+      </p:pic>
+    </p:spTree>
+    <p:extLst>
+      <p:ext uri="{BB962C8B-B14F-4D97-AF65-F5344CB8AC3E}">
+        <p14:creationId xmlns:p14="http://schemas.microsoft.com/office/powerpoint/2010/main" val="395667295"/>
+      </p:ext>
+    </p:extLst>
+  </p:cSld>
+  <p:clrMapOvr>
+    <a:masterClrMapping/>
+  </p:clrMapOvr>
+</p:sld>
+</file>
+
+<file path=ppt/slides/slide35.xml><?xml version="1.0" encoding="utf-8"?>
+<p:sld xmlns:a="http://schemas.openxmlformats.org/drawingml/2006/main" xmlns:r="http://schemas.openxmlformats.org/officeDocument/2006/relationships" xmlns:p="http://schemas.openxmlformats.org/presentationml/2006/main">
+  <p:cSld>
+    <p:spTree>
+      <p:nvGrpSpPr>
+        <p:cNvPr id="1" name="">
+          <a:extLst>
+            <a:ext uri="{FF2B5EF4-FFF2-40B4-BE49-F238E27FC236}">
+              <a16:creationId xmlns:a16="http://schemas.microsoft.com/office/drawing/2014/main" id="{C46CC0D9-476E-8E7D-EC3C-28E97B88ABA6}"/>
+            </a:ext>
+          </a:extLst>
+        </p:cNvPr>
+        <p:cNvGrpSpPr/>
+        <p:nvPr/>
+      </p:nvGrpSpPr>
+      <p:grpSpPr>
+        <a:xfrm>
+          <a:off x="0" y="0"/>
+          <a:ext cx="0" cy="0"/>
+          <a:chOff x="0" y="0"/>
+          <a:chExt cx="0" cy="0"/>
+        </a:xfrm>
+      </p:grpSpPr>
+      <p:sp>
+        <p:nvSpPr>
+          <p:cNvPr id="2" name="Title 1">
+            <a:extLst>
+              <a:ext uri="{FF2B5EF4-FFF2-40B4-BE49-F238E27FC236}">
+                <a16:creationId xmlns:a16="http://schemas.microsoft.com/office/drawing/2014/main" id="{6B5BE93B-0FD8-4FAC-CF58-5DD52D3DB7FF}"/>
+              </a:ext>
+            </a:extLst>
+          </p:cNvPr>
+          <p:cNvSpPr>
+            <a:spLocks noGrp="1"/>
+          </p:cNvSpPr>
+          <p:nvPr>
+            <p:ph type="title"/>
+          </p:nvPr>
+        </p:nvSpPr>
+        <p:spPr/>
+        <p:txBody>
+          <a:bodyPr/>
+          <a:lstStyle/>
+          <a:p>
+            <a:r>
+              <a:rPr lang="pt-BR" i="1" dirty="0" err="1"/>
+              <a:t>Gated</a:t>
+            </a:r>
+            <a:r>
+              <a:rPr lang="pt-BR" i="1" dirty="0"/>
+              <a:t> </a:t>
+            </a:r>
+            <a:r>
+              <a:rPr lang="pt-BR" i="1" dirty="0" err="1"/>
+              <a:t>recurrent</a:t>
+            </a:r>
+            <a:r>
+              <a:rPr lang="pt-BR" i="1" dirty="0"/>
+              <a:t> </a:t>
+            </a:r>
+            <a:r>
+              <a:rPr lang="pt-BR" i="1" dirty="0" err="1"/>
+              <a:t>unit</a:t>
+            </a:r>
+            <a:r>
+              <a:rPr lang="pt-BR" dirty="0"/>
+              <a:t> (GRU)</a:t>
+            </a:r>
+            <a:endParaRPr lang="en-US" dirty="0"/>
+          </a:p>
+        </p:txBody>
+      </p:sp>
+      <p:sp>
+        <p:nvSpPr>
+          <p:cNvPr id="3" name="Content Placeholder 2">
+            <a:extLst>
+              <a:ext uri="{FF2B5EF4-FFF2-40B4-BE49-F238E27FC236}">
+                <a16:creationId xmlns:a16="http://schemas.microsoft.com/office/drawing/2014/main" id="{26A8CC03-24B7-54E8-63B4-1022B00698F3}"/>
+              </a:ext>
+            </a:extLst>
+          </p:cNvPr>
+          <p:cNvSpPr>
+            <a:spLocks noGrp="1"/>
+          </p:cNvSpPr>
+          <p:nvPr>
+            <p:ph idx="1"/>
+          </p:nvPr>
+        </p:nvSpPr>
+        <p:spPr>
+          <a:xfrm>
+            <a:off x="5397500" y="1825624"/>
+            <a:ext cx="6794500" cy="5032375"/>
+          </a:xfrm>
+        </p:spPr>
+        <p:txBody>
+          <a:bodyPr/>
+          <a:lstStyle/>
+          <a:p>
+            <a:r>
+              <a:rPr lang="pt-BR" dirty="0"/>
+              <a:t>Usam menos portas e não possuem um estado da célula.</a:t>
+            </a:r>
+          </a:p>
+          <a:p>
+            <a:r>
+              <a:rPr lang="pt-BR" dirty="0"/>
+              <a:t>A porta de </a:t>
+            </a:r>
+            <a:r>
+              <a:rPr lang="pt-BR" i="1" dirty="0"/>
+              <a:t>reset</a:t>
+            </a:r>
+            <a:r>
+              <a:rPr lang="pt-BR" dirty="0"/>
+              <a:t> é responsável pela memória de curto prazo, pois decide quanta informação passada será mantida e quanta informação será descartada.</a:t>
+            </a:r>
+          </a:p>
+          <a:p>
+            <a:r>
+              <a:rPr lang="pt-BR" dirty="0"/>
+              <a:t>Em contraste, a porta de atualização é responsável pela memória de longo prazo e é comparável à porta de esquecimento da LSTM.</a:t>
+            </a:r>
+            <a:endParaRPr lang="en-US" dirty="0"/>
+          </a:p>
+        </p:txBody>
+      </p:sp>
+      <p:pic>
+        <p:nvPicPr>
+          <p:cNvPr id="6" name="Picture 5">
+            <a:extLst>
+              <a:ext uri="{FF2B5EF4-FFF2-40B4-BE49-F238E27FC236}">
+                <a16:creationId xmlns:a16="http://schemas.microsoft.com/office/drawing/2014/main" id="{0338C40E-CB7E-E4BB-FDBA-B493D89783E7}"/>
+              </a:ext>
+            </a:extLst>
+          </p:cNvPr>
+          <p:cNvPicPr>
+            <a:picLocks noChangeAspect="1"/>
+          </p:cNvPicPr>
+          <p:nvPr/>
+        </p:nvPicPr>
+        <p:blipFill>
+          <a:blip r:embed="rId3">
+            <a:extLst>
+              <a:ext uri="{28A0092B-C50C-407E-A947-70E740481C1C}">
+                <a14:useLocalDpi xmlns:a14="http://schemas.microsoft.com/office/drawing/2010/main" val="0"/>
+              </a:ext>
+            </a:extLst>
+          </a:blip>
+          <a:stretch>
+            <a:fillRect/>
+          </a:stretch>
+        </p:blipFill>
+        <p:spPr>
+          <a:xfrm>
+            <a:off x="221302" y="2398034"/>
+            <a:ext cx="4929495" cy="2995382"/>
+          </a:xfrm>
+          <a:prstGeom prst="rect">
+            <a:avLst/>
+          </a:prstGeom>
+        </p:spPr>
+      </p:pic>
+    </p:spTree>
+    <p:extLst>
+      <p:ext uri="{BB962C8B-B14F-4D97-AF65-F5344CB8AC3E}">
+        <p14:creationId xmlns:p14="http://schemas.microsoft.com/office/powerpoint/2010/main" val="3645323427"/>
+      </p:ext>
+    </p:extLst>
+  </p:cSld>
+  <p:clrMapOvr>
+    <a:masterClrMapping/>
+  </p:clrMapOvr>
+</p:sld>
+</file>
+
+<file path=ppt/slides/slide36.xml><?xml version="1.0" encoding="utf-8"?>
 <p:sld xmlns:a="http://schemas.openxmlformats.org/drawingml/2006/main" xmlns:r="http://schemas.openxmlformats.org/officeDocument/2006/relationships" xmlns:p="http://schemas.openxmlformats.org/presentationml/2006/main">
   <p:cSld>
     <p:spTree>
@@ -16725,7 +17544,7 @@
 </p:sld>
 </file>
 
-<file path=ppt/slides/slide35.xml><?xml version="1.0" encoding="utf-8"?>
+<file path=ppt/slides/slide37.xml><?xml version="1.0" encoding="utf-8"?>
 <p:sld xmlns:a="http://schemas.openxmlformats.org/drawingml/2006/main" xmlns:r="http://schemas.openxmlformats.org/officeDocument/2006/relationships" xmlns:p="http://schemas.openxmlformats.org/presentationml/2006/main">
   <p:cSld>
     <p:spTree>
@@ -16810,161 +17629,6 @@
 </p:sld>
 </file>
 
-<file path=ppt/slides/slide36.xml><?xml version="1.0" encoding="utf-8"?>
-<p:sld xmlns:a="http://schemas.openxmlformats.org/drawingml/2006/main" xmlns:r="http://schemas.openxmlformats.org/officeDocument/2006/relationships" xmlns:p="http://schemas.openxmlformats.org/presentationml/2006/main">
-  <p:cSld>
-    <p:spTree>
-      <p:nvGrpSpPr>
-        <p:cNvPr id="1" name=""/>
-        <p:cNvGrpSpPr/>
-        <p:nvPr/>
-      </p:nvGrpSpPr>
-      <p:grpSpPr>
-        <a:xfrm>
-          <a:off x="0" y="0"/>
-          <a:ext cx="0" cy="0"/>
-          <a:chOff x="0" y="0"/>
-          <a:chExt cx="0" cy="0"/>
-        </a:xfrm>
-      </p:grpSpPr>
-      <p:sp>
-        <p:nvSpPr>
-          <p:cNvPr id="3" name="Espaço Reservado para Conteúdo 2"/>
-          <p:cNvSpPr>
-            <a:spLocks noGrp="1"/>
-          </p:cNvSpPr>
-          <p:nvPr>
-            <p:ph idx="1"/>
-          </p:nvPr>
-        </p:nvSpPr>
-        <p:spPr>
-          <a:xfrm>
-            <a:off x="788323" y="2873029"/>
-            <a:ext cx="10515600" cy="1067203"/>
-          </a:xfrm>
-        </p:spPr>
-        <p:txBody>
-          <a:bodyPr>
-            <a:normAutofit/>
-          </a:bodyPr>
-          <a:lstStyle/>
-          <a:p>
-            <a:pPr marL="0" indent="0" algn="ctr">
-              <a:buNone/>
-            </a:pPr>
-            <a:r>
-              <a:rPr lang="pt-BR" sz="6000" dirty="0"/>
-              <a:t>LSTM</a:t>
-            </a:r>
-          </a:p>
-        </p:txBody>
-      </p:sp>
-    </p:spTree>
-    <p:extLst>
-      <p:ext uri="{BB962C8B-B14F-4D97-AF65-F5344CB8AC3E}">
-        <p14:creationId xmlns:p14="http://schemas.microsoft.com/office/powerpoint/2010/main" val="3863331605"/>
-      </p:ext>
-    </p:extLst>
-  </p:cSld>
-  <p:clrMapOvr>
-    <a:masterClrMapping/>
-  </p:clrMapOvr>
-</p:sld>
-</file>
-
-<file path=ppt/slides/slide37.xml><?xml version="1.0" encoding="utf-8"?>
-<p:sld xmlns:a="http://schemas.openxmlformats.org/drawingml/2006/main" xmlns:r="http://schemas.openxmlformats.org/officeDocument/2006/relationships" xmlns:p="http://schemas.openxmlformats.org/presentationml/2006/main">
-  <p:cSld>
-    <p:spTree>
-      <p:nvGrpSpPr>
-        <p:cNvPr id="1" name=""/>
-        <p:cNvGrpSpPr/>
-        <p:nvPr/>
-      </p:nvGrpSpPr>
-      <p:grpSpPr>
-        <a:xfrm>
-          <a:off x="0" y="0"/>
-          <a:ext cx="0" cy="0"/>
-          <a:chOff x="0" y="0"/>
-          <a:chExt cx="0" cy="0"/>
-        </a:xfrm>
-      </p:grpSpPr>
-      <p:sp>
-        <p:nvSpPr>
-          <p:cNvPr id="2" name="Título 1"/>
-          <p:cNvSpPr>
-            <a:spLocks noGrp="1"/>
-          </p:cNvSpPr>
-          <p:nvPr>
-            <p:ph type="title"/>
-          </p:nvPr>
-        </p:nvSpPr>
-        <p:spPr/>
-        <p:txBody>
-          <a:bodyPr/>
-          <a:lstStyle/>
-          <a:p>
-            <a:r>
-              <a:rPr lang="pt-BR" dirty="0"/>
-              <a:t>Motivação para LSTM</a:t>
-            </a:r>
-          </a:p>
-        </p:txBody>
-      </p:sp>
-      <p:sp>
-        <p:nvSpPr>
-          <p:cNvPr id="3" name="Espaço Reservado para Conteúdo 2"/>
-          <p:cNvSpPr>
-            <a:spLocks noGrp="1"/>
-          </p:cNvSpPr>
-          <p:nvPr>
-            <p:ph idx="1"/>
-          </p:nvPr>
-        </p:nvSpPr>
-        <p:spPr/>
-        <p:txBody>
-          <a:bodyPr/>
-          <a:lstStyle/>
-          <a:p>
-            <a:r>
-              <a:rPr lang="pt-BR" dirty="0"/>
-              <a:t>Resolver dependências longas</a:t>
-            </a:r>
-          </a:p>
-          <a:p>
-            <a:r>
-              <a:rPr lang="pt-BR" dirty="0"/>
-              <a:t>Evitar </a:t>
-            </a:r>
-            <a:r>
-              <a:rPr lang="pt-BR" dirty="0" err="1"/>
-              <a:t>vanishing</a:t>
-            </a:r>
-            <a:r>
-              <a:rPr lang="pt-BR" dirty="0"/>
-              <a:t> </a:t>
-            </a:r>
-            <a:r>
-              <a:rPr lang="pt-BR" dirty="0" err="1"/>
-              <a:t>gradient</a:t>
-            </a:r>
-            <a:endParaRPr lang="pt-BR" dirty="0"/>
-          </a:p>
-        </p:txBody>
-      </p:sp>
-    </p:spTree>
-    <p:extLst>
-      <p:ext uri="{BB962C8B-B14F-4D97-AF65-F5344CB8AC3E}">
-        <p14:creationId xmlns:p14="http://schemas.microsoft.com/office/powerpoint/2010/main" val="1343654665"/>
-      </p:ext>
-    </p:extLst>
-  </p:cSld>
-  <p:clrMapOvr>
-    <a:masterClrMapping/>
-  </p:clrMapOvr>
-</p:sld>
-</file>
-
 <file path=ppt/slides/slide38.xml><?xml version="1.0" encoding="utf-8"?>
 <p:sld xmlns:a="http://schemas.openxmlformats.org/drawingml/2006/main" xmlns:r="http://schemas.openxmlformats.org/officeDocument/2006/relationships" xmlns:p="http://schemas.openxmlformats.org/presentationml/2006/main">
   <p:cSld>
@@ -16984,40 +17648,64 @@
       </p:grpSpPr>
       <p:sp>
         <p:nvSpPr>
-          <p:cNvPr id="3" name="Espaço Reservado para Conteúdo 2"/>
-          <p:cNvSpPr>
-            <a:spLocks noGrp="1"/>
+          <p:cNvPr id="4" name="Título 1">
+            <a:extLst>
+              <a:ext uri="{FF2B5EF4-FFF2-40B4-BE49-F238E27FC236}">
+                <a16:creationId xmlns:a16="http://schemas.microsoft.com/office/drawing/2014/main" id="{32666AC8-2E17-4DB4-B0F5-60C640CCFD2E}"/>
+              </a:ext>
+            </a:extLst>
+          </p:cNvPr>
+          <p:cNvSpPr txBox="1">
+            <a:spLocks/>
           </p:cNvSpPr>
-          <p:nvPr>
-            <p:ph idx="1"/>
-          </p:nvPr>
+          <p:nvPr/>
         </p:nvSpPr>
         <p:spPr>
           <a:xfrm>
-            <a:off x="788323" y="2873029"/>
-            <a:ext cx="10515600" cy="1067203"/>
+            <a:off x="1431533" y="2720526"/>
+            <a:ext cx="9144000" cy="1029541"/>
           </a:xfrm>
+          <a:prstGeom prst="rect">
+            <a:avLst/>
+          </a:prstGeom>
         </p:spPr>
         <p:txBody>
-          <a:bodyPr>
+          <a:bodyPr vert="horz" lIns="91440" tIns="45720" rIns="91440" bIns="45720" rtlCol="0" anchor="ctr">
             <a:normAutofit/>
           </a:bodyPr>
-          <a:lstStyle/>
+          <a:lstStyle>
+            <a:lvl1pPr algn="l" defTabSz="914400" rtl="0" eaLnBrk="1" latinLnBrk="0" hangingPunct="1">
+              <a:lnSpc>
+                <a:spcPct val="90000"/>
+              </a:lnSpc>
+              <a:spcBef>
+                <a:spcPct val="0"/>
+              </a:spcBef>
+              <a:buNone/>
+              <a:defRPr sz="4400" kern="1200">
+                <a:solidFill>
+                  <a:schemeClr val="tx1"/>
+                </a:solidFill>
+                <a:latin typeface="+mj-lt"/>
+                <a:ea typeface="+mj-ea"/>
+                <a:cs typeface="+mj-cs"/>
+              </a:defRPr>
+            </a:lvl1pPr>
+          </a:lstStyle>
           <a:p>
-            <a:pPr marL="0" indent="0" algn="ctr">
-              <a:buNone/>
-            </a:pPr>
+            <a:pPr algn="ctr"/>
             <a:r>
-              <a:rPr lang="pt-BR" sz="6000" dirty="0"/>
-              <a:t>Variantes</a:t>
+              <a:rPr lang="pt-BR" sz="6600" dirty="0"/>
+              <a:t>Perguntas?</a:t>
             </a:r>
+            <a:endParaRPr lang="pt-BR" sz="6600" b="1" i="1" dirty="0"/>
           </a:p>
         </p:txBody>
       </p:sp>
     </p:spTree>
     <p:extLst>
       <p:ext uri="{BB962C8B-B14F-4D97-AF65-F5344CB8AC3E}">
-        <p14:creationId xmlns:p14="http://schemas.microsoft.com/office/powerpoint/2010/main" val="2837701330"/>
+        <p14:creationId xmlns:p14="http://schemas.microsoft.com/office/powerpoint/2010/main" val="3773005660"/>
       </p:ext>
     </p:extLst>
   </p:cSld>
@@ -17046,93 +17734,64 @@
       </p:grpSpPr>
       <p:sp>
         <p:nvSpPr>
-          <p:cNvPr id="2" name="Título 1"/>
-          <p:cNvSpPr>
-            <a:spLocks noGrp="1"/>
+          <p:cNvPr id="4" name="Título 1">
+            <a:extLst>
+              <a:ext uri="{FF2B5EF4-FFF2-40B4-BE49-F238E27FC236}">
+                <a16:creationId xmlns:a16="http://schemas.microsoft.com/office/drawing/2014/main" id="{32666AC8-2E17-4DB4-B0F5-60C640CCFD2E}"/>
+              </a:ext>
+            </a:extLst>
+          </p:cNvPr>
+          <p:cNvSpPr txBox="1">
+            <a:spLocks/>
           </p:cNvSpPr>
-          <p:nvPr>
-            <p:ph type="title"/>
-          </p:nvPr>
+          <p:nvPr/>
         </p:nvSpPr>
-        <p:spPr/>
+        <p:spPr>
+          <a:xfrm>
+            <a:off x="1431533" y="2720526"/>
+            <a:ext cx="9144000" cy="1029541"/>
+          </a:xfrm>
+          <a:prstGeom prst="rect">
+            <a:avLst/>
+          </a:prstGeom>
+        </p:spPr>
         <p:txBody>
-          <a:bodyPr/>
-          <a:lstStyle/>
+          <a:bodyPr vert="horz" lIns="91440" tIns="45720" rIns="91440" bIns="45720" rtlCol="0" anchor="ctr">
+            <a:normAutofit/>
+          </a:bodyPr>
+          <a:lstStyle>
+            <a:lvl1pPr algn="l" defTabSz="914400" rtl="0" eaLnBrk="1" latinLnBrk="0" hangingPunct="1">
+              <a:lnSpc>
+                <a:spcPct val="90000"/>
+              </a:lnSpc>
+              <a:spcBef>
+                <a:spcPct val="0"/>
+              </a:spcBef>
+              <a:buNone/>
+              <a:defRPr sz="4400" kern="1200">
+                <a:solidFill>
+                  <a:schemeClr val="tx1"/>
+                </a:solidFill>
+                <a:latin typeface="+mj-lt"/>
+                <a:ea typeface="+mj-ea"/>
+                <a:cs typeface="+mj-cs"/>
+              </a:defRPr>
+            </a:lvl1pPr>
+          </a:lstStyle>
           <a:p>
+            <a:pPr algn="ctr"/>
             <a:r>
-              <a:rPr lang="pt-BR" dirty="0"/>
-              <a:t>Variantes</a:t>
+              <a:rPr lang="pt-BR" sz="6600" dirty="0"/>
+              <a:t>Obrigado!</a:t>
             </a:r>
-          </a:p>
-        </p:txBody>
-      </p:sp>
-      <p:sp>
-        <p:nvSpPr>
-          <p:cNvPr id="3" name="Espaço Reservado para Conteúdo 2"/>
-          <p:cNvSpPr>
-            <a:spLocks noGrp="1"/>
-          </p:cNvSpPr>
-          <p:nvPr>
-            <p:ph idx="1"/>
-          </p:nvPr>
-        </p:nvSpPr>
-        <p:spPr/>
-        <p:txBody>
-          <a:bodyPr/>
-          <a:lstStyle/>
-          <a:p>
-            <a:r>
-              <a:rPr lang="pt-BR" dirty="0"/>
-              <a:t>GRU</a:t>
-            </a:r>
-          </a:p>
-          <a:p>
-            <a:pPr lvl="1"/>
-            <a:r>
-              <a:rPr lang="pt-BR" dirty="0"/>
-              <a:t>Versão simplificada</a:t>
-            </a:r>
-          </a:p>
-          <a:p>
-            <a:pPr lvl="1"/>
-            <a:r>
-              <a:rPr lang="pt-BR" dirty="0"/>
-              <a:t>Menos parâmetros</a:t>
-            </a:r>
-          </a:p>
-          <a:p>
-            <a:pPr lvl="1"/>
-            <a:r>
-              <a:rPr lang="pt-BR" dirty="0"/>
-              <a:t>Frequentemente mais rápida de treinar. </a:t>
-            </a:r>
-          </a:p>
-          <a:p>
-            <a:r>
-              <a:rPr lang="pt-BR" dirty="0" err="1"/>
-              <a:t>Bidirectional</a:t>
-            </a:r>
-            <a:r>
-              <a:rPr lang="pt-BR" dirty="0"/>
-              <a:t> RNN</a:t>
-            </a:r>
-          </a:p>
-          <a:p>
-            <a:pPr lvl="1"/>
-            <a:r>
-              <a:rPr lang="pt-BR" dirty="0"/>
-              <a:t>Considera passado e futuro</a:t>
-            </a:r>
-          </a:p>
-          <a:p>
-            <a:endParaRPr lang="pt-BR" dirty="0"/>
+            <a:endParaRPr lang="pt-BR" sz="6600" b="1" i="1" dirty="0"/>
           </a:p>
         </p:txBody>
       </p:sp>
     </p:spTree>
     <p:extLst>
       <p:ext uri="{BB962C8B-B14F-4D97-AF65-F5344CB8AC3E}">
-        <p14:creationId xmlns:p14="http://schemas.microsoft.com/office/powerpoint/2010/main" val="2820481937"/>
+        <p14:creationId xmlns:p14="http://schemas.microsoft.com/office/powerpoint/2010/main" val="2655704619"/>
       </p:ext>
     </p:extLst>
   </p:cSld>
@@ -17369,178 +18028,6 @@
   <p:cSld>
     <p:spTree>
       <p:nvGrpSpPr>
-        <p:cNvPr id="1" name=""/>
-        <p:cNvGrpSpPr/>
-        <p:nvPr/>
-      </p:nvGrpSpPr>
-      <p:grpSpPr>
-        <a:xfrm>
-          <a:off x="0" y="0"/>
-          <a:ext cx="0" cy="0"/>
-          <a:chOff x="0" y="0"/>
-          <a:chExt cx="0" cy="0"/>
-        </a:xfrm>
-      </p:grpSpPr>
-      <p:sp>
-        <p:nvSpPr>
-          <p:cNvPr id="4" name="Título 1">
-            <a:extLst>
-              <a:ext uri="{FF2B5EF4-FFF2-40B4-BE49-F238E27FC236}">
-                <a16:creationId xmlns:a16="http://schemas.microsoft.com/office/drawing/2014/main" id="{32666AC8-2E17-4DB4-B0F5-60C640CCFD2E}"/>
-              </a:ext>
-            </a:extLst>
-          </p:cNvPr>
-          <p:cNvSpPr txBox="1">
-            <a:spLocks/>
-          </p:cNvSpPr>
-          <p:nvPr/>
-        </p:nvSpPr>
-        <p:spPr>
-          <a:xfrm>
-            <a:off x="1431533" y="2720526"/>
-            <a:ext cx="9144000" cy="1029541"/>
-          </a:xfrm>
-          <a:prstGeom prst="rect">
-            <a:avLst/>
-          </a:prstGeom>
-        </p:spPr>
-        <p:txBody>
-          <a:bodyPr vert="horz" lIns="91440" tIns="45720" rIns="91440" bIns="45720" rtlCol="0" anchor="ctr">
-            <a:normAutofit/>
-          </a:bodyPr>
-          <a:lstStyle>
-            <a:lvl1pPr algn="l" defTabSz="914400" rtl="0" eaLnBrk="1" latinLnBrk="0" hangingPunct="1">
-              <a:lnSpc>
-                <a:spcPct val="90000"/>
-              </a:lnSpc>
-              <a:spcBef>
-                <a:spcPct val="0"/>
-              </a:spcBef>
-              <a:buNone/>
-              <a:defRPr sz="4400" kern="1200">
-                <a:solidFill>
-                  <a:schemeClr val="tx1"/>
-                </a:solidFill>
-                <a:latin typeface="+mj-lt"/>
-                <a:ea typeface="+mj-ea"/>
-                <a:cs typeface="+mj-cs"/>
-              </a:defRPr>
-            </a:lvl1pPr>
-          </a:lstStyle>
-          <a:p>
-            <a:pPr algn="ctr"/>
-            <a:r>
-              <a:rPr lang="pt-BR" sz="6600" dirty="0"/>
-              <a:t>Perguntas?</a:t>
-            </a:r>
-            <a:endParaRPr lang="pt-BR" sz="6600" b="1" i="1" dirty="0"/>
-          </a:p>
-        </p:txBody>
-      </p:sp>
-    </p:spTree>
-    <p:extLst>
-      <p:ext uri="{BB962C8B-B14F-4D97-AF65-F5344CB8AC3E}">
-        <p14:creationId xmlns:p14="http://schemas.microsoft.com/office/powerpoint/2010/main" val="3773005660"/>
-      </p:ext>
-    </p:extLst>
-  </p:cSld>
-  <p:clrMapOvr>
-    <a:masterClrMapping/>
-  </p:clrMapOvr>
-</p:sld>
-</file>
-
-<file path=ppt/slides/slide41.xml><?xml version="1.0" encoding="utf-8"?>
-<p:sld xmlns:a="http://schemas.openxmlformats.org/drawingml/2006/main" xmlns:r="http://schemas.openxmlformats.org/officeDocument/2006/relationships" xmlns:p="http://schemas.openxmlformats.org/presentationml/2006/main">
-  <p:cSld>
-    <p:spTree>
-      <p:nvGrpSpPr>
-        <p:cNvPr id="1" name=""/>
-        <p:cNvGrpSpPr/>
-        <p:nvPr/>
-      </p:nvGrpSpPr>
-      <p:grpSpPr>
-        <a:xfrm>
-          <a:off x="0" y="0"/>
-          <a:ext cx="0" cy="0"/>
-          <a:chOff x="0" y="0"/>
-          <a:chExt cx="0" cy="0"/>
-        </a:xfrm>
-      </p:grpSpPr>
-      <p:sp>
-        <p:nvSpPr>
-          <p:cNvPr id="4" name="Título 1">
-            <a:extLst>
-              <a:ext uri="{FF2B5EF4-FFF2-40B4-BE49-F238E27FC236}">
-                <a16:creationId xmlns:a16="http://schemas.microsoft.com/office/drawing/2014/main" id="{32666AC8-2E17-4DB4-B0F5-60C640CCFD2E}"/>
-              </a:ext>
-            </a:extLst>
-          </p:cNvPr>
-          <p:cNvSpPr txBox="1">
-            <a:spLocks/>
-          </p:cNvSpPr>
-          <p:nvPr/>
-        </p:nvSpPr>
-        <p:spPr>
-          <a:xfrm>
-            <a:off x="1431533" y="2720526"/>
-            <a:ext cx="9144000" cy="1029541"/>
-          </a:xfrm>
-          <a:prstGeom prst="rect">
-            <a:avLst/>
-          </a:prstGeom>
-        </p:spPr>
-        <p:txBody>
-          <a:bodyPr vert="horz" lIns="91440" tIns="45720" rIns="91440" bIns="45720" rtlCol="0" anchor="ctr">
-            <a:normAutofit/>
-          </a:bodyPr>
-          <a:lstStyle>
-            <a:lvl1pPr algn="l" defTabSz="914400" rtl="0" eaLnBrk="1" latinLnBrk="0" hangingPunct="1">
-              <a:lnSpc>
-                <a:spcPct val="90000"/>
-              </a:lnSpc>
-              <a:spcBef>
-                <a:spcPct val="0"/>
-              </a:spcBef>
-              <a:buNone/>
-              <a:defRPr sz="4400" kern="1200">
-                <a:solidFill>
-                  <a:schemeClr val="tx1"/>
-                </a:solidFill>
-                <a:latin typeface="+mj-lt"/>
-                <a:ea typeface="+mj-ea"/>
-                <a:cs typeface="+mj-cs"/>
-              </a:defRPr>
-            </a:lvl1pPr>
-          </a:lstStyle>
-          <a:p>
-            <a:pPr algn="ctr"/>
-            <a:r>
-              <a:rPr lang="pt-BR" sz="6600" dirty="0"/>
-              <a:t>Obrigado!</a:t>
-            </a:r>
-            <a:endParaRPr lang="pt-BR" sz="6600" b="1" i="1" dirty="0"/>
-          </a:p>
-        </p:txBody>
-      </p:sp>
-    </p:spTree>
-    <p:extLst>
-      <p:ext uri="{BB962C8B-B14F-4D97-AF65-F5344CB8AC3E}">
-        <p14:creationId xmlns:p14="http://schemas.microsoft.com/office/powerpoint/2010/main" val="2655704619"/>
-      </p:ext>
-    </p:extLst>
-  </p:cSld>
-  <p:clrMapOvr>
-    <a:masterClrMapping/>
-  </p:clrMapOvr>
-</p:sld>
-</file>
-
-<file path=ppt/slides/slide42.xml><?xml version="1.0" encoding="utf-8"?>
-<p:sld xmlns:a="http://schemas.openxmlformats.org/drawingml/2006/main" xmlns:r="http://schemas.openxmlformats.org/officeDocument/2006/relationships" xmlns:p="http://schemas.openxmlformats.org/presentationml/2006/main">
-  <p:cSld>
-    <p:spTree>
-      <p:nvGrpSpPr>
         <p:cNvPr id="1" name="">
           <a:extLst>
             <a:ext uri="{FF2B5EF4-FFF2-40B4-BE49-F238E27FC236}">
@@ -17628,7 +18115,7 @@
 </p:sld>
 </file>
 
-<file path=ppt/slides/slide43.xml><?xml version="1.0" encoding="utf-8"?>
+<file path=ppt/slides/slide41.xml><?xml version="1.0" encoding="utf-8"?>
 <p:sld xmlns:a="http://schemas.openxmlformats.org/drawingml/2006/main" xmlns:r="http://schemas.openxmlformats.org/officeDocument/2006/relationships" xmlns:p="http://schemas.openxmlformats.org/presentationml/2006/main">
   <p:cSld>
     <p:spTree>
@@ -22913,7 +23400,7 @@
 </p:sld>
 </file>
 
-<file path=ppt/slides/slide44.xml><?xml version="1.0" encoding="utf-8"?>
+<file path=ppt/slides/slide42.xml><?xml version="1.0" encoding="utf-8"?>
 <p:sld xmlns:a="http://schemas.openxmlformats.org/drawingml/2006/main" xmlns:r="http://schemas.openxmlformats.org/officeDocument/2006/relationships" xmlns:p="http://schemas.openxmlformats.org/presentationml/2006/main">
   <p:cSld>
     <p:spTree>
@@ -26792,7 +27279,7 @@
 </p:sld>
 </file>
 
-<file path=ppt/slides/slide45.xml><?xml version="1.0" encoding="utf-8"?>
+<file path=ppt/slides/slide43.xml><?xml version="1.0" encoding="utf-8"?>
 <p:sld xmlns:a="http://schemas.openxmlformats.org/drawingml/2006/main" xmlns:r="http://schemas.openxmlformats.org/officeDocument/2006/relationships" xmlns:p="http://schemas.openxmlformats.org/presentationml/2006/main">
   <p:cSld>
     <p:spTree>
@@ -28704,7 +29191,7 @@
 </p:sld>
 </file>
 
-<file path=ppt/slides/slide46.xml><?xml version="1.0" encoding="utf-8"?>
+<file path=ppt/slides/slide44.xml><?xml version="1.0" encoding="utf-8"?>
 <p:sld xmlns:a="http://schemas.openxmlformats.org/drawingml/2006/main" xmlns:r="http://schemas.openxmlformats.org/officeDocument/2006/relationships" xmlns:p="http://schemas.openxmlformats.org/presentationml/2006/main">
   <p:cSld>
     <p:spTree>
@@ -31743,7 +32230,7 @@
 </p:sld>
 </file>
 
-<file path=ppt/slides/slide47.xml><?xml version="1.0" encoding="utf-8"?>
+<file path=ppt/slides/slide45.xml><?xml version="1.0" encoding="utf-8"?>
 <p:sld xmlns:a="http://schemas.openxmlformats.org/drawingml/2006/main" xmlns:r="http://schemas.openxmlformats.org/officeDocument/2006/relationships" xmlns:p="http://schemas.openxmlformats.org/presentationml/2006/main">
   <p:cSld>
     <p:spTree>
@@ -32309,7 +32796,7 @@
 </p:sld>
 </file>
 
-<file path=ppt/slides/slide48.xml><?xml version="1.0" encoding="utf-8"?>
+<file path=ppt/slides/slide46.xml><?xml version="1.0" encoding="utf-8"?>
 <p:sld xmlns:a="http://schemas.openxmlformats.org/drawingml/2006/main" xmlns:r="http://schemas.openxmlformats.org/officeDocument/2006/relationships" xmlns:p="http://schemas.openxmlformats.org/presentationml/2006/main">
   <p:cSld>
     <p:spTree>
@@ -32396,8 +32883,8 @@
             </a:p>
           </p:txBody>
         </p:sp>
-        <mc:AlternateContent xmlns:mc="http://schemas.openxmlformats.org/markup-compatibility/2006">
-          <mc:Choice xmlns:a14="http://schemas.microsoft.com/office/drawing/2010/main" Requires="a14">
+        <mc:AlternateContent xmlns:mc="http://schemas.openxmlformats.org/markup-compatibility/2006" xmlns:a14="http://schemas.microsoft.com/office/drawing/2010/main">
+          <mc:Choice Requires="a14">
             <p:sp>
               <p:nvSpPr>
                 <p:cNvPr id="8" name="Rectangle 7">
@@ -32468,7 +32955,7 @@
               </p:txBody>
             </p:sp>
           </mc:Choice>
-          <mc:Fallback>
+          <mc:Fallback xmlns="">
             <p:sp>
               <p:nvSpPr>
                 <p:cNvPr id="8" name="Rectangle 7">
@@ -32513,8 +33000,8 @@
             </p:sp>
           </mc:Fallback>
         </mc:AlternateContent>
-        <mc:AlternateContent xmlns:mc="http://schemas.openxmlformats.org/markup-compatibility/2006">
-          <mc:Choice xmlns:a14="http://schemas.microsoft.com/office/drawing/2010/main" Requires="a14">
+        <mc:AlternateContent xmlns:mc="http://schemas.openxmlformats.org/markup-compatibility/2006" xmlns:a14="http://schemas.microsoft.com/office/drawing/2010/main">
+          <mc:Choice Requires="a14">
             <p:sp>
               <p:nvSpPr>
                 <p:cNvPr id="10" name="Rectangle 9">
@@ -32585,7 +33072,7 @@
               </p:txBody>
             </p:sp>
           </mc:Choice>
-          <mc:Fallback>
+          <mc:Fallback xmlns="">
             <p:sp>
               <p:nvSpPr>
                 <p:cNvPr id="10" name="Rectangle 9">
@@ -32630,8 +33117,8 @@
             </p:sp>
           </mc:Fallback>
         </mc:AlternateContent>
-        <mc:AlternateContent xmlns:mc="http://schemas.openxmlformats.org/markup-compatibility/2006">
-          <mc:Choice xmlns:a14="http://schemas.microsoft.com/office/drawing/2010/main" Requires="a14">
+        <mc:AlternateContent xmlns:mc="http://schemas.openxmlformats.org/markup-compatibility/2006" xmlns:a14="http://schemas.microsoft.com/office/drawing/2010/main">
+          <mc:Choice Requires="a14">
             <p:sp>
               <p:nvSpPr>
                 <p:cNvPr id="11" name="Rectangle 10">
@@ -32702,7 +33189,7 @@
               </p:txBody>
             </p:sp>
           </mc:Choice>
-          <mc:Fallback>
+          <mc:Fallback xmlns="">
             <p:sp>
               <p:nvSpPr>
                 <p:cNvPr id="11" name="Rectangle 10">
@@ -34245,8 +34732,8 @@
             </a:fontRef>
           </p:style>
         </p:cxnSp>
-        <mc:AlternateContent xmlns:mc="http://schemas.openxmlformats.org/markup-compatibility/2006">
-          <mc:Choice xmlns:a14="http://schemas.microsoft.com/office/drawing/2010/main" Requires="a14">
+        <mc:AlternateContent xmlns:mc="http://schemas.openxmlformats.org/markup-compatibility/2006" xmlns:a14="http://schemas.microsoft.com/office/drawing/2010/main">
+          <mc:Choice Requires="a14">
             <p:sp>
               <p:nvSpPr>
                 <p:cNvPr id="108" name="TextBox 107">
@@ -34321,7 +34808,7 @@
               </p:txBody>
             </p:sp>
           </mc:Choice>
-          <mc:Fallback>
+          <mc:Fallback xmlns="">
             <p:sp>
               <p:nvSpPr>
                 <p:cNvPr id="108" name="TextBox 107">
@@ -34528,8 +35015,8 @@
             </a:fontRef>
           </p:style>
         </p:cxnSp>
-        <mc:AlternateContent xmlns:mc="http://schemas.openxmlformats.org/markup-compatibility/2006">
-          <mc:Choice xmlns:a14="http://schemas.microsoft.com/office/drawing/2010/main" Requires="a14">
+        <mc:AlternateContent xmlns:mc="http://schemas.openxmlformats.org/markup-compatibility/2006" xmlns:a14="http://schemas.microsoft.com/office/drawing/2010/main">
+          <mc:Choice Requires="a14">
             <p:sp>
               <p:nvSpPr>
                 <p:cNvPr id="2" name="Rectangle 1">
@@ -34600,7 +35087,7 @@
               </p:txBody>
             </p:sp>
           </mc:Choice>
-          <mc:Fallback>
+          <mc:Fallback xmlns="">
             <p:sp>
               <p:nvSpPr>
                 <p:cNvPr id="2" name="Rectangle 1">
@@ -35112,8 +35599,8 @@
             </a:p>
           </p:txBody>
         </p:sp>
-        <mc:AlternateContent xmlns:mc="http://schemas.openxmlformats.org/markup-compatibility/2006">
-          <mc:Choice xmlns:a14="http://schemas.microsoft.com/office/drawing/2010/main" Requires="a14">
+        <mc:AlternateContent xmlns:mc="http://schemas.openxmlformats.org/markup-compatibility/2006" xmlns:a14="http://schemas.microsoft.com/office/drawing/2010/main">
+          <mc:Choice Requires="a14">
             <p:sp>
               <p:nvSpPr>
                 <p:cNvPr id="7" name="TextBox 6">
@@ -35182,7 +35669,7 @@
               </p:txBody>
             </p:sp>
           </mc:Choice>
-          <mc:Fallback>
+          <mc:Fallback xmlns="">
             <p:sp>
               <p:nvSpPr>
                 <p:cNvPr id="7" name="TextBox 6">
@@ -35227,8 +35714,8 @@
             </p:sp>
           </mc:Fallback>
         </mc:AlternateContent>
-        <mc:AlternateContent xmlns:mc="http://schemas.openxmlformats.org/markup-compatibility/2006">
-          <mc:Choice xmlns:a14="http://schemas.microsoft.com/office/drawing/2010/main" Requires="a14">
+        <mc:AlternateContent xmlns:mc="http://schemas.openxmlformats.org/markup-compatibility/2006" xmlns:a14="http://schemas.microsoft.com/office/drawing/2010/main">
+          <mc:Choice Requires="a14">
             <p:sp>
               <p:nvSpPr>
                 <p:cNvPr id="27" name="TextBox 26">
@@ -35291,13 +35778,7 @@
                               <a:rPr lang="pt-BR" b="0" i="1" smtClean="0">
                                 <a:latin typeface="Cambria Math" panose="02040503050406030204" pitchFamily="18" charset="0"/>
                               </a:rPr>
-                              <m:t>+</m:t>
-                            </m:r>
-                            <m:r>
-                              <a:rPr lang="pt-BR" b="0" i="1" smtClean="0">
-                                <a:latin typeface="Cambria Math" panose="02040503050406030204" pitchFamily="18" charset="0"/>
-                              </a:rPr>
-                              <m:t>1</m:t>
+                              <m:t>+1</m:t>
                             </m:r>
                           </m:sub>
                         </m:sSub>
@@ -35309,7 +35790,7 @@
               </p:txBody>
             </p:sp>
           </mc:Choice>
-          <mc:Fallback>
+          <mc:Fallback xmlns="">
             <p:sp>
               <p:nvSpPr>
                 <p:cNvPr id="27" name="TextBox 26">
@@ -35354,8 +35835,8 @@
             </p:sp>
           </mc:Fallback>
         </mc:AlternateContent>
-        <mc:AlternateContent xmlns:mc="http://schemas.openxmlformats.org/markup-compatibility/2006">
-          <mc:Choice xmlns:a14="http://schemas.microsoft.com/office/drawing/2010/main" Requires="a14">
+        <mc:AlternateContent xmlns:mc="http://schemas.openxmlformats.org/markup-compatibility/2006" xmlns:a14="http://schemas.microsoft.com/office/drawing/2010/main">
+          <mc:Choice Requires="a14">
             <p:sp>
               <p:nvSpPr>
                 <p:cNvPr id="28" name="TextBox 27">
@@ -35418,13 +35899,7 @@
                               <a:rPr lang="pt-BR" b="0" i="1" smtClean="0">
                                 <a:latin typeface="Cambria Math" panose="02040503050406030204" pitchFamily="18" charset="0"/>
                               </a:rPr>
-                              <m:t>+</m:t>
-                            </m:r>
-                            <m:r>
-                              <a:rPr lang="pt-BR" b="0" i="1" smtClean="0">
-                                <a:latin typeface="Cambria Math" panose="02040503050406030204" pitchFamily="18" charset="0"/>
-                              </a:rPr>
-                              <m:t>1</m:t>
+                              <m:t>+1</m:t>
                             </m:r>
                           </m:sub>
                         </m:sSub>
@@ -35436,7 +35911,7 @@
               </p:txBody>
             </p:sp>
           </mc:Choice>
-          <mc:Fallback>
+          <mc:Fallback xmlns="">
             <p:sp>
               <p:nvSpPr>
                 <p:cNvPr id="28" name="TextBox 27">
@@ -35481,8 +35956,8 @@
             </p:sp>
           </mc:Fallback>
         </mc:AlternateContent>
-        <mc:AlternateContent xmlns:mc="http://schemas.openxmlformats.org/markup-compatibility/2006">
-          <mc:Choice xmlns:a14="http://schemas.microsoft.com/office/drawing/2010/main" Requires="a14">
+        <mc:AlternateContent xmlns:mc="http://schemas.openxmlformats.org/markup-compatibility/2006" xmlns:a14="http://schemas.microsoft.com/office/drawing/2010/main">
+          <mc:Choice Requires="a14">
             <p:sp>
               <p:nvSpPr>
                 <p:cNvPr id="29" name="TextBox 28">
@@ -35551,7 +36026,7 @@
               </p:txBody>
             </p:sp>
           </mc:Choice>
-          <mc:Fallback>
+          <mc:Fallback xmlns="">
             <p:sp>
               <p:nvSpPr>
                 <p:cNvPr id="29" name="TextBox 28">
@@ -35596,8 +36071,8 @@
             </p:sp>
           </mc:Fallback>
         </mc:AlternateContent>
-        <mc:AlternateContent xmlns:mc="http://schemas.openxmlformats.org/markup-compatibility/2006">
-          <mc:Choice xmlns:a14="http://schemas.microsoft.com/office/drawing/2010/main" Requires="a14">
+        <mc:AlternateContent xmlns:mc="http://schemas.openxmlformats.org/markup-compatibility/2006" xmlns:a14="http://schemas.microsoft.com/office/drawing/2010/main">
+          <mc:Choice Requires="a14">
             <p:sp>
               <p:nvSpPr>
                 <p:cNvPr id="31" name="TextBox 30">
@@ -35660,13 +36135,7 @@
                               <a:rPr lang="pt-BR" b="0" i="1" smtClean="0">
                                 <a:latin typeface="Cambria Math" panose="02040503050406030204" pitchFamily="18" charset="0"/>
                               </a:rPr>
-                              <m:t>−</m:t>
-                            </m:r>
-                            <m:r>
-                              <a:rPr lang="pt-BR" b="0" i="1" smtClean="0">
-                                <a:latin typeface="Cambria Math" panose="02040503050406030204" pitchFamily="18" charset="0"/>
-                              </a:rPr>
-                              <m:t>1</m:t>
+                              <m:t>−1</m:t>
                             </m:r>
                           </m:sub>
                         </m:sSub>
@@ -35678,7 +36147,7 @@
               </p:txBody>
             </p:sp>
           </mc:Choice>
-          <mc:Fallback>
+          <mc:Fallback xmlns="">
             <p:sp>
               <p:nvSpPr>
                 <p:cNvPr id="31" name="TextBox 30">
@@ -35836,7 +36305,7 @@
 </p:sld>
 </file>
 
-<file path=ppt/slides/slide49.xml><?xml version="1.0" encoding="utf-8"?>
+<file path=ppt/slides/slide47.xml><?xml version="1.0" encoding="utf-8"?>
 <p:sld xmlns:a="http://schemas.openxmlformats.org/drawingml/2006/main" xmlns:r="http://schemas.openxmlformats.org/officeDocument/2006/relationships" xmlns:p="http://schemas.openxmlformats.org/presentationml/2006/main">
   <p:cSld>
     <p:spTree>
@@ -38638,121 +39107,7 @@
 </p:sld>
 </file>
 
-<file path=ppt/slides/slide5.xml><?xml version="1.0" encoding="utf-8"?>
-<p:sld xmlns:a="http://schemas.openxmlformats.org/drawingml/2006/main" xmlns:r="http://schemas.openxmlformats.org/officeDocument/2006/relationships" xmlns:p="http://schemas.openxmlformats.org/presentationml/2006/main">
-  <p:cSld>
-    <p:spTree>
-      <p:nvGrpSpPr>
-        <p:cNvPr id="1" name=""/>
-        <p:cNvGrpSpPr/>
-        <p:nvPr/>
-      </p:nvGrpSpPr>
-      <p:grpSpPr>
-        <a:xfrm>
-          <a:off x="0" y="0"/>
-          <a:ext cx="0" cy="0"/>
-          <a:chOff x="0" y="0"/>
-          <a:chExt cx="0" cy="0"/>
-        </a:xfrm>
-      </p:grpSpPr>
-      <p:sp>
-        <p:nvSpPr>
-          <p:cNvPr id="3" name="Content Placeholder 2">
-            <a:extLst>
-              <a:ext uri="{FF2B5EF4-FFF2-40B4-BE49-F238E27FC236}">
-                <a16:creationId xmlns:a16="http://schemas.microsoft.com/office/drawing/2014/main" id="{97A47F2C-5902-D14E-461A-E03776C92E47}"/>
-              </a:ext>
-            </a:extLst>
-          </p:cNvPr>
-          <p:cNvSpPr>
-            <a:spLocks noGrp="1"/>
-          </p:cNvSpPr>
-          <p:nvPr>
-            <p:ph idx="1"/>
-          </p:nvPr>
-        </p:nvSpPr>
-        <p:spPr>
-          <a:xfrm>
-            <a:off x="7683954" y="3142796"/>
-            <a:ext cx="3962400" cy="972003"/>
-          </a:xfrm>
-        </p:spPr>
-        <p:txBody>
-          <a:bodyPr/>
-          <a:lstStyle/>
-          <a:p>
-            <a:pPr marL="0" indent="0" algn="ctr">
-              <a:buNone/>
-            </a:pPr>
-            <a:r>
-              <a:rPr lang="pt-BR" dirty="0"/>
-              <a:t>Redes neurais recorrentes têm memória!</a:t>
-            </a:r>
-            <a:endParaRPr lang="en-US" dirty="0"/>
-          </a:p>
-        </p:txBody>
-      </p:sp>
-      <p:pic>
-        <p:nvPicPr>
-          <p:cNvPr id="2050" name="Picture 2" descr="RNN be like! #RNN #NeuralNetwork #meme">
-            <a:extLst>
-              <a:ext uri="{FF2B5EF4-FFF2-40B4-BE49-F238E27FC236}">
-                <a16:creationId xmlns:a16="http://schemas.microsoft.com/office/drawing/2014/main" id="{B99978AC-6F74-4307-94F5-3BAC8F4A5BF6}"/>
-              </a:ext>
-            </a:extLst>
-          </p:cNvPr>
-          <p:cNvPicPr>
-            <a:picLocks noChangeAspect="1" noChangeArrowheads="1"/>
-          </p:cNvPicPr>
-          <p:nvPr/>
-        </p:nvPicPr>
-        <p:blipFill>
-          <a:blip r:embed="rId2">
-            <a:extLst>
-              <a:ext uri="{28A0092B-C50C-407E-A947-70E740481C1C}">
-                <a14:useLocalDpi xmlns:a14="http://schemas.microsoft.com/office/drawing/2010/main" val="0"/>
-              </a:ext>
-            </a:extLst>
-          </a:blip>
-          <a:srcRect/>
-          <a:stretch>
-            <a:fillRect/>
-          </a:stretch>
-        </p:blipFill>
-        <p:spPr bwMode="auto">
-          <a:xfrm>
-            <a:off x="545646" y="1911803"/>
-            <a:ext cx="6551109" cy="3683454"/>
-          </a:xfrm>
-          <a:prstGeom prst="rect">
-            <a:avLst/>
-          </a:prstGeom>
-          <a:noFill/>
-          <a:extLst>
-            <a:ext uri="{909E8E84-426E-40DD-AFC4-6F175D3DCCD1}">
-              <a14:hiddenFill xmlns:a14="http://schemas.microsoft.com/office/drawing/2010/main">
-                <a:solidFill>
-                  <a:srgbClr val="FFFFFF"/>
-                </a:solidFill>
-              </a14:hiddenFill>
-            </a:ext>
-          </a:extLst>
-        </p:spPr>
-      </p:pic>
-    </p:spTree>
-    <p:extLst>
-      <p:ext uri="{BB962C8B-B14F-4D97-AF65-F5344CB8AC3E}">
-        <p14:creationId xmlns:p14="http://schemas.microsoft.com/office/powerpoint/2010/main" val="2006836852"/>
-      </p:ext>
-    </p:extLst>
-  </p:cSld>
-  <p:clrMapOvr>
-    <a:masterClrMapping/>
-  </p:clrMapOvr>
-</p:sld>
-</file>
-
-<file path=ppt/slides/slide50.xml><?xml version="1.0" encoding="utf-8"?>
+<file path=ppt/slides/slide48.xml><?xml version="1.0" encoding="utf-8"?>
 <p:sld xmlns:a="http://schemas.openxmlformats.org/drawingml/2006/main" xmlns:r="http://schemas.openxmlformats.org/officeDocument/2006/relationships" xmlns:p="http://schemas.openxmlformats.org/presentationml/2006/main">
   <p:cSld>
     <p:spTree>
@@ -39135,8 +39490,8 @@
             </a:fontRef>
           </p:style>
         </p:cxnSp>
-        <mc:AlternateContent xmlns:mc="http://schemas.openxmlformats.org/markup-compatibility/2006">
-          <mc:Choice xmlns:a14="http://schemas.microsoft.com/office/drawing/2010/main" Requires="a14">
+        <mc:AlternateContent xmlns:mc="http://schemas.openxmlformats.org/markup-compatibility/2006" xmlns:a14="http://schemas.microsoft.com/office/drawing/2010/main">
+          <mc:Choice Requires="a14">
             <p:sp>
               <p:nvSpPr>
                 <p:cNvPr id="10" name="Rectangle 9">
@@ -39207,7 +39562,7 @@
               </p:txBody>
             </p:sp>
           </mc:Choice>
-          <mc:Fallback>
+          <mc:Fallback xmlns="">
             <p:sp>
               <p:nvSpPr>
                 <p:cNvPr id="10" name="Rectangle 9">
@@ -39252,8 +39607,8 @@
             </p:sp>
           </mc:Fallback>
         </mc:AlternateContent>
-        <mc:AlternateContent xmlns:mc="http://schemas.openxmlformats.org/markup-compatibility/2006">
-          <mc:Choice xmlns:a14="http://schemas.microsoft.com/office/drawing/2010/main" Requires="a14">
+        <mc:AlternateContent xmlns:mc="http://schemas.openxmlformats.org/markup-compatibility/2006" xmlns:a14="http://schemas.microsoft.com/office/drawing/2010/main">
+          <mc:Choice Requires="a14">
             <p:sp>
               <p:nvSpPr>
                 <p:cNvPr id="11" name="Rectangle 10">
@@ -39324,7 +39679,7 @@
               </p:txBody>
             </p:sp>
           </mc:Choice>
-          <mc:Fallback>
+          <mc:Fallback xmlns="">
             <p:sp>
               <p:nvSpPr>
                 <p:cNvPr id="11" name="Rectangle 10">
@@ -39722,8 +40077,8 @@
             </a:fontRef>
           </p:style>
         </p:cxnSp>
-        <mc:AlternateContent xmlns:mc="http://schemas.openxmlformats.org/markup-compatibility/2006">
-          <mc:Choice xmlns:a14="http://schemas.microsoft.com/office/drawing/2010/main" Requires="a14">
+        <mc:AlternateContent xmlns:mc="http://schemas.openxmlformats.org/markup-compatibility/2006" xmlns:a14="http://schemas.microsoft.com/office/drawing/2010/main">
+          <mc:Choice Requires="a14">
             <p:sp>
               <p:nvSpPr>
                 <p:cNvPr id="51" name="TextBox 50">
@@ -39792,7 +40147,7 @@
               </p:txBody>
             </p:sp>
           </mc:Choice>
-          <mc:Fallback>
+          <mc:Fallback xmlns="">
             <p:sp>
               <p:nvSpPr>
                 <p:cNvPr id="51" name="TextBox 50">
@@ -40147,8 +40502,8 @@
             </a:fontRef>
           </p:style>
         </p:cxnSp>
-        <mc:AlternateContent xmlns:mc="http://schemas.openxmlformats.org/markup-compatibility/2006">
-          <mc:Choice xmlns:a14="http://schemas.microsoft.com/office/drawing/2010/main" Requires="a14">
+        <mc:AlternateContent xmlns:mc="http://schemas.openxmlformats.org/markup-compatibility/2006" xmlns:a14="http://schemas.microsoft.com/office/drawing/2010/main">
+          <mc:Choice Requires="a14">
             <p:sp>
               <p:nvSpPr>
                 <p:cNvPr id="7" name="TextBox 6">
@@ -40217,7 +40572,7 @@
               </p:txBody>
             </p:sp>
           </mc:Choice>
-          <mc:Fallback>
+          <mc:Fallback xmlns="">
             <p:sp>
               <p:nvSpPr>
                 <p:cNvPr id="7" name="TextBox 6">
@@ -40420,8 +40775,8 @@
             </a:p>
           </p:txBody>
         </p:sp>
-        <mc:AlternateContent xmlns:mc="http://schemas.openxmlformats.org/markup-compatibility/2006">
-          <mc:Choice xmlns:a14="http://schemas.microsoft.com/office/drawing/2010/main" Requires="a14">
+        <mc:AlternateContent xmlns:mc="http://schemas.openxmlformats.org/markup-compatibility/2006" xmlns:a14="http://schemas.microsoft.com/office/drawing/2010/main">
+          <mc:Choice Requires="a14">
             <p:sp>
               <p:nvSpPr>
                 <p:cNvPr id="8" name="Rectangle 7">
@@ -40492,7 +40847,7 @@
               </p:txBody>
             </p:sp>
           </mc:Choice>
-          <mc:Fallback>
+          <mc:Fallback xmlns="">
             <p:sp>
               <p:nvSpPr>
                 <p:cNvPr id="8" name="Rectangle 7">
@@ -40661,8 +41016,8 @@
             </a:fontRef>
           </p:style>
         </p:cxnSp>
-        <mc:AlternateContent xmlns:mc="http://schemas.openxmlformats.org/markup-compatibility/2006">
-          <mc:Choice xmlns:a14="http://schemas.microsoft.com/office/drawing/2010/main" Requires="a14">
+        <mc:AlternateContent xmlns:mc="http://schemas.openxmlformats.org/markup-compatibility/2006" xmlns:a14="http://schemas.microsoft.com/office/drawing/2010/main">
+          <mc:Choice Requires="a14">
             <p:sp>
               <p:nvSpPr>
                 <p:cNvPr id="5" name="TextBox 4">
@@ -40737,7 +41092,7 @@
               </p:txBody>
             </p:sp>
           </mc:Choice>
-          <mc:Fallback>
+          <mc:Fallback xmlns="">
             <p:sp>
               <p:nvSpPr>
                 <p:cNvPr id="5" name="TextBox 4">
@@ -40782,8 +41137,8 @@
             </p:sp>
           </mc:Fallback>
         </mc:AlternateContent>
-        <mc:AlternateContent xmlns:mc="http://schemas.openxmlformats.org/markup-compatibility/2006">
-          <mc:Choice xmlns:a14="http://schemas.microsoft.com/office/drawing/2010/main" Requires="a14">
+        <mc:AlternateContent xmlns:mc="http://schemas.openxmlformats.org/markup-compatibility/2006" xmlns:a14="http://schemas.microsoft.com/office/drawing/2010/main">
+          <mc:Choice Requires="a14">
             <p:sp>
               <p:nvSpPr>
                 <p:cNvPr id="50" name="TextBox 49">
@@ -40858,7 +41213,7 @@
               </p:txBody>
             </p:sp>
           </mc:Choice>
-          <mc:Fallback>
+          <mc:Fallback xmlns="">
             <p:sp>
               <p:nvSpPr>
                 <p:cNvPr id="50" name="TextBox 49">
@@ -40903,8 +41258,8 @@
             </p:sp>
           </mc:Fallback>
         </mc:AlternateContent>
-        <mc:AlternateContent xmlns:mc="http://schemas.openxmlformats.org/markup-compatibility/2006">
-          <mc:Choice xmlns:a14="http://schemas.microsoft.com/office/drawing/2010/main" Requires="a14">
+        <mc:AlternateContent xmlns:mc="http://schemas.openxmlformats.org/markup-compatibility/2006" xmlns:a14="http://schemas.microsoft.com/office/drawing/2010/main">
+          <mc:Choice Requires="a14">
             <p:sp>
               <p:nvSpPr>
                 <p:cNvPr id="53" name="TextBox 52">
@@ -40973,7 +41328,7 @@
               </p:txBody>
             </p:sp>
           </mc:Choice>
-          <mc:Fallback>
+          <mc:Fallback xmlns="">
             <p:sp>
               <p:nvSpPr>
                 <p:cNvPr id="53" name="TextBox 52">
@@ -41018,8 +41373,8 @@
             </p:sp>
           </mc:Fallback>
         </mc:AlternateContent>
-        <mc:AlternateContent xmlns:mc="http://schemas.openxmlformats.org/markup-compatibility/2006">
-          <mc:Choice xmlns:a14="http://schemas.microsoft.com/office/drawing/2010/main" Requires="a14">
+        <mc:AlternateContent xmlns:mc="http://schemas.openxmlformats.org/markup-compatibility/2006" xmlns:a14="http://schemas.microsoft.com/office/drawing/2010/main">
+          <mc:Choice Requires="a14">
             <p:sp>
               <p:nvSpPr>
                 <p:cNvPr id="55" name="TextBox 54">
@@ -41088,7 +41443,7 @@
               </p:txBody>
             </p:sp>
           </mc:Choice>
-          <mc:Fallback>
+          <mc:Fallback xmlns="">
             <p:sp>
               <p:nvSpPr>
                 <p:cNvPr id="55" name="TextBox 54">
@@ -41176,8 +41531,8 @@
             </a:fontRef>
           </p:style>
         </p:cxnSp>
-        <mc:AlternateContent xmlns:mc="http://schemas.openxmlformats.org/markup-compatibility/2006">
-          <mc:Choice xmlns:a14="http://schemas.microsoft.com/office/drawing/2010/main" Requires="a14">
+        <mc:AlternateContent xmlns:mc="http://schemas.openxmlformats.org/markup-compatibility/2006" xmlns:a14="http://schemas.microsoft.com/office/drawing/2010/main">
+          <mc:Choice Requires="a14">
             <p:sp>
               <p:nvSpPr>
                 <p:cNvPr id="9" name="TextBox 8">
@@ -41246,7 +41601,7 @@
               </p:txBody>
             </p:sp>
           </mc:Choice>
-          <mc:Fallback>
+          <mc:Fallback xmlns="">
             <p:sp>
               <p:nvSpPr>
                 <p:cNvPr id="9" name="TextBox 8">
@@ -41384,7 +41739,7 @@
 </p:sld>
 </file>
 
-<file path=ppt/slides/slide51.xml><?xml version="1.0" encoding="utf-8"?>
+<file path=ppt/slides/slide49.xml><?xml version="1.0" encoding="utf-8"?>
 <p:sld xmlns:a="http://schemas.openxmlformats.org/drawingml/2006/main" xmlns:r="http://schemas.openxmlformats.org/officeDocument/2006/relationships" xmlns:p="http://schemas.openxmlformats.org/presentationml/2006/main">
   <p:cSld>
     <p:spTree>
@@ -41552,8 +41907,8 @@
             </a:fontRef>
           </p:style>
         </p:cxnSp>
-        <mc:AlternateContent xmlns:mc="http://schemas.openxmlformats.org/markup-compatibility/2006">
-          <mc:Choice xmlns:a14="http://schemas.microsoft.com/office/drawing/2010/main" Requires="a14">
+        <mc:AlternateContent xmlns:mc="http://schemas.openxmlformats.org/markup-compatibility/2006" xmlns:a14="http://schemas.microsoft.com/office/drawing/2010/main">
+          <mc:Choice Requires="a14">
             <p:sp>
               <p:nvSpPr>
                 <p:cNvPr id="7" name="TextBox 6">
@@ -41622,7 +41977,7 @@
               </p:txBody>
             </p:sp>
           </mc:Choice>
-          <mc:Fallback>
+          <mc:Fallback xmlns="">
             <p:sp>
               <p:nvSpPr>
                 <p:cNvPr id="7" name="TextBox 6">
@@ -41667,8 +42022,8 @@
             </p:sp>
           </mc:Fallback>
         </mc:AlternateContent>
-        <mc:AlternateContent xmlns:mc="http://schemas.openxmlformats.org/markup-compatibility/2006">
-          <mc:Choice xmlns:a14="http://schemas.microsoft.com/office/drawing/2010/main" Requires="a14">
+        <mc:AlternateContent xmlns:mc="http://schemas.openxmlformats.org/markup-compatibility/2006" xmlns:a14="http://schemas.microsoft.com/office/drawing/2010/main">
+          <mc:Choice Requires="a14">
             <p:sp>
               <p:nvSpPr>
                 <p:cNvPr id="53" name="TextBox 52">
@@ -41737,7 +42092,7 @@
               </p:txBody>
             </p:sp>
           </mc:Choice>
-          <mc:Fallback>
+          <mc:Fallback xmlns="">
             <p:sp>
               <p:nvSpPr>
                 <p:cNvPr id="53" name="TextBox 52">
@@ -42083,8 +42438,8 @@
             </a:fontRef>
           </p:style>
         </p:cxnSp>
-        <mc:AlternateContent xmlns:mc="http://schemas.openxmlformats.org/markup-compatibility/2006">
-          <mc:Choice xmlns:a14="http://schemas.microsoft.com/office/drawing/2010/main" Requires="a14">
+        <mc:AlternateContent xmlns:mc="http://schemas.openxmlformats.org/markup-compatibility/2006" xmlns:a14="http://schemas.microsoft.com/office/drawing/2010/main">
+          <mc:Choice Requires="a14">
             <p:sp>
               <p:nvSpPr>
                 <p:cNvPr id="11" name="Rectangle 10">
@@ -42155,7 +42510,7 @@
               </p:txBody>
             </p:sp>
           </mc:Choice>
-          <mc:Fallback>
+          <mc:Fallback xmlns="">
             <p:sp>
               <p:nvSpPr>
                 <p:cNvPr id="11" name="Rectangle 10">
@@ -42330,8 +42685,8 @@
             </a:fontRef>
           </p:style>
         </p:cxnSp>
-        <mc:AlternateContent xmlns:mc="http://schemas.openxmlformats.org/markup-compatibility/2006">
-          <mc:Choice xmlns:a14="http://schemas.microsoft.com/office/drawing/2010/main" Requires="a14">
+        <mc:AlternateContent xmlns:mc="http://schemas.openxmlformats.org/markup-compatibility/2006" xmlns:a14="http://schemas.microsoft.com/office/drawing/2010/main">
+          <mc:Choice Requires="a14">
             <p:sp>
               <p:nvSpPr>
                 <p:cNvPr id="51" name="TextBox 50">
@@ -42400,7 +42755,7 @@
               </p:txBody>
             </p:sp>
           </mc:Choice>
-          <mc:Fallback>
+          <mc:Fallback xmlns="">
             <p:sp>
               <p:nvSpPr>
                 <p:cNvPr id="51" name="TextBox 50">
@@ -42670,8 +43025,8 @@
             </a:p>
           </p:txBody>
         </p:sp>
-        <mc:AlternateContent xmlns:mc="http://schemas.openxmlformats.org/markup-compatibility/2006">
-          <mc:Choice xmlns:a14="http://schemas.microsoft.com/office/drawing/2010/main" Requires="a14">
+        <mc:AlternateContent xmlns:mc="http://schemas.openxmlformats.org/markup-compatibility/2006" xmlns:a14="http://schemas.microsoft.com/office/drawing/2010/main">
+          <mc:Choice Requires="a14">
             <p:sp>
               <p:nvSpPr>
                 <p:cNvPr id="8" name="Rectangle 7">
@@ -42742,7 +43097,7 @@
               </p:txBody>
             </p:sp>
           </mc:Choice>
-          <mc:Fallback>
+          <mc:Fallback xmlns="">
             <p:sp>
               <p:nvSpPr>
                 <p:cNvPr id="8" name="Rectangle 7">
@@ -42869,8 +43224,8 @@
             </a:fontRef>
           </p:style>
         </p:cxnSp>
-        <mc:AlternateContent xmlns:mc="http://schemas.openxmlformats.org/markup-compatibility/2006">
-          <mc:Choice xmlns:a14="http://schemas.microsoft.com/office/drawing/2010/main" Requires="a14">
+        <mc:AlternateContent xmlns:mc="http://schemas.openxmlformats.org/markup-compatibility/2006" xmlns:a14="http://schemas.microsoft.com/office/drawing/2010/main">
+          <mc:Choice Requires="a14">
             <p:sp>
               <p:nvSpPr>
                 <p:cNvPr id="5" name="TextBox 4">
@@ -42945,7 +43300,7 @@
               </p:txBody>
             </p:sp>
           </mc:Choice>
-          <mc:Fallback>
+          <mc:Fallback xmlns="">
             <p:sp>
               <p:nvSpPr>
                 <p:cNvPr id="5" name="TextBox 4">
@@ -42990,8 +43345,8 @@
             </p:sp>
           </mc:Fallback>
         </mc:AlternateContent>
-        <mc:AlternateContent xmlns:mc="http://schemas.openxmlformats.org/markup-compatibility/2006">
-          <mc:Choice xmlns:a14="http://schemas.microsoft.com/office/drawing/2010/main" Requires="a14">
+        <mc:AlternateContent xmlns:mc="http://schemas.openxmlformats.org/markup-compatibility/2006" xmlns:a14="http://schemas.microsoft.com/office/drawing/2010/main">
+          <mc:Choice Requires="a14">
             <p:sp>
               <p:nvSpPr>
                 <p:cNvPr id="50" name="TextBox 49">
@@ -43066,7 +43421,7 @@
               </p:txBody>
             </p:sp>
           </mc:Choice>
-          <mc:Fallback>
+          <mc:Fallback xmlns="">
             <p:sp>
               <p:nvSpPr>
                 <p:cNvPr id="50" name="TextBox 49">
@@ -43111,8 +43466,8 @@
             </p:sp>
           </mc:Fallback>
         </mc:AlternateContent>
-        <mc:AlternateContent xmlns:mc="http://schemas.openxmlformats.org/markup-compatibility/2006">
-          <mc:Choice xmlns:a14="http://schemas.microsoft.com/office/drawing/2010/main" Requires="a14">
+        <mc:AlternateContent xmlns:mc="http://schemas.openxmlformats.org/markup-compatibility/2006" xmlns:a14="http://schemas.microsoft.com/office/drawing/2010/main">
+          <mc:Choice Requires="a14">
             <p:sp>
               <p:nvSpPr>
                 <p:cNvPr id="55" name="TextBox 54">
@@ -43181,7 +43536,7 @@
               </p:txBody>
             </p:sp>
           </mc:Choice>
-          <mc:Fallback>
+          <mc:Fallback xmlns="">
             <p:sp>
               <p:nvSpPr>
                 <p:cNvPr id="55" name="TextBox 54">
@@ -43226,8 +43581,8 @@
             </p:sp>
           </mc:Fallback>
         </mc:AlternateContent>
-        <mc:AlternateContent xmlns:mc="http://schemas.openxmlformats.org/markup-compatibility/2006">
-          <mc:Choice xmlns:a14="http://schemas.microsoft.com/office/drawing/2010/main" Requires="a14">
+        <mc:AlternateContent xmlns:mc="http://schemas.openxmlformats.org/markup-compatibility/2006" xmlns:a14="http://schemas.microsoft.com/office/drawing/2010/main">
+          <mc:Choice Requires="a14">
             <p:sp>
               <p:nvSpPr>
                 <p:cNvPr id="9" name="TextBox 8">
@@ -43296,7 +43651,7 @@
               </p:txBody>
             </p:sp>
           </mc:Choice>
-          <mc:Fallback>
+          <mc:Fallback xmlns="">
             <p:sp>
               <p:nvSpPr>
                 <p:cNvPr id="9" name="TextBox 8">
@@ -43456,8 +43811,8 @@
             </a:p>
           </p:txBody>
         </p:sp>
-        <mc:AlternateContent xmlns:mc="http://schemas.openxmlformats.org/markup-compatibility/2006">
-          <mc:Choice xmlns:a14="http://schemas.microsoft.com/office/drawing/2010/main" Requires="a14">
+        <mc:AlternateContent xmlns:mc="http://schemas.openxmlformats.org/markup-compatibility/2006" xmlns:a14="http://schemas.microsoft.com/office/drawing/2010/main">
+          <mc:Choice Requires="a14">
             <p:sp>
               <p:nvSpPr>
                 <p:cNvPr id="10" name="Rectangle 9">
@@ -43528,7 +43883,7 @@
               </p:txBody>
             </p:sp>
           </mc:Choice>
-          <mc:Fallback>
+          <mc:Fallback xmlns="">
             <p:sp>
               <p:nvSpPr>
                 <p:cNvPr id="10" name="Rectangle 9">
@@ -44006,8 +44361,8 @@
             </a:fontRef>
           </p:style>
         </p:cxnSp>
-        <mc:AlternateContent xmlns:mc="http://schemas.openxmlformats.org/markup-compatibility/2006">
-          <mc:Choice xmlns:a14="http://schemas.microsoft.com/office/drawing/2010/main" Requires="a14">
+        <mc:AlternateContent xmlns:mc="http://schemas.openxmlformats.org/markup-compatibility/2006" xmlns:a14="http://schemas.microsoft.com/office/drawing/2010/main">
+          <mc:Choice Requires="a14">
             <p:sp>
               <p:nvSpPr>
                 <p:cNvPr id="27" name="TextBox 26">
@@ -44076,7 +44431,7 @@
               </p:txBody>
             </p:sp>
           </mc:Choice>
-          <mc:Fallback>
+          <mc:Fallback xmlns="">
             <p:sp>
               <p:nvSpPr>
                 <p:cNvPr id="27" name="TextBox 26">
@@ -44121,8 +44476,8 @@
             </p:sp>
           </mc:Fallback>
         </mc:AlternateContent>
-        <mc:AlternateContent xmlns:mc="http://schemas.openxmlformats.org/markup-compatibility/2006">
-          <mc:Choice xmlns:a14="http://schemas.microsoft.com/office/drawing/2010/main" Requires="a14">
+        <mc:AlternateContent xmlns:mc="http://schemas.openxmlformats.org/markup-compatibility/2006" xmlns:a14="http://schemas.microsoft.com/office/drawing/2010/main">
+          <mc:Choice Requires="a14">
             <p:sp>
               <p:nvSpPr>
                 <p:cNvPr id="28" name="TextBox 27">
@@ -44203,7 +44558,7 @@
               </p:txBody>
             </p:sp>
           </mc:Choice>
-          <mc:Fallback>
+          <mc:Fallback xmlns="">
             <p:sp>
               <p:nvSpPr>
                 <p:cNvPr id="28" name="TextBox 27">
@@ -44262,7 +44617,121 @@
 </p:sld>
 </file>
 
-<file path=ppt/slides/slide52.xml><?xml version="1.0" encoding="utf-8"?>
+<file path=ppt/slides/slide5.xml><?xml version="1.0" encoding="utf-8"?>
+<p:sld xmlns:a="http://schemas.openxmlformats.org/drawingml/2006/main" xmlns:r="http://schemas.openxmlformats.org/officeDocument/2006/relationships" xmlns:p="http://schemas.openxmlformats.org/presentationml/2006/main">
+  <p:cSld>
+    <p:spTree>
+      <p:nvGrpSpPr>
+        <p:cNvPr id="1" name=""/>
+        <p:cNvGrpSpPr/>
+        <p:nvPr/>
+      </p:nvGrpSpPr>
+      <p:grpSpPr>
+        <a:xfrm>
+          <a:off x="0" y="0"/>
+          <a:ext cx="0" cy="0"/>
+          <a:chOff x="0" y="0"/>
+          <a:chExt cx="0" cy="0"/>
+        </a:xfrm>
+      </p:grpSpPr>
+      <p:sp>
+        <p:nvSpPr>
+          <p:cNvPr id="3" name="Content Placeholder 2">
+            <a:extLst>
+              <a:ext uri="{FF2B5EF4-FFF2-40B4-BE49-F238E27FC236}">
+                <a16:creationId xmlns:a16="http://schemas.microsoft.com/office/drawing/2014/main" id="{97A47F2C-5902-D14E-461A-E03776C92E47}"/>
+              </a:ext>
+            </a:extLst>
+          </p:cNvPr>
+          <p:cNvSpPr>
+            <a:spLocks noGrp="1"/>
+          </p:cNvSpPr>
+          <p:nvPr>
+            <p:ph idx="1"/>
+          </p:nvPr>
+        </p:nvSpPr>
+        <p:spPr>
+          <a:xfrm>
+            <a:off x="7683954" y="3142796"/>
+            <a:ext cx="3962400" cy="972003"/>
+          </a:xfrm>
+        </p:spPr>
+        <p:txBody>
+          <a:bodyPr/>
+          <a:lstStyle/>
+          <a:p>
+            <a:pPr marL="0" indent="0" algn="ctr">
+              <a:buNone/>
+            </a:pPr>
+            <a:r>
+              <a:rPr lang="pt-BR" dirty="0"/>
+              <a:t>Redes neurais recorrentes têm memória!</a:t>
+            </a:r>
+            <a:endParaRPr lang="en-US" dirty="0"/>
+          </a:p>
+        </p:txBody>
+      </p:sp>
+      <p:pic>
+        <p:nvPicPr>
+          <p:cNvPr id="2050" name="Picture 2" descr="RNN be like! #RNN #NeuralNetwork #meme">
+            <a:extLst>
+              <a:ext uri="{FF2B5EF4-FFF2-40B4-BE49-F238E27FC236}">
+                <a16:creationId xmlns:a16="http://schemas.microsoft.com/office/drawing/2014/main" id="{B99978AC-6F74-4307-94F5-3BAC8F4A5BF6}"/>
+              </a:ext>
+            </a:extLst>
+          </p:cNvPr>
+          <p:cNvPicPr>
+            <a:picLocks noChangeAspect="1" noChangeArrowheads="1"/>
+          </p:cNvPicPr>
+          <p:nvPr/>
+        </p:nvPicPr>
+        <p:blipFill>
+          <a:blip r:embed="rId2">
+            <a:extLst>
+              <a:ext uri="{28A0092B-C50C-407E-A947-70E740481C1C}">
+                <a14:useLocalDpi xmlns:a14="http://schemas.microsoft.com/office/drawing/2010/main" val="0"/>
+              </a:ext>
+            </a:extLst>
+          </a:blip>
+          <a:srcRect/>
+          <a:stretch>
+            <a:fillRect/>
+          </a:stretch>
+        </p:blipFill>
+        <p:spPr bwMode="auto">
+          <a:xfrm>
+            <a:off x="545646" y="1911803"/>
+            <a:ext cx="6551109" cy="3683454"/>
+          </a:xfrm>
+          <a:prstGeom prst="rect">
+            <a:avLst/>
+          </a:prstGeom>
+          <a:noFill/>
+          <a:extLst>
+            <a:ext uri="{909E8E84-426E-40DD-AFC4-6F175D3DCCD1}">
+              <a14:hiddenFill xmlns:a14="http://schemas.microsoft.com/office/drawing/2010/main">
+                <a:solidFill>
+                  <a:srgbClr val="FFFFFF"/>
+                </a:solidFill>
+              </a14:hiddenFill>
+            </a:ext>
+          </a:extLst>
+        </p:spPr>
+      </p:pic>
+    </p:spTree>
+    <p:extLst>
+      <p:ext uri="{BB962C8B-B14F-4D97-AF65-F5344CB8AC3E}">
+        <p14:creationId xmlns:p14="http://schemas.microsoft.com/office/powerpoint/2010/main" val="2006836852"/>
+      </p:ext>
+    </p:extLst>
+  </p:cSld>
+  <p:clrMapOvr>
+    <a:masterClrMapping/>
+  </p:clrMapOvr>
+</p:sld>
+</file>
+
+<file path=ppt/slides/slide50.xml><?xml version="1.0" encoding="utf-8"?>
 <p:sld xmlns:a="http://schemas.openxmlformats.org/drawingml/2006/main" xmlns:r="http://schemas.openxmlformats.org/officeDocument/2006/relationships" xmlns:p="http://schemas.openxmlformats.org/presentationml/2006/main">
   <p:cSld>
     <p:spTree>
@@ -44682,8 +45151,8 @@
             </a:p>
           </p:txBody>
         </p:sp>
-        <mc:AlternateContent xmlns:mc="http://schemas.openxmlformats.org/markup-compatibility/2006">
-          <mc:Choice xmlns:a14="http://schemas.microsoft.com/office/drawing/2010/main" Requires="a14">
+        <mc:AlternateContent xmlns:mc="http://schemas.openxmlformats.org/markup-compatibility/2006" xmlns:a14="http://schemas.microsoft.com/office/drawing/2010/main">
+          <mc:Choice Requires="a14">
             <p:sp>
               <p:nvSpPr>
                 <p:cNvPr id="8" name="Rectangle 7">
@@ -44754,7 +45223,7 @@
               </p:txBody>
             </p:sp>
           </mc:Choice>
-          <mc:Fallback>
+          <mc:Fallback xmlns="">
             <p:sp>
               <p:nvSpPr>
                 <p:cNvPr id="8" name="Rectangle 7">
@@ -44842,8 +45311,8 @@
             </a:fontRef>
           </p:style>
         </p:cxnSp>
-        <mc:AlternateContent xmlns:mc="http://schemas.openxmlformats.org/markup-compatibility/2006">
-          <mc:Choice xmlns:a14="http://schemas.microsoft.com/office/drawing/2010/main" Requires="a14">
+        <mc:AlternateContent xmlns:mc="http://schemas.openxmlformats.org/markup-compatibility/2006" xmlns:a14="http://schemas.microsoft.com/office/drawing/2010/main">
+          <mc:Choice Requires="a14">
             <p:sp>
               <p:nvSpPr>
                 <p:cNvPr id="5" name="TextBox 4">
@@ -44918,7 +45387,7 @@
               </p:txBody>
             </p:sp>
           </mc:Choice>
-          <mc:Fallback>
+          <mc:Fallback xmlns="">
             <p:sp>
               <p:nvSpPr>
                 <p:cNvPr id="5" name="TextBox 4">
@@ -44963,8 +45432,8 @@
             </p:sp>
           </mc:Fallback>
         </mc:AlternateContent>
-        <mc:AlternateContent xmlns:mc="http://schemas.openxmlformats.org/markup-compatibility/2006">
-          <mc:Choice xmlns:a14="http://schemas.microsoft.com/office/drawing/2010/main" Requires="a14">
+        <mc:AlternateContent xmlns:mc="http://schemas.openxmlformats.org/markup-compatibility/2006" xmlns:a14="http://schemas.microsoft.com/office/drawing/2010/main">
+          <mc:Choice Requires="a14">
             <p:sp>
               <p:nvSpPr>
                 <p:cNvPr id="9" name="TextBox 8">
@@ -45033,7 +45502,7 @@
               </p:txBody>
             </p:sp>
           </mc:Choice>
-          <mc:Fallback>
+          <mc:Fallback xmlns="">
             <p:sp>
               <p:nvSpPr>
                 <p:cNvPr id="9" name="TextBox 8">
@@ -45142,8 +45611,8 @@
             </a:p>
           </p:txBody>
         </p:sp>
-        <mc:AlternateContent xmlns:mc="http://schemas.openxmlformats.org/markup-compatibility/2006">
-          <mc:Choice xmlns:a14="http://schemas.microsoft.com/office/drawing/2010/main" Requires="a14">
+        <mc:AlternateContent xmlns:mc="http://schemas.openxmlformats.org/markup-compatibility/2006" xmlns:a14="http://schemas.microsoft.com/office/drawing/2010/main">
+          <mc:Choice Requires="a14">
             <p:sp>
               <p:nvSpPr>
                 <p:cNvPr id="10" name="Rectangle 9">
@@ -45214,7 +45683,7 @@
               </p:txBody>
             </p:sp>
           </mc:Choice>
-          <mc:Fallback>
+          <mc:Fallback xmlns="">
             <p:sp>
               <p:nvSpPr>
                 <p:cNvPr id="10" name="Rectangle 9">
@@ -45448,8 +45917,8 @@
             </a:fontRef>
           </p:style>
         </p:cxnSp>
-        <mc:AlternateContent xmlns:mc="http://schemas.openxmlformats.org/markup-compatibility/2006">
-          <mc:Choice xmlns:a14="http://schemas.microsoft.com/office/drawing/2010/main" Requires="a14">
+        <mc:AlternateContent xmlns:mc="http://schemas.openxmlformats.org/markup-compatibility/2006" xmlns:a14="http://schemas.microsoft.com/office/drawing/2010/main">
+          <mc:Choice Requires="a14">
             <p:sp>
               <p:nvSpPr>
                 <p:cNvPr id="27" name="TextBox 26">
@@ -45518,7 +45987,7 @@
               </p:txBody>
             </p:sp>
           </mc:Choice>
-          <mc:Fallback>
+          <mc:Fallback xmlns="">
             <p:sp>
               <p:nvSpPr>
                 <p:cNvPr id="27" name="TextBox 26">
@@ -45563,8 +46032,8 @@
             </p:sp>
           </mc:Fallback>
         </mc:AlternateContent>
-        <mc:AlternateContent xmlns:mc="http://schemas.openxmlformats.org/markup-compatibility/2006">
-          <mc:Choice xmlns:a14="http://schemas.microsoft.com/office/drawing/2010/main" Requires="a14">
+        <mc:AlternateContent xmlns:mc="http://schemas.openxmlformats.org/markup-compatibility/2006" xmlns:a14="http://schemas.microsoft.com/office/drawing/2010/main">
+          <mc:Choice Requires="a14">
             <p:sp>
               <p:nvSpPr>
                 <p:cNvPr id="28" name="TextBox 27">
@@ -45645,7 +46114,7 @@
               </p:txBody>
             </p:sp>
           </mc:Choice>
-          <mc:Fallback>
+          <mc:Fallback xmlns="">
             <p:sp>
               <p:nvSpPr>
                 <p:cNvPr id="28" name="TextBox 27">
@@ -45868,8 +46337,8 @@
             </a:fontRef>
           </p:style>
         </p:cxnSp>
-        <mc:AlternateContent xmlns:mc="http://schemas.openxmlformats.org/markup-compatibility/2006">
-          <mc:Choice xmlns:a14="http://schemas.microsoft.com/office/drawing/2010/main" Requires="a14">
+        <mc:AlternateContent xmlns:mc="http://schemas.openxmlformats.org/markup-compatibility/2006" xmlns:a14="http://schemas.microsoft.com/office/drawing/2010/main">
+          <mc:Choice Requires="a14">
             <p:sp>
               <p:nvSpPr>
                 <p:cNvPr id="7" name="TextBox 6">
@@ -45938,7 +46407,7 @@
               </p:txBody>
             </p:sp>
           </mc:Choice>
-          <mc:Fallback>
+          <mc:Fallback xmlns="">
             <p:sp>
               <p:nvSpPr>
                 <p:cNvPr id="7" name="TextBox 6">
@@ -45983,8 +46452,8 @@
             </p:sp>
           </mc:Fallback>
         </mc:AlternateContent>
-        <mc:AlternateContent xmlns:mc="http://schemas.openxmlformats.org/markup-compatibility/2006">
-          <mc:Choice xmlns:a14="http://schemas.microsoft.com/office/drawing/2010/main" Requires="a14">
+        <mc:AlternateContent xmlns:mc="http://schemas.openxmlformats.org/markup-compatibility/2006" xmlns:a14="http://schemas.microsoft.com/office/drawing/2010/main">
+          <mc:Choice Requires="a14">
             <p:sp>
               <p:nvSpPr>
                 <p:cNvPr id="53" name="TextBox 52">
@@ -46053,7 +46522,7 @@
               </p:txBody>
             </p:sp>
           </mc:Choice>
-          <mc:Fallback>
+          <mc:Fallback xmlns="">
             <p:sp>
               <p:nvSpPr>
                 <p:cNvPr id="53" name="TextBox 52">
@@ -46246,8 +46715,8 @@
             </a:fontRef>
           </p:style>
         </p:cxnSp>
-        <mc:AlternateContent xmlns:mc="http://schemas.openxmlformats.org/markup-compatibility/2006">
-          <mc:Choice xmlns:a14="http://schemas.microsoft.com/office/drawing/2010/main" Requires="a14">
+        <mc:AlternateContent xmlns:mc="http://schemas.openxmlformats.org/markup-compatibility/2006" xmlns:a14="http://schemas.microsoft.com/office/drawing/2010/main">
+          <mc:Choice Requires="a14">
             <p:sp>
               <p:nvSpPr>
                 <p:cNvPr id="11" name="Rectangle 10">
@@ -46318,7 +46787,7 @@
               </p:txBody>
             </p:sp>
           </mc:Choice>
-          <mc:Fallback>
+          <mc:Fallback xmlns="">
             <p:sp>
               <p:nvSpPr>
                 <p:cNvPr id="11" name="Rectangle 10">
@@ -46493,8 +46962,8 @@
             </a:fontRef>
           </p:style>
         </p:cxnSp>
-        <mc:AlternateContent xmlns:mc="http://schemas.openxmlformats.org/markup-compatibility/2006">
-          <mc:Choice xmlns:a14="http://schemas.microsoft.com/office/drawing/2010/main" Requires="a14">
+        <mc:AlternateContent xmlns:mc="http://schemas.openxmlformats.org/markup-compatibility/2006" xmlns:a14="http://schemas.microsoft.com/office/drawing/2010/main">
+          <mc:Choice Requires="a14">
             <p:sp>
               <p:nvSpPr>
                 <p:cNvPr id="51" name="TextBox 50">
@@ -46563,7 +47032,7 @@
               </p:txBody>
             </p:sp>
           </mc:Choice>
-          <mc:Fallback>
+          <mc:Fallback xmlns="">
             <p:sp>
               <p:nvSpPr>
                 <p:cNvPr id="51" name="TextBox 50">
@@ -46726,8 +47195,8 @@
             </p:txBody>
           </p:sp>
         </p:grpSp>
-        <mc:AlternateContent xmlns:mc="http://schemas.openxmlformats.org/markup-compatibility/2006">
-          <mc:Choice xmlns:a14="http://schemas.microsoft.com/office/drawing/2010/main" Requires="a14">
+        <mc:AlternateContent xmlns:mc="http://schemas.openxmlformats.org/markup-compatibility/2006" xmlns:a14="http://schemas.microsoft.com/office/drawing/2010/main">
+          <mc:Choice Requires="a14">
             <p:sp>
               <p:nvSpPr>
                 <p:cNvPr id="50" name="TextBox 49">
@@ -46802,7 +47271,7 @@
               </p:txBody>
             </p:sp>
           </mc:Choice>
-          <mc:Fallback>
+          <mc:Fallback xmlns="">
             <p:sp>
               <p:nvSpPr>
                 <p:cNvPr id="50" name="TextBox 49">
@@ -46847,8 +47316,8 @@
             </p:sp>
           </mc:Fallback>
         </mc:AlternateContent>
-        <mc:AlternateContent xmlns:mc="http://schemas.openxmlformats.org/markup-compatibility/2006">
-          <mc:Choice xmlns:a14="http://schemas.microsoft.com/office/drawing/2010/main" Requires="a14">
+        <mc:AlternateContent xmlns:mc="http://schemas.openxmlformats.org/markup-compatibility/2006" xmlns:a14="http://schemas.microsoft.com/office/drawing/2010/main">
+          <mc:Choice Requires="a14">
             <p:sp>
               <p:nvSpPr>
                 <p:cNvPr id="55" name="TextBox 54">
@@ -46917,7 +47386,7 @@
               </p:txBody>
             </p:sp>
           </mc:Choice>
-          <mc:Fallback>
+          <mc:Fallback xmlns="">
             <p:sp>
               <p:nvSpPr>
                 <p:cNvPr id="55" name="TextBox 54">
@@ -47087,8 +47556,8 @@
             </a:fontRef>
           </p:style>
         </p:cxnSp>
-        <mc:AlternateContent xmlns:mc="http://schemas.openxmlformats.org/markup-compatibility/2006">
-          <mc:Choice xmlns:a14="http://schemas.microsoft.com/office/drawing/2010/main" Requires="a14">
+        <mc:AlternateContent xmlns:mc="http://schemas.openxmlformats.org/markup-compatibility/2006" xmlns:a14="http://schemas.microsoft.com/office/drawing/2010/main">
+          <mc:Choice Requires="a14">
             <p:sp>
               <p:nvSpPr>
                 <p:cNvPr id="26" name="TextBox 25">
@@ -47157,7 +47626,7 @@
               </p:txBody>
             </p:sp>
           </mc:Choice>
-          <mc:Fallback>
+          <mc:Fallback xmlns="">
             <p:sp>
               <p:nvSpPr>
                 <p:cNvPr id="26" name="TextBox 25">
@@ -47207,6 +47676,5014 @@
     <p:extLst>
       <p:ext uri="{BB962C8B-B14F-4D97-AF65-F5344CB8AC3E}">
         <p14:creationId xmlns:p14="http://schemas.microsoft.com/office/powerpoint/2010/main" val="2201110884"/>
+      </p:ext>
+    </p:extLst>
+  </p:cSld>
+  <p:clrMapOvr>
+    <a:masterClrMapping/>
+  </p:clrMapOvr>
+</p:sld>
+</file>
+
+<file path=ppt/slides/slide51.xml><?xml version="1.0" encoding="utf-8"?>
+<p:sld xmlns:a="http://schemas.openxmlformats.org/drawingml/2006/main" xmlns:r="http://schemas.openxmlformats.org/officeDocument/2006/relationships" xmlns:p="http://schemas.openxmlformats.org/presentationml/2006/main">
+  <p:cSld>
+    <p:spTree>
+      <p:nvGrpSpPr>
+        <p:cNvPr id="1" name="">
+          <a:extLst>
+            <a:ext uri="{FF2B5EF4-FFF2-40B4-BE49-F238E27FC236}">
+              <a16:creationId xmlns:a16="http://schemas.microsoft.com/office/drawing/2014/main" id="{F794AEBB-1DB3-0C45-B06E-B6487708D94E}"/>
+            </a:ext>
+          </a:extLst>
+        </p:cNvPr>
+        <p:cNvGrpSpPr/>
+        <p:nvPr/>
+      </p:nvGrpSpPr>
+      <p:grpSpPr>
+        <a:xfrm>
+          <a:off x="0" y="0"/>
+          <a:ext cx="0" cy="0"/>
+          <a:chOff x="0" y="0"/>
+          <a:chExt cx="0" cy="0"/>
+        </a:xfrm>
+      </p:grpSpPr>
+      <p:grpSp>
+        <p:nvGrpSpPr>
+          <p:cNvPr id="133" name="Group 132">
+            <a:extLst>
+              <a:ext uri="{FF2B5EF4-FFF2-40B4-BE49-F238E27FC236}">
+                <a16:creationId xmlns:a16="http://schemas.microsoft.com/office/drawing/2014/main" id="{F7B7D8FC-9645-4A44-7D00-F1E2AE598CBE}"/>
+              </a:ext>
+            </a:extLst>
+          </p:cNvPr>
+          <p:cNvGrpSpPr/>
+          <p:nvPr/>
+        </p:nvGrpSpPr>
+        <p:grpSpPr>
+          <a:xfrm>
+            <a:off x="3581399" y="2244873"/>
+            <a:ext cx="4928922" cy="2579854"/>
+            <a:chOff x="3581399" y="2244873"/>
+            <a:chExt cx="4928922" cy="2579854"/>
+          </a:xfrm>
+        </p:grpSpPr>
+        <p:sp>
+          <p:nvSpPr>
+            <p:cNvPr id="134" name="Rectangle: Rounded Corners 133">
+              <a:extLst>
+                <a:ext uri="{FF2B5EF4-FFF2-40B4-BE49-F238E27FC236}">
+                  <a16:creationId xmlns:a16="http://schemas.microsoft.com/office/drawing/2014/main" id="{90050B18-8D3F-55EF-2EB2-32D909A3DEA1}"/>
+                </a:ext>
+              </a:extLst>
+            </p:cNvPr>
+            <p:cNvSpPr/>
+            <p:nvPr/>
+          </p:nvSpPr>
+          <p:spPr>
+            <a:xfrm>
+              <a:off x="4301176" y="2438400"/>
+              <a:ext cx="3522024" cy="1981200"/>
+            </a:xfrm>
+            <a:prstGeom prst="roundRect">
+              <a:avLst/>
+            </a:prstGeom>
+            <a:solidFill>
+              <a:schemeClr val="accent6">
+                <a:lumMod val="40000"/>
+                <a:lumOff val="60000"/>
+                <a:alpha val="88000"/>
+              </a:schemeClr>
+            </a:solidFill>
+          </p:spPr>
+          <p:style>
+            <a:lnRef idx="1">
+              <a:schemeClr val="accent6"/>
+            </a:lnRef>
+            <a:fillRef idx="2">
+              <a:schemeClr val="accent6"/>
+            </a:fillRef>
+            <a:effectRef idx="1">
+              <a:schemeClr val="accent6"/>
+            </a:effectRef>
+            <a:fontRef idx="minor">
+              <a:schemeClr val="dk1"/>
+            </a:fontRef>
+          </p:style>
+          <p:txBody>
+            <a:bodyPr rtlCol="0" anchor="ctr"/>
+            <a:lstStyle/>
+            <a:p>
+              <a:pPr algn="ctr"/>
+              <a:endParaRPr lang="en-US" dirty="0"/>
+            </a:p>
+          </p:txBody>
+        </p:sp>
+        <p:cxnSp>
+          <p:nvCxnSpPr>
+            <p:cNvPr id="135" name="Straight Arrow Connector 134">
+              <a:extLst>
+                <a:ext uri="{FF2B5EF4-FFF2-40B4-BE49-F238E27FC236}">
+                  <a16:creationId xmlns:a16="http://schemas.microsoft.com/office/drawing/2014/main" id="{74C5C52F-9EF8-E099-77E3-78FBC698A9E5}"/>
+                </a:ext>
+              </a:extLst>
+            </p:cNvPr>
+            <p:cNvCxnSpPr>
+              <a:cxnSpLocks/>
+            </p:cNvCxnSpPr>
+            <p:nvPr/>
+          </p:nvCxnSpPr>
+          <p:spPr>
+            <a:xfrm flipV="1">
+              <a:off x="7924149" y="2244873"/>
+              <a:ext cx="0" cy="468000"/>
+            </a:xfrm>
+            <a:prstGeom prst="straightConnector1">
+              <a:avLst/>
+            </a:prstGeom>
+            <a:ln w="19050">
+              <a:headEnd type="none" w="med" len="med"/>
+              <a:tailEnd type="triangle" w="med" len="med"/>
+            </a:ln>
+          </p:spPr>
+          <p:style>
+            <a:lnRef idx="1">
+              <a:schemeClr val="dk1"/>
+            </a:lnRef>
+            <a:fillRef idx="0">
+              <a:schemeClr val="dk1"/>
+            </a:fillRef>
+            <a:effectRef idx="0">
+              <a:schemeClr val="dk1"/>
+            </a:effectRef>
+            <a:fontRef idx="minor">
+              <a:schemeClr val="tx1"/>
+            </a:fontRef>
+          </p:style>
+        </p:cxnSp>
+        <p:sp>
+          <p:nvSpPr>
+            <p:cNvPr id="136" name="Oval 135">
+              <a:extLst>
+                <a:ext uri="{FF2B5EF4-FFF2-40B4-BE49-F238E27FC236}">
+                  <a16:creationId xmlns:a16="http://schemas.microsoft.com/office/drawing/2014/main" id="{10C8CDDB-6BDF-ED81-4C18-815D38FC460E}"/>
+                </a:ext>
+              </a:extLst>
+            </p:cNvPr>
+            <p:cNvSpPr/>
+            <p:nvPr/>
+          </p:nvSpPr>
+          <p:spPr>
+            <a:xfrm>
+              <a:off x="4733602" y="3187865"/>
+              <a:ext cx="273050" cy="273050"/>
+            </a:xfrm>
+            <a:prstGeom prst="ellipse">
+              <a:avLst/>
+            </a:prstGeom>
+            <a:solidFill>
+              <a:schemeClr val="accent2">
+                <a:lumMod val="40000"/>
+                <a:lumOff val="60000"/>
+              </a:schemeClr>
+            </a:solidFill>
+          </p:spPr>
+          <p:style>
+            <a:lnRef idx="2">
+              <a:schemeClr val="accent1">
+                <a:shade val="15000"/>
+              </a:schemeClr>
+            </a:lnRef>
+            <a:fillRef idx="1">
+              <a:schemeClr val="accent1"/>
+            </a:fillRef>
+            <a:effectRef idx="0">
+              <a:schemeClr val="accent1"/>
+            </a:effectRef>
+            <a:fontRef idx="minor">
+              <a:schemeClr val="lt1"/>
+            </a:fontRef>
+          </p:style>
+          <p:txBody>
+            <a:bodyPr rtlCol="0" anchor="ctr"/>
+            <a:lstStyle/>
+            <a:p>
+              <a:pPr algn="ctr"/>
+              <a:r>
+                <a:rPr lang="pt-BR" dirty="0">
+                  <a:solidFill>
+                    <a:schemeClr val="tx1"/>
+                  </a:solidFill>
+                </a:rPr>
+                <a:t>x</a:t>
+              </a:r>
+              <a:endParaRPr lang="en-US" dirty="0">
+                <a:solidFill>
+                  <a:schemeClr val="tx1"/>
+                </a:solidFill>
+              </a:endParaRPr>
+            </a:p>
+          </p:txBody>
+        </p:sp>
+        <p:sp>
+          <p:nvSpPr>
+            <p:cNvPr id="137" name="Oval 136">
+              <a:extLst>
+                <a:ext uri="{FF2B5EF4-FFF2-40B4-BE49-F238E27FC236}">
+                  <a16:creationId xmlns:a16="http://schemas.microsoft.com/office/drawing/2014/main" id="{C878417F-026D-C5E4-7CD5-9AF914BD3FA8}"/>
+                </a:ext>
+              </a:extLst>
+            </p:cNvPr>
+            <p:cNvSpPr/>
+            <p:nvPr/>
+          </p:nvSpPr>
+          <p:spPr>
+            <a:xfrm>
+              <a:off x="6236481" y="2576348"/>
+              <a:ext cx="273050" cy="273050"/>
+            </a:xfrm>
+            <a:prstGeom prst="ellipse">
+              <a:avLst/>
+            </a:prstGeom>
+            <a:solidFill>
+              <a:schemeClr val="accent2">
+                <a:lumMod val="40000"/>
+                <a:lumOff val="60000"/>
+              </a:schemeClr>
+            </a:solidFill>
+          </p:spPr>
+          <p:style>
+            <a:lnRef idx="2">
+              <a:schemeClr val="accent1">
+                <a:shade val="15000"/>
+              </a:schemeClr>
+            </a:lnRef>
+            <a:fillRef idx="1">
+              <a:schemeClr val="accent1"/>
+            </a:fillRef>
+            <a:effectRef idx="0">
+              <a:schemeClr val="accent1"/>
+            </a:effectRef>
+            <a:fontRef idx="minor">
+              <a:schemeClr val="lt1"/>
+            </a:fontRef>
+          </p:style>
+          <p:txBody>
+            <a:bodyPr rtlCol="0" anchor="ctr"/>
+            <a:lstStyle/>
+            <a:p>
+              <a:pPr algn="ctr"/>
+              <a:r>
+                <a:rPr lang="pt-BR" dirty="0">
+                  <a:solidFill>
+                    <a:schemeClr val="tx1"/>
+                  </a:solidFill>
+                </a:rPr>
+                <a:t>x</a:t>
+              </a:r>
+              <a:endParaRPr lang="en-US" dirty="0">
+                <a:solidFill>
+                  <a:schemeClr val="tx1"/>
+                </a:solidFill>
+              </a:endParaRPr>
+            </a:p>
+          </p:txBody>
+        </p:sp>
+        <p:sp>
+          <p:nvSpPr>
+            <p:cNvPr id="138" name="Rectangle 137">
+              <a:extLst>
+                <a:ext uri="{FF2B5EF4-FFF2-40B4-BE49-F238E27FC236}">
+                  <a16:creationId xmlns:a16="http://schemas.microsoft.com/office/drawing/2014/main" id="{3690F93B-C813-8543-60EE-FD8C453D5D34}"/>
+                </a:ext>
+              </a:extLst>
+            </p:cNvPr>
+            <p:cNvSpPr/>
+            <p:nvPr/>
+          </p:nvSpPr>
+          <p:spPr>
+            <a:xfrm>
+              <a:off x="7076731" y="3612407"/>
+              <a:ext cx="614781" cy="297872"/>
+            </a:xfrm>
+            <a:prstGeom prst="rect">
+              <a:avLst/>
+            </a:prstGeom>
+          </p:spPr>
+          <p:style>
+            <a:lnRef idx="2">
+              <a:schemeClr val="accent2">
+                <a:shade val="15000"/>
+              </a:schemeClr>
+            </a:lnRef>
+            <a:fillRef idx="1">
+              <a:schemeClr val="accent2"/>
+            </a:fillRef>
+            <a:effectRef idx="0">
+              <a:schemeClr val="accent2"/>
+            </a:effectRef>
+            <a:fontRef idx="minor">
+              <a:schemeClr val="lt1"/>
+            </a:fontRef>
+          </p:style>
+          <p:txBody>
+            <a:bodyPr rtlCol="0" anchor="ctr"/>
+            <a:lstStyle/>
+            <a:p>
+              <a:pPr algn="ctr"/>
+              <a:r>
+                <a:rPr lang="pt-BR" dirty="0" err="1">
+                  <a:solidFill>
+                    <a:schemeClr val="tx1"/>
+                  </a:solidFill>
+                </a:rPr>
+                <a:t>tanh</a:t>
+              </a:r>
+              <a:endParaRPr lang="en-US" dirty="0">
+                <a:solidFill>
+                  <a:schemeClr val="tx1"/>
+                </a:solidFill>
+              </a:endParaRPr>
+            </a:p>
+          </p:txBody>
+        </p:sp>
+        <p:sp>
+          <p:nvSpPr>
+            <p:cNvPr id="139" name="Oval 138">
+              <a:extLst>
+                <a:ext uri="{FF2B5EF4-FFF2-40B4-BE49-F238E27FC236}">
+                  <a16:creationId xmlns:a16="http://schemas.microsoft.com/office/drawing/2014/main" id="{D95F8E15-9ACA-85AA-D57F-195E21823AC0}"/>
+                </a:ext>
+              </a:extLst>
+            </p:cNvPr>
+            <p:cNvSpPr/>
+            <p:nvPr/>
+          </p:nvSpPr>
+          <p:spPr>
+            <a:xfrm>
+              <a:off x="7247597" y="2576348"/>
+              <a:ext cx="273050" cy="273050"/>
+            </a:xfrm>
+            <a:prstGeom prst="ellipse">
+              <a:avLst/>
+            </a:prstGeom>
+            <a:solidFill>
+              <a:schemeClr val="accent2">
+                <a:lumMod val="40000"/>
+                <a:lumOff val="60000"/>
+              </a:schemeClr>
+            </a:solidFill>
+          </p:spPr>
+          <p:style>
+            <a:lnRef idx="2">
+              <a:schemeClr val="accent1">
+                <a:shade val="15000"/>
+              </a:schemeClr>
+            </a:lnRef>
+            <a:fillRef idx="1">
+              <a:schemeClr val="accent1"/>
+            </a:fillRef>
+            <a:effectRef idx="0">
+              <a:schemeClr val="accent1"/>
+            </a:effectRef>
+            <a:fontRef idx="minor">
+              <a:schemeClr val="lt1"/>
+            </a:fontRef>
+          </p:style>
+          <p:txBody>
+            <a:bodyPr rtlCol="0" anchor="ctr"/>
+            <a:lstStyle/>
+            <a:p>
+              <a:pPr algn="ctr"/>
+              <a:r>
+                <a:rPr lang="pt-BR" dirty="0">
+                  <a:solidFill>
+                    <a:schemeClr val="tx1"/>
+                  </a:solidFill>
+                </a:rPr>
+                <a:t>+</a:t>
+              </a:r>
+              <a:endParaRPr lang="en-US" dirty="0">
+                <a:solidFill>
+                  <a:schemeClr val="tx1"/>
+                </a:solidFill>
+              </a:endParaRPr>
+            </a:p>
+          </p:txBody>
+        </p:sp>
+        <mc:AlternateContent xmlns:mc="http://schemas.openxmlformats.org/markup-compatibility/2006">
+          <mc:Choice xmlns:a14="http://schemas.microsoft.com/office/drawing/2010/main" Requires="a14">
+            <p:sp>
+              <p:nvSpPr>
+                <p:cNvPr id="140" name="TextBox 139">
+                  <a:extLst>
+                    <a:ext uri="{FF2B5EF4-FFF2-40B4-BE49-F238E27FC236}">
+                      <a16:creationId xmlns:a16="http://schemas.microsoft.com/office/drawing/2014/main" id="{DAD0E2EE-D6B9-4EAA-3EA2-01FF5FF7F9A0}"/>
+                    </a:ext>
+                  </a:extLst>
+                </p:cNvPr>
+                <p:cNvSpPr txBox="1"/>
+                <p:nvPr/>
+              </p:nvSpPr>
+              <p:spPr>
+                <a:xfrm>
+                  <a:off x="3581399" y="2520191"/>
+                  <a:ext cx="511583" cy="369332"/>
+                </a:xfrm>
+                <a:prstGeom prst="rect">
+                  <a:avLst/>
+                </a:prstGeom>
+                <a:noFill/>
+              </p:spPr>
+              <p:txBody>
+                <a:bodyPr wrap="square" rtlCol="0">
+                  <a:spAutoFit/>
+                </a:bodyPr>
+                <a:lstStyle/>
+                <a:p>
+                  <a:pPr/>
+                  <a14:m>
+                    <m:oMathPara xmlns:m="http://schemas.openxmlformats.org/officeDocument/2006/math">
+                      <m:oMathParaPr>
+                        <m:jc m:val="centerGroup"/>
+                      </m:oMathParaPr>
+                      <m:oMath xmlns:m="http://schemas.openxmlformats.org/officeDocument/2006/math">
+                        <m:sSub>
+                          <m:sSubPr>
+                            <m:ctrlPr>
+                              <a:rPr lang="en-US" i="1" smtClean="0">
+                                <a:latin typeface="Cambria Math" panose="02040503050406030204" pitchFamily="18" charset="0"/>
+                              </a:rPr>
+                            </m:ctrlPr>
+                          </m:sSubPr>
+                          <m:e>
+                            <m:r>
+                              <a:rPr lang="pt-BR" b="0" i="1" smtClean="0">
+                                <a:latin typeface="Cambria Math" panose="02040503050406030204" pitchFamily="18" charset="0"/>
+                              </a:rPr>
+                              <m:t>h</m:t>
+                            </m:r>
+                          </m:e>
+                          <m:sub>
+                            <m:r>
+                              <a:rPr lang="pt-BR" b="0" i="1" smtClean="0">
+                                <a:latin typeface="Cambria Math" panose="02040503050406030204" pitchFamily="18" charset="0"/>
+                              </a:rPr>
+                              <m:t>𝑡</m:t>
+                            </m:r>
+                            <m:r>
+                              <a:rPr lang="pt-BR" b="0" i="1" smtClean="0">
+                                <a:latin typeface="Cambria Math" panose="02040503050406030204" pitchFamily="18" charset="0"/>
+                              </a:rPr>
+                              <m:t>−1</m:t>
+                            </m:r>
+                          </m:sub>
+                        </m:sSub>
+                      </m:oMath>
+                    </m:oMathPara>
+                  </a14:m>
+                  <a:endParaRPr lang="en-US" dirty="0"/>
+                </a:p>
+              </p:txBody>
+            </p:sp>
+          </mc:Choice>
+          <mc:Fallback>
+            <p:sp>
+              <p:nvSpPr>
+                <p:cNvPr id="140" name="TextBox 139">
+                  <a:extLst>
+                    <a:ext uri="{FF2B5EF4-FFF2-40B4-BE49-F238E27FC236}">
+                      <a16:creationId xmlns:a16="http://schemas.microsoft.com/office/drawing/2014/main" id="{DAD0E2EE-D6B9-4EAA-3EA2-01FF5FF7F9A0}"/>
+                    </a:ext>
+                  </a:extLst>
+                </p:cNvPr>
+                <p:cNvSpPr txBox="1">
+                  <a:spLocks noRot="1" noChangeAspect="1" noMove="1" noResize="1" noEditPoints="1" noAdjustHandles="1" noChangeArrowheads="1" noChangeShapeType="1" noTextEdit="1"/>
+                </p:cNvSpPr>
+                <p:nvPr/>
+              </p:nvSpPr>
+              <p:spPr>
+                <a:xfrm>
+                  <a:off x="3581399" y="2520191"/>
+                  <a:ext cx="511583" cy="369332"/>
+                </a:xfrm>
+                <a:prstGeom prst="rect">
+                  <a:avLst/>
+                </a:prstGeom>
+                <a:blipFill>
+                  <a:blip r:embed="rId3"/>
+                  <a:stretch>
+                    <a:fillRect r="-11905"/>
+                  </a:stretch>
+                </a:blipFill>
+              </p:spPr>
+              <p:txBody>
+                <a:bodyPr/>
+                <a:lstStyle/>
+                <a:p>
+                  <a:r>
+                    <a:rPr lang="en-US">
+                      <a:noFill/>
+                    </a:rPr>
+                    <a:t> </a:t>
+                  </a:r>
+                </a:p>
+              </p:txBody>
+            </p:sp>
+          </mc:Fallback>
+        </mc:AlternateContent>
+        <p:sp>
+          <p:nvSpPr>
+            <p:cNvPr id="141" name="Oval 140">
+              <a:extLst>
+                <a:ext uri="{FF2B5EF4-FFF2-40B4-BE49-F238E27FC236}">
+                  <a16:creationId xmlns:a16="http://schemas.microsoft.com/office/drawing/2014/main" id="{C6E8D3F7-3B24-BD33-C5A8-30120A16C309}"/>
+                </a:ext>
+              </a:extLst>
+            </p:cNvPr>
+            <p:cNvSpPr/>
+            <p:nvPr/>
+          </p:nvSpPr>
+          <p:spPr>
+            <a:xfrm>
+              <a:off x="7247597" y="3086265"/>
+              <a:ext cx="273050" cy="273050"/>
+            </a:xfrm>
+            <a:prstGeom prst="ellipse">
+              <a:avLst/>
+            </a:prstGeom>
+            <a:solidFill>
+              <a:schemeClr val="accent2">
+                <a:lumMod val="40000"/>
+                <a:lumOff val="60000"/>
+              </a:schemeClr>
+            </a:solidFill>
+          </p:spPr>
+          <p:style>
+            <a:lnRef idx="2">
+              <a:schemeClr val="accent1">
+                <a:shade val="15000"/>
+              </a:schemeClr>
+            </a:lnRef>
+            <a:fillRef idx="1">
+              <a:schemeClr val="accent1"/>
+            </a:fillRef>
+            <a:effectRef idx="0">
+              <a:schemeClr val="accent1"/>
+            </a:effectRef>
+            <a:fontRef idx="minor">
+              <a:schemeClr val="lt1"/>
+            </a:fontRef>
+          </p:style>
+          <p:txBody>
+            <a:bodyPr rtlCol="0" anchor="ctr"/>
+            <a:lstStyle/>
+            <a:p>
+              <a:pPr algn="ctr"/>
+              <a:r>
+                <a:rPr lang="pt-BR" dirty="0">
+                  <a:solidFill>
+                    <a:schemeClr val="tx1"/>
+                  </a:solidFill>
+                </a:rPr>
+                <a:t>x</a:t>
+              </a:r>
+              <a:endParaRPr lang="en-US" dirty="0">
+                <a:solidFill>
+                  <a:schemeClr val="tx1"/>
+                </a:solidFill>
+              </a:endParaRPr>
+            </a:p>
+          </p:txBody>
+        </p:sp>
+        <mc:AlternateContent xmlns:mc="http://schemas.openxmlformats.org/markup-compatibility/2006">
+          <mc:Choice xmlns:a14="http://schemas.microsoft.com/office/drawing/2010/main" Requires="a14">
+            <p:sp>
+              <p:nvSpPr>
+                <p:cNvPr id="142" name="Rectangle 141">
+                  <a:extLst>
+                    <a:ext uri="{FF2B5EF4-FFF2-40B4-BE49-F238E27FC236}">
+                      <a16:creationId xmlns:a16="http://schemas.microsoft.com/office/drawing/2014/main" id="{BA9026C2-ACF3-B134-C819-4C9178161B1B}"/>
+                    </a:ext>
+                  </a:extLst>
+                </p:cNvPr>
+                <p:cNvSpPr/>
+                <p:nvPr/>
+              </p:nvSpPr>
+              <p:spPr>
+                <a:xfrm>
+                  <a:off x="6206433" y="3607165"/>
+                  <a:ext cx="332510" cy="297872"/>
+                </a:xfrm>
+                <a:prstGeom prst="rect">
+                  <a:avLst/>
+                </a:prstGeom>
+              </p:spPr>
+              <p:style>
+                <a:lnRef idx="2">
+                  <a:schemeClr val="accent2">
+                    <a:shade val="15000"/>
+                  </a:schemeClr>
+                </a:lnRef>
+                <a:fillRef idx="1">
+                  <a:schemeClr val="accent2"/>
+                </a:fillRef>
+                <a:effectRef idx="0">
+                  <a:schemeClr val="accent2"/>
+                </a:effectRef>
+                <a:fontRef idx="minor">
+                  <a:schemeClr val="lt1"/>
+                </a:fontRef>
+              </p:style>
+              <p:txBody>
+                <a:bodyPr rtlCol="0" anchor="ctr"/>
+                <a:lstStyle/>
+                <a:p>
+                  <a:pPr algn="ctr"/>
+                  <a14:m>
+                    <m:oMathPara xmlns:m="http://schemas.openxmlformats.org/officeDocument/2006/math">
+                      <m:oMathParaPr>
+                        <m:jc m:val="center"/>
+                      </m:oMathParaPr>
+                      <m:oMath xmlns:m="http://schemas.openxmlformats.org/officeDocument/2006/math">
+                        <m:r>
+                          <a:rPr lang="en-US" i="1" smtClean="0">
+                            <a:solidFill>
+                              <a:schemeClr val="tx1"/>
+                            </a:solidFill>
+                            <a:latin typeface="Cambria Math" panose="02040503050406030204" pitchFamily="18" charset="0"/>
+                            <a:ea typeface="Cambria Math" panose="02040503050406030204" pitchFamily="18" charset="0"/>
+                          </a:rPr>
+                          <m:t>𝜎</m:t>
+                        </m:r>
+                      </m:oMath>
+                    </m:oMathPara>
+                  </a14:m>
+                  <a:endParaRPr lang="en-US" dirty="0">
+                    <a:solidFill>
+                      <a:schemeClr val="tx1"/>
+                    </a:solidFill>
+                  </a:endParaRPr>
+                </a:p>
+              </p:txBody>
+            </p:sp>
+          </mc:Choice>
+          <mc:Fallback>
+            <p:sp>
+              <p:nvSpPr>
+                <p:cNvPr id="142" name="Rectangle 141">
+                  <a:extLst>
+                    <a:ext uri="{FF2B5EF4-FFF2-40B4-BE49-F238E27FC236}">
+                      <a16:creationId xmlns:a16="http://schemas.microsoft.com/office/drawing/2014/main" id="{BA9026C2-ACF3-B134-C819-4C9178161B1B}"/>
+                    </a:ext>
+                  </a:extLst>
+                </p:cNvPr>
+                <p:cNvSpPr>
+                  <a:spLocks noRot="1" noChangeAspect="1" noMove="1" noResize="1" noEditPoints="1" noAdjustHandles="1" noChangeArrowheads="1" noChangeShapeType="1" noTextEdit="1"/>
+                </p:cNvSpPr>
+                <p:nvPr/>
+              </p:nvSpPr>
+              <p:spPr>
+                <a:xfrm>
+                  <a:off x="6206433" y="3607165"/>
+                  <a:ext cx="332510" cy="297872"/>
+                </a:xfrm>
+                <a:prstGeom prst="rect">
+                  <a:avLst/>
+                </a:prstGeom>
+                <a:blipFill>
+                  <a:blip r:embed="rId4"/>
+                  <a:stretch>
+                    <a:fillRect/>
+                  </a:stretch>
+                </a:blipFill>
+              </p:spPr>
+              <p:txBody>
+                <a:bodyPr/>
+                <a:lstStyle/>
+                <a:p>
+                  <a:r>
+                    <a:rPr lang="en-US">
+                      <a:noFill/>
+                    </a:rPr>
+                    <a:t> </a:t>
+                  </a:r>
+                </a:p>
+              </p:txBody>
+            </p:sp>
+          </mc:Fallback>
+        </mc:AlternateContent>
+        <mc:AlternateContent xmlns:mc="http://schemas.openxmlformats.org/markup-compatibility/2006">
+          <mc:Choice xmlns:a14="http://schemas.microsoft.com/office/drawing/2010/main" Requires="a14">
+            <p:sp>
+              <p:nvSpPr>
+                <p:cNvPr id="143" name="Rectangle 142">
+                  <a:extLst>
+                    <a:ext uri="{FF2B5EF4-FFF2-40B4-BE49-F238E27FC236}">
+                      <a16:creationId xmlns:a16="http://schemas.microsoft.com/office/drawing/2014/main" id="{1628C659-015D-1DA5-CA6B-E8B9389E03EE}"/>
+                    </a:ext>
+                  </a:extLst>
+                </p:cNvPr>
+                <p:cNvSpPr/>
+                <p:nvPr/>
+              </p:nvSpPr>
+              <p:spPr>
+                <a:xfrm>
+                  <a:off x="5326611" y="3610051"/>
+                  <a:ext cx="332510" cy="297872"/>
+                </a:xfrm>
+                <a:prstGeom prst="rect">
+                  <a:avLst/>
+                </a:prstGeom>
+              </p:spPr>
+              <p:style>
+                <a:lnRef idx="2">
+                  <a:schemeClr val="accent2">
+                    <a:shade val="15000"/>
+                  </a:schemeClr>
+                </a:lnRef>
+                <a:fillRef idx="1">
+                  <a:schemeClr val="accent2"/>
+                </a:fillRef>
+                <a:effectRef idx="0">
+                  <a:schemeClr val="accent2"/>
+                </a:effectRef>
+                <a:fontRef idx="minor">
+                  <a:schemeClr val="lt1"/>
+                </a:fontRef>
+              </p:style>
+              <p:txBody>
+                <a:bodyPr rtlCol="0" anchor="ctr"/>
+                <a:lstStyle/>
+                <a:p>
+                  <a:pPr algn="ctr"/>
+                  <a14:m>
+                    <m:oMathPara xmlns:m="http://schemas.openxmlformats.org/officeDocument/2006/math">
+                      <m:oMathParaPr>
+                        <m:jc m:val="center"/>
+                      </m:oMathParaPr>
+                      <m:oMath xmlns:m="http://schemas.openxmlformats.org/officeDocument/2006/math">
+                        <m:r>
+                          <a:rPr lang="en-US" i="1" smtClean="0">
+                            <a:solidFill>
+                              <a:schemeClr val="tx1"/>
+                            </a:solidFill>
+                            <a:latin typeface="Cambria Math" panose="02040503050406030204" pitchFamily="18" charset="0"/>
+                            <a:ea typeface="Cambria Math" panose="02040503050406030204" pitchFamily="18" charset="0"/>
+                          </a:rPr>
+                          <m:t>𝜎</m:t>
+                        </m:r>
+                      </m:oMath>
+                    </m:oMathPara>
+                  </a14:m>
+                  <a:endParaRPr lang="en-US" dirty="0">
+                    <a:solidFill>
+                      <a:schemeClr val="tx1"/>
+                    </a:solidFill>
+                  </a:endParaRPr>
+                </a:p>
+              </p:txBody>
+            </p:sp>
+          </mc:Choice>
+          <mc:Fallback>
+            <p:sp>
+              <p:nvSpPr>
+                <p:cNvPr id="143" name="Rectangle 142">
+                  <a:extLst>
+                    <a:ext uri="{FF2B5EF4-FFF2-40B4-BE49-F238E27FC236}">
+                      <a16:creationId xmlns:a16="http://schemas.microsoft.com/office/drawing/2014/main" id="{1628C659-015D-1DA5-CA6B-E8B9389E03EE}"/>
+                    </a:ext>
+                  </a:extLst>
+                </p:cNvPr>
+                <p:cNvSpPr>
+                  <a:spLocks noRot="1" noChangeAspect="1" noMove="1" noResize="1" noEditPoints="1" noAdjustHandles="1" noChangeArrowheads="1" noChangeShapeType="1" noTextEdit="1"/>
+                </p:cNvSpPr>
+                <p:nvPr/>
+              </p:nvSpPr>
+              <p:spPr>
+                <a:xfrm>
+                  <a:off x="5326611" y="3610051"/>
+                  <a:ext cx="332510" cy="297872"/>
+                </a:xfrm>
+                <a:prstGeom prst="rect">
+                  <a:avLst/>
+                </a:prstGeom>
+                <a:blipFill>
+                  <a:blip r:embed="rId5"/>
+                  <a:stretch>
+                    <a:fillRect/>
+                  </a:stretch>
+                </a:blipFill>
+              </p:spPr>
+              <p:txBody>
+                <a:bodyPr/>
+                <a:lstStyle/>
+                <a:p>
+                  <a:r>
+                    <a:rPr lang="en-US">
+                      <a:noFill/>
+                    </a:rPr>
+                    <a:t> </a:t>
+                  </a:r>
+                </a:p>
+              </p:txBody>
+            </p:sp>
+          </mc:Fallback>
+        </mc:AlternateContent>
+        <p:sp>
+          <p:nvSpPr>
+            <p:cNvPr id="144" name="Oval 143">
+              <a:extLst>
+                <a:ext uri="{FF2B5EF4-FFF2-40B4-BE49-F238E27FC236}">
+                  <a16:creationId xmlns:a16="http://schemas.microsoft.com/office/drawing/2014/main" id="{A167DEAA-A4BC-3DC5-B475-EBB7590347D8}"/>
+                </a:ext>
+              </a:extLst>
+            </p:cNvPr>
+            <p:cNvSpPr/>
+            <p:nvPr/>
+          </p:nvSpPr>
+          <p:spPr>
+            <a:xfrm>
+              <a:off x="6680078" y="3084943"/>
+              <a:ext cx="273050" cy="273050"/>
+            </a:xfrm>
+            <a:prstGeom prst="ellipse">
+              <a:avLst/>
+            </a:prstGeom>
+            <a:solidFill>
+              <a:schemeClr val="accent2">
+                <a:lumMod val="40000"/>
+                <a:lumOff val="60000"/>
+              </a:schemeClr>
+            </a:solidFill>
+          </p:spPr>
+          <p:style>
+            <a:lnRef idx="2">
+              <a:schemeClr val="accent1">
+                <a:shade val="15000"/>
+              </a:schemeClr>
+            </a:lnRef>
+            <a:fillRef idx="1">
+              <a:schemeClr val="accent1"/>
+            </a:fillRef>
+            <a:effectRef idx="0">
+              <a:schemeClr val="accent1"/>
+            </a:effectRef>
+            <a:fontRef idx="minor">
+              <a:schemeClr val="lt1"/>
+            </a:fontRef>
+          </p:style>
+          <p:txBody>
+            <a:bodyPr rtlCol="0" anchor="ctr"/>
+            <a:lstStyle/>
+            <a:p>
+              <a:pPr algn="ctr"/>
+              <a:endParaRPr lang="en-US" sz="1000" dirty="0">
+                <a:solidFill>
+                  <a:schemeClr val="tx1"/>
+                </a:solidFill>
+              </a:endParaRPr>
+            </a:p>
+          </p:txBody>
+        </p:sp>
+        <p:cxnSp>
+          <p:nvCxnSpPr>
+            <p:cNvPr id="145" name="Straight Connector 144">
+              <a:extLst>
+                <a:ext uri="{FF2B5EF4-FFF2-40B4-BE49-F238E27FC236}">
+                  <a16:creationId xmlns:a16="http://schemas.microsoft.com/office/drawing/2014/main" id="{117D1456-CB87-98A7-0EB1-D7D8E8F96920}"/>
+                </a:ext>
+              </a:extLst>
+            </p:cNvPr>
+            <p:cNvCxnSpPr>
+              <a:cxnSpLocks/>
+              <a:stCxn id="140" idx="3"/>
+              <a:endCxn id="137" idx="2"/>
+            </p:cNvCxnSpPr>
+            <p:nvPr/>
+          </p:nvCxnSpPr>
+          <p:spPr>
+            <a:xfrm>
+              <a:off x="4092982" y="2704857"/>
+              <a:ext cx="2143499" cy="8016"/>
+            </a:xfrm>
+            <a:prstGeom prst="line">
+              <a:avLst/>
+            </a:prstGeom>
+            <a:ln w="19050"/>
+          </p:spPr>
+          <p:style>
+            <a:lnRef idx="1">
+              <a:schemeClr val="dk1"/>
+            </a:lnRef>
+            <a:fillRef idx="0">
+              <a:schemeClr val="dk1"/>
+            </a:fillRef>
+            <a:effectRef idx="0">
+              <a:schemeClr val="dk1"/>
+            </a:effectRef>
+            <a:fontRef idx="minor">
+              <a:schemeClr val="tx1"/>
+            </a:fontRef>
+          </p:style>
+        </p:cxnSp>
+        <p:cxnSp>
+          <p:nvCxnSpPr>
+            <p:cNvPr id="146" name="Straight Arrow Connector 145">
+              <a:extLst>
+                <a:ext uri="{FF2B5EF4-FFF2-40B4-BE49-F238E27FC236}">
+                  <a16:creationId xmlns:a16="http://schemas.microsoft.com/office/drawing/2014/main" id="{58E46E7A-E1E3-D586-BCF0-E5340AD35998}"/>
+                </a:ext>
+              </a:extLst>
+            </p:cNvPr>
+            <p:cNvCxnSpPr>
+              <a:cxnSpLocks/>
+              <a:stCxn id="142" idx="0"/>
+              <a:endCxn id="137" idx="4"/>
+            </p:cNvCxnSpPr>
+            <p:nvPr/>
+          </p:nvCxnSpPr>
+          <p:spPr>
+            <a:xfrm flipV="1">
+              <a:off x="6372688" y="2849398"/>
+              <a:ext cx="318" cy="757767"/>
+            </a:xfrm>
+            <a:prstGeom prst="straightConnector1">
+              <a:avLst/>
+            </a:prstGeom>
+            <a:ln w="19050">
+              <a:solidFill>
+                <a:schemeClr val="tx1"/>
+              </a:solidFill>
+              <a:tailEnd type="triangle"/>
+            </a:ln>
+          </p:spPr>
+          <p:style>
+            <a:lnRef idx="1">
+              <a:schemeClr val="accent1"/>
+            </a:lnRef>
+            <a:fillRef idx="0">
+              <a:schemeClr val="accent1"/>
+            </a:fillRef>
+            <a:effectRef idx="0">
+              <a:schemeClr val="accent1"/>
+            </a:effectRef>
+            <a:fontRef idx="minor">
+              <a:schemeClr val="tx1"/>
+            </a:fontRef>
+          </p:style>
+        </p:cxnSp>
+        <p:sp>
+          <p:nvSpPr>
+            <p:cNvPr id="147" name="TextBox 146">
+              <a:extLst>
+                <a:ext uri="{FF2B5EF4-FFF2-40B4-BE49-F238E27FC236}">
+                  <a16:creationId xmlns:a16="http://schemas.microsoft.com/office/drawing/2014/main" id="{2B2D2713-80F9-8691-6DD2-110DFD52B741}"/>
+                </a:ext>
+              </a:extLst>
+            </p:cNvPr>
+            <p:cNvSpPr txBox="1"/>
+            <p:nvPr/>
+          </p:nvSpPr>
+          <p:spPr>
+            <a:xfrm>
+              <a:off x="6643013" y="3036802"/>
+              <a:ext cx="369937" cy="369332"/>
+            </a:xfrm>
+            <a:prstGeom prst="rect">
+              <a:avLst/>
+            </a:prstGeom>
+            <a:noFill/>
+          </p:spPr>
+          <p:txBody>
+            <a:bodyPr wrap="square">
+              <a:spAutoFit/>
+            </a:bodyPr>
+            <a:lstStyle/>
+            <a:p>
+              <a:pPr algn="ctr"/>
+              <a:r>
+                <a:rPr lang="pt-BR" dirty="0">
+                  <a:solidFill>
+                    <a:schemeClr val="tx1"/>
+                  </a:solidFill>
+                </a:rPr>
+                <a:t>1-</a:t>
+              </a:r>
+              <a:endParaRPr lang="en-US" dirty="0">
+                <a:solidFill>
+                  <a:schemeClr val="tx1"/>
+                </a:solidFill>
+              </a:endParaRPr>
+            </a:p>
+          </p:txBody>
+        </p:sp>
+        <p:cxnSp>
+          <p:nvCxnSpPr>
+            <p:cNvPr id="148" name="Straight Connector 147">
+              <a:extLst>
+                <a:ext uri="{FF2B5EF4-FFF2-40B4-BE49-F238E27FC236}">
+                  <a16:creationId xmlns:a16="http://schemas.microsoft.com/office/drawing/2014/main" id="{89B28A53-8903-1E7F-2167-9D4D45F09B8D}"/>
+                </a:ext>
+              </a:extLst>
+            </p:cNvPr>
+            <p:cNvCxnSpPr>
+              <a:stCxn id="137" idx="6"/>
+              <a:endCxn id="139" idx="2"/>
+            </p:cNvCxnSpPr>
+            <p:nvPr/>
+          </p:nvCxnSpPr>
+          <p:spPr>
+            <a:xfrm>
+              <a:off x="6509531" y="2712873"/>
+              <a:ext cx="738066" cy="0"/>
+            </a:xfrm>
+            <a:prstGeom prst="line">
+              <a:avLst/>
+            </a:prstGeom>
+            <a:ln w="19050">
+              <a:solidFill>
+                <a:schemeClr val="tx1"/>
+              </a:solidFill>
+            </a:ln>
+          </p:spPr>
+          <p:style>
+            <a:lnRef idx="1">
+              <a:schemeClr val="accent1"/>
+            </a:lnRef>
+            <a:fillRef idx="0">
+              <a:schemeClr val="accent1"/>
+            </a:fillRef>
+            <a:effectRef idx="0">
+              <a:schemeClr val="accent1"/>
+            </a:effectRef>
+            <a:fontRef idx="minor">
+              <a:schemeClr val="tx1"/>
+            </a:fontRef>
+          </p:style>
+        </p:cxnSp>
+        <p:cxnSp>
+          <p:nvCxnSpPr>
+            <p:cNvPr id="149" name="Straight Arrow Connector 148">
+              <a:extLst>
+                <a:ext uri="{FF2B5EF4-FFF2-40B4-BE49-F238E27FC236}">
+                  <a16:creationId xmlns:a16="http://schemas.microsoft.com/office/drawing/2014/main" id="{D4E7BBA5-09C3-80E0-1CAB-039A11EDF1AE}"/>
+                </a:ext>
+              </a:extLst>
+            </p:cNvPr>
+            <p:cNvCxnSpPr>
+              <a:stCxn id="141" idx="0"/>
+              <a:endCxn id="139" idx="4"/>
+            </p:cNvCxnSpPr>
+            <p:nvPr/>
+          </p:nvCxnSpPr>
+          <p:spPr>
+            <a:xfrm flipV="1">
+              <a:off x="7384122" y="2849398"/>
+              <a:ext cx="0" cy="236867"/>
+            </a:xfrm>
+            <a:prstGeom prst="straightConnector1">
+              <a:avLst/>
+            </a:prstGeom>
+            <a:ln w="19050">
+              <a:solidFill>
+                <a:schemeClr val="tx1"/>
+              </a:solidFill>
+              <a:tailEnd type="triangle"/>
+            </a:ln>
+          </p:spPr>
+          <p:style>
+            <a:lnRef idx="1">
+              <a:schemeClr val="accent1"/>
+            </a:lnRef>
+            <a:fillRef idx="0">
+              <a:schemeClr val="accent1"/>
+            </a:fillRef>
+            <a:effectRef idx="0">
+              <a:schemeClr val="accent1"/>
+            </a:effectRef>
+            <a:fontRef idx="minor">
+              <a:schemeClr val="tx1"/>
+            </a:fontRef>
+          </p:style>
+        </p:cxnSp>
+        <p:cxnSp>
+          <p:nvCxnSpPr>
+            <p:cNvPr id="150" name="Straight Connector 149">
+              <a:extLst>
+                <a:ext uri="{FF2B5EF4-FFF2-40B4-BE49-F238E27FC236}">
+                  <a16:creationId xmlns:a16="http://schemas.microsoft.com/office/drawing/2014/main" id="{92B680C6-14AA-8FD4-B377-1166A521DAE9}"/>
+                </a:ext>
+              </a:extLst>
+            </p:cNvPr>
+            <p:cNvCxnSpPr>
+              <a:cxnSpLocks/>
+              <a:stCxn id="138" idx="0"/>
+              <a:endCxn id="141" idx="4"/>
+            </p:cNvCxnSpPr>
+            <p:nvPr/>
+          </p:nvCxnSpPr>
+          <p:spPr>
+            <a:xfrm flipV="1">
+              <a:off x="7384122" y="3359315"/>
+              <a:ext cx="0" cy="253092"/>
+            </a:xfrm>
+            <a:prstGeom prst="line">
+              <a:avLst/>
+            </a:prstGeom>
+            <a:ln w="19050">
+              <a:headEnd type="none" w="med" len="med"/>
+              <a:tailEnd type="triangle" w="med" len="med"/>
+            </a:ln>
+          </p:spPr>
+          <p:style>
+            <a:lnRef idx="1">
+              <a:schemeClr val="dk1"/>
+            </a:lnRef>
+            <a:fillRef idx="0">
+              <a:schemeClr val="dk1"/>
+            </a:fillRef>
+            <a:effectRef idx="0">
+              <a:schemeClr val="dk1"/>
+            </a:effectRef>
+            <a:fontRef idx="minor">
+              <a:schemeClr val="tx1"/>
+            </a:fontRef>
+          </p:style>
+        </p:cxnSp>
+        <p:cxnSp>
+          <p:nvCxnSpPr>
+            <p:cNvPr id="151" name="Straight Arrow Connector 150">
+              <a:extLst>
+                <a:ext uri="{FF2B5EF4-FFF2-40B4-BE49-F238E27FC236}">
+                  <a16:creationId xmlns:a16="http://schemas.microsoft.com/office/drawing/2014/main" id="{629C1E56-B71B-009E-0B81-04D4491F1D52}"/>
+                </a:ext>
+              </a:extLst>
+            </p:cNvPr>
+            <p:cNvCxnSpPr>
+              <a:cxnSpLocks/>
+              <a:stCxn id="139" idx="6"/>
+            </p:cNvCxnSpPr>
+            <p:nvPr/>
+          </p:nvCxnSpPr>
+          <p:spPr>
+            <a:xfrm>
+              <a:off x="7520646" y="2712873"/>
+              <a:ext cx="648000" cy="3115"/>
+            </a:xfrm>
+            <a:prstGeom prst="straightConnector1">
+              <a:avLst/>
+            </a:prstGeom>
+            <a:ln w="19050">
+              <a:tailEnd type="triangle"/>
+            </a:ln>
+          </p:spPr>
+          <p:style>
+            <a:lnRef idx="1">
+              <a:schemeClr val="dk1"/>
+            </a:lnRef>
+            <a:fillRef idx="0">
+              <a:schemeClr val="dk1"/>
+            </a:fillRef>
+            <a:effectRef idx="0">
+              <a:schemeClr val="dk1"/>
+            </a:effectRef>
+            <a:fontRef idx="minor">
+              <a:schemeClr val="tx1"/>
+            </a:fontRef>
+          </p:style>
+        </p:cxnSp>
+        <mc:AlternateContent xmlns:mc="http://schemas.openxmlformats.org/markup-compatibility/2006">
+          <mc:Choice xmlns:a14="http://schemas.microsoft.com/office/drawing/2010/main" Requires="a14">
+            <p:sp>
+              <p:nvSpPr>
+                <p:cNvPr id="152" name="TextBox 151">
+                  <a:extLst>
+                    <a:ext uri="{FF2B5EF4-FFF2-40B4-BE49-F238E27FC236}">
+                      <a16:creationId xmlns:a16="http://schemas.microsoft.com/office/drawing/2014/main" id="{13433DA1-D8F5-0EEE-EEC8-A05EC5E55CCC}"/>
+                    </a:ext>
+                  </a:extLst>
+                </p:cNvPr>
+                <p:cNvSpPr txBox="1"/>
+                <p:nvPr/>
+              </p:nvSpPr>
+              <p:spPr>
+                <a:xfrm>
+                  <a:off x="8146477" y="2520191"/>
+                  <a:ext cx="363844" cy="369332"/>
+                </a:xfrm>
+                <a:prstGeom prst="rect">
+                  <a:avLst/>
+                </a:prstGeom>
+                <a:noFill/>
+              </p:spPr>
+              <p:txBody>
+                <a:bodyPr wrap="square" rtlCol="0">
+                  <a:spAutoFit/>
+                </a:bodyPr>
+                <a:lstStyle/>
+                <a:p>
+                  <a:pPr algn="just"/>
+                  <a14:m>
+                    <m:oMathPara xmlns:m="http://schemas.openxmlformats.org/officeDocument/2006/math">
+                      <m:oMathParaPr>
+                        <m:jc m:val="left"/>
+                      </m:oMathParaPr>
+                      <m:oMath xmlns:m="http://schemas.openxmlformats.org/officeDocument/2006/math">
+                        <m:sSub>
+                          <m:sSubPr>
+                            <m:ctrlPr>
+                              <a:rPr lang="en-US" i="1" smtClean="0">
+                                <a:latin typeface="Cambria Math" panose="02040503050406030204" pitchFamily="18" charset="0"/>
+                              </a:rPr>
+                            </m:ctrlPr>
+                          </m:sSubPr>
+                          <m:e>
+                            <m:r>
+                              <a:rPr lang="pt-BR" b="0" i="1" smtClean="0">
+                                <a:latin typeface="Cambria Math" panose="02040503050406030204" pitchFamily="18" charset="0"/>
+                              </a:rPr>
+                              <m:t>h</m:t>
+                            </m:r>
+                          </m:e>
+                          <m:sub>
+                            <m:r>
+                              <a:rPr lang="pt-BR" b="0" i="1" smtClean="0">
+                                <a:latin typeface="Cambria Math" panose="02040503050406030204" pitchFamily="18" charset="0"/>
+                              </a:rPr>
+                              <m:t>𝑡</m:t>
+                            </m:r>
+                          </m:sub>
+                        </m:sSub>
+                      </m:oMath>
+                    </m:oMathPara>
+                  </a14:m>
+                  <a:endParaRPr lang="en-US" dirty="0"/>
+                </a:p>
+              </p:txBody>
+            </p:sp>
+          </mc:Choice>
+          <mc:Fallback>
+            <p:sp>
+              <p:nvSpPr>
+                <p:cNvPr id="152" name="TextBox 151">
+                  <a:extLst>
+                    <a:ext uri="{FF2B5EF4-FFF2-40B4-BE49-F238E27FC236}">
+                      <a16:creationId xmlns:a16="http://schemas.microsoft.com/office/drawing/2014/main" id="{13433DA1-D8F5-0EEE-EEC8-A05EC5E55CCC}"/>
+                    </a:ext>
+                  </a:extLst>
+                </p:cNvPr>
+                <p:cNvSpPr txBox="1">
+                  <a:spLocks noRot="1" noChangeAspect="1" noMove="1" noResize="1" noEditPoints="1" noAdjustHandles="1" noChangeArrowheads="1" noChangeShapeType="1" noTextEdit="1"/>
+                </p:cNvSpPr>
+                <p:nvPr/>
+              </p:nvSpPr>
+              <p:spPr>
+                <a:xfrm>
+                  <a:off x="8146477" y="2520191"/>
+                  <a:ext cx="363844" cy="369332"/>
+                </a:xfrm>
+                <a:prstGeom prst="rect">
+                  <a:avLst/>
+                </a:prstGeom>
+                <a:blipFill>
+                  <a:blip r:embed="rId6"/>
+                  <a:stretch>
+                    <a:fillRect/>
+                  </a:stretch>
+                </a:blipFill>
+              </p:spPr>
+              <p:txBody>
+                <a:bodyPr/>
+                <a:lstStyle/>
+                <a:p>
+                  <a:r>
+                    <a:rPr lang="en-US">
+                      <a:noFill/>
+                    </a:rPr>
+                    <a:t> </a:t>
+                  </a:r>
+                </a:p>
+              </p:txBody>
+            </p:sp>
+          </mc:Fallback>
+        </mc:AlternateContent>
+        <p:cxnSp>
+          <p:nvCxnSpPr>
+            <p:cNvPr id="153" name="Connector: Elbow 152">
+              <a:extLst>
+                <a:ext uri="{FF2B5EF4-FFF2-40B4-BE49-F238E27FC236}">
+                  <a16:creationId xmlns:a16="http://schemas.microsoft.com/office/drawing/2014/main" id="{105EEC1D-3C43-F2A9-88AE-42FA04BF1309}"/>
+                </a:ext>
+              </a:extLst>
+            </p:cNvPr>
+            <p:cNvCxnSpPr>
+              <a:stCxn id="143" idx="0"/>
+              <a:endCxn id="136" idx="6"/>
+            </p:cNvCxnSpPr>
+            <p:nvPr/>
+          </p:nvCxnSpPr>
+          <p:spPr>
+            <a:xfrm rot="16200000" flipV="1">
+              <a:off x="5106929" y="3224114"/>
+              <a:ext cx="285661" cy="486214"/>
+            </a:xfrm>
+            <a:prstGeom prst="bentConnector2">
+              <a:avLst/>
+            </a:prstGeom>
+            <a:ln w="19050">
+              <a:tailEnd type="triangle"/>
+            </a:ln>
+          </p:spPr>
+          <p:style>
+            <a:lnRef idx="1">
+              <a:schemeClr val="dk1"/>
+            </a:lnRef>
+            <a:fillRef idx="0">
+              <a:schemeClr val="dk1"/>
+            </a:fillRef>
+            <a:effectRef idx="0">
+              <a:schemeClr val="dk1"/>
+            </a:effectRef>
+            <a:fontRef idx="minor">
+              <a:schemeClr val="tx1"/>
+            </a:fontRef>
+          </p:style>
+        </p:cxnSp>
+        <p:cxnSp>
+          <p:nvCxnSpPr>
+            <p:cNvPr id="154" name="Straight Connector 153">
+              <a:extLst>
+                <a:ext uri="{FF2B5EF4-FFF2-40B4-BE49-F238E27FC236}">
+                  <a16:creationId xmlns:a16="http://schemas.microsoft.com/office/drawing/2014/main" id="{2EE7824F-8399-FB24-5842-DC6000E156F9}"/>
+                </a:ext>
+              </a:extLst>
+            </p:cNvPr>
+            <p:cNvCxnSpPr/>
+            <p:nvPr/>
+          </p:nvCxnSpPr>
+          <p:spPr>
+            <a:xfrm flipV="1">
+              <a:off x="4870127" y="2712873"/>
+              <a:ext cx="0" cy="474992"/>
+            </a:xfrm>
+            <a:prstGeom prst="line">
+              <a:avLst/>
+            </a:prstGeom>
+            <a:ln w="19050">
+              <a:headEnd type="triangle" w="med" len="med"/>
+              <a:tailEnd type="none" w="med" len="med"/>
+            </a:ln>
+          </p:spPr>
+          <p:style>
+            <a:lnRef idx="1">
+              <a:schemeClr val="dk1"/>
+            </a:lnRef>
+            <a:fillRef idx="0">
+              <a:schemeClr val="dk1"/>
+            </a:fillRef>
+            <a:effectRef idx="0">
+              <a:schemeClr val="dk1"/>
+            </a:effectRef>
+            <a:fontRef idx="minor">
+              <a:schemeClr val="tx1"/>
+            </a:fontRef>
+          </p:style>
+        </p:cxnSp>
+        <p:cxnSp>
+          <p:nvCxnSpPr>
+            <p:cNvPr id="155" name="Connector: Elbow 154">
+              <a:extLst>
+                <a:ext uri="{FF2B5EF4-FFF2-40B4-BE49-F238E27FC236}">
+                  <a16:creationId xmlns:a16="http://schemas.microsoft.com/office/drawing/2014/main" id="{BB4CE004-4534-6E2D-73FA-39554F4B499D}"/>
+                </a:ext>
+              </a:extLst>
+            </p:cNvPr>
+            <p:cNvCxnSpPr>
+              <a:stCxn id="136" idx="4"/>
+              <a:endCxn id="138" idx="2"/>
+            </p:cNvCxnSpPr>
+            <p:nvPr/>
+          </p:nvCxnSpPr>
+          <p:spPr>
+            <a:xfrm rot="16200000" flipH="1">
+              <a:off x="5902442" y="2428599"/>
+              <a:ext cx="449364" cy="2513995"/>
+            </a:xfrm>
+            <a:prstGeom prst="bentConnector3">
+              <a:avLst>
+                <a:gd name="adj1" fmla="val 171009"/>
+              </a:avLst>
+            </a:prstGeom>
+            <a:ln w="19050"/>
+          </p:spPr>
+          <p:style>
+            <a:lnRef idx="1">
+              <a:schemeClr val="dk1"/>
+            </a:lnRef>
+            <a:fillRef idx="0">
+              <a:schemeClr val="dk1"/>
+            </a:fillRef>
+            <a:effectRef idx="0">
+              <a:schemeClr val="dk1"/>
+            </a:effectRef>
+            <a:fontRef idx="minor">
+              <a:schemeClr val="tx1"/>
+            </a:fontRef>
+          </p:style>
+        </p:cxnSp>
+        <mc:AlternateContent xmlns:mc="http://schemas.openxmlformats.org/markup-compatibility/2006">
+          <mc:Choice xmlns:a14="http://schemas.microsoft.com/office/drawing/2010/main" Requires="a14">
+            <p:sp>
+              <p:nvSpPr>
+                <p:cNvPr id="156" name="TextBox 155">
+                  <a:extLst>
+                    <a:ext uri="{FF2B5EF4-FFF2-40B4-BE49-F238E27FC236}">
+                      <a16:creationId xmlns:a16="http://schemas.microsoft.com/office/drawing/2014/main" id="{62C37C40-4525-A06C-71DB-6F6890D83DE4}"/>
+                    </a:ext>
+                  </a:extLst>
+                </p:cNvPr>
+                <p:cNvSpPr txBox="1"/>
+                <p:nvPr/>
+              </p:nvSpPr>
+              <p:spPr>
+                <a:xfrm>
+                  <a:off x="4270792" y="4455395"/>
+                  <a:ext cx="446532" cy="369332"/>
+                </a:xfrm>
+                <a:prstGeom prst="rect">
+                  <a:avLst/>
+                </a:prstGeom>
+                <a:noFill/>
+              </p:spPr>
+              <p:txBody>
+                <a:bodyPr wrap="none" rtlCol="0">
+                  <a:spAutoFit/>
+                </a:bodyPr>
+                <a:lstStyle/>
+                <a:p>
+                  <a:pPr/>
+                  <a14:m>
+                    <m:oMathPara xmlns:m="http://schemas.openxmlformats.org/officeDocument/2006/math">
+                      <m:oMathParaPr>
+                        <m:jc m:val="centerGroup"/>
+                      </m:oMathParaPr>
+                      <m:oMath xmlns:m="http://schemas.openxmlformats.org/officeDocument/2006/math">
+                        <m:sSub>
+                          <m:sSubPr>
+                            <m:ctrlPr>
+                              <a:rPr lang="en-US" i="1" smtClean="0">
+                                <a:latin typeface="Cambria Math" panose="02040503050406030204" pitchFamily="18" charset="0"/>
+                              </a:rPr>
+                            </m:ctrlPr>
+                          </m:sSubPr>
+                          <m:e>
+                            <m:r>
+                              <a:rPr lang="pt-BR" b="0" i="1" smtClean="0">
+                                <a:latin typeface="Cambria Math" panose="02040503050406030204" pitchFamily="18" charset="0"/>
+                              </a:rPr>
+                              <m:t>𝑥</m:t>
+                            </m:r>
+                          </m:e>
+                          <m:sub>
+                            <m:r>
+                              <a:rPr lang="pt-BR" b="0" i="1" smtClean="0">
+                                <a:latin typeface="Cambria Math" panose="02040503050406030204" pitchFamily="18" charset="0"/>
+                              </a:rPr>
+                              <m:t>𝑡</m:t>
+                            </m:r>
+                          </m:sub>
+                        </m:sSub>
+                      </m:oMath>
+                    </m:oMathPara>
+                  </a14:m>
+                  <a:endParaRPr lang="en-US" dirty="0"/>
+                </a:p>
+              </p:txBody>
+            </p:sp>
+          </mc:Choice>
+          <mc:Fallback>
+            <p:sp>
+              <p:nvSpPr>
+                <p:cNvPr id="156" name="TextBox 155">
+                  <a:extLst>
+                    <a:ext uri="{FF2B5EF4-FFF2-40B4-BE49-F238E27FC236}">
+                      <a16:creationId xmlns:a16="http://schemas.microsoft.com/office/drawing/2014/main" id="{62C37C40-4525-A06C-71DB-6F6890D83DE4}"/>
+                    </a:ext>
+                  </a:extLst>
+                </p:cNvPr>
+                <p:cNvSpPr txBox="1">
+                  <a:spLocks noRot="1" noChangeAspect="1" noMove="1" noResize="1" noEditPoints="1" noAdjustHandles="1" noChangeArrowheads="1" noChangeShapeType="1" noTextEdit="1"/>
+                </p:cNvSpPr>
+                <p:nvPr/>
+              </p:nvSpPr>
+              <p:spPr>
+                <a:xfrm>
+                  <a:off x="4270792" y="4455395"/>
+                  <a:ext cx="446532" cy="369332"/>
+                </a:xfrm>
+                <a:prstGeom prst="rect">
+                  <a:avLst/>
+                </a:prstGeom>
+                <a:blipFill>
+                  <a:blip r:embed="rId7"/>
+                  <a:stretch>
+                    <a:fillRect/>
+                  </a:stretch>
+                </a:blipFill>
+              </p:spPr>
+              <p:txBody>
+                <a:bodyPr/>
+                <a:lstStyle/>
+                <a:p>
+                  <a:r>
+                    <a:rPr lang="en-US">
+                      <a:noFill/>
+                    </a:rPr>
+                    <a:t> </a:t>
+                  </a:r>
+                </a:p>
+              </p:txBody>
+            </p:sp>
+          </mc:Fallback>
+        </mc:AlternateContent>
+        <p:cxnSp>
+          <p:nvCxnSpPr>
+            <p:cNvPr id="157" name="Connector: Elbow 156">
+              <a:extLst>
+                <a:ext uri="{FF2B5EF4-FFF2-40B4-BE49-F238E27FC236}">
+                  <a16:creationId xmlns:a16="http://schemas.microsoft.com/office/drawing/2014/main" id="{F21A6FE6-B20A-D2B8-1A2A-BF0CD68E0322}"/>
+                </a:ext>
+              </a:extLst>
+            </p:cNvPr>
+            <p:cNvCxnSpPr>
+              <a:cxnSpLocks/>
+            </p:cNvCxnSpPr>
+            <p:nvPr/>
+          </p:nvCxnSpPr>
+          <p:spPr>
+            <a:xfrm rot="5400000">
+              <a:off x="5779325" y="2625890"/>
+              <a:ext cx="320409" cy="2889186"/>
+            </a:xfrm>
+            <a:prstGeom prst="bentConnector2">
+              <a:avLst/>
+            </a:prstGeom>
+            <a:ln w="19050">
+              <a:headEnd type="triangle" w="med" len="med"/>
+              <a:tailEnd type="none" w="med" len="med"/>
+            </a:ln>
+          </p:spPr>
+          <p:style>
+            <a:lnRef idx="1">
+              <a:schemeClr val="dk1"/>
+            </a:lnRef>
+            <a:fillRef idx="0">
+              <a:schemeClr val="dk1"/>
+            </a:fillRef>
+            <a:effectRef idx="0">
+              <a:schemeClr val="dk1"/>
+            </a:effectRef>
+            <a:fontRef idx="minor">
+              <a:schemeClr val="tx1"/>
+            </a:fontRef>
+          </p:style>
+        </p:cxnSp>
+        <p:cxnSp>
+          <p:nvCxnSpPr>
+            <p:cNvPr id="158" name="Straight Connector 157">
+              <a:extLst>
+                <a:ext uri="{FF2B5EF4-FFF2-40B4-BE49-F238E27FC236}">
+                  <a16:creationId xmlns:a16="http://schemas.microsoft.com/office/drawing/2014/main" id="{6C9CC7CA-AB4F-1D5E-EE6E-AA03D2E71EB1}"/>
+                </a:ext>
+              </a:extLst>
+            </p:cNvPr>
+            <p:cNvCxnSpPr/>
+            <p:nvPr/>
+          </p:nvCxnSpPr>
+          <p:spPr>
+            <a:xfrm flipV="1">
+              <a:off x="4502150" y="2712873"/>
+              <a:ext cx="0" cy="1111415"/>
+            </a:xfrm>
+            <a:prstGeom prst="line">
+              <a:avLst/>
+            </a:prstGeom>
+            <a:ln w="19050">
+              <a:solidFill>
+                <a:schemeClr val="tx1"/>
+              </a:solidFill>
+            </a:ln>
+          </p:spPr>
+          <p:style>
+            <a:lnRef idx="1">
+              <a:schemeClr val="accent1"/>
+            </a:lnRef>
+            <a:fillRef idx="0">
+              <a:schemeClr val="accent1"/>
+            </a:fillRef>
+            <a:effectRef idx="0">
+              <a:schemeClr val="accent1"/>
+            </a:effectRef>
+            <a:fontRef idx="minor">
+              <a:schemeClr val="tx1"/>
+            </a:fontRef>
+          </p:style>
+        </p:cxnSp>
+        <p:cxnSp>
+          <p:nvCxnSpPr>
+            <p:cNvPr id="159" name="Connector: Elbow 158">
+              <a:extLst>
+                <a:ext uri="{FF2B5EF4-FFF2-40B4-BE49-F238E27FC236}">
+                  <a16:creationId xmlns:a16="http://schemas.microsoft.com/office/drawing/2014/main" id="{CA24E0D2-DBB3-B807-0058-DB1675A40AD5}"/>
+                </a:ext>
+              </a:extLst>
+            </p:cNvPr>
+            <p:cNvCxnSpPr>
+              <a:cxnSpLocks/>
+              <a:stCxn id="160" idx="2"/>
+              <a:endCxn id="142" idx="2"/>
+            </p:cNvCxnSpPr>
+            <p:nvPr/>
+          </p:nvCxnSpPr>
+          <p:spPr>
+            <a:xfrm flipV="1">
+              <a:off x="4600574" y="3905037"/>
+              <a:ext cx="1772114" cy="124675"/>
+            </a:xfrm>
+            <a:prstGeom prst="bentConnector2">
+              <a:avLst/>
+            </a:prstGeom>
+            <a:ln w="19050">
+              <a:headEnd type="none" w="med" len="med"/>
+              <a:tailEnd type="triangle" w="med" len="med"/>
+            </a:ln>
+          </p:spPr>
+          <p:style>
+            <a:lnRef idx="1">
+              <a:schemeClr val="dk1"/>
+            </a:lnRef>
+            <a:fillRef idx="0">
+              <a:schemeClr val="dk1"/>
+            </a:fillRef>
+            <a:effectRef idx="0">
+              <a:schemeClr val="dk1"/>
+            </a:effectRef>
+            <a:fontRef idx="minor">
+              <a:schemeClr val="tx1"/>
+            </a:fontRef>
+          </p:style>
+        </p:cxnSp>
+        <p:sp>
+          <p:nvSpPr>
+            <p:cNvPr id="160" name="Freeform: Shape 159">
+              <a:extLst>
+                <a:ext uri="{FF2B5EF4-FFF2-40B4-BE49-F238E27FC236}">
+                  <a16:creationId xmlns:a16="http://schemas.microsoft.com/office/drawing/2014/main" id="{388429B5-EC77-54D8-F1D7-DD4559DEA260}"/>
+                </a:ext>
+              </a:extLst>
+            </p:cNvPr>
+            <p:cNvSpPr/>
+            <p:nvPr/>
+          </p:nvSpPr>
+          <p:spPr>
+            <a:xfrm>
+              <a:off x="4495799" y="3802856"/>
+              <a:ext cx="104775" cy="226856"/>
+            </a:xfrm>
+            <a:custGeom>
+              <a:avLst/>
+              <a:gdLst>
+                <a:gd name="csX0" fmla="*/ 6107 w 106120"/>
+                <a:gd name="csY0" fmla="*/ 0 h 214313"/>
+                <a:gd name="csX1" fmla="*/ 10870 w 106120"/>
+                <a:gd name="csY1" fmla="*/ 157163 h 214313"/>
+                <a:gd name="csX2" fmla="*/ 106120 w 106120"/>
+                <a:gd name="csY2" fmla="*/ 214313 h 214313"/>
+              </a:gdLst>
+              <a:ahLst/>
+              <a:cxnLst>
+                <a:cxn ang="0">
+                  <a:pos x="csX0" y="csY0"/>
+                </a:cxn>
+                <a:cxn ang="0">
+                  <a:pos x="csX1" y="csY1"/>
+                </a:cxn>
+                <a:cxn ang="0">
+                  <a:pos x="csX2" y="csY2"/>
+                </a:cxn>
+              </a:cxnLst>
+              <a:rect l="l" t="t" r="r" b="b"/>
+              <a:pathLst>
+                <a:path w="106120" h="214313">
+                  <a:moveTo>
+                    <a:pt x="6107" y="0"/>
+                  </a:moveTo>
+                  <a:cubicBezTo>
+                    <a:pt x="154" y="60722"/>
+                    <a:pt x="-5799" y="121444"/>
+                    <a:pt x="10870" y="157163"/>
+                  </a:cubicBezTo>
+                  <a:cubicBezTo>
+                    <a:pt x="27539" y="192882"/>
+                    <a:pt x="66829" y="203597"/>
+                    <a:pt x="106120" y="214313"/>
+                  </a:cubicBezTo>
+                </a:path>
+              </a:pathLst>
+            </a:custGeom>
+            <a:noFill/>
+            <a:ln w="19050">
+              <a:solidFill>
+                <a:schemeClr val="tx1"/>
+              </a:solidFill>
+            </a:ln>
+          </p:spPr>
+          <p:style>
+            <a:lnRef idx="2">
+              <a:schemeClr val="accent1">
+                <a:shade val="15000"/>
+              </a:schemeClr>
+            </a:lnRef>
+            <a:fillRef idx="1">
+              <a:schemeClr val="accent1"/>
+            </a:fillRef>
+            <a:effectRef idx="0">
+              <a:schemeClr val="accent1"/>
+            </a:effectRef>
+            <a:fontRef idx="minor">
+              <a:schemeClr val="lt1"/>
+            </a:fontRef>
+          </p:style>
+          <p:txBody>
+            <a:bodyPr rtlCol="0" anchor="ctr"/>
+            <a:lstStyle/>
+            <a:p>
+              <a:pPr algn="ctr"/>
+              <a:endParaRPr lang="en-US"/>
+            </a:p>
+          </p:txBody>
+        </p:sp>
+        <p:cxnSp>
+          <p:nvCxnSpPr>
+            <p:cNvPr id="161" name="Straight Connector 160">
+              <a:extLst>
+                <a:ext uri="{FF2B5EF4-FFF2-40B4-BE49-F238E27FC236}">
+                  <a16:creationId xmlns:a16="http://schemas.microsoft.com/office/drawing/2014/main" id="{EB9F10BE-C0D9-DCE6-20B3-0600C34F7790}"/>
+                </a:ext>
+              </a:extLst>
+            </p:cNvPr>
+            <p:cNvCxnSpPr/>
+            <p:nvPr/>
+          </p:nvCxnSpPr>
+          <p:spPr>
+            <a:xfrm flipV="1">
+              <a:off x="4500561" y="4140756"/>
+              <a:ext cx="0" cy="396000"/>
+            </a:xfrm>
+            <a:prstGeom prst="line">
+              <a:avLst/>
+            </a:prstGeom>
+            <a:ln w="19050">
+              <a:solidFill>
+                <a:schemeClr val="tx1"/>
+              </a:solidFill>
+            </a:ln>
+          </p:spPr>
+          <p:style>
+            <a:lnRef idx="1">
+              <a:schemeClr val="accent1"/>
+            </a:lnRef>
+            <a:fillRef idx="0">
+              <a:schemeClr val="accent1"/>
+            </a:fillRef>
+            <a:effectRef idx="0">
+              <a:schemeClr val="accent1"/>
+            </a:effectRef>
+            <a:fontRef idx="minor">
+              <a:schemeClr val="tx1"/>
+            </a:fontRef>
+          </p:style>
+        </p:cxnSp>
+        <p:sp>
+          <p:nvSpPr>
+            <p:cNvPr id="162" name="Freeform: Shape 161">
+              <a:extLst>
+                <a:ext uri="{FF2B5EF4-FFF2-40B4-BE49-F238E27FC236}">
+                  <a16:creationId xmlns:a16="http://schemas.microsoft.com/office/drawing/2014/main" id="{1F9CCA16-0915-4D37-C307-5E13D4257933}"/>
+                </a:ext>
+              </a:extLst>
+            </p:cNvPr>
+            <p:cNvSpPr/>
+            <p:nvPr/>
+          </p:nvSpPr>
+          <p:spPr>
+            <a:xfrm rot="5170363">
+              <a:off x="4558343" y="3970802"/>
+              <a:ext cx="104775" cy="226856"/>
+            </a:xfrm>
+            <a:custGeom>
+              <a:avLst/>
+              <a:gdLst>
+                <a:gd name="csX0" fmla="*/ 6107 w 106120"/>
+                <a:gd name="csY0" fmla="*/ 0 h 214313"/>
+                <a:gd name="csX1" fmla="*/ 10870 w 106120"/>
+                <a:gd name="csY1" fmla="*/ 157163 h 214313"/>
+                <a:gd name="csX2" fmla="*/ 106120 w 106120"/>
+                <a:gd name="csY2" fmla="*/ 214313 h 214313"/>
+              </a:gdLst>
+              <a:ahLst/>
+              <a:cxnLst>
+                <a:cxn ang="0">
+                  <a:pos x="csX0" y="csY0"/>
+                </a:cxn>
+                <a:cxn ang="0">
+                  <a:pos x="csX1" y="csY1"/>
+                </a:cxn>
+                <a:cxn ang="0">
+                  <a:pos x="csX2" y="csY2"/>
+                </a:cxn>
+              </a:cxnLst>
+              <a:rect l="l" t="t" r="r" b="b"/>
+              <a:pathLst>
+                <a:path w="106120" h="214313">
+                  <a:moveTo>
+                    <a:pt x="6107" y="0"/>
+                  </a:moveTo>
+                  <a:cubicBezTo>
+                    <a:pt x="154" y="60722"/>
+                    <a:pt x="-5799" y="121444"/>
+                    <a:pt x="10870" y="157163"/>
+                  </a:cubicBezTo>
+                  <a:cubicBezTo>
+                    <a:pt x="27539" y="192882"/>
+                    <a:pt x="66829" y="203597"/>
+                    <a:pt x="106120" y="214313"/>
+                  </a:cubicBezTo>
+                </a:path>
+              </a:pathLst>
+            </a:custGeom>
+            <a:noFill/>
+            <a:ln w="19050">
+              <a:solidFill>
+                <a:schemeClr val="tx1"/>
+              </a:solidFill>
+            </a:ln>
+          </p:spPr>
+          <p:style>
+            <a:lnRef idx="2">
+              <a:schemeClr val="accent1">
+                <a:shade val="15000"/>
+              </a:schemeClr>
+            </a:lnRef>
+            <a:fillRef idx="1">
+              <a:schemeClr val="accent1"/>
+            </a:fillRef>
+            <a:effectRef idx="0">
+              <a:schemeClr val="accent1"/>
+            </a:effectRef>
+            <a:fontRef idx="minor">
+              <a:schemeClr val="lt1"/>
+            </a:fontRef>
+          </p:style>
+          <p:txBody>
+            <a:bodyPr rtlCol="0" anchor="ctr"/>
+            <a:lstStyle/>
+            <a:p>
+              <a:pPr algn="ctr"/>
+              <a:endParaRPr lang="en-US"/>
+            </a:p>
+          </p:txBody>
+        </p:sp>
+        <p:cxnSp>
+          <p:nvCxnSpPr>
+            <p:cNvPr id="163" name="Straight Connector 162">
+              <a:extLst>
+                <a:ext uri="{FF2B5EF4-FFF2-40B4-BE49-F238E27FC236}">
+                  <a16:creationId xmlns:a16="http://schemas.microsoft.com/office/drawing/2014/main" id="{2472D226-670D-5BCA-F37F-C3B918721002}"/>
+                </a:ext>
+              </a:extLst>
+            </p:cNvPr>
+            <p:cNvCxnSpPr>
+              <a:cxnSpLocks/>
+              <a:stCxn id="143" idx="2"/>
+            </p:cNvCxnSpPr>
+            <p:nvPr/>
+          </p:nvCxnSpPr>
+          <p:spPr>
+            <a:xfrm>
+              <a:off x="5492866" y="3907923"/>
+              <a:ext cx="0" cy="116465"/>
+            </a:xfrm>
+            <a:prstGeom prst="line">
+              <a:avLst/>
+            </a:prstGeom>
+            <a:ln w="19050">
+              <a:headEnd type="triangle" w="med" len="med"/>
+              <a:tailEnd type="none" w="med" len="med"/>
+            </a:ln>
+          </p:spPr>
+          <p:style>
+            <a:lnRef idx="1">
+              <a:schemeClr val="dk1"/>
+            </a:lnRef>
+            <a:fillRef idx="0">
+              <a:schemeClr val="dk1"/>
+            </a:fillRef>
+            <a:effectRef idx="0">
+              <a:schemeClr val="dk1"/>
+            </a:effectRef>
+            <a:fontRef idx="minor">
+              <a:schemeClr val="tx1"/>
+            </a:fontRef>
+          </p:style>
+        </p:cxnSp>
+        <mc:AlternateContent xmlns:mc="http://schemas.openxmlformats.org/markup-compatibility/2006">
+          <mc:Choice xmlns:a14="http://schemas.microsoft.com/office/drawing/2010/main" Requires="a14">
+            <p:sp>
+              <p:nvSpPr>
+                <p:cNvPr id="164" name="TextBox 163">
+                  <a:extLst>
+                    <a:ext uri="{FF2B5EF4-FFF2-40B4-BE49-F238E27FC236}">
+                      <a16:creationId xmlns:a16="http://schemas.microsoft.com/office/drawing/2014/main" id="{AF66BBF7-1C5B-A091-3F98-EC9EFC352EA7}"/>
+                    </a:ext>
+                  </a:extLst>
+                </p:cNvPr>
+                <p:cNvSpPr txBox="1"/>
+                <p:nvPr/>
+              </p:nvSpPr>
+              <p:spPr>
+                <a:xfrm>
+                  <a:off x="6002906" y="3222817"/>
+                  <a:ext cx="431913" cy="369332"/>
+                </a:xfrm>
+                <a:prstGeom prst="rect">
+                  <a:avLst/>
+                </a:prstGeom>
+                <a:noFill/>
+              </p:spPr>
+              <p:txBody>
+                <a:bodyPr wrap="none" rtlCol="0">
+                  <a:spAutoFit/>
+                </a:bodyPr>
+                <a:lstStyle/>
+                <a:p>
+                  <a:pPr/>
+                  <a14:m>
+                    <m:oMathPara xmlns:m="http://schemas.openxmlformats.org/officeDocument/2006/math">
+                      <m:oMathParaPr>
+                        <m:jc m:val="centerGroup"/>
+                      </m:oMathParaPr>
+                      <m:oMath xmlns:m="http://schemas.openxmlformats.org/officeDocument/2006/math">
+                        <m:sSub>
+                          <m:sSubPr>
+                            <m:ctrlPr>
+                              <a:rPr lang="en-US" i="1" smtClean="0">
+                                <a:latin typeface="Cambria Math" panose="02040503050406030204" pitchFamily="18" charset="0"/>
+                              </a:rPr>
+                            </m:ctrlPr>
+                          </m:sSubPr>
+                          <m:e>
+                            <m:r>
+                              <a:rPr lang="pt-BR" b="0" i="1" smtClean="0">
+                                <a:latin typeface="Cambria Math" panose="02040503050406030204" pitchFamily="18" charset="0"/>
+                              </a:rPr>
+                              <m:t>𝑧</m:t>
+                            </m:r>
+                          </m:e>
+                          <m:sub>
+                            <m:r>
+                              <a:rPr lang="pt-BR" b="0" i="1" smtClean="0">
+                                <a:latin typeface="Cambria Math" panose="02040503050406030204" pitchFamily="18" charset="0"/>
+                              </a:rPr>
+                              <m:t>𝑡</m:t>
+                            </m:r>
+                          </m:sub>
+                        </m:sSub>
+                      </m:oMath>
+                    </m:oMathPara>
+                  </a14:m>
+                  <a:endParaRPr lang="en-US" dirty="0"/>
+                </a:p>
+              </p:txBody>
+            </p:sp>
+          </mc:Choice>
+          <mc:Fallback>
+            <p:sp>
+              <p:nvSpPr>
+                <p:cNvPr id="164" name="TextBox 163">
+                  <a:extLst>
+                    <a:ext uri="{FF2B5EF4-FFF2-40B4-BE49-F238E27FC236}">
+                      <a16:creationId xmlns:a16="http://schemas.microsoft.com/office/drawing/2014/main" id="{AF66BBF7-1C5B-A091-3F98-EC9EFC352EA7}"/>
+                    </a:ext>
+                  </a:extLst>
+                </p:cNvPr>
+                <p:cNvSpPr txBox="1">
+                  <a:spLocks noRot="1" noChangeAspect="1" noMove="1" noResize="1" noEditPoints="1" noAdjustHandles="1" noChangeArrowheads="1" noChangeShapeType="1" noTextEdit="1"/>
+                </p:cNvSpPr>
+                <p:nvPr/>
+              </p:nvSpPr>
+              <p:spPr>
+                <a:xfrm>
+                  <a:off x="6002906" y="3222817"/>
+                  <a:ext cx="431913" cy="369332"/>
+                </a:xfrm>
+                <a:prstGeom prst="rect">
+                  <a:avLst/>
+                </a:prstGeom>
+                <a:blipFill>
+                  <a:blip r:embed="rId8"/>
+                  <a:stretch>
+                    <a:fillRect/>
+                  </a:stretch>
+                </a:blipFill>
+              </p:spPr>
+              <p:txBody>
+                <a:bodyPr/>
+                <a:lstStyle/>
+                <a:p>
+                  <a:r>
+                    <a:rPr lang="en-US">
+                      <a:noFill/>
+                    </a:rPr>
+                    <a:t> </a:t>
+                  </a:r>
+                </a:p>
+              </p:txBody>
+            </p:sp>
+          </mc:Fallback>
+        </mc:AlternateContent>
+        <mc:AlternateContent xmlns:mc="http://schemas.openxmlformats.org/markup-compatibility/2006">
+          <mc:Choice xmlns:a14="http://schemas.microsoft.com/office/drawing/2010/main" Requires="a14">
+            <p:sp>
+              <p:nvSpPr>
+                <p:cNvPr id="165" name="TextBox 164">
+                  <a:extLst>
+                    <a:ext uri="{FF2B5EF4-FFF2-40B4-BE49-F238E27FC236}">
+                      <a16:creationId xmlns:a16="http://schemas.microsoft.com/office/drawing/2014/main" id="{3DD599C4-3F95-4407-2AF1-A0D0C08AD7CC}"/>
+                    </a:ext>
+                  </a:extLst>
+                </p:cNvPr>
+                <p:cNvSpPr txBox="1"/>
+                <p:nvPr/>
+              </p:nvSpPr>
+              <p:spPr>
+                <a:xfrm>
+                  <a:off x="5122198" y="3247949"/>
+                  <a:ext cx="408958" cy="369332"/>
+                </a:xfrm>
+                <a:prstGeom prst="rect">
+                  <a:avLst/>
+                </a:prstGeom>
+                <a:noFill/>
+              </p:spPr>
+              <p:txBody>
+                <a:bodyPr wrap="none" rtlCol="0">
+                  <a:spAutoFit/>
+                </a:bodyPr>
+                <a:lstStyle/>
+                <a:p>
+                  <a:pPr/>
+                  <a14:m>
+                    <m:oMathPara xmlns:m="http://schemas.openxmlformats.org/officeDocument/2006/math">
+                      <m:oMathParaPr>
+                        <m:jc m:val="centerGroup"/>
+                      </m:oMathParaPr>
+                      <m:oMath xmlns:m="http://schemas.openxmlformats.org/officeDocument/2006/math">
+                        <m:sSub>
+                          <m:sSubPr>
+                            <m:ctrlPr>
+                              <a:rPr lang="en-US" i="1" smtClean="0">
+                                <a:latin typeface="Cambria Math" panose="02040503050406030204" pitchFamily="18" charset="0"/>
+                              </a:rPr>
+                            </m:ctrlPr>
+                          </m:sSubPr>
+                          <m:e>
+                            <m:r>
+                              <a:rPr lang="pt-BR" b="0" i="1" smtClean="0">
+                                <a:latin typeface="Cambria Math" panose="02040503050406030204" pitchFamily="18" charset="0"/>
+                              </a:rPr>
+                              <m:t>𝑟</m:t>
+                            </m:r>
+                          </m:e>
+                          <m:sub>
+                            <m:r>
+                              <a:rPr lang="pt-BR" b="0" i="1" smtClean="0">
+                                <a:latin typeface="Cambria Math" panose="02040503050406030204" pitchFamily="18" charset="0"/>
+                              </a:rPr>
+                              <m:t>𝑡</m:t>
+                            </m:r>
+                          </m:sub>
+                        </m:sSub>
+                      </m:oMath>
+                    </m:oMathPara>
+                  </a14:m>
+                  <a:endParaRPr lang="en-US" dirty="0"/>
+                </a:p>
+              </p:txBody>
+            </p:sp>
+          </mc:Choice>
+          <mc:Fallback>
+            <p:sp>
+              <p:nvSpPr>
+                <p:cNvPr id="165" name="TextBox 164">
+                  <a:extLst>
+                    <a:ext uri="{FF2B5EF4-FFF2-40B4-BE49-F238E27FC236}">
+                      <a16:creationId xmlns:a16="http://schemas.microsoft.com/office/drawing/2014/main" id="{3DD599C4-3F95-4407-2AF1-A0D0C08AD7CC}"/>
+                    </a:ext>
+                  </a:extLst>
+                </p:cNvPr>
+                <p:cNvSpPr txBox="1">
+                  <a:spLocks noRot="1" noChangeAspect="1" noMove="1" noResize="1" noEditPoints="1" noAdjustHandles="1" noChangeArrowheads="1" noChangeShapeType="1" noTextEdit="1"/>
+                </p:cNvSpPr>
+                <p:nvPr/>
+              </p:nvSpPr>
+              <p:spPr>
+                <a:xfrm>
+                  <a:off x="5122198" y="3247949"/>
+                  <a:ext cx="408958" cy="369332"/>
+                </a:xfrm>
+                <a:prstGeom prst="rect">
+                  <a:avLst/>
+                </a:prstGeom>
+                <a:blipFill>
+                  <a:blip r:embed="rId9"/>
+                  <a:stretch>
+                    <a:fillRect/>
+                  </a:stretch>
+                </a:blipFill>
+              </p:spPr>
+              <p:txBody>
+                <a:bodyPr/>
+                <a:lstStyle/>
+                <a:p>
+                  <a:r>
+                    <a:rPr lang="en-US">
+                      <a:noFill/>
+                    </a:rPr>
+                    <a:t> </a:t>
+                  </a:r>
+                </a:p>
+              </p:txBody>
+            </p:sp>
+          </mc:Fallback>
+        </mc:AlternateContent>
+        <mc:AlternateContent xmlns:mc="http://schemas.openxmlformats.org/markup-compatibility/2006">
+          <mc:Choice xmlns:a14="http://schemas.microsoft.com/office/drawing/2010/main" Requires="a14">
+            <p:sp>
+              <p:nvSpPr>
+                <p:cNvPr id="166" name="TextBox 165">
+                  <a:extLst>
+                    <a:ext uri="{FF2B5EF4-FFF2-40B4-BE49-F238E27FC236}">
+                      <a16:creationId xmlns:a16="http://schemas.microsoft.com/office/drawing/2014/main" id="{450F4BB0-A5D6-64C7-220A-31E7EF22B78D}"/>
+                    </a:ext>
+                  </a:extLst>
+                </p:cNvPr>
+                <p:cNvSpPr txBox="1"/>
+                <p:nvPr/>
+              </p:nvSpPr>
+              <p:spPr>
+                <a:xfrm>
+                  <a:off x="7376868" y="3269551"/>
+                  <a:ext cx="453586" cy="381643"/>
+                </a:xfrm>
+                <a:prstGeom prst="rect">
+                  <a:avLst/>
+                </a:prstGeom>
+                <a:noFill/>
+              </p:spPr>
+              <p:txBody>
+                <a:bodyPr wrap="none" rtlCol="0">
+                  <a:spAutoFit/>
+                </a:bodyPr>
+                <a:lstStyle/>
+                <a:p>
+                  <a:pPr/>
+                  <a14:m>
+                    <m:oMathPara xmlns:m="http://schemas.openxmlformats.org/officeDocument/2006/math">
+                      <m:oMathParaPr>
+                        <m:jc m:val="centerGroup"/>
+                      </m:oMathParaPr>
+                      <m:oMath xmlns:m="http://schemas.openxmlformats.org/officeDocument/2006/math">
+                        <m:sSub>
+                          <m:sSubPr>
+                            <m:ctrlPr>
+                              <a:rPr lang="en-US" i="1" smtClean="0">
+                                <a:latin typeface="Cambria Math" panose="02040503050406030204" pitchFamily="18" charset="0"/>
+                              </a:rPr>
+                            </m:ctrlPr>
+                          </m:sSubPr>
+                          <m:e>
+                            <m:acc>
+                              <m:accPr>
+                                <m:chr m:val="̃"/>
+                                <m:ctrlPr>
+                                  <a:rPr lang="en-US" i="1">
+                                    <a:latin typeface="Cambria Math" panose="02040503050406030204" pitchFamily="18" charset="0"/>
+                                  </a:rPr>
+                                </m:ctrlPr>
+                              </m:accPr>
+                              <m:e>
+                                <m:r>
+                                  <a:rPr lang="pt-BR" b="0" i="1" smtClean="0">
+                                    <a:latin typeface="Cambria Math" panose="02040503050406030204" pitchFamily="18" charset="0"/>
+                                  </a:rPr>
+                                  <m:t>h</m:t>
+                                </m:r>
+                              </m:e>
+                            </m:acc>
+                          </m:e>
+                          <m:sub>
+                            <m:r>
+                              <a:rPr lang="pt-BR" b="0" i="1" smtClean="0">
+                                <a:latin typeface="Cambria Math" panose="02040503050406030204" pitchFamily="18" charset="0"/>
+                              </a:rPr>
+                              <m:t>𝑡</m:t>
+                            </m:r>
+                          </m:sub>
+                        </m:sSub>
+                      </m:oMath>
+                    </m:oMathPara>
+                  </a14:m>
+                  <a:endParaRPr lang="en-US" dirty="0"/>
+                </a:p>
+              </p:txBody>
+            </p:sp>
+          </mc:Choice>
+          <mc:Fallback>
+            <p:sp>
+              <p:nvSpPr>
+                <p:cNvPr id="166" name="TextBox 165">
+                  <a:extLst>
+                    <a:ext uri="{FF2B5EF4-FFF2-40B4-BE49-F238E27FC236}">
+                      <a16:creationId xmlns:a16="http://schemas.microsoft.com/office/drawing/2014/main" id="{450F4BB0-A5D6-64C7-220A-31E7EF22B78D}"/>
+                    </a:ext>
+                  </a:extLst>
+                </p:cNvPr>
+                <p:cNvSpPr txBox="1">
+                  <a:spLocks noRot="1" noChangeAspect="1" noMove="1" noResize="1" noEditPoints="1" noAdjustHandles="1" noChangeArrowheads="1" noChangeShapeType="1" noTextEdit="1"/>
+                </p:cNvSpPr>
+                <p:nvPr/>
+              </p:nvSpPr>
+              <p:spPr>
+                <a:xfrm>
+                  <a:off x="7376868" y="3269551"/>
+                  <a:ext cx="453586" cy="381643"/>
+                </a:xfrm>
+                <a:prstGeom prst="rect">
+                  <a:avLst/>
+                </a:prstGeom>
+                <a:blipFill>
+                  <a:blip r:embed="rId10"/>
+                  <a:stretch>
+                    <a:fillRect t="-4762" r="-6667"/>
+                  </a:stretch>
+                </a:blipFill>
+              </p:spPr>
+              <p:txBody>
+                <a:bodyPr/>
+                <a:lstStyle/>
+                <a:p>
+                  <a:r>
+                    <a:rPr lang="en-US">
+                      <a:noFill/>
+                    </a:rPr>
+                    <a:t> </a:t>
+                  </a:r>
+                </a:p>
+              </p:txBody>
+            </p:sp>
+          </mc:Fallback>
+        </mc:AlternateContent>
+        <p:cxnSp>
+          <p:nvCxnSpPr>
+            <p:cNvPr id="173" name="Straight Arrow Connector 172">
+              <a:extLst>
+                <a:ext uri="{FF2B5EF4-FFF2-40B4-BE49-F238E27FC236}">
+                  <a16:creationId xmlns:a16="http://schemas.microsoft.com/office/drawing/2014/main" id="{392EC775-E042-840D-378B-90F1077C2FE0}"/>
+                </a:ext>
+              </a:extLst>
+            </p:cNvPr>
+            <p:cNvCxnSpPr>
+              <a:cxnSpLocks/>
+              <a:endCxn id="144" idx="2"/>
+            </p:cNvCxnSpPr>
+            <p:nvPr/>
+          </p:nvCxnSpPr>
+          <p:spPr>
+            <a:xfrm>
+              <a:off x="6372688" y="3221468"/>
+              <a:ext cx="307390" cy="0"/>
+            </a:xfrm>
+            <a:prstGeom prst="straightConnector1">
+              <a:avLst/>
+            </a:prstGeom>
+            <a:ln w="19050">
+              <a:tailEnd type="triangle"/>
+            </a:ln>
+          </p:spPr>
+          <p:style>
+            <a:lnRef idx="1">
+              <a:schemeClr val="dk1"/>
+            </a:lnRef>
+            <a:fillRef idx="0">
+              <a:schemeClr val="dk1"/>
+            </a:fillRef>
+            <a:effectRef idx="0">
+              <a:schemeClr val="dk1"/>
+            </a:effectRef>
+            <a:fontRef idx="minor">
+              <a:schemeClr val="tx1"/>
+            </a:fontRef>
+          </p:style>
+        </p:cxnSp>
+        <p:cxnSp>
+          <p:nvCxnSpPr>
+            <p:cNvPr id="174" name="Straight Arrow Connector 173">
+              <a:extLst>
+                <a:ext uri="{FF2B5EF4-FFF2-40B4-BE49-F238E27FC236}">
+                  <a16:creationId xmlns:a16="http://schemas.microsoft.com/office/drawing/2014/main" id="{52896F66-9320-EEE1-2DE9-C988426FD4C8}"/>
+                </a:ext>
+              </a:extLst>
+            </p:cNvPr>
+            <p:cNvCxnSpPr>
+              <a:cxnSpLocks/>
+              <a:stCxn id="144" idx="6"/>
+              <a:endCxn id="141" idx="2"/>
+            </p:cNvCxnSpPr>
+            <p:nvPr/>
+          </p:nvCxnSpPr>
+          <p:spPr>
+            <a:xfrm>
+              <a:off x="6953128" y="3221468"/>
+              <a:ext cx="294469" cy="1322"/>
+            </a:xfrm>
+            <a:prstGeom prst="straightConnector1">
+              <a:avLst/>
+            </a:prstGeom>
+            <a:ln w="19050">
+              <a:tailEnd type="triangle"/>
+            </a:ln>
+          </p:spPr>
+          <p:style>
+            <a:lnRef idx="1">
+              <a:schemeClr val="dk1"/>
+            </a:lnRef>
+            <a:fillRef idx="0">
+              <a:schemeClr val="dk1"/>
+            </a:fillRef>
+            <a:effectRef idx="0">
+              <a:schemeClr val="dk1"/>
+            </a:effectRef>
+            <a:fontRef idx="minor">
+              <a:schemeClr val="tx1"/>
+            </a:fontRef>
+          </p:style>
+        </p:cxnSp>
+      </p:grpSp>
+    </p:spTree>
+    <p:extLst>
+      <p:ext uri="{BB962C8B-B14F-4D97-AF65-F5344CB8AC3E}">
+        <p14:creationId xmlns:p14="http://schemas.microsoft.com/office/powerpoint/2010/main" val="3337450272"/>
+      </p:ext>
+    </p:extLst>
+  </p:cSld>
+  <p:clrMapOvr>
+    <a:masterClrMapping/>
+  </p:clrMapOvr>
+</p:sld>
+</file>
+
+<file path=ppt/slides/slide52.xml><?xml version="1.0" encoding="utf-8"?>
+<p:sld xmlns:a="http://schemas.openxmlformats.org/drawingml/2006/main" xmlns:r="http://schemas.openxmlformats.org/officeDocument/2006/relationships" xmlns:p="http://schemas.openxmlformats.org/presentationml/2006/main">
+  <p:cSld>
+    <p:spTree>
+      <p:nvGrpSpPr>
+        <p:cNvPr id="1" name="">
+          <a:extLst>
+            <a:ext uri="{FF2B5EF4-FFF2-40B4-BE49-F238E27FC236}">
+              <a16:creationId xmlns:a16="http://schemas.microsoft.com/office/drawing/2014/main" id="{562252F6-7CF6-0CB5-2A37-B62D170C75AC}"/>
+            </a:ext>
+          </a:extLst>
+        </p:cNvPr>
+        <p:cNvGrpSpPr/>
+        <p:nvPr/>
+      </p:nvGrpSpPr>
+      <p:grpSpPr>
+        <a:xfrm>
+          <a:off x="0" y="0"/>
+          <a:ext cx="0" cy="0"/>
+          <a:chOff x="0" y="0"/>
+          <a:chExt cx="0" cy="0"/>
+        </a:xfrm>
+      </p:grpSpPr>
+      <p:grpSp>
+        <p:nvGrpSpPr>
+          <p:cNvPr id="44" name="Group 43">
+            <a:extLst>
+              <a:ext uri="{FF2B5EF4-FFF2-40B4-BE49-F238E27FC236}">
+                <a16:creationId xmlns:a16="http://schemas.microsoft.com/office/drawing/2014/main" id="{5D8E9F3C-B497-3F06-40DA-7AF6840F84ED}"/>
+              </a:ext>
+            </a:extLst>
+          </p:cNvPr>
+          <p:cNvGrpSpPr/>
+          <p:nvPr/>
+        </p:nvGrpSpPr>
+        <p:grpSpPr>
+          <a:xfrm>
+            <a:off x="3581399" y="1829242"/>
+            <a:ext cx="4928922" cy="2995485"/>
+            <a:chOff x="3581399" y="1829242"/>
+            <a:chExt cx="4928922" cy="2995485"/>
+          </a:xfrm>
+        </p:grpSpPr>
+        <p:sp>
+          <p:nvSpPr>
+            <p:cNvPr id="39" name="Rectangle: Rounded Corners 38">
+              <a:extLst>
+                <a:ext uri="{FF2B5EF4-FFF2-40B4-BE49-F238E27FC236}">
+                  <a16:creationId xmlns:a16="http://schemas.microsoft.com/office/drawing/2014/main" id="{BA002826-58F0-2B0D-1038-C97581B5271D}"/>
+                </a:ext>
+              </a:extLst>
+            </p:cNvPr>
+            <p:cNvSpPr/>
+            <p:nvPr/>
+          </p:nvSpPr>
+          <p:spPr>
+            <a:xfrm>
+              <a:off x="4301176" y="2438400"/>
+              <a:ext cx="3522024" cy="1981200"/>
+            </a:xfrm>
+            <a:prstGeom prst="roundRect">
+              <a:avLst/>
+            </a:prstGeom>
+            <a:solidFill>
+              <a:schemeClr val="accent6">
+                <a:lumMod val="40000"/>
+                <a:lumOff val="60000"/>
+                <a:alpha val="88000"/>
+              </a:schemeClr>
+            </a:solidFill>
+          </p:spPr>
+          <p:style>
+            <a:lnRef idx="1">
+              <a:schemeClr val="accent6"/>
+            </a:lnRef>
+            <a:fillRef idx="2">
+              <a:schemeClr val="accent6"/>
+            </a:fillRef>
+            <a:effectRef idx="1">
+              <a:schemeClr val="accent6"/>
+            </a:effectRef>
+            <a:fontRef idx="minor">
+              <a:schemeClr val="dk1"/>
+            </a:fontRef>
+          </p:style>
+          <p:txBody>
+            <a:bodyPr rtlCol="0" anchor="ctr"/>
+            <a:lstStyle/>
+            <a:p>
+              <a:pPr algn="ctr"/>
+              <a:endParaRPr lang="en-US" dirty="0"/>
+            </a:p>
+          </p:txBody>
+        </p:sp>
+        <p:cxnSp>
+          <p:nvCxnSpPr>
+            <p:cNvPr id="93" name="Straight Arrow Connector 92">
+              <a:extLst>
+                <a:ext uri="{FF2B5EF4-FFF2-40B4-BE49-F238E27FC236}">
+                  <a16:creationId xmlns:a16="http://schemas.microsoft.com/office/drawing/2014/main" id="{1B79736A-236D-E3D9-6C83-C58E440FA780}"/>
+                </a:ext>
+              </a:extLst>
+            </p:cNvPr>
+            <p:cNvCxnSpPr>
+              <a:cxnSpLocks/>
+            </p:cNvCxnSpPr>
+            <p:nvPr/>
+          </p:nvCxnSpPr>
+          <p:spPr>
+            <a:xfrm flipV="1">
+              <a:off x="7924149" y="2244873"/>
+              <a:ext cx="0" cy="468000"/>
+            </a:xfrm>
+            <a:prstGeom prst="straightConnector1">
+              <a:avLst/>
+            </a:prstGeom>
+            <a:ln w="19050">
+              <a:headEnd type="none" w="med" len="med"/>
+              <a:tailEnd type="triangle" w="med" len="med"/>
+            </a:ln>
+          </p:spPr>
+          <p:style>
+            <a:lnRef idx="1">
+              <a:schemeClr val="dk1"/>
+            </a:lnRef>
+            <a:fillRef idx="0">
+              <a:schemeClr val="dk1"/>
+            </a:fillRef>
+            <a:effectRef idx="0">
+              <a:schemeClr val="dk1"/>
+            </a:effectRef>
+            <a:fontRef idx="minor">
+              <a:schemeClr val="tx1"/>
+            </a:fontRef>
+          </p:style>
+        </p:cxnSp>
+        <p:sp>
+          <p:nvSpPr>
+            <p:cNvPr id="37" name="Oval 36">
+              <a:extLst>
+                <a:ext uri="{FF2B5EF4-FFF2-40B4-BE49-F238E27FC236}">
+                  <a16:creationId xmlns:a16="http://schemas.microsoft.com/office/drawing/2014/main" id="{D2414ECA-C1B7-3469-AA7E-EC751760A2ED}"/>
+                </a:ext>
+              </a:extLst>
+            </p:cNvPr>
+            <p:cNvSpPr/>
+            <p:nvPr/>
+          </p:nvSpPr>
+          <p:spPr>
+            <a:xfrm>
+              <a:off x="4733602" y="3187865"/>
+              <a:ext cx="273050" cy="273050"/>
+            </a:xfrm>
+            <a:prstGeom prst="ellipse">
+              <a:avLst/>
+            </a:prstGeom>
+            <a:solidFill>
+              <a:schemeClr val="accent2">
+                <a:lumMod val="40000"/>
+                <a:lumOff val="60000"/>
+              </a:schemeClr>
+            </a:solidFill>
+          </p:spPr>
+          <p:style>
+            <a:lnRef idx="2">
+              <a:schemeClr val="accent1">
+                <a:shade val="15000"/>
+              </a:schemeClr>
+            </a:lnRef>
+            <a:fillRef idx="1">
+              <a:schemeClr val="accent1"/>
+            </a:fillRef>
+            <a:effectRef idx="0">
+              <a:schemeClr val="accent1"/>
+            </a:effectRef>
+            <a:fontRef idx="minor">
+              <a:schemeClr val="lt1"/>
+            </a:fontRef>
+          </p:style>
+          <p:txBody>
+            <a:bodyPr rtlCol="0" anchor="ctr"/>
+            <a:lstStyle/>
+            <a:p>
+              <a:pPr algn="ctr"/>
+              <a:r>
+                <a:rPr lang="pt-BR" dirty="0">
+                  <a:solidFill>
+                    <a:schemeClr val="tx1"/>
+                  </a:solidFill>
+                </a:rPr>
+                <a:t>x</a:t>
+              </a:r>
+              <a:endParaRPr lang="en-US" dirty="0">
+                <a:solidFill>
+                  <a:schemeClr val="tx1"/>
+                </a:solidFill>
+              </a:endParaRPr>
+            </a:p>
+          </p:txBody>
+        </p:sp>
+        <p:sp>
+          <p:nvSpPr>
+            <p:cNvPr id="52" name="Oval 51">
+              <a:extLst>
+                <a:ext uri="{FF2B5EF4-FFF2-40B4-BE49-F238E27FC236}">
+                  <a16:creationId xmlns:a16="http://schemas.microsoft.com/office/drawing/2014/main" id="{ED51A595-29D8-A07D-C3F0-F222BCFA01C8}"/>
+                </a:ext>
+              </a:extLst>
+            </p:cNvPr>
+            <p:cNvSpPr/>
+            <p:nvPr/>
+          </p:nvSpPr>
+          <p:spPr>
+            <a:xfrm>
+              <a:off x="6236481" y="2576348"/>
+              <a:ext cx="273050" cy="273050"/>
+            </a:xfrm>
+            <a:prstGeom prst="ellipse">
+              <a:avLst/>
+            </a:prstGeom>
+            <a:solidFill>
+              <a:schemeClr val="accent2">
+                <a:lumMod val="40000"/>
+                <a:lumOff val="60000"/>
+              </a:schemeClr>
+            </a:solidFill>
+          </p:spPr>
+          <p:style>
+            <a:lnRef idx="2">
+              <a:schemeClr val="accent1">
+                <a:shade val="15000"/>
+              </a:schemeClr>
+            </a:lnRef>
+            <a:fillRef idx="1">
+              <a:schemeClr val="accent1"/>
+            </a:fillRef>
+            <a:effectRef idx="0">
+              <a:schemeClr val="accent1"/>
+            </a:effectRef>
+            <a:fontRef idx="minor">
+              <a:schemeClr val="lt1"/>
+            </a:fontRef>
+          </p:style>
+          <p:txBody>
+            <a:bodyPr rtlCol="0" anchor="ctr"/>
+            <a:lstStyle/>
+            <a:p>
+              <a:pPr algn="ctr"/>
+              <a:r>
+                <a:rPr lang="pt-BR" dirty="0">
+                  <a:solidFill>
+                    <a:schemeClr val="tx1"/>
+                  </a:solidFill>
+                </a:rPr>
+                <a:t>x</a:t>
+              </a:r>
+              <a:endParaRPr lang="en-US" dirty="0">
+                <a:solidFill>
+                  <a:schemeClr val="tx1"/>
+                </a:solidFill>
+              </a:endParaRPr>
+            </a:p>
+          </p:txBody>
+        </p:sp>
+        <p:sp>
+          <p:nvSpPr>
+            <p:cNvPr id="12" name="Rectangle 11">
+              <a:extLst>
+                <a:ext uri="{FF2B5EF4-FFF2-40B4-BE49-F238E27FC236}">
+                  <a16:creationId xmlns:a16="http://schemas.microsoft.com/office/drawing/2014/main" id="{440BE548-A72A-2BF0-59F6-02658DA115FF}"/>
+                </a:ext>
+              </a:extLst>
+            </p:cNvPr>
+            <p:cNvSpPr/>
+            <p:nvPr/>
+          </p:nvSpPr>
+          <p:spPr>
+            <a:xfrm>
+              <a:off x="7076731" y="3612407"/>
+              <a:ext cx="614781" cy="297872"/>
+            </a:xfrm>
+            <a:prstGeom prst="rect">
+              <a:avLst/>
+            </a:prstGeom>
+          </p:spPr>
+          <p:style>
+            <a:lnRef idx="2">
+              <a:schemeClr val="accent2">
+                <a:shade val="15000"/>
+              </a:schemeClr>
+            </a:lnRef>
+            <a:fillRef idx="1">
+              <a:schemeClr val="accent2"/>
+            </a:fillRef>
+            <a:effectRef idx="0">
+              <a:schemeClr val="accent2"/>
+            </a:effectRef>
+            <a:fontRef idx="minor">
+              <a:schemeClr val="lt1"/>
+            </a:fontRef>
+          </p:style>
+          <p:txBody>
+            <a:bodyPr rtlCol="0" anchor="ctr"/>
+            <a:lstStyle/>
+            <a:p>
+              <a:pPr algn="ctr"/>
+              <a:r>
+                <a:rPr lang="pt-BR" dirty="0" err="1">
+                  <a:solidFill>
+                    <a:schemeClr val="tx1"/>
+                  </a:solidFill>
+                </a:rPr>
+                <a:t>tanh</a:t>
+              </a:r>
+              <a:endParaRPr lang="en-US" dirty="0">
+                <a:solidFill>
+                  <a:schemeClr val="tx1"/>
+                </a:solidFill>
+              </a:endParaRPr>
+            </a:p>
+          </p:txBody>
+        </p:sp>
+        <p:sp>
+          <p:nvSpPr>
+            <p:cNvPr id="48" name="Oval 47">
+              <a:extLst>
+                <a:ext uri="{FF2B5EF4-FFF2-40B4-BE49-F238E27FC236}">
+                  <a16:creationId xmlns:a16="http://schemas.microsoft.com/office/drawing/2014/main" id="{E6D8DDBB-3D1C-6DFC-433F-295B122112B7}"/>
+                </a:ext>
+              </a:extLst>
+            </p:cNvPr>
+            <p:cNvSpPr/>
+            <p:nvPr/>
+          </p:nvSpPr>
+          <p:spPr>
+            <a:xfrm>
+              <a:off x="7247597" y="2576348"/>
+              <a:ext cx="273050" cy="273050"/>
+            </a:xfrm>
+            <a:prstGeom prst="ellipse">
+              <a:avLst/>
+            </a:prstGeom>
+            <a:solidFill>
+              <a:schemeClr val="accent2">
+                <a:lumMod val="40000"/>
+                <a:lumOff val="60000"/>
+              </a:schemeClr>
+            </a:solidFill>
+          </p:spPr>
+          <p:style>
+            <a:lnRef idx="2">
+              <a:schemeClr val="accent1">
+                <a:shade val="15000"/>
+              </a:schemeClr>
+            </a:lnRef>
+            <a:fillRef idx="1">
+              <a:schemeClr val="accent1"/>
+            </a:fillRef>
+            <a:effectRef idx="0">
+              <a:schemeClr val="accent1"/>
+            </a:effectRef>
+            <a:fontRef idx="minor">
+              <a:schemeClr val="lt1"/>
+            </a:fontRef>
+          </p:style>
+          <p:txBody>
+            <a:bodyPr rtlCol="0" anchor="ctr"/>
+            <a:lstStyle/>
+            <a:p>
+              <a:pPr algn="ctr"/>
+              <a:r>
+                <a:rPr lang="pt-BR" dirty="0">
+                  <a:solidFill>
+                    <a:schemeClr val="tx1"/>
+                  </a:solidFill>
+                </a:rPr>
+                <a:t>+</a:t>
+              </a:r>
+              <a:endParaRPr lang="en-US" dirty="0">
+                <a:solidFill>
+                  <a:schemeClr val="tx1"/>
+                </a:solidFill>
+              </a:endParaRPr>
+            </a:p>
+          </p:txBody>
+        </p:sp>
+        <mc:AlternateContent xmlns:mc="http://schemas.openxmlformats.org/markup-compatibility/2006">
+          <mc:Choice xmlns:a14="http://schemas.microsoft.com/office/drawing/2010/main" Requires="a14">
+            <p:sp>
+              <p:nvSpPr>
+                <p:cNvPr id="5" name="TextBox 4">
+                  <a:extLst>
+                    <a:ext uri="{FF2B5EF4-FFF2-40B4-BE49-F238E27FC236}">
+                      <a16:creationId xmlns:a16="http://schemas.microsoft.com/office/drawing/2014/main" id="{24262BB3-B947-8525-67E1-678650132CEC}"/>
+                    </a:ext>
+                  </a:extLst>
+                </p:cNvPr>
+                <p:cNvSpPr txBox="1"/>
+                <p:nvPr/>
+              </p:nvSpPr>
+              <p:spPr>
+                <a:xfrm>
+                  <a:off x="3581399" y="2520191"/>
+                  <a:ext cx="511583" cy="369332"/>
+                </a:xfrm>
+                <a:prstGeom prst="rect">
+                  <a:avLst/>
+                </a:prstGeom>
+                <a:noFill/>
+              </p:spPr>
+              <p:txBody>
+                <a:bodyPr wrap="square" rtlCol="0">
+                  <a:spAutoFit/>
+                </a:bodyPr>
+                <a:lstStyle/>
+                <a:p>
+                  <a:pPr/>
+                  <a14:m>
+                    <m:oMathPara xmlns:m="http://schemas.openxmlformats.org/officeDocument/2006/math">
+                      <m:oMathParaPr>
+                        <m:jc m:val="centerGroup"/>
+                      </m:oMathParaPr>
+                      <m:oMath xmlns:m="http://schemas.openxmlformats.org/officeDocument/2006/math">
+                        <m:sSub>
+                          <m:sSubPr>
+                            <m:ctrlPr>
+                              <a:rPr lang="en-US" i="1" smtClean="0">
+                                <a:latin typeface="Cambria Math" panose="02040503050406030204" pitchFamily="18" charset="0"/>
+                              </a:rPr>
+                            </m:ctrlPr>
+                          </m:sSubPr>
+                          <m:e>
+                            <m:r>
+                              <a:rPr lang="pt-BR" b="0" i="1" smtClean="0">
+                                <a:latin typeface="Cambria Math" panose="02040503050406030204" pitchFamily="18" charset="0"/>
+                              </a:rPr>
+                              <m:t>h</m:t>
+                            </m:r>
+                          </m:e>
+                          <m:sub>
+                            <m:r>
+                              <a:rPr lang="pt-BR" b="0" i="1" smtClean="0">
+                                <a:latin typeface="Cambria Math" panose="02040503050406030204" pitchFamily="18" charset="0"/>
+                              </a:rPr>
+                              <m:t>𝑡</m:t>
+                            </m:r>
+                            <m:r>
+                              <a:rPr lang="pt-BR" b="0" i="1" smtClean="0">
+                                <a:latin typeface="Cambria Math" panose="02040503050406030204" pitchFamily="18" charset="0"/>
+                              </a:rPr>
+                              <m:t>−1</m:t>
+                            </m:r>
+                          </m:sub>
+                        </m:sSub>
+                      </m:oMath>
+                    </m:oMathPara>
+                  </a14:m>
+                  <a:endParaRPr lang="en-US" dirty="0"/>
+                </a:p>
+              </p:txBody>
+            </p:sp>
+          </mc:Choice>
+          <mc:Fallback>
+            <p:sp>
+              <p:nvSpPr>
+                <p:cNvPr id="5" name="TextBox 4">
+                  <a:extLst>
+                    <a:ext uri="{FF2B5EF4-FFF2-40B4-BE49-F238E27FC236}">
+                      <a16:creationId xmlns:a16="http://schemas.microsoft.com/office/drawing/2014/main" id="{24262BB3-B947-8525-67E1-678650132CEC}"/>
+                    </a:ext>
+                  </a:extLst>
+                </p:cNvPr>
+                <p:cNvSpPr txBox="1">
+                  <a:spLocks noRot="1" noChangeAspect="1" noMove="1" noResize="1" noEditPoints="1" noAdjustHandles="1" noChangeArrowheads="1" noChangeShapeType="1" noTextEdit="1"/>
+                </p:cNvSpPr>
+                <p:nvPr/>
+              </p:nvSpPr>
+              <p:spPr>
+                <a:xfrm>
+                  <a:off x="3581399" y="2520191"/>
+                  <a:ext cx="511583" cy="369332"/>
+                </a:xfrm>
+                <a:prstGeom prst="rect">
+                  <a:avLst/>
+                </a:prstGeom>
+                <a:blipFill>
+                  <a:blip r:embed="rId3"/>
+                  <a:stretch>
+                    <a:fillRect r="-11905"/>
+                  </a:stretch>
+                </a:blipFill>
+              </p:spPr>
+              <p:txBody>
+                <a:bodyPr/>
+                <a:lstStyle/>
+                <a:p>
+                  <a:r>
+                    <a:rPr lang="en-US">
+                      <a:noFill/>
+                    </a:rPr>
+                    <a:t> </a:t>
+                  </a:r>
+                </a:p>
+              </p:txBody>
+            </p:sp>
+          </mc:Fallback>
+        </mc:AlternateContent>
+        <p:sp>
+          <p:nvSpPr>
+            <p:cNvPr id="4" name="Oval 3">
+              <a:extLst>
+                <a:ext uri="{FF2B5EF4-FFF2-40B4-BE49-F238E27FC236}">
+                  <a16:creationId xmlns:a16="http://schemas.microsoft.com/office/drawing/2014/main" id="{1A0E8F15-DE4D-390E-F4A4-F035B779E166}"/>
+                </a:ext>
+              </a:extLst>
+            </p:cNvPr>
+            <p:cNvSpPr/>
+            <p:nvPr/>
+          </p:nvSpPr>
+          <p:spPr>
+            <a:xfrm>
+              <a:off x="7247597" y="3086265"/>
+              <a:ext cx="273050" cy="273050"/>
+            </a:xfrm>
+            <a:prstGeom prst="ellipse">
+              <a:avLst/>
+            </a:prstGeom>
+            <a:solidFill>
+              <a:schemeClr val="accent2">
+                <a:lumMod val="40000"/>
+                <a:lumOff val="60000"/>
+              </a:schemeClr>
+            </a:solidFill>
+          </p:spPr>
+          <p:style>
+            <a:lnRef idx="2">
+              <a:schemeClr val="accent1">
+                <a:shade val="15000"/>
+              </a:schemeClr>
+            </a:lnRef>
+            <a:fillRef idx="1">
+              <a:schemeClr val="accent1"/>
+            </a:fillRef>
+            <a:effectRef idx="0">
+              <a:schemeClr val="accent1"/>
+            </a:effectRef>
+            <a:fontRef idx="minor">
+              <a:schemeClr val="lt1"/>
+            </a:fontRef>
+          </p:style>
+          <p:txBody>
+            <a:bodyPr rtlCol="0" anchor="ctr"/>
+            <a:lstStyle/>
+            <a:p>
+              <a:pPr algn="ctr"/>
+              <a:r>
+                <a:rPr lang="pt-BR" dirty="0">
+                  <a:solidFill>
+                    <a:schemeClr val="tx1"/>
+                  </a:solidFill>
+                </a:rPr>
+                <a:t>x</a:t>
+              </a:r>
+              <a:endParaRPr lang="en-US" dirty="0">
+                <a:solidFill>
+                  <a:schemeClr val="tx1"/>
+                </a:solidFill>
+              </a:endParaRPr>
+            </a:p>
+          </p:txBody>
+        </p:sp>
+        <mc:AlternateContent xmlns:mc="http://schemas.openxmlformats.org/markup-compatibility/2006">
+          <mc:Choice xmlns:a14="http://schemas.microsoft.com/office/drawing/2010/main" Requires="a14">
+            <p:sp>
+              <p:nvSpPr>
+                <p:cNvPr id="14" name="Rectangle 13">
+                  <a:extLst>
+                    <a:ext uri="{FF2B5EF4-FFF2-40B4-BE49-F238E27FC236}">
+                      <a16:creationId xmlns:a16="http://schemas.microsoft.com/office/drawing/2014/main" id="{9213067C-7827-348E-6613-891F3A96783C}"/>
+                    </a:ext>
+                  </a:extLst>
+                </p:cNvPr>
+                <p:cNvSpPr/>
+                <p:nvPr/>
+              </p:nvSpPr>
+              <p:spPr>
+                <a:xfrm>
+                  <a:off x="6206433" y="3607165"/>
+                  <a:ext cx="332510" cy="297872"/>
+                </a:xfrm>
+                <a:prstGeom prst="rect">
+                  <a:avLst/>
+                </a:prstGeom>
+              </p:spPr>
+              <p:style>
+                <a:lnRef idx="2">
+                  <a:schemeClr val="accent2">
+                    <a:shade val="15000"/>
+                  </a:schemeClr>
+                </a:lnRef>
+                <a:fillRef idx="1">
+                  <a:schemeClr val="accent2"/>
+                </a:fillRef>
+                <a:effectRef idx="0">
+                  <a:schemeClr val="accent2"/>
+                </a:effectRef>
+                <a:fontRef idx="minor">
+                  <a:schemeClr val="lt1"/>
+                </a:fontRef>
+              </p:style>
+              <p:txBody>
+                <a:bodyPr rtlCol="0" anchor="ctr"/>
+                <a:lstStyle/>
+                <a:p>
+                  <a:pPr algn="ctr"/>
+                  <a14:m>
+                    <m:oMathPara xmlns:m="http://schemas.openxmlformats.org/officeDocument/2006/math">
+                      <m:oMathParaPr>
+                        <m:jc m:val="center"/>
+                      </m:oMathParaPr>
+                      <m:oMath xmlns:m="http://schemas.openxmlformats.org/officeDocument/2006/math">
+                        <m:r>
+                          <a:rPr lang="en-US" i="1" smtClean="0">
+                            <a:solidFill>
+                              <a:schemeClr val="tx1"/>
+                            </a:solidFill>
+                            <a:latin typeface="Cambria Math" panose="02040503050406030204" pitchFamily="18" charset="0"/>
+                            <a:ea typeface="Cambria Math" panose="02040503050406030204" pitchFamily="18" charset="0"/>
+                          </a:rPr>
+                          <m:t>𝜎</m:t>
+                        </m:r>
+                      </m:oMath>
+                    </m:oMathPara>
+                  </a14:m>
+                  <a:endParaRPr lang="en-US" dirty="0">
+                    <a:solidFill>
+                      <a:schemeClr val="tx1"/>
+                    </a:solidFill>
+                  </a:endParaRPr>
+                </a:p>
+              </p:txBody>
+            </p:sp>
+          </mc:Choice>
+          <mc:Fallback>
+            <p:sp>
+              <p:nvSpPr>
+                <p:cNvPr id="14" name="Rectangle 13">
+                  <a:extLst>
+                    <a:ext uri="{FF2B5EF4-FFF2-40B4-BE49-F238E27FC236}">
+                      <a16:creationId xmlns:a16="http://schemas.microsoft.com/office/drawing/2014/main" id="{9213067C-7827-348E-6613-891F3A96783C}"/>
+                    </a:ext>
+                  </a:extLst>
+                </p:cNvPr>
+                <p:cNvSpPr>
+                  <a:spLocks noRot="1" noChangeAspect="1" noMove="1" noResize="1" noEditPoints="1" noAdjustHandles="1" noChangeArrowheads="1" noChangeShapeType="1" noTextEdit="1"/>
+                </p:cNvSpPr>
+                <p:nvPr/>
+              </p:nvSpPr>
+              <p:spPr>
+                <a:xfrm>
+                  <a:off x="6206433" y="3607165"/>
+                  <a:ext cx="332510" cy="297872"/>
+                </a:xfrm>
+                <a:prstGeom prst="rect">
+                  <a:avLst/>
+                </a:prstGeom>
+                <a:blipFill>
+                  <a:blip r:embed="rId4"/>
+                  <a:stretch>
+                    <a:fillRect/>
+                  </a:stretch>
+                </a:blipFill>
+              </p:spPr>
+              <p:txBody>
+                <a:bodyPr/>
+                <a:lstStyle/>
+                <a:p>
+                  <a:r>
+                    <a:rPr lang="en-US">
+                      <a:noFill/>
+                    </a:rPr>
+                    <a:t> </a:t>
+                  </a:r>
+                </a:p>
+              </p:txBody>
+            </p:sp>
+          </mc:Fallback>
+        </mc:AlternateContent>
+        <mc:AlternateContent xmlns:mc="http://schemas.openxmlformats.org/markup-compatibility/2006">
+          <mc:Choice xmlns:a14="http://schemas.microsoft.com/office/drawing/2010/main" Requires="a14">
+            <p:sp>
+              <p:nvSpPr>
+                <p:cNvPr id="19" name="Rectangle 18">
+                  <a:extLst>
+                    <a:ext uri="{FF2B5EF4-FFF2-40B4-BE49-F238E27FC236}">
+                      <a16:creationId xmlns:a16="http://schemas.microsoft.com/office/drawing/2014/main" id="{D9360C69-650C-8769-4C8B-CFCD0CF33DA6}"/>
+                    </a:ext>
+                  </a:extLst>
+                </p:cNvPr>
+                <p:cNvSpPr/>
+                <p:nvPr/>
+              </p:nvSpPr>
+              <p:spPr>
+                <a:xfrm>
+                  <a:off x="5326611" y="3610051"/>
+                  <a:ext cx="332510" cy="297872"/>
+                </a:xfrm>
+                <a:prstGeom prst="rect">
+                  <a:avLst/>
+                </a:prstGeom>
+              </p:spPr>
+              <p:style>
+                <a:lnRef idx="2">
+                  <a:schemeClr val="accent2">
+                    <a:shade val="15000"/>
+                  </a:schemeClr>
+                </a:lnRef>
+                <a:fillRef idx="1">
+                  <a:schemeClr val="accent2"/>
+                </a:fillRef>
+                <a:effectRef idx="0">
+                  <a:schemeClr val="accent2"/>
+                </a:effectRef>
+                <a:fontRef idx="minor">
+                  <a:schemeClr val="lt1"/>
+                </a:fontRef>
+              </p:style>
+              <p:txBody>
+                <a:bodyPr rtlCol="0" anchor="ctr"/>
+                <a:lstStyle/>
+                <a:p>
+                  <a:pPr algn="ctr"/>
+                  <a14:m>
+                    <m:oMathPara xmlns:m="http://schemas.openxmlformats.org/officeDocument/2006/math">
+                      <m:oMathParaPr>
+                        <m:jc m:val="center"/>
+                      </m:oMathParaPr>
+                      <m:oMath xmlns:m="http://schemas.openxmlformats.org/officeDocument/2006/math">
+                        <m:r>
+                          <a:rPr lang="en-US" i="1" smtClean="0">
+                            <a:solidFill>
+                              <a:schemeClr val="tx1"/>
+                            </a:solidFill>
+                            <a:latin typeface="Cambria Math" panose="02040503050406030204" pitchFamily="18" charset="0"/>
+                            <a:ea typeface="Cambria Math" panose="02040503050406030204" pitchFamily="18" charset="0"/>
+                          </a:rPr>
+                          <m:t>𝜎</m:t>
+                        </m:r>
+                      </m:oMath>
+                    </m:oMathPara>
+                  </a14:m>
+                  <a:endParaRPr lang="en-US" dirty="0">
+                    <a:solidFill>
+                      <a:schemeClr val="tx1"/>
+                    </a:solidFill>
+                  </a:endParaRPr>
+                </a:p>
+              </p:txBody>
+            </p:sp>
+          </mc:Choice>
+          <mc:Fallback>
+            <p:sp>
+              <p:nvSpPr>
+                <p:cNvPr id="19" name="Rectangle 18">
+                  <a:extLst>
+                    <a:ext uri="{FF2B5EF4-FFF2-40B4-BE49-F238E27FC236}">
+                      <a16:creationId xmlns:a16="http://schemas.microsoft.com/office/drawing/2014/main" id="{D9360C69-650C-8769-4C8B-CFCD0CF33DA6}"/>
+                    </a:ext>
+                  </a:extLst>
+                </p:cNvPr>
+                <p:cNvSpPr>
+                  <a:spLocks noRot="1" noChangeAspect="1" noMove="1" noResize="1" noEditPoints="1" noAdjustHandles="1" noChangeArrowheads="1" noChangeShapeType="1" noTextEdit="1"/>
+                </p:cNvSpPr>
+                <p:nvPr/>
+              </p:nvSpPr>
+              <p:spPr>
+                <a:xfrm>
+                  <a:off x="5326611" y="3610051"/>
+                  <a:ext cx="332510" cy="297872"/>
+                </a:xfrm>
+                <a:prstGeom prst="rect">
+                  <a:avLst/>
+                </a:prstGeom>
+                <a:blipFill>
+                  <a:blip r:embed="rId5"/>
+                  <a:stretch>
+                    <a:fillRect/>
+                  </a:stretch>
+                </a:blipFill>
+              </p:spPr>
+              <p:txBody>
+                <a:bodyPr/>
+                <a:lstStyle/>
+                <a:p>
+                  <a:r>
+                    <a:rPr lang="en-US">
+                      <a:noFill/>
+                    </a:rPr>
+                    <a:t> </a:t>
+                  </a:r>
+                </a:p>
+              </p:txBody>
+            </p:sp>
+          </mc:Fallback>
+        </mc:AlternateContent>
+        <p:sp>
+          <p:nvSpPr>
+            <p:cNvPr id="17" name="Oval 16">
+              <a:extLst>
+                <a:ext uri="{FF2B5EF4-FFF2-40B4-BE49-F238E27FC236}">
+                  <a16:creationId xmlns:a16="http://schemas.microsoft.com/office/drawing/2014/main" id="{C0629450-C119-502D-C9FE-A91B3C7D5847}"/>
+                </a:ext>
+              </a:extLst>
+            </p:cNvPr>
+            <p:cNvSpPr/>
+            <p:nvPr/>
+          </p:nvSpPr>
+          <p:spPr>
+            <a:xfrm>
+              <a:off x="6680078" y="3084943"/>
+              <a:ext cx="273050" cy="273050"/>
+            </a:xfrm>
+            <a:prstGeom prst="ellipse">
+              <a:avLst/>
+            </a:prstGeom>
+            <a:solidFill>
+              <a:schemeClr val="accent2">
+                <a:lumMod val="40000"/>
+                <a:lumOff val="60000"/>
+              </a:schemeClr>
+            </a:solidFill>
+          </p:spPr>
+          <p:style>
+            <a:lnRef idx="2">
+              <a:schemeClr val="accent1">
+                <a:shade val="15000"/>
+              </a:schemeClr>
+            </a:lnRef>
+            <a:fillRef idx="1">
+              <a:schemeClr val="accent1"/>
+            </a:fillRef>
+            <a:effectRef idx="0">
+              <a:schemeClr val="accent1"/>
+            </a:effectRef>
+            <a:fontRef idx="minor">
+              <a:schemeClr val="lt1"/>
+            </a:fontRef>
+          </p:style>
+          <p:txBody>
+            <a:bodyPr rtlCol="0" anchor="ctr"/>
+            <a:lstStyle/>
+            <a:p>
+              <a:pPr algn="ctr"/>
+              <a:endParaRPr lang="en-US" sz="1000" dirty="0">
+                <a:solidFill>
+                  <a:schemeClr val="tx1"/>
+                </a:solidFill>
+              </a:endParaRPr>
+            </a:p>
+          </p:txBody>
+        </p:sp>
+        <p:cxnSp>
+          <p:nvCxnSpPr>
+            <p:cNvPr id="25" name="Straight Connector 24">
+              <a:extLst>
+                <a:ext uri="{FF2B5EF4-FFF2-40B4-BE49-F238E27FC236}">
+                  <a16:creationId xmlns:a16="http://schemas.microsoft.com/office/drawing/2014/main" id="{54C05E61-D20B-738A-2DA6-6C154D176A9D}"/>
+                </a:ext>
+              </a:extLst>
+            </p:cNvPr>
+            <p:cNvCxnSpPr>
+              <a:cxnSpLocks/>
+              <a:stCxn id="5" idx="3"/>
+              <a:endCxn id="52" idx="2"/>
+            </p:cNvCxnSpPr>
+            <p:nvPr/>
+          </p:nvCxnSpPr>
+          <p:spPr>
+            <a:xfrm>
+              <a:off x="4092982" y="2704857"/>
+              <a:ext cx="2143499" cy="8016"/>
+            </a:xfrm>
+            <a:prstGeom prst="line">
+              <a:avLst/>
+            </a:prstGeom>
+            <a:ln w="19050"/>
+          </p:spPr>
+          <p:style>
+            <a:lnRef idx="1">
+              <a:schemeClr val="dk1"/>
+            </a:lnRef>
+            <a:fillRef idx="0">
+              <a:schemeClr val="dk1"/>
+            </a:fillRef>
+            <a:effectRef idx="0">
+              <a:schemeClr val="dk1"/>
+            </a:effectRef>
+            <a:fontRef idx="minor">
+              <a:schemeClr val="tx1"/>
+            </a:fontRef>
+          </p:style>
+        </p:cxnSp>
+        <p:cxnSp>
+          <p:nvCxnSpPr>
+            <p:cNvPr id="31" name="Straight Arrow Connector 30">
+              <a:extLst>
+                <a:ext uri="{FF2B5EF4-FFF2-40B4-BE49-F238E27FC236}">
+                  <a16:creationId xmlns:a16="http://schemas.microsoft.com/office/drawing/2014/main" id="{AA92D7CB-640B-D967-DC02-4066C5EB26AA}"/>
+                </a:ext>
+              </a:extLst>
+            </p:cNvPr>
+            <p:cNvCxnSpPr>
+              <a:cxnSpLocks/>
+              <a:stCxn id="14" idx="0"/>
+              <a:endCxn id="52" idx="4"/>
+            </p:cNvCxnSpPr>
+            <p:nvPr/>
+          </p:nvCxnSpPr>
+          <p:spPr>
+            <a:xfrm flipV="1">
+              <a:off x="6372688" y="2849398"/>
+              <a:ext cx="318" cy="757767"/>
+            </a:xfrm>
+            <a:prstGeom prst="straightConnector1">
+              <a:avLst/>
+            </a:prstGeom>
+            <a:ln w="19050">
+              <a:solidFill>
+                <a:schemeClr val="tx1"/>
+              </a:solidFill>
+              <a:tailEnd type="triangle"/>
+            </a:ln>
+          </p:spPr>
+          <p:style>
+            <a:lnRef idx="1">
+              <a:schemeClr val="accent1"/>
+            </a:lnRef>
+            <a:fillRef idx="0">
+              <a:schemeClr val="accent1"/>
+            </a:fillRef>
+            <a:effectRef idx="0">
+              <a:schemeClr val="accent1"/>
+            </a:effectRef>
+            <a:fontRef idx="minor">
+              <a:schemeClr val="tx1"/>
+            </a:fontRef>
+          </p:style>
+        </p:cxnSp>
+        <p:sp>
+          <p:nvSpPr>
+            <p:cNvPr id="40" name="TextBox 39">
+              <a:extLst>
+                <a:ext uri="{FF2B5EF4-FFF2-40B4-BE49-F238E27FC236}">
+                  <a16:creationId xmlns:a16="http://schemas.microsoft.com/office/drawing/2014/main" id="{0D1B64B4-7D6A-099F-591C-1F74EE2899F3}"/>
+                </a:ext>
+              </a:extLst>
+            </p:cNvPr>
+            <p:cNvSpPr txBox="1"/>
+            <p:nvPr/>
+          </p:nvSpPr>
+          <p:spPr>
+            <a:xfrm>
+              <a:off x="6643013" y="3036802"/>
+              <a:ext cx="369937" cy="369332"/>
+            </a:xfrm>
+            <a:prstGeom prst="rect">
+              <a:avLst/>
+            </a:prstGeom>
+            <a:noFill/>
+          </p:spPr>
+          <p:txBody>
+            <a:bodyPr wrap="square">
+              <a:spAutoFit/>
+            </a:bodyPr>
+            <a:lstStyle/>
+            <a:p>
+              <a:pPr algn="ctr"/>
+              <a:r>
+                <a:rPr lang="pt-BR" dirty="0">
+                  <a:solidFill>
+                    <a:schemeClr val="tx1"/>
+                  </a:solidFill>
+                </a:rPr>
+                <a:t>1-</a:t>
+              </a:r>
+              <a:endParaRPr lang="en-US" dirty="0">
+                <a:solidFill>
+                  <a:schemeClr val="tx1"/>
+                </a:solidFill>
+              </a:endParaRPr>
+            </a:p>
+          </p:txBody>
+        </p:sp>
+        <p:cxnSp>
+          <p:nvCxnSpPr>
+            <p:cNvPr id="45" name="Straight Connector 44">
+              <a:extLst>
+                <a:ext uri="{FF2B5EF4-FFF2-40B4-BE49-F238E27FC236}">
+                  <a16:creationId xmlns:a16="http://schemas.microsoft.com/office/drawing/2014/main" id="{F1C8C073-B9C6-A980-3D68-03DD6E4321DA}"/>
+                </a:ext>
+              </a:extLst>
+            </p:cNvPr>
+            <p:cNvCxnSpPr>
+              <a:stCxn id="52" idx="6"/>
+              <a:endCxn id="48" idx="2"/>
+            </p:cNvCxnSpPr>
+            <p:nvPr/>
+          </p:nvCxnSpPr>
+          <p:spPr>
+            <a:xfrm>
+              <a:off x="6509531" y="2712873"/>
+              <a:ext cx="738066" cy="0"/>
+            </a:xfrm>
+            <a:prstGeom prst="line">
+              <a:avLst/>
+            </a:prstGeom>
+            <a:ln w="19050">
+              <a:solidFill>
+                <a:schemeClr val="tx1"/>
+              </a:solidFill>
+            </a:ln>
+          </p:spPr>
+          <p:style>
+            <a:lnRef idx="1">
+              <a:schemeClr val="accent1"/>
+            </a:lnRef>
+            <a:fillRef idx="0">
+              <a:schemeClr val="accent1"/>
+            </a:fillRef>
+            <a:effectRef idx="0">
+              <a:schemeClr val="accent1"/>
+            </a:effectRef>
+            <a:fontRef idx="minor">
+              <a:schemeClr val="tx1"/>
+            </a:fontRef>
+          </p:style>
+        </p:cxnSp>
+        <p:cxnSp>
+          <p:nvCxnSpPr>
+            <p:cNvPr id="54" name="Straight Arrow Connector 53">
+              <a:extLst>
+                <a:ext uri="{FF2B5EF4-FFF2-40B4-BE49-F238E27FC236}">
+                  <a16:creationId xmlns:a16="http://schemas.microsoft.com/office/drawing/2014/main" id="{E2228004-25D2-FC50-BB67-5122D67A3E40}"/>
+                </a:ext>
+              </a:extLst>
+            </p:cNvPr>
+            <p:cNvCxnSpPr>
+              <a:stCxn id="4" idx="0"/>
+              <a:endCxn id="48" idx="4"/>
+            </p:cNvCxnSpPr>
+            <p:nvPr/>
+          </p:nvCxnSpPr>
+          <p:spPr>
+            <a:xfrm flipV="1">
+              <a:off x="7384122" y="2849398"/>
+              <a:ext cx="0" cy="236867"/>
+            </a:xfrm>
+            <a:prstGeom prst="straightConnector1">
+              <a:avLst/>
+            </a:prstGeom>
+            <a:ln w="19050">
+              <a:solidFill>
+                <a:schemeClr val="tx1"/>
+              </a:solidFill>
+              <a:tailEnd type="triangle"/>
+            </a:ln>
+          </p:spPr>
+          <p:style>
+            <a:lnRef idx="1">
+              <a:schemeClr val="accent1"/>
+            </a:lnRef>
+            <a:fillRef idx="0">
+              <a:schemeClr val="accent1"/>
+            </a:fillRef>
+            <a:effectRef idx="0">
+              <a:schemeClr val="accent1"/>
+            </a:effectRef>
+            <a:fontRef idx="minor">
+              <a:schemeClr val="tx1"/>
+            </a:fontRef>
+          </p:style>
+        </p:cxnSp>
+        <p:cxnSp>
+          <p:nvCxnSpPr>
+            <p:cNvPr id="74" name="Straight Connector 73">
+              <a:extLst>
+                <a:ext uri="{FF2B5EF4-FFF2-40B4-BE49-F238E27FC236}">
+                  <a16:creationId xmlns:a16="http://schemas.microsoft.com/office/drawing/2014/main" id="{8224F3CC-FC36-8E12-DB65-87AA483CCE92}"/>
+                </a:ext>
+              </a:extLst>
+            </p:cNvPr>
+            <p:cNvCxnSpPr>
+              <a:cxnSpLocks/>
+              <a:stCxn id="12" idx="0"/>
+              <a:endCxn id="4" idx="4"/>
+            </p:cNvCxnSpPr>
+            <p:nvPr/>
+          </p:nvCxnSpPr>
+          <p:spPr>
+            <a:xfrm flipV="1">
+              <a:off x="7384122" y="3359315"/>
+              <a:ext cx="0" cy="253092"/>
+            </a:xfrm>
+            <a:prstGeom prst="line">
+              <a:avLst/>
+            </a:prstGeom>
+            <a:ln w="19050">
+              <a:headEnd type="none" w="med" len="med"/>
+              <a:tailEnd type="triangle" w="med" len="med"/>
+            </a:ln>
+          </p:spPr>
+          <p:style>
+            <a:lnRef idx="1">
+              <a:schemeClr val="dk1"/>
+            </a:lnRef>
+            <a:fillRef idx="0">
+              <a:schemeClr val="dk1"/>
+            </a:fillRef>
+            <a:effectRef idx="0">
+              <a:schemeClr val="dk1"/>
+            </a:effectRef>
+            <a:fontRef idx="minor">
+              <a:schemeClr val="tx1"/>
+            </a:fontRef>
+          </p:style>
+        </p:cxnSp>
+        <p:cxnSp>
+          <p:nvCxnSpPr>
+            <p:cNvPr id="76" name="Straight Arrow Connector 75">
+              <a:extLst>
+                <a:ext uri="{FF2B5EF4-FFF2-40B4-BE49-F238E27FC236}">
+                  <a16:creationId xmlns:a16="http://schemas.microsoft.com/office/drawing/2014/main" id="{FC4C760C-41A3-2B9F-BDBD-EACAF2930C86}"/>
+                </a:ext>
+              </a:extLst>
+            </p:cNvPr>
+            <p:cNvCxnSpPr>
+              <a:cxnSpLocks/>
+              <a:stCxn id="48" idx="6"/>
+            </p:cNvCxnSpPr>
+            <p:nvPr/>
+          </p:nvCxnSpPr>
+          <p:spPr>
+            <a:xfrm>
+              <a:off x="7520646" y="2712873"/>
+              <a:ext cx="648000" cy="3115"/>
+            </a:xfrm>
+            <a:prstGeom prst="straightConnector1">
+              <a:avLst/>
+            </a:prstGeom>
+            <a:ln w="19050">
+              <a:tailEnd type="triangle"/>
+            </a:ln>
+          </p:spPr>
+          <p:style>
+            <a:lnRef idx="1">
+              <a:schemeClr val="dk1"/>
+            </a:lnRef>
+            <a:fillRef idx="0">
+              <a:schemeClr val="dk1"/>
+            </a:fillRef>
+            <a:effectRef idx="0">
+              <a:schemeClr val="dk1"/>
+            </a:effectRef>
+            <a:fontRef idx="minor">
+              <a:schemeClr val="tx1"/>
+            </a:fontRef>
+          </p:style>
+        </p:cxnSp>
+        <mc:AlternateContent xmlns:mc="http://schemas.openxmlformats.org/markup-compatibility/2006">
+          <mc:Choice xmlns:a14="http://schemas.microsoft.com/office/drawing/2010/main" Requires="a14">
+            <p:sp>
+              <p:nvSpPr>
+                <p:cNvPr id="82" name="TextBox 81">
+                  <a:extLst>
+                    <a:ext uri="{FF2B5EF4-FFF2-40B4-BE49-F238E27FC236}">
+                      <a16:creationId xmlns:a16="http://schemas.microsoft.com/office/drawing/2014/main" id="{488590DC-E339-4D94-6CCB-A85E1063A95C}"/>
+                    </a:ext>
+                  </a:extLst>
+                </p:cNvPr>
+                <p:cNvSpPr txBox="1"/>
+                <p:nvPr/>
+              </p:nvSpPr>
+              <p:spPr>
+                <a:xfrm>
+                  <a:off x="8146477" y="2520191"/>
+                  <a:ext cx="363844" cy="369332"/>
+                </a:xfrm>
+                <a:prstGeom prst="rect">
+                  <a:avLst/>
+                </a:prstGeom>
+                <a:noFill/>
+              </p:spPr>
+              <p:txBody>
+                <a:bodyPr wrap="square" rtlCol="0">
+                  <a:spAutoFit/>
+                </a:bodyPr>
+                <a:lstStyle/>
+                <a:p>
+                  <a:pPr algn="just"/>
+                  <a14:m>
+                    <m:oMathPara xmlns:m="http://schemas.openxmlformats.org/officeDocument/2006/math">
+                      <m:oMathParaPr>
+                        <m:jc m:val="left"/>
+                      </m:oMathParaPr>
+                      <m:oMath xmlns:m="http://schemas.openxmlformats.org/officeDocument/2006/math">
+                        <m:sSub>
+                          <m:sSubPr>
+                            <m:ctrlPr>
+                              <a:rPr lang="en-US" i="1" smtClean="0">
+                                <a:latin typeface="Cambria Math" panose="02040503050406030204" pitchFamily="18" charset="0"/>
+                              </a:rPr>
+                            </m:ctrlPr>
+                          </m:sSubPr>
+                          <m:e>
+                            <m:r>
+                              <a:rPr lang="pt-BR" b="0" i="1" smtClean="0">
+                                <a:latin typeface="Cambria Math" panose="02040503050406030204" pitchFamily="18" charset="0"/>
+                              </a:rPr>
+                              <m:t>h</m:t>
+                            </m:r>
+                          </m:e>
+                          <m:sub>
+                            <m:r>
+                              <a:rPr lang="pt-BR" b="0" i="1" smtClean="0">
+                                <a:latin typeface="Cambria Math" panose="02040503050406030204" pitchFamily="18" charset="0"/>
+                              </a:rPr>
+                              <m:t>𝑡</m:t>
+                            </m:r>
+                          </m:sub>
+                        </m:sSub>
+                      </m:oMath>
+                    </m:oMathPara>
+                  </a14:m>
+                  <a:endParaRPr lang="en-US" dirty="0"/>
+                </a:p>
+              </p:txBody>
+            </p:sp>
+          </mc:Choice>
+          <mc:Fallback>
+            <p:sp>
+              <p:nvSpPr>
+                <p:cNvPr id="82" name="TextBox 81">
+                  <a:extLst>
+                    <a:ext uri="{FF2B5EF4-FFF2-40B4-BE49-F238E27FC236}">
+                      <a16:creationId xmlns:a16="http://schemas.microsoft.com/office/drawing/2014/main" id="{488590DC-E339-4D94-6CCB-A85E1063A95C}"/>
+                    </a:ext>
+                  </a:extLst>
+                </p:cNvPr>
+                <p:cNvSpPr txBox="1">
+                  <a:spLocks noRot="1" noChangeAspect="1" noMove="1" noResize="1" noEditPoints="1" noAdjustHandles="1" noChangeArrowheads="1" noChangeShapeType="1" noTextEdit="1"/>
+                </p:cNvSpPr>
+                <p:nvPr/>
+              </p:nvSpPr>
+              <p:spPr>
+                <a:xfrm>
+                  <a:off x="8146477" y="2520191"/>
+                  <a:ext cx="363844" cy="369332"/>
+                </a:xfrm>
+                <a:prstGeom prst="rect">
+                  <a:avLst/>
+                </a:prstGeom>
+                <a:blipFill>
+                  <a:blip r:embed="rId6"/>
+                  <a:stretch>
+                    <a:fillRect/>
+                  </a:stretch>
+                </a:blipFill>
+              </p:spPr>
+              <p:txBody>
+                <a:bodyPr/>
+                <a:lstStyle/>
+                <a:p>
+                  <a:r>
+                    <a:rPr lang="en-US">
+                      <a:noFill/>
+                    </a:rPr>
+                    <a:t> </a:t>
+                  </a:r>
+                </a:p>
+              </p:txBody>
+            </p:sp>
+          </mc:Fallback>
+        </mc:AlternateContent>
+        <p:cxnSp>
+          <p:nvCxnSpPr>
+            <p:cNvPr id="87" name="Connector: Elbow 86">
+              <a:extLst>
+                <a:ext uri="{FF2B5EF4-FFF2-40B4-BE49-F238E27FC236}">
+                  <a16:creationId xmlns:a16="http://schemas.microsoft.com/office/drawing/2014/main" id="{540822DA-C440-2FF8-1393-44F98D89EC54}"/>
+                </a:ext>
+              </a:extLst>
+            </p:cNvPr>
+            <p:cNvCxnSpPr>
+              <a:stCxn id="19" idx="0"/>
+              <a:endCxn id="37" idx="6"/>
+            </p:cNvCxnSpPr>
+            <p:nvPr/>
+          </p:nvCxnSpPr>
+          <p:spPr>
+            <a:xfrm rot="16200000" flipV="1">
+              <a:off x="5106929" y="3224114"/>
+              <a:ext cx="285661" cy="486214"/>
+            </a:xfrm>
+            <a:prstGeom prst="bentConnector2">
+              <a:avLst/>
+            </a:prstGeom>
+            <a:ln w="19050">
+              <a:tailEnd type="triangle"/>
+            </a:ln>
+          </p:spPr>
+          <p:style>
+            <a:lnRef idx="1">
+              <a:schemeClr val="dk1"/>
+            </a:lnRef>
+            <a:fillRef idx="0">
+              <a:schemeClr val="dk1"/>
+            </a:fillRef>
+            <a:effectRef idx="0">
+              <a:schemeClr val="dk1"/>
+            </a:effectRef>
+            <a:fontRef idx="minor">
+              <a:schemeClr val="tx1"/>
+            </a:fontRef>
+          </p:style>
+        </p:cxnSp>
+        <p:cxnSp>
+          <p:nvCxnSpPr>
+            <p:cNvPr id="89" name="Straight Connector 88">
+              <a:extLst>
+                <a:ext uri="{FF2B5EF4-FFF2-40B4-BE49-F238E27FC236}">
+                  <a16:creationId xmlns:a16="http://schemas.microsoft.com/office/drawing/2014/main" id="{180749C7-0E69-D172-CFA1-210BCB96C9E1}"/>
+                </a:ext>
+              </a:extLst>
+            </p:cNvPr>
+            <p:cNvCxnSpPr/>
+            <p:nvPr/>
+          </p:nvCxnSpPr>
+          <p:spPr>
+            <a:xfrm flipV="1">
+              <a:off x="4870127" y="2712873"/>
+              <a:ext cx="0" cy="474992"/>
+            </a:xfrm>
+            <a:prstGeom prst="line">
+              <a:avLst/>
+            </a:prstGeom>
+            <a:ln w="19050">
+              <a:headEnd type="triangle" w="med" len="med"/>
+              <a:tailEnd type="none" w="med" len="med"/>
+            </a:ln>
+          </p:spPr>
+          <p:style>
+            <a:lnRef idx="1">
+              <a:schemeClr val="dk1"/>
+            </a:lnRef>
+            <a:fillRef idx="0">
+              <a:schemeClr val="dk1"/>
+            </a:fillRef>
+            <a:effectRef idx="0">
+              <a:schemeClr val="dk1"/>
+            </a:effectRef>
+            <a:fontRef idx="minor">
+              <a:schemeClr val="tx1"/>
+            </a:fontRef>
+          </p:style>
+        </p:cxnSp>
+        <p:cxnSp>
+          <p:nvCxnSpPr>
+            <p:cNvPr id="91" name="Connector: Elbow 90">
+              <a:extLst>
+                <a:ext uri="{FF2B5EF4-FFF2-40B4-BE49-F238E27FC236}">
+                  <a16:creationId xmlns:a16="http://schemas.microsoft.com/office/drawing/2014/main" id="{641E2C6D-8BAA-2586-960B-35BF5D6E68FC}"/>
+                </a:ext>
+              </a:extLst>
+            </p:cNvPr>
+            <p:cNvCxnSpPr>
+              <a:stCxn id="37" idx="4"/>
+              <a:endCxn id="12" idx="2"/>
+            </p:cNvCxnSpPr>
+            <p:nvPr/>
+          </p:nvCxnSpPr>
+          <p:spPr>
+            <a:xfrm rot="16200000" flipH="1">
+              <a:off x="5902442" y="2428599"/>
+              <a:ext cx="449364" cy="2513995"/>
+            </a:xfrm>
+            <a:prstGeom prst="bentConnector3">
+              <a:avLst>
+                <a:gd name="adj1" fmla="val 171009"/>
+              </a:avLst>
+            </a:prstGeom>
+            <a:ln w="19050"/>
+          </p:spPr>
+          <p:style>
+            <a:lnRef idx="1">
+              <a:schemeClr val="dk1"/>
+            </a:lnRef>
+            <a:fillRef idx="0">
+              <a:schemeClr val="dk1"/>
+            </a:fillRef>
+            <a:effectRef idx="0">
+              <a:schemeClr val="dk1"/>
+            </a:effectRef>
+            <a:fontRef idx="minor">
+              <a:schemeClr val="tx1"/>
+            </a:fontRef>
+          </p:style>
+        </p:cxnSp>
+        <mc:AlternateContent xmlns:mc="http://schemas.openxmlformats.org/markup-compatibility/2006">
+          <mc:Choice xmlns:a14="http://schemas.microsoft.com/office/drawing/2010/main" Requires="a14">
+            <p:sp>
+              <p:nvSpPr>
+                <p:cNvPr id="98" name="TextBox 97">
+                  <a:extLst>
+                    <a:ext uri="{FF2B5EF4-FFF2-40B4-BE49-F238E27FC236}">
+                      <a16:creationId xmlns:a16="http://schemas.microsoft.com/office/drawing/2014/main" id="{775ACD4F-2125-CA2F-A6D1-F0CFBF0C345E}"/>
+                    </a:ext>
+                  </a:extLst>
+                </p:cNvPr>
+                <p:cNvSpPr txBox="1"/>
+                <p:nvPr/>
+              </p:nvSpPr>
+              <p:spPr>
+                <a:xfrm>
+                  <a:off x="4270792" y="4455395"/>
+                  <a:ext cx="446532" cy="369332"/>
+                </a:xfrm>
+                <a:prstGeom prst="rect">
+                  <a:avLst/>
+                </a:prstGeom>
+                <a:noFill/>
+              </p:spPr>
+              <p:txBody>
+                <a:bodyPr wrap="none" rtlCol="0">
+                  <a:spAutoFit/>
+                </a:bodyPr>
+                <a:lstStyle/>
+                <a:p>
+                  <a:pPr/>
+                  <a14:m>
+                    <m:oMathPara xmlns:m="http://schemas.openxmlformats.org/officeDocument/2006/math">
+                      <m:oMathParaPr>
+                        <m:jc m:val="centerGroup"/>
+                      </m:oMathParaPr>
+                      <m:oMath xmlns:m="http://schemas.openxmlformats.org/officeDocument/2006/math">
+                        <m:sSub>
+                          <m:sSubPr>
+                            <m:ctrlPr>
+                              <a:rPr lang="en-US" i="1" smtClean="0">
+                                <a:latin typeface="Cambria Math" panose="02040503050406030204" pitchFamily="18" charset="0"/>
+                              </a:rPr>
+                            </m:ctrlPr>
+                          </m:sSubPr>
+                          <m:e>
+                            <m:r>
+                              <a:rPr lang="pt-BR" b="0" i="1" smtClean="0">
+                                <a:latin typeface="Cambria Math" panose="02040503050406030204" pitchFamily="18" charset="0"/>
+                              </a:rPr>
+                              <m:t>𝑥</m:t>
+                            </m:r>
+                          </m:e>
+                          <m:sub>
+                            <m:r>
+                              <a:rPr lang="pt-BR" b="0" i="1" smtClean="0">
+                                <a:latin typeface="Cambria Math" panose="02040503050406030204" pitchFamily="18" charset="0"/>
+                              </a:rPr>
+                              <m:t>𝑡</m:t>
+                            </m:r>
+                          </m:sub>
+                        </m:sSub>
+                      </m:oMath>
+                    </m:oMathPara>
+                  </a14:m>
+                  <a:endParaRPr lang="en-US" dirty="0"/>
+                </a:p>
+              </p:txBody>
+            </p:sp>
+          </mc:Choice>
+          <mc:Fallback>
+            <p:sp>
+              <p:nvSpPr>
+                <p:cNvPr id="98" name="TextBox 97">
+                  <a:extLst>
+                    <a:ext uri="{FF2B5EF4-FFF2-40B4-BE49-F238E27FC236}">
+                      <a16:creationId xmlns:a16="http://schemas.microsoft.com/office/drawing/2014/main" id="{775ACD4F-2125-CA2F-A6D1-F0CFBF0C345E}"/>
+                    </a:ext>
+                  </a:extLst>
+                </p:cNvPr>
+                <p:cNvSpPr txBox="1">
+                  <a:spLocks noRot="1" noChangeAspect="1" noMove="1" noResize="1" noEditPoints="1" noAdjustHandles="1" noChangeArrowheads="1" noChangeShapeType="1" noTextEdit="1"/>
+                </p:cNvSpPr>
+                <p:nvPr/>
+              </p:nvSpPr>
+              <p:spPr>
+                <a:xfrm>
+                  <a:off x="4270792" y="4455395"/>
+                  <a:ext cx="446532" cy="369332"/>
+                </a:xfrm>
+                <a:prstGeom prst="rect">
+                  <a:avLst/>
+                </a:prstGeom>
+                <a:blipFill>
+                  <a:blip r:embed="rId7"/>
+                  <a:stretch>
+                    <a:fillRect/>
+                  </a:stretch>
+                </a:blipFill>
+              </p:spPr>
+              <p:txBody>
+                <a:bodyPr/>
+                <a:lstStyle/>
+                <a:p>
+                  <a:r>
+                    <a:rPr lang="en-US">
+                      <a:noFill/>
+                    </a:rPr>
+                    <a:t> </a:t>
+                  </a:r>
+                </a:p>
+              </p:txBody>
+            </p:sp>
+          </mc:Fallback>
+        </mc:AlternateContent>
+        <p:cxnSp>
+          <p:nvCxnSpPr>
+            <p:cNvPr id="104" name="Connector: Elbow 103">
+              <a:extLst>
+                <a:ext uri="{FF2B5EF4-FFF2-40B4-BE49-F238E27FC236}">
+                  <a16:creationId xmlns:a16="http://schemas.microsoft.com/office/drawing/2014/main" id="{0DE47F14-750D-68C0-E1AD-B3723EE38EFD}"/>
+                </a:ext>
+              </a:extLst>
+            </p:cNvPr>
+            <p:cNvCxnSpPr>
+              <a:cxnSpLocks/>
+            </p:cNvCxnSpPr>
+            <p:nvPr/>
+          </p:nvCxnSpPr>
+          <p:spPr>
+            <a:xfrm rot="5400000">
+              <a:off x="5779325" y="2625890"/>
+              <a:ext cx="320409" cy="2889186"/>
+            </a:xfrm>
+            <a:prstGeom prst="bentConnector2">
+              <a:avLst/>
+            </a:prstGeom>
+            <a:ln w="19050">
+              <a:headEnd type="triangle" w="med" len="med"/>
+              <a:tailEnd type="none" w="med" len="med"/>
+            </a:ln>
+          </p:spPr>
+          <p:style>
+            <a:lnRef idx="1">
+              <a:schemeClr val="dk1"/>
+            </a:lnRef>
+            <a:fillRef idx="0">
+              <a:schemeClr val="dk1"/>
+            </a:fillRef>
+            <a:effectRef idx="0">
+              <a:schemeClr val="dk1"/>
+            </a:effectRef>
+            <a:fontRef idx="minor">
+              <a:schemeClr val="tx1"/>
+            </a:fontRef>
+          </p:style>
+        </p:cxnSp>
+        <p:cxnSp>
+          <p:nvCxnSpPr>
+            <p:cNvPr id="107" name="Straight Connector 106">
+              <a:extLst>
+                <a:ext uri="{FF2B5EF4-FFF2-40B4-BE49-F238E27FC236}">
+                  <a16:creationId xmlns:a16="http://schemas.microsoft.com/office/drawing/2014/main" id="{716C0B98-441D-08AF-01CE-CB39C12BF5BC}"/>
+                </a:ext>
+              </a:extLst>
+            </p:cNvPr>
+            <p:cNvCxnSpPr/>
+            <p:nvPr/>
+          </p:nvCxnSpPr>
+          <p:spPr>
+            <a:xfrm flipV="1">
+              <a:off x="4502150" y="2712873"/>
+              <a:ext cx="0" cy="1111415"/>
+            </a:xfrm>
+            <a:prstGeom prst="line">
+              <a:avLst/>
+            </a:prstGeom>
+            <a:ln w="19050">
+              <a:solidFill>
+                <a:schemeClr val="tx1"/>
+              </a:solidFill>
+            </a:ln>
+          </p:spPr>
+          <p:style>
+            <a:lnRef idx="1">
+              <a:schemeClr val="accent1"/>
+            </a:lnRef>
+            <a:fillRef idx="0">
+              <a:schemeClr val="accent1"/>
+            </a:fillRef>
+            <a:effectRef idx="0">
+              <a:schemeClr val="accent1"/>
+            </a:effectRef>
+            <a:fontRef idx="minor">
+              <a:schemeClr val="tx1"/>
+            </a:fontRef>
+          </p:style>
+        </p:cxnSp>
+        <p:cxnSp>
+          <p:nvCxnSpPr>
+            <p:cNvPr id="111" name="Connector: Elbow 110">
+              <a:extLst>
+                <a:ext uri="{FF2B5EF4-FFF2-40B4-BE49-F238E27FC236}">
+                  <a16:creationId xmlns:a16="http://schemas.microsoft.com/office/drawing/2014/main" id="{737121D0-0380-2E97-A3BF-0A624A417999}"/>
+                </a:ext>
+              </a:extLst>
+            </p:cNvPr>
+            <p:cNvCxnSpPr>
+              <a:cxnSpLocks/>
+              <a:stCxn id="114" idx="2"/>
+              <a:endCxn id="14" idx="2"/>
+            </p:cNvCxnSpPr>
+            <p:nvPr/>
+          </p:nvCxnSpPr>
+          <p:spPr>
+            <a:xfrm flipV="1">
+              <a:off x="4600574" y="3905037"/>
+              <a:ext cx="1772114" cy="124675"/>
+            </a:xfrm>
+            <a:prstGeom prst="bentConnector2">
+              <a:avLst/>
+            </a:prstGeom>
+            <a:ln w="19050">
+              <a:headEnd type="none" w="med" len="med"/>
+              <a:tailEnd type="triangle" w="med" len="med"/>
+            </a:ln>
+          </p:spPr>
+          <p:style>
+            <a:lnRef idx="1">
+              <a:schemeClr val="dk1"/>
+            </a:lnRef>
+            <a:fillRef idx="0">
+              <a:schemeClr val="dk1"/>
+            </a:fillRef>
+            <a:effectRef idx="0">
+              <a:schemeClr val="dk1"/>
+            </a:effectRef>
+            <a:fontRef idx="minor">
+              <a:schemeClr val="tx1"/>
+            </a:fontRef>
+          </p:style>
+        </p:cxnSp>
+        <p:sp>
+          <p:nvSpPr>
+            <p:cNvPr id="114" name="Freeform: Shape 113">
+              <a:extLst>
+                <a:ext uri="{FF2B5EF4-FFF2-40B4-BE49-F238E27FC236}">
+                  <a16:creationId xmlns:a16="http://schemas.microsoft.com/office/drawing/2014/main" id="{11A13A5E-D171-20F2-D972-AD32DF855867}"/>
+                </a:ext>
+              </a:extLst>
+            </p:cNvPr>
+            <p:cNvSpPr/>
+            <p:nvPr/>
+          </p:nvSpPr>
+          <p:spPr>
+            <a:xfrm>
+              <a:off x="4495799" y="3802856"/>
+              <a:ext cx="104775" cy="226856"/>
+            </a:xfrm>
+            <a:custGeom>
+              <a:avLst/>
+              <a:gdLst>
+                <a:gd name="csX0" fmla="*/ 6107 w 106120"/>
+                <a:gd name="csY0" fmla="*/ 0 h 214313"/>
+                <a:gd name="csX1" fmla="*/ 10870 w 106120"/>
+                <a:gd name="csY1" fmla="*/ 157163 h 214313"/>
+                <a:gd name="csX2" fmla="*/ 106120 w 106120"/>
+                <a:gd name="csY2" fmla="*/ 214313 h 214313"/>
+              </a:gdLst>
+              <a:ahLst/>
+              <a:cxnLst>
+                <a:cxn ang="0">
+                  <a:pos x="csX0" y="csY0"/>
+                </a:cxn>
+                <a:cxn ang="0">
+                  <a:pos x="csX1" y="csY1"/>
+                </a:cxn>
+                <a:cxn ang="0">
+                  <a:pos x="csX2" y="csY2"/>
+                </a:cxn>
+              </a:cxnLst>
+              <a:rect l="l" t="t" r="r" b="b"/>
+              <a:pathLst>
+                <a:path w="106120" h="214313">
+                  <a:moveTo>
+                    <a:pt x="6107" y="0"/>
+                  </a:moveTo>
+                  <a:cubicBezTo>
+                    <a:pt x="154" y="60722"/>
+                    <a:pt x="-5799" y="121444"/>
+                    <a:pt x="10870" y="157163"/>
+                  </a:cubicBezTo>
+                  <a:cubicBezTo>
+                    <a:pt x="27539" y="192882"/>
+                    <a:pt x="66829" y="203597"/>
+                    <a:pt x="106120" y="214313"/>
+                  </a:cubicBezTo>
+                </a:path>
+              </a:pathLst>
+            </a:custGeom>
+            <a:noFill/>
+            <a:ln w="19050">
+              <a:solidFill>
+                <a:schemeClr val="tx1"/>
+              </a:solidFill>
+            </a:ln>
+          </p:spPr>
+          <p:style>
+            <a:lnRef idx="2">
+              <a:schemeClr val="accent1">
+                <a:shade val="15000"/>
+              </a:schemeClr>
+            </a:lnRef>
+            <a:fillRef idx="1">
+              <a:schemeClr val="accent1"/>
+            </a:fillRef>
+            <a:effectRef idx="0">
+              <a:schemeClr val="accent1"/>
+            </a:effectRef>
+            <a:fontRef idx="minor">
+              <a:schemeClr val="lt1"/>
+            </a:fontRef>
+          </p:style>
+          <p:txBody>
+            <a:bodyPr rtlCol="0" anchor="ctr"/>
+            <a:lstStyle/>
+            <a:p>
+              <a:pPr algn="ctr"/>
+              <a:endParaRPr lang="en-US"/>
+            </a:p>
+          </p:txBody>
+        </p:sp>
+        <p:cxnSp>
+          <p:nvCxnSpPr>
+            <p:cNvPr id="122" name="Straight Connector 121">
+              <a:extLst>
+                <a:ext uri="{FF2B5EF4-FFF2-40B4-BE49-F238E27FC236}">
+                  <a16:creationId xmlns:a16="http://schemas.microsoft.com/office/drawing/2014/main" id="{4CA64C18-D2EA-8E55-6B93-5C413921DD43}"/>
+                </a:ext>
+              </a:extLst>
+            </p:cNvPr>
+            <p:cNvCxnSpPr/>
+            <p:nvPr/>
+          </p:nvCxnSpPr>
+          <p:spPr>
+            <a:xfrm flipV="1">
+              <a:off x="4500561" y="4140756"/>
+              <a:ext cx="0" cy="396000"/>
+            </a:xfrm>
+            <a:prstGeom prst="line">
+              <a:avLst/>
+            </a:prstGeom>
+            <a:ln w="19050">
+              <a:solidFill>
+                <a:schemeClr val="tx1"/>
+              </a:solidFill>
+            </a:ln>
+          </p:spPr>
+          <p:style>
+            <a:lnRef idx="1">
+              <a:schemeClr val="accent1"/>
+            </a:lnRef>
+            <a:fillRef idx="0">
+              <a:schemeClr val="accent1"/>
+            </a:fillRef>
+            <a:effectRef idx="0">
+              <a:schemeClr val="accent1"/>
+            </a:effectRef>
+            <a:fontRef idx="minor">
+              <a:schemeClr val="tx1"/>
+            </a:fontRef>
+          </p:style>
+        </p:cxnSp>
+        <p:sp>
+          <p:nvSpPr>
+            <p:cNvPr id="123" name="Freeform: Shape 122">
+              <a:extLst>
+                <a:ext uri="{FF2B5EF4-FFF2-40B4-BE49-F238E27FC236}">
+                  <a16:creationId xmlns:a16="http://schemas.microsoft.com/office/drawing/2014/main" id="{B1F4FBC4-364C-A19F-A81D-DA38A3FDF67F}"/>
+                </a:ext>
+              </a:extLst>
+            </p:cNvPr>
+            <p:cNvSpPr/>
+            <p:nvPr/>
+          </p:nvSpPr>
+          <p:spPr>
+            <a:xfrm rot="5170363">
+              <a:off x="4558343" y="3970802"/>
+              <a:ext cx="104775" cy="226856"/>
+            </a:xfrm>
+            <a:custGeom>
+              <a:avLst/>
+              <a:gdLst>
+                <a:gd name="csX0" fmla="*/ 6107 w 106120"/>
+                <a:gd name="csY0" fmla="*/ 0 h 214313"/>
+                <a:gd name="csX1" fmla="*/ 10870 w 106120"/>
+                <a:gd name="csY1" fmla="*/ 157163 h 214313"/>
+                <a:gd name="csX2" fmla="*/ 106120 w 106120"/>
+                <a:gd name="csY2" fmla="*/ 214313 h 214313"/>
+              </a:gdLst>
+              <a:ahLst/>
+              <a:cxnLst>
+                <a:cxn ang="0">
+                  <a:pos x="csX0" y="csY0"/>
+                </a:cxn>
+                <a:cxn ang="0">
+                  <a:pos x="csX1" y="csY1"/>
+                </a:cxn>
+                <a:cxn ang="0">
+                  <a:pos x="csX2" y="csY2"/>
+                </a:cxn>
+              </a:cxnLst>
+              <a:rect l="l" t="t" r="r" b="b"/>
+              <a:pathLst>
+                <a:path w="106120" h="214313">
+                  <a:moveTo>
+                    <a:pt x="6107" y="0"/>
+                  </a:moveTo>
+                  <a:cubicBezTo>
+                    <a:pt x="154" y="60722"/>
+                    <a:pt x="-5799" y="121444"/>
+                    <a:pt x="10870" y="157163"/>
+                  </a:cubicBezTo>
+                  <a:cubicBezTo>
+                    <a:pt x="27539" y="192882"/>
+                    <a:pt x="66829" y="203597"/>
+                    <a:pt x="106120" y="214313"/>
+                  </a:cubicBezTo>
+                </a:path>
+              </a:pathLst>
+            </a:custGeom>
+            <a:noFill/>
+            <a:ln w="19050">
+              <a:solidFill>
+                <a:schemeClr val="tx1"/>
+              </a:solidFill>
+            </a:ln>
+          </p:spPr>
+          <p:style>
+            <a:lnRef idx="2">
+              <a:schemeClr val="accent1">
+                <a:shade val="15000"/>
+              </a:schemeClr>
+            </a:lnRef>
+            <a:fillRef idx="1">
+              <a:schemeClr val="accent1"/>
+            </a:fillRef>
+            <a:effectRef idx="0">
+              <a:schemeClr val="accent1"/>
+            </a:effectRef>
+            <a:fontRef idx="minor">
+              <a:schemeClr val="lt1"/>
+            </a:fontRef>
+          </p:style>
+          <p:txBody>
+            <a:bodyPr rtlCol="0" anchor="ctr"/>
+            <a:lstStyle/>
+            <a:p>
+              <a:pPr algn="ctr"/>
+              <a:endParaRPr lang="en-US"/>
+            </a:p>
+          </p:txBody>
+        </p:sp>
+        <p:cxnSp>
+          <p:nvCxnSpPr>
+            <p:cNvPr id="126" name="Straight Connector 125">
+              <a:extLst>
+                <a:ext uri="{FF2B5EF4-FFF2-40B4-BE49-F238E27FC236}">
+                  <a16:creationId xmlns:a16="http://schemas.microsoft.com/office/drawing/2014/main" id="{A4AFA3A5-3D61-AD77-0FD5-E05A04A78770}"/>
+                </a:ext>
+              </a:extLst>
+            </p:cNvPr>
+            <p:cNvCxnSpPr>
+              <a:cxnSpLocks/>
+              <a:stCxn id="19" idx="2"/>
+            </p:cNvCxnSpPr>
+            <p:nvPr/>
+          </p:nvCxnSpPr>
+          <p:spPr>
+            <a:xfrm>
+              <a:off x="5492866" y="3907923"/>
+              <a:ext cx="0" cy="116465"/>
+            </a:xfrm>
+            <a:prstGeom prst="line">
+              <a:avLst/>
+            </a:prstGeom>
+            <a:ln w="19050">
+              <a:headEnd type="triangle" w="med" len="med"/>
+              <a:tailEnd type="none" w="med" len="med"/>
+            </a:ln>
+          </p:spPr>
+          <p:style>
+            <a:lnRef idx="1">
+              <a:schemeClr val="dk1"/>
+            </a:lnRef>
+            <a:fillRef idx="0">
+              <a:schemeClr val="dk1"/>
+            </a:fillRef>
+            <a:effectRef idx="0">
+              <a:schemeClr val="dk1"/>
+            </a:effectRef>
+            <a:fontRef idx="minor">
+              <a:schemeClr val="tx1"/>
+            </a:fontRef>
+          </p:style>
+        </p:cxnSp>
+        <mc:AlternateContent xmlns:mc="http://schemas.openxmlformats.org/markup-compatibility/2006">
+          <mc:Choice xmlns:a14="http://schemas.microsoft.com/office/drawing/2010/main" Requires="a14">
+            <p:sp>
+              <p:nvSpPr>
+                <p:cNvPr id="129" name="TextBox 128">
+                  <a:extLst>
+                    <a:ext uri="{FF2B5EF4-FFF2-40B4-BE49-F238E27FC236}">
+                      <a16:creationId xmlns:a16="http://schemas.microsoft.com/office/drawing/2014/main" id="{2ADCA7E5-A076-5B32-BC9D-A16A6D795C3A}"/>
+                    </a:ext>
+                  </a:extLst>
+                </p:cNvPr>
+                <p:cNvSpPr txBox="1"/>
+                <p:nvPr/>
+              </p:nvSpPr>
+              <p:spPr>
+                <a:xfrm>
+                  <a:off x="6002906" y="3222817"/>
+                  <a:ext cx="431913" cy="369332"/>
+                </a:xfrm>
+                <a:prstGeom prst="rect">
+                  <a:avLst/>
+                </a:prstGeom>
+                <a:noFill/>
+              </p:spPr>
+              <p:txBody>
+                <a:bodyPr wrap="none" rtlCol="0">
+                  <a:spAutoFit/>
+                </a:bodyPr>
+                <a:lstStyle/>
+                <a:p>
+                  <a:pPr/>
+                  <a14:m>
+                    <m:oMathPara xmlns:m="http://schemas.openxmlformats.org/officeDocument/2006/math">
+                      <m:oMathParaPr>
+                        <m:jc m:val="centerGroup"/>
+                      </m:oMathParaPr>
+                      <m:oMath xmlns:m="http://schemas.openxmlformats.org/officeDocument/2006/math">
+                        <m:sSub>
+                          <m:sSubPr>
+                            <m:ctrlPr>
+                              <a:rPr lang="en-US" i="1" smtClean="0">
+                                <a:latin typeface="Cambria Math" panose="02040503050406030204" pitchFamily="18" charset="0"/>
+                              </a:rPr>
+                            </m:ctrlPr>
+                          </m:sSubPr>
+                          <m:e>
+                            <m:r>
+                              <a:rPr lang="pt-BR" b="0" i="1" smtClean="0">
+                                <a:latin typeface="Cambria Math" panose="02040503050406030204" pitchFamily="18" charset="0"/>
+                              </a:rPr>
+                              <m:t>𝑧</m:t>
+                            </m:r>
+                          </m:e>
+                          <m:sub>
+                            <m:r>
+                              <a:rPr lang="pt-BR" b="0" i="1" smtClean="0">
+                                <a:latin typeface="Cambria Math" panose="02040503050406030204" pitchFamily="18" charset="0"/>
+                              </a:rPr>
+                              <m:t>𝑡</m:t>
+                            </m:r>
+                          </m:sub>
+                        </m:sSub>
+                      </m:oMath>
+                    </m:oMathPara>
+                  </a14:m>
+                  <a:endParaRPr lang="en-US" dirty="0"/>
+                </a:p>
+              </p:txBody>
+            </p:sp>
+          </mc:Choice>
+          <mc:Fallback>
+            <p:sp>
+              <p:nvSpPr>
+                <p:cNvPr id="129" name="TextBox 128">
+                  <a:extLst>
+                    <a:ext uri="{FF2B5EF4-FFF2-40B4-BE49-F238E27FC236}">
+                      <a16:creationId xmlns:a16="http://schemas.microsoft.com/office/drawing/2014/main" id="{2ADCA7E5-A076-5B32-BC9D-A16A6D795C3A}"/>
+                    </a:ext>
+                  </a:extLst>
+                </p:cNvPr>
+                <p:cNvSpPr txBox="1">
+                  <a:spLocks noRot="1" noChangeAspect="1" noMove="1" noResize="1" noEditPoints="1" noAdjustHandles="1" noChangeArrowheads="1" noChangeShapeType="1" noTextEdit="1"/>
+                </p:cNvSpPr>
+                <p:nvPr/>
+              </p:nvSpPr>
+              <p:spPr>
+                <a:xfrm>
+                  <a:off x="6002906" y="3222817"/>
+                  <a:ext cx="431913" cy="369332"/>
+                </a:xfrm>
+                <a:prstGeom prst="rect">
+                  <a:avLst/>
+                </a:prstGeom>
+                <a:blipFill>
+                  <a:blip r:embed="rId8"/>
+                  <a:stretch>
+                    <a:fillRect/>
+                  </a:stretch>
+                </a:blipFill>
+              </p:spPr>
+              <p:txBody>
+                <a:bodyPr/>
+                <a:lstStyle/>
+                <a:p>
+                  <a:r>
+                    <a:rPr lang="en-US">
+                      <a:noFill/>
+                    </a:rPr>
+                    <a:t> </a:t>
+                  </a:r>
+                </a:p>
+              </p:txBody>
+            </p:sp>
+          </mc:Fallback>
+        </mc:AlternateContent>
+        <mc:AlternateContent xmlns:mc="http://schemas.openxmlformats.org/markup-compatibility/2006">
+          <mc:Choice xmlns:a14="http://schemas.microsoft.com/office/drawing/2010/main" Requires="a14">
+            <p:sp>
+              <p:nvSpPr>
+                <p:cNvPr id="130" name="TextBox 129">
+                  <a:extLst>
+                    <a:ext uri="{FF2B5EF4-FFF2-40B4-BE49-F238E27FC236}">
+                      <a16:creationId xmlns:a16="http://schemas.microsoft.com/office/drawing/2014/main" id="{30D44200-682E-3C64-7263-CD46DB66F451}"/>
+                    </a:ext>
+                  </a:extLst>
+                </p:cNvPr>
+                <p:cNvSpPr txBox="1"/>
+                <p:nvPr/>
+              </p:nvSpPr>
+              <p:spPr>
+                <a:xfrm>
+                  <a:off x="5122198" y="3247949"/>
+                  <a:ext cx="408958" cy="369332"/>
+                </a:xfrm>
+                <a:prstGeom prst="rect">
+                  <a:avLst/>
+                </a:prstGeom>
+                <a:noFill/>
+              </p:spPr>
+              <p:txBody>
+                <a:bodyPr wrap="none" rtlCol="0">
+                  <a:spAutoFit/>
+                </a:bodyPr>
+                <a:lstStyle/>
+                <a:p>
+                  <a:pPr/>
+                  <a14:m>
+                    <m:oMathPara xmlns:m="http://schemas.openxmlformats.org/officeDocument/2006/math">
+                      <m:oMathParaPr>
+                        <m:jc m:val="centerGroup"/>
+                      </m:oMathParaPr>
+                      <m:oMath xmlns:m="http://schemas.openxmlformats.org/officeDocument/2006/math">
+                        <m:sSub>
+                          <m:sSubPr>
+                            <m:ctrlPr>
+                              <a:rPr lang="en-US" i="1" smtClean="0">
+                                <a:latin typeface="Cambria Math" panose="02040503050406030204" pitchFamily="18" charset="0"/>
+                              </a:rPr>
+                            </m:ctrlPr>
+                          </m:sSubPr>
+                          <m:e>
+                            <m:r>
+                              <a:rPr lang="pt-BR" b="0" i="1" smtClean="0">
+                                <a:latin typeface="Cambria Math" panose="02040503050406030204" pitchFamily="18" charset="0"/>
+                              </a:rPr>
+                              <m:t>𝑟</m:t>
+                            </m:r>
+                          </m:e>
+                          <m:sub>
+                            <m:r>
+                              <a:rPr lang="pt-BR" b="0" i="1" smtClean="0">
+                                <a:latin typeface="Cambria Math" panose="02040503050406030204" pitchFamily="18" charset="0"/>
+                              </a:rPr>
+                              <m:t>𝑡</m:t>
+                            </m:r>
+                          </m:sub>
+                        </m:sSub>
+                      </m:oMath>
+                    </m:oMathPara>
+                  </a14:m>
+                  <a:endParaRPr lang="en-US" dirty="0"/>
+                </a:p>
+              </p:txBody>
+            </p:sp>
+          </mc:Choice>
+          <mc:Fallback>
+            <p:sp>
+              <p:nvSpPr>
+                <p:cNvPr id="130" name="TextBox 129">
+                  <a:extLst>
+                    <a:ext uri="{FF2B5EF4-FFF2-40B4-BE49-F238E27FC236}">
+                      <a16:creationId xmlns:a16="http://schemas.microsoft.com/office/drawing/2014/main" id="{30D44200-682E-3C64-7263-CD46DB66F451}"/>
+                    </a:ext>
+                  </a:extLst>
+                </p:cNvPr>
+                <p:cNvSpPr txBox="1">
+                  <a:spLocks noRot="1" noChangeAspect="1" noMove="1" noResize="1" noEditPoints="1" noAdjustHandles="1" noChangeArrowheads="1" noChangeShapeType="1" noTextEdit="1"/>
+                </p:cNvSpPr>
+                <p:nvPr/>
+              </p:nvSpPr>
+              <p:spPr>
+                <a:xfrm>
+                  <a:off x="5122198" y="3247949"/>
+                  <a:ext cx="408958" cy="369332"/>
+                </a:xfrm>
+                <a:prstGeom prst="rect">
+                  <a:avLst/>
+                </a:prstGeom>
+                <a:blipFill>
+                  <a:blip r:embed="rId9"/>
+                  <a:stretch>
+                    <a:fillRect/>
+                  </a:stretch>
+                </a:blipFill>
+              </p:spPr>
+              <p:txBody>
+                <a:bodyPr/>
+                <a:lstStyle/>
+                <a:p>
+                  <a:r>
+                    <a:rPr lang="en-US">
+                      <a:noFill/>
+                    </a:rPr>
+                    <a:t> </a:t>
+                  </a:r>
+                </a:p>
+              </p:txBody>
+            </p:sp>
+          </mc:Fallback>
+        </mc:AlternateContent>
+        <mc:AlternateContent xmlns:mc="http://schemas.openxmlformats.org/markup-compatibility/2006">
+          <mc:Choice xmlns:a14="http://schemas.microsoft.com/office/drawing/2010/main" Requires="a14">
+            <p:sp>
+              <p:nvSpPr>
+                <p:cNvPr id="131" name="TextBox 130">
+                  <a:extLst>
+                    <a:ext uri="{FF2B5EF4-FFF2-40B4-BE49-F238E27FC236}">
+                      <a16:creationId xmlns:a16="http://schemas.microsoft.com/office/drawing/2014/main" id="{6700C2E8-30BB-D3C5-50C9-1951D85495E1}"/>
+                    </a:ext>
+                  </a:extLst>
+                </p:cNvPr>
+                <p:cNvSpPr txBox="1"/>
+                <p:nvPr/>
+              </p:nvSpPr>
+              <p:spPr>
+                <a:xfrm>
+                  <a:off x="7376868" y="3269551"/>
+                  <a:ext cx="453586" cy="381643"/>
+                </a:xfrm>
+                <a:prstGeom prst="rect">
+                  <a:avLst/>
+                </a:prstGeom>
+                <a:noFill/>
+              </p:spPr>
+              <p:txBody>
+                <a:bodyPr wrap="none" rtlCol="0">
+                  <a:spAutoFit/>
+                </a:bodyPr>
+                <a:lstStyle/>
+                <a:p>
+                  <a:pPr/>
+                  <a14:m>
+                    <m:oMathPara xmlns:m="http://schemas.openxmlformats.org/officeDocument/2006/math">
+                      <m:oMathParaPr>
+                        <m:jc m:val="centerGroup"/>
+                      </m:oMathParaPr>
+                      <m:oMath xmlns:m="http://schemas.openxmlformats.org/officeDocument/2006/math">
+                        <m:sSub>
+                          <m:sSubPr>
+                            <m:ctrlPr>
+                              <a:rPr lang="en-US" i="1" smtClean="0">
+                                <a:latin typeface="Cambria Math" panose="02040503050406030204" pitchFamily="18" charset="0"/>
+                              </a:rPr>
+                            </m:ctrlPr>
+                          </m:sSubPr>
+                          <m:e>
+                            <m:acc>
+                              <m:accPr>
+                                <m:chr m:val="̃"/>
+                                <m:ctrlPr>
+                                  <a:rPr lang="en-US" i="1">
+                                    <a:latin typeface="Cambria Math" panose="02040503050406030204" pitchFamily="18" charset="0"/>
+                                  </a:rPr>
+                                </m:ctrlPr>
+                              </m:accPr>
+                              <m:e>
+                                <m:r>
+                                  <a:rPr lang="pt-BR" b="0" i="1" smtClean="0">
+                                    <a:latin typeface="Cambria Math" panose="02040503050406030204" pitchFamily="18" charset="0"/>
+                                  </a:rPr>
+                                  <m:t>h</m:t>
+                                </m:r>
+                              </m:e>
+                            </m:acc>
+                          </m:e>
+                          <m:sub>
+                            <m:r>
+                              <a:rPr lang="pt-BR" b="0" i="1" smtClean="0">
+                                <a:latin typeface="Cambria Math" panose="02040503050406030204" pitchFamily="18" charset="0"/>
+                              </a:rPr>
+                              <m:t>𝑡</m:t>
+                            </m:r>
+                          </m:sub>
+                        </m:sSub>
+                      </m:oMath>
+                    </m:oMathPara>
+                  </a14:m>
+                  <a:endParaRPr lang="en-US" dirty="0"/>
+                </a:p>
+              </p:txBody>
+            </p:sp>
+          </mc:Choice>
+          <mc:Fallback>
+            <p:sp>
+              <p:nvSpPr>
+                <p:cNvPr id="131" name="TextBox 130">
+                  <a:extLst>
+                    <a:ext uri="{FF2B5EF4-FFF2-40B4-BE49-F238E27FC236}">
+                      <a16:creationId xmlns:a16="http://schemas.microsoft.com/office/drawing/2014/main" id="{6700C2E8-30BB-D3C5-50C9-1951D85495E1}"/>
+                    </a:ext>
+                  </a:extLst>
+                </p:cNvPr>
+                <p:cNvSpPr txBox="1">
+                  <a:spLocks noRot="1" noChangeAspect="1" noMove="1" noResize="1" noEditPoints="1" noAdjustHandles="1" noChangeArrowheads="1" noChangeShapeType="1" noTextEdit="1"/>
+                </p:cNvSpPr>
+                <p:nvPr/>
+              </p:nvSpPr>
+              <p:spPr>
+                <a:xfrm>
+                  <a:off x="7376868" y="3269551"/>
+                  <a:ext cx="453586" cy="381643"/>
+                </a:xfrm>
+                <a:prstGeom prst="rect">
+                  <a:avLst/>
+                </a:prstGeom>
+                <a:blipFill>
+                  <a:blip r:embed="rId10"/>
+                  <a:stretch>
+                    <a:fillRect t="-4762" r="-6667"/>
+                  </a:stretch>
+                </a:blipFill>
+              </p:spPr>
+              <p:txBody>
+                <a:bodyPr/>
+                <a:lstStyle/>
+                <a:p>
+                  <a:r>
+                    <a:rPr lang="en-US">
+                      <a:noFill/>
+                    </a:rPr>
+                    <a:t> </a:t>
+                  </a:r>
+                </a:p>
+              </p:txBody>
+            </p:sp>
+          </mc:Fallback>
+        </mc:AlternateContent>
+        <p:sp>
+          <p:nvSpPr>
+            <p:cNvPr id="2" name="Rectangle 1">
+              <a:extLst>
+                <a:ext uri="{FF2B5EF4-FFF2-40B4-BE49-F238E27FC236}">
+                  <a16:creationId xmlns:a16="http://schemas.microsoft.com/office/drawing/2014/main" id="{68154BB7-44CA-1D82-2AC2-22171A0642D6}"/>
+                </a:ext>
+              </a:extLst>
+            </p:cNvPr>
+            <p:cNvSpPr/>
+            <p:nvPr/>
+          </p:nvSpPr>
+          <p:spPr>
+            <a:xfrm>
+              <a:off x="6036582" y="2520191"/>
+              <a:ext cx="539413" cy="1620565"/>
+            </a:xfrm>
+            <a:prstGeom prst="rect">
+              <a:avLst/>
+            </a:prstGeom>
+            <a:noFill/>
+            <a:ln w="19050">
+              <a:solidFill>
+                <a:srgbClr val="FF0000"/>
+              </a:solidFill>
+              <a:prstDash val="dash"/>
+            </a:ln>
+          </p:spPr>
+          <p:style>
+            <a:lnRef idx="2">
+              <a:schemeClr val="accent1">
+                <a:shade val="15000"/>
+              </a:schemeClr>
+            </a:lnRef>
+            <a:fillRef idx="1">
+              <a:schemeClr val="accent1"/>
+            </a:fillRef>
+            <a:effectRef idx="0">
+              <a:schemeClr val="accent1"/>
+            </a:effectRef>
+            <a:fontRef idx="minor">
+              <a:schemeClr val="lt1"/>
+            </a:fontRef>
+          </p:style>
+          <p:txBody>
+            <a:bodyPr rtlCol="0" anchor="ctr"/>
+            <a:lstStyle/>
+            <a:p>
+              <a:pPr algn="ctr"/>
+              <a:endParaRPr lang="en-US"/>
+            </a:p>
+          </p:txBody>
+        </p:sp>
+        <p:sp>
+          <p:nvSpPr>
+            <p:cNvPr id="3" name="Rectangle 2">
+              <a:extLst>
+                <a:ext uri="{FF2B5EF4-FFF2-40B4-BE49-F238E27FC236}">
+                  <a16:creationId xmlns:a16="http://schemas.microsoft.com/office/drawing/2014/main" id="{84BBC452-1110-2988-2E65-E445EE63C4C7}"/>
+                </a:ext>
+              </a:extLst>
+            </p:cNvPr>
+            <p:cNvSpPr/>
+            <p:nvPr/>
+          </p:nvSpPr>
+          <p:spPr>
+            <a:xfrm>
+              <a:off x="4666818" y="3031273"/>
+              <a:ext cx="1117692" cy="1103399"/>
+            </a:xfrm>
+            <a:prstGeom prst="rect">
+              <a:avLst/>
+            </a:prstGeom>
+            <a:noFill/>
+            <a:ln w="19050">
+              <a:solidFill>
+                <a:srgbClr val="FF0000"/>
+              </a:solidFill>
+              <a:prstDash val="dash"/>
+            </a:ln>
+          </p:spPr>
+          <p:style>
+            <a:lnRef idx="2">
+              <a:schemeClr val="accent1">
+                <a:shade val="15000"/>
+              </a:schemeClr>
+            </a:lnRef>
+            <a:fillRef idx="1">
+              <a:schemeClr val="accent1"/>
+            </a:fillRef>
+            <a:effectRef idx="0">
+              <a:schemeClr val="accent1"/>
+            </a:effectRef>
+            <a:fontRef idx="minor">
+              <a:schemeClr val="lt1"/>
+            </a:fontRef>
+          </p:style>
+          <p:txBody>
+            <a:bodyPr rtlCol="0" anchor="ctr"/>
+            <a:lstStyle/>
+            <a:p>
+              <a:pPr algn="ctr"/>
+              <a:endParaRPr lang="en-US"/>
+            </a:p>
+          </p:txBody>
+        </p:sp>
+        <p:sp>
+          <p:nvSpPr>
+            <p:cNvPr id="6" name="TextBox 5">
+              <a:extLst>
+                <a:ext uri="{FF2B5EF4-FFF2-40B4-BE49-F238E27FC236}">
+                  <a16:creationId xmlns:a16="http://schemas.microsoft.com/office/drawing/2014/main" id="{E3AB5C93-A0FA-4FF5-F0AA-FD75161F0631}"/>
+                </a:ext>
+              </a:extLst>
+            </p:cNvPr>
+            <p:cNvSpPr txBox="1"/>
+            <p:nvPr/>
+          </p:nvSpPr>
+          <p:spPr>
+            <a:xfrm>
+              <a:off x="5835605" y="1829242"/>
+              <a:ext cx="941366" cy="461665"/>
+            </a:xfrm>
+            <a:prstGeom prst="rect">
+              <a:avLst/>
+            </a:prstGeom>
+            <a:noFill/>
+          </p:spPr>
+          <p:txBody>
+            <a:bodyPr wrap="square" rtlCol="0">
+              <a:spAutoFit/>
+            </a:bodyPr>
+            <a:lstStyle/>
+            <a:p>
+              <a:pPr algn="ctr"/>
+              <a:r>
+                <a:rPr lang="pt-BR" sz="1200" dirty="0"/>
+                <a:t>porta de atualização</a:t>
+              </a:r>
+              <a:endParaRPr lang="en-US" sz="1200" dirty="0"/>
+            </a:p>
+          </p:txBody>
+        </p:sp>
+        <p:cxnSp>
+          <p:nvCxnSpPr>
+            <p:cNvPr id="8" name="Straight Connector 7">
+              <a:extLst>
+                <a:ext uri="{FF2B5EF4-FFF2-40B4-BE49-F238E27FC236}">
+                  <a16:creationId xmlns:a16="http://schemas.microsoft.com/office/drawing/2014/main" id="{7B4BB778-3C5D-0F93-B5F7-D66D9C30556C}"/>
+                </a:ext>
+              </a:extLst>
+            </p:cNvPr>
+            <p:cNvCxnSpPr>
+              <a:cxnSpLocks/>
+              <a:stCxn id="2" idx="0"/>
+              <a:endCxn id="6" idx="2"/>
+            </p:cNvCxnSpPr>
+            <p:nvPr/>
+          </p:nvCxnSpPr>
+          <p:spPr>
+            <a:xfrm flipH="1" flipV="1">
+              <a:off x="6306288" y="2290907"/>
+              <a:ext cx="1" cy="229284"/>
+            </a:xfrm>
+            <a:prstGeom prst="line">
+              <a:avLst/>
+            </a:prstGeom>
+            <a:ln w="19050">
+              <a:prstDash val="sysDot"/>
+            </a:ln>
+          </p:spPr>
+          <p:style>
+            <a:lnRef idx="1">
+              <a:schemeClr val="dk1"/>
+            </a:lnRef>
+            <a:fillRef idx="0">
+              <a:schemeClr val="dk1"/>
+            </a:fillRef>
+            <a:effectRef idx="0">
+              <a:schemeClr val="dk1"/>
+            </a:effectRef>
+            <a:fontRef idx="minor">
+              <a:schemeClr val="tx1"/>
+            </a:fontRef>
+          </p:style>
+        </p:cxnSp>
+        <p:sp>
+          <p:nvSpPr>
+            <p:cNvPr id="9" name="TextBox 8">
+              <a:extLst>
+                <a:ext uri="{FF2B5EF4-FFF2-40B4-BE49-F238E27FC236}">
+                  <a16:creationId xmlns:a16="http://schemas.microsoft.com/office/drawing/2014/main" id="{027BE59C-84F5-3A6A-1F58-4156CACC3A1F}"/>
+                </a:ext>
+              </a:extLst>
+            </p:cNvPr>
+            <p:cNvSpPr txBox="1"/>
+            <p:nvPr/>
+          </p:nvSpPr>
+          <p:spPr>
+            <a:xfrm>
+              <a:off x="4759386" y="1840210"/>
+              <a:ext cx="941366" cy="461665"/>
+            </a:xfrm>
+            <a:prstGeom prst="rect">
+              <a:avLst/>
+            </a:prstGeom>
+            <a:noFill/>
+          </p:spPr>
+          <p:txBody>
+            <a:bodyPr wrap="square" rtlCol="0">
+              <a:spAutoFit/>
+            </a:bodyPr>
+            <a:lstStyle/>
+            <a:p>
+              <a:pPr algn="ctr"/>
+              <a:r>
+                <a:rPr lang="pt-BR" sz="1200" dirty="0"/>
+                <a:t>porta de </a:t>
+              </a:r>
+              <a:r>
+                <a:rPr lang="pt-BR" sz="1200" i="1" dirty="0"/>
+                <a:t>reset</a:t>
+              </a:r>
+              <a:endParaRPr lang="en-US" sz="1200" i="1" dirty="0"/>
+            </a:p>
+          </p:txBody>
+        </p:sp>
+        <p:cxnSp>
+          <p:nvCxnSpPr>
+            <p:cNvPr id="10" name="Straight Connector 9">
+              <a:extLst>
+                <a:ext uri="{FF2B5EF4-FFF2-40B4-BE49-F238E27FC236}">
+                  <a16:creationId xmlns:a16="http://schemas.microsoft.com/office/drawing/2014/main" id="{F4D7901D-0577-0DF7-A300-F4B8DDD2B08B}"/>
+                </a:ext>
+              </a:extLst>
+            </p:cNvPr>
+            <p:cNvCxnSpPr>
+              <a:cxnSpLocks/>
+              <a:stCxn id="3" idx="0"/>
+              <a:endCxn id="9" idx="2"/>
+            </p:cNvCxnSpPr>
+            <p:nvPr/>
+          </p:nvCxnSpPr>
+          <p:spPr>
+            <a:xfrm flipV="1">
+              <a:off x="5225664" y="2301875"/>
+              <a:ext cx="4405" cy="729398"/>
+            </a:xfrm>
+            <a:prstGeom prst="line">
+              <a:avLst/>
+            </a:prstGeom>
+            <a:ln w="19050">
+              <a:prstDash val="sysDot"/>
+            </a:ln>
+          </p:spPr>
+          <p:style>
+            <a:lnRef idx="1">
+              <a:schemeClr val="dk1"/>
+            </a:lnRef>
+            <a:fillRef idx="0">
+              <a:schemeClr val="dk1"/>
+            </a:fillRef>
+            <a:effectRef idx="0">
+              <a:schemeClr val="dk1"/>
+            </a:effectRef>
+            <a:fontRef idx="minor">
+              <a:schemeClr val="tx1"/>
+            </a:fontRef>
+          </p:style>
+        </p:cxnSp>
+        <p:cxnSp>
+          <p:nvCxnSpPr>
+            <p:cNvPr id="27" name="Straight Arrow Connector 26">
+              <a:extLst>
+                <a:ext uri="{FF2B5EF4-FFF2-40B4-BE49-F238E27FC236}">
+                  <a16:creationId xmlns:a16="http://schemas.microsoft.com/office/drawing/2014/main" id="{8CF85A48-30D2-A843-6627-1DD7BA329BD6}"/>
+                </a:ext>
+              </a:extLst>
+            </p:cNvPr>
+            <p:cNvCxnSpPr>
+              <a:cxnSpLocks/>
+              <a:endCxn id="17" idx="2"/>
+            </p:cNvCxnSpPr>
+            <p:nvPr/>
+          </p:nvCxnSpPr>
+          <p:spPr>
+            <a:xfrm>
+              <a:off x="6372688" y="3221468"/>
+              <a:ext cx="307390" cy="0"/>
+            </a:xfrm>
+            <a:prstGeom prst="straightConnector1">
+              <a:avLst/>
+            </a:prstGeom>
+            <a:ln w="19050">
+              <a:tailEnd type="triangle"/>
+            </a:ln>
+          </p:spPr>
+          <p:style>
+            <a:lnRef idx="1">
+              <a:schemeClr val="dk1"/>
+            </a:lnRef>
+            <a:fillRef idx="0">
+              <a:schemeClr val="dk1"/>
+            </a:fillRef>
+            <a:effectRef idx="0">
+              <a:schemeClr val="dk1"/>
+            </a:effectRef>
+            <a:fontRef idx="minor">
+              <a:schemeClr val="tx1"/>
+            </a:fontRef>
+          </p:style>
+        </p:cxnSp>
+        <p:cxnSp>
+          <p:nvCxnSpPr>
+            <p:cNvPr id="29" name="Straight Arrow Connector 28">
+              <a:extLst>
+                <a:ext uri="{FF2B5EF4-FFF2-40B4-BE49-F238E27FC236}">
+                  <a16:creationId xmlns:a16="http://schemas.microsoft.com/office/drawing/2014/main" id="{353162AA-0266-E2D5-F390-ED75645298B3}"/>
+                </a:ext>
+              </a:extLst>
+            </p:cNvPr>
+            <p:cNvCxnSpPr>
+              <a:cxnSpLocks/>
+              <a:stCxn id="17" idx="6"/>
+              <a:endCxn id="4" idx="2"/>
+            </p:cNvCxnSpPr>
+            <p:nvPr/>
+          </p:nvCxnSpPr>
+          <p:spPr>
+            <a:xfrm>
+              <a:off x="6953128" y="3221468"/>
+              <a:ext cx="294469" cy="1322"/>
+            </a:xfrm>
+            <a:prstGeom prst="straightConnector1">
+              <a:avLst/>
+            </a:prstGeom>
+            <a:ln w="19050">
+              <a:tailEnd type="triangle"/>
+            </a:ln>
+          </p:spPr>
+          <p:style>
+            <a:lnRef idx="1">
+              <a:schemeClr val="dk1"/>
+            </a:lnRef>
+            <a:fillRef idx="0">
+              <a:schemeClr val="dk1"/>
+            </a:fillRef>
+            <a:effectRef idx="0">
+              <a:schemeClr val="dk1"/>
+            </a:effectRef>
+            <a:fontRef idx="minor">
+              <a:schemeClr val="tx1"/>
+            </a:fontRef>
+          </p:style>
+        </p:cxnSp>
+      </p:grpSp>
+    </p:spTree>
+    <p:extLst>
+      <p:ext uri="{BB962C8B-B14F-4D97-AF65-F5344CB8AC3E}">
+        <p14:creationId xmlns:p14="http://schemas.microsoft.com/office/powerpoint/2010/main" val="3273583629"/>
       </p:ext>
     </p:extLst>
   </p:cSld>
